--- a/references/tables_v10.pptx
+++ b/references/tables_v10.pptx
@@ -10,8 +10,9 @@
     <p:sldId id="258" r:id="rId9"/>
     <p:sldId id="259" r:id="rId10"/>
     <p:sldId id="260" r:id="rId11"/>
+    <p:sldId id="261" r:id="rId12"/>
   </p:sldIdLst>
-  <p:sldSz cx="14630400" cy="8229600" type="screen4x3"/>
+  <p:sldSz cx="19202400" cy="8229600" type="screen4x3"/>
   <p:notesSz cx="6858000" cy="9144000"/>
   <p:defaultTextStyle>
     <a:defPPr>
@@ -3100,8 +3101,8 @@
         </p:nvSpPr>
         <p:spPr>
           <a:xfrm>
-            <a:off x="457200" y="274320"/>
-            <a:ext cx="13716000" cy="548640"/>
+            <a:off x="457200" y="137160"/>
+            <a:ext cx="18288000" cy="411480"/>
           </a:xfrm>
           <a:prstGeom prst="rect">
             <a:avLst/>
@@ -3109,19 +3110,18 @@
           <a:noFill/>
         </p:spPr>
         <p:txBody>
-          <a:bodyPr wrap="none">
+          <a:bodyPr wrap="square">
             <a:spAutoFit/>
           </a:bodyPr>
           <a:lstStyle/>
           <a:p>
-            <a:pPr>
-              <a:defRPr sz="2400" b="1">
+            <a:pPr algn="l"/>
+            <a:r>
+              <a:rPr sz="2000" b="1">
                 <a:solidFill>
                   <a:srgbClr val="000000"/>
                 </a:solidFill>
-              </a:defRPr>
-            </a:pPr>
-            <a:r>
+              </a:rPr>
               <a:t>Table 1: Evolution of EEG Decoding Models</a:t>
             </a:r>
           </a:p>
@@ -3136,8 +3136,8 @@
           <p:nvPr/>
         </p:nvGraphicFramePr>
         <p:xfrm>
-          <a:off x="457200" y="1005840"/>
-          <a:ext cx="13716000" cy="1463040"/>
+          <a:off x="274320" y="731520"/>
+          <a:ext cx="12801600" cy="2011680"/>
         </p:xfrm>
         <a:graphic>
           <a:graphicData uri="http://schemas.openxmlformats.org/drawingml/2006/table">
@@ -3149,116 +3149,111 @@
                 <a:gridCol w="3200400"/>
                 <a:gridCol w="2743200"/>
                 <a:gridCol w="4114800"/>
-                <a:gridCol w="3657600"/>
+                <a:gridCol w="2743200"/>
               </a:tblGrid>
-              <a:tr h="365760">
-                <a:tc>
-                  <a:txBody>
-                    <a:bodyPr/>
-                    <a:lstStyle/>
-                    <a:p>
-                      <a:pPr algn="ctr">
-                        <a:defRPr sz="1200" b="1">
-                          <a:solidFill>
-                            <a:srgbClr val="000000"/>
-                          </a:solidFill>
-                        </a:defRPr>
-                      </a:pPr>
-                      <a:r>
+              <a:tr h="502920">
+                <a:tc>
+                  <a:txBody>
+                    <a:bodyPr/>
+                    <a:lstStyle/>
+                    <a:p>
+                      <a:pPr algn="ctr"/>
+                      <a:r>
+                        <a:rPr sz="1000" b="1">
+                          <a:solidFill>
+                            <a:srgbClr val="FFFFFF"/>
+                          </a:solidFill>
+                        </a:rPr>
                         <a:t>Stage</a:t>
                       </a:r>
                     </a:p>
                   </a:txBody>
                   <a:tcPr>
                     <a:solidFill>
-                      <a:srgbClr val="F0F0F0"/>
-                    </a:solidFill>
-                  </a:tcPr>
-                </a:tc>
-                <a:tc>
-                  <a:txBody>
-                    <a:bodyPr/>
-                    <a:lstStyle/>
-                    <a:p>
-                      <a:pPr algn="ctr">
-                        <a:defRPr sz="1200" b="1">
-                          <a:solidFill>
-                            <a:srgbClr val="000000"/>
-                          </a:solidFill>
-                        </a:defRPr>
-                      </a:pPr>
-                      <a:r>
+                      <a:srgbClr val="3C3C3C"/>
+                    </a:solidFill>
+                  </a:tcPr>
+                </a:tc>
+                <a:tc>
+                  <a:txBody>
+                    <a:bodyPr/>
+                    <a:lstStyle/>
+                    <a:p>
+                      <a:pPr algn="ctr"/>
+                      <a:r>
+                        <a:rPr sz="1000" b="1">
+                          <a:solidFill>
+                            <a:srgbClr val="FFFFFF"/>
+                          </a:solidFill>
+                        </a:rPr>
                         <a:t>Representative</a:t>
                       </a:r>
                     </a:p>
                   </a:txBody>
                   <a:tcPr>
                     <a:solidFill>
-                      <a:srgbClr val="F0F0F0"/>
-                    </a:solidFill>
-                  </a:tcPr>
-                </a:tc>
-                <a:tc>
-                  <a:txBody>
-                    <a:bodyPr/>
-                    <a:lstStyle/>
-                    <a:p>
-                      <a:pPr algn="ctr">
-                        <a:defRPr sz="1200" b="1">
-                          <a:solidFill>
-                            <a:srgbClr val="000000"/>
-                          </a:solidFill>
-                        </a:defRPr>
-                      </a:pPr>
-                      <a:r>
+                      <a:srgbClr val="3C3C3C"/>
+                    </a:solidFill>
+                  </a:tcPr>
+                </a:tc>
+                <a:tc>
+                  <a:txBody>
+                    <a:bodyPr/>
+                    <a:lstStyle/>
+                    <a:p>
+                      <a:pPr algn="ctr"/>
+                      <a:r>
+                        <a:rPr sz="1000" b="1">
+                          <a:solidFill>
+                            <a:srgbClr val="FFFFFF"/>
+                          </a:solidFill>
+                        </a:rPr>
                         <a:t>Rationale</a:t>
                       </a:r>
                     </a:p>
                   </a:txBody>
                   <a:tcPr>
                     <a:solidFill>
-                      <a:srgbClr val="F0F0F0"/>
-                    </a:solidFill>
-                  </a:tcPr>
-                </a:tc>
-                <a:tc>
-                  <a:txBody>
-                    <a:bodyPr/>
-                    <a:lstStyle/>
-                    <a:p>
-                      <a:pPr algn="ctr">
-                        <a:defRPr sz="1200" b="1">
-                          <a:solidFill>
-                            <a:srgbClr val="000000"/>
-                          </a:solidFill>
-                        </a:defRPr>
-                      </a:pPr>
-                      <a:r>
+                      <a:srgbClr val="3C3C3C"/>
+                    </a:solidFill>
+                  </a:tcPr>
+                </a:tc>
+                <a:tc>
+                  <a:txBody>
+                    <a:bodyPr/>
+                    <a:lstStyle/>
+                    <a:p>
+                      <a:pPr algn="ctr"/>
+                      <a:r>
+                        <a:rPr sz="1000" b="1">
+                          <a:solidFill>
+                            <a:srgbClr val="FFFFFF"/>
+                          </a:solidFill>
+                        </a:rPr>
                         <a:t>Key Value</a:t>
                       </a:r>
                     </a:p>
                   </a:txBody>
                   <a:tcPr>
                     <a:solidFill>
-                      <a:srgbClr val="F0F0F0"/>
+                      <a:srgbClr val="3C3C3C"/>
                     </a:solidFill>
                   </a:tcPr>
                 </a:tc>
               </a:tr>
-              <a:tr h="365760">
-                <a:tc>
-                  <a:txBody>
-                    <a:bodyPr/>
-                    <a:lstStyle/>
-                    <a:p>
-                      <a:pPr>
-                        <a:defRPr sz="1100">
-                          <a:solidFill>
-                            <a:srgbClr val="000000"/>
-                          </a:solidFill>
-                        </a:defRPr>
-                      </a:pPr>
-                      <a:r>
+              <a:tr h="502920">
+                <a:tc>
+                  <a:txBody>
+                    <a:bodyPr/>
+                    <a:lstStyle/>
+                    <a:p>
+                      <a:pPr algn="l"/>
+                      <a:r>
+                        <a:rPr sz="1000" b="0">
+                          <a:solidFill>
+                            <a:srgbClr val="000000"/>
+                          </a:solidFill>
+                        </a:rPr>
                         <a:t>Deep learning for EEG</a:t>
                       </a:r>
                     </a:p>
@@ -3274,14 +3269,13 @@
                     <a:bodyPr/>
                     <a:lstStyle/>
                     <a:p>
-                      <a:pPr>
-                        <a:defRPr sz="1100">
-                          <a:solidFill>
-                            <a:srgbClr val="000000"/>
-                          </a:solidFill>
-                        </a:defRPr>
-                      </a:pPr>
-                      <a:r>
+                      <a:pPr algn="ctr"/>
+                      <a:r>
+                        <a:rPr sz="1000" b="0">
+                          <a:solidFill>
+                            <a:srgbClr val="000000"/>
+                          </a:solidFill>
+                        </a:rPr>
                         <a:t>EEGNet (2018)</a:t>
                       </a:r>
                     </a:p>
@@ -3297,38 +3291,36 @@
                     <a:bodyPr/>
                     <a:lstStyle/>
                     <a:p>
-                      <a:pPr>
-                        <a:defRPr sz="1100">
-                          <a:solidFill>
-                            <a:srgbClr val="000000"/>
-                          </a:solidFill>
-                        </a:defRPr>
-                      </a:pPr>
-                      <a:r>
-                        <a:t>Compact, domain-aware deep model</a:t>
-                      </a:r>
-                    </a:p>
-                  </a:txBody>
-                  <a:tcPr>
-                    <a:solidFill>
-                      <a:srgbClr val="FFFFFF"/>
-                    </a:solidFill>
-                  </a:tcPr>
-                </a:tc>
-                <a:tc>
-                  <a:txBody>
-                    <a:bodyPr/>
-                    <a:lstStyle/>
-                    <a:p>
-                      <a:pPr>
-                        <a:defRPr sz="1100">
-                          <a:solidFill>
-                            <a:srgbClr val="000000"/>
-                          </a:solidFill>
-                        </a:defRPr>
-                      </a:pPr>
-                      <a:r>
-                        <a:t>Efficient EEG feature learning</a:t>
+                      <a:pPr algn="ctr"/>
+                      <a:r>
+                        <a:rPr sz="1000" b="0">
+                          <a:solidFill>
+                            <a:srgbClr val="000000"/>
+                          </a:solidFill>
+                        </a:rPr>
+                        <a:t>Compact, domain-aware deep CNN</a:t>
+                      </a:r>
+                    </a:p>
+                  </a:txBody>
+                  <a:tcPr>
+                    <a:solidFill>
+                      <a:srgbClr val="FFFFFF"/>
+                    </a:solidFill>
+                  </a:tcPr>
+                </a:tc>
+                <a:tc>
+                  <a:txBody>
+                    <a:bodyPr/>
+                    <a:lstStyle/>
+                    <a:p>
+                      <a:pPr algn="ctr"/>
+                      <a:r>
+                        <a:rPr sz="1000" b="0">
+                          <a:solidFill>
+                            <a:srgbClr val="000000"/>
+                          </a:solidFill>
+                        </a:rPr>
+                        <a:t>Efficient spatio-temporal feature learning</a:t>
                       </a:r>
                     </a:p>
                   </a:txBody>
@@ -3339,20 +3331,19 @@
                   </a:tcPr>
                 </a:tc>
               </a:tr>
-              <a:tr h="365760">
-                <a:tc>
-                  <a:txBody>
-                    <a:bodyPr/>
-                    <a:lstStyle/>
-                    <a:p>
-                      <a:pPr>
-                        <a:defRPr sz="1100">
-                          <a:solidFill>
-                            <a:srgbClr val="000000"/>
-                          </a:solidFill>
-                        </a:defRPr>
-                      </a:pPr>
-                      <a:r>
+              <a:tr h="502920">
+                <a:tc>
+                  <a:txBody>
+                    <a:bodyPr/>
+                    <a:lstStyle/>
+                    <a:p>
+                      <a:pPr algn="l"/>
+                      <a:r>
+                        <a:rPr sz="1000" b="0">
+                          <a:solidFill>
+                            <a:srgbClr val="000000"/>
+                          </a:solidFill>
+                        </a:rPr>
                         <a:t>Global temporal modeling</a:t>
                       </a:r>
                     </a:p>
@@ -3368,14 +3359,13 @@
                     <a:bodyPr/>
                     <a:lstStyle/>
                     <a:p>
-                      <a:pPr>
-                        <a:defRPr sz="1100">
-                          <a:solidFill>
-                            <a:srgbClr val="000000"/>
-                          </a:solidFill>
-                        </a:defRPr>
-                      </a:pPr>
-                      <a:r>
+                      <a:pPr algn="ctr"/>
+                      <a:r>
+                        <a:rPr sz="1000" b="0">
+                          <a:solidFill>
+                            <a:srgbClr val="000000"/>
+                          </a:solidFill>
+                        </a:rPr>
                         <a:t>EEG Conformer (2023)</a:t>
                       </a:r>
                     </a:p>
@@ -3391,37 +3381,35 @@
                     <a:bodyPr/>
                     <a:lstStyle/>
                     <a:p>
-                      <a:pPr>
-                        <a:defRPr sz="1100">
-                          <a:solidFill>
-                            <a:srgbClr val="000000"/>
-                          </a:solidFill>
-                        </a:defRPr>
-                      </a:pPr>
-                      <a:r>
-                        <a:t>CNN frontend + Transformer attention</a:t>
-                      </a:r>
-                    </a:p>
-                  </a:txBody>
-                  <a:tcPr>
-                    <a:solidFill>
-                      <a:srgbClr val="FFFFFF"/>
-                    </a:solidFill>
-                  </a:tcPr>
-                </a:tc>
-                <a:tc>
-                  <a:txBody>
-                    <a:bodyPr/>
-                    <a:lstStyle/>
-                    <a:p>
-                      <a:pPr>
-                        <a:defRPr sz="1100">
-                          <a:solidFill>
-                            <a:srgbClr val="000000"/>
-                          </a:solidFill>
-                        </a:defRPr>
-                      </a:pPr>
-                      <a:r>
+                      <a:pPr algn="ctr"/>
+                      <a:r>
+                        <a:rPr sz="1000" b="0">
+                          <a:solidFill>
+                            <a:srgbClr val="000000"/>
+                          </a:solidFill>
+                        </a:rPr>
+                        <a:t>CNN frontend + Transformer self-attention</a:t>
+                      </a:r>
+                    </a:p>
+                  </a:txBody>
+                  <a:tcPr>
+                    <a:solidFill>
+                      <a:srgbClr val="FFFFFF"/>
+                    </a:solidFill>
+                  </a:tcPr>
+                </a:tc>
+                <a:tc>
+                  <a:txBody>
+                    <a:bodyPr/>
+                    <a:lstStyle/>
+                    <a:p>
+                      <a:pPr algn="ctr"/>
+                      <a:r>
+                        <a:rPr sz="1000" b="0">
+                          <a:solidFill>
+                            <a:srgbClr val="000000"/>
+                          </a:solidFill>
+                        </a:rPr>
                         <a:t>Long-range dependency + attention visualization</a:t>
                       </a:r>
                     </a:p>
@@ -3433,20 +3421,19 @@
                   </a:tcPr>
                 </a:tc>
               </a:tr>
-              <a:tr h="365760">
-                <a:tc>
-                  <a:txBody>
-                    <a:bodyPr/>
-                    <a:lstStyle/>
-                    <a:p>
-                      <a:pPr>
-                        <a:defRPr sz="1100">
-                          <a:solidFill>
-                            <a:srgbClr val="000000"/>
-                          </a:solidFill>
-                        </a:defRPr>
-                      </a:pPr>
-                      <a:r>
+              <a:tr h="502920">
+                <a:tc>
+                  <a:txBody>
+                    <a:bodyPr/>
+                    <a:lstStyle/>
+                    <a:p>
+                      <a:pPr algn="l"/>
+                      <a:r>
+                        <a:rPr sz="1000" b="0">
+                          <a:solidFill>
+                            <a:srgbClr val="000000"/>
+                          </a:solidFill>
+                        </a:rPr>
                         <a:t>Large-scale pretraining</a:t>
                       </a:r>
                     </a:p>
@@ -3462,14 +3449,13 @@
                     <a:bodyPr/>
                     <a:lstStyle/>
                     <a:p>
-                      <a:pPr>
-                        <a:defRPr sz="1100">
-                          <a:solidFill>
-                            <a:srgbClr val="000000"/>
-                          </a:solidFill>
-                        </a:defRPr>
-                      </a:pPr>
-                      <a:r>
+                      <a:pPr algn="ctr"/>
+                      <a:r>
+                        <a:rPr sz="1000" b="0">
+                          <a:solidFill>
+                            <a:srgbClr val="000000"/>
+                          </a:solidFill>
+                        </a:rPr>
                         <a:t>CBraMod (2025)</a:t>
                       </a:r>
                     </a:p>
@@ -3485,38 +3471,36 @@
                     <a:bodyPr/>
                     <a:lstStyle/>
                     <a:p>
-                      <a:pPr>
-                        <a:defRPr sz="1100">
-                          <a:solidFill>
-                            <a:srgbClr val="000000"/>
-                          </a:solidFill>
-                        </a:defRPr>
-                      </a:pPr>
-                      <a:r>
-                        <a:t>EEG foundation model</a:t>
-                      </a:r>
-                    </a:p>
-                  </a:txBody>
-                  <a:tcPr>
-                    <a:solidFill>
-                      <a:srgbClr val="FFFFFF"/>
-                    </a:solidFill>
-                  </a:tcPr>
-                </a:tc>
-                <a:tc>
-                  <a:txBody>
-                    <a:bodyPr/>
-                    <a:lstStyle/>
-                    <a:p>
-                      <a:pPr>
-                        <a:defRPr sz="1100">
-                          <a:solidFill>
-                            <a:srgbClr val="000000"/>
-                          </a:solidFill>
-                        </a:defRPr>
-                      </a:pPr>
-                      <a:r>
-                        <a:t>Pretrain → LP/FT multi-task adaptation</a:t>
+                      <a:pPr algn="ctr"/>
+                      <a:r>
+                        <a:rPr sz="1000" b="0">
+                          <a:solidFill>
+                            <a:srgbClr val="000000"/>
+                          </a:solidFill>
+                        </a:rPr>
+                        <a:t>Criss-cross attention + masked EEG pretraining</a:t>
+                      </a:r>
+                    </a:p>
+                  </a:txBody>
+                  <a:tcPr>
+                    <a:solidFill>
+                      <a:srgbClr val="FFFFFF"/>
+                    </a:solidFill>
+                  </a:tcPr>
+                </a:tc>
+                <a:tc>
+                  <a:txBody>
+                    <a:bodyPr/>
+                    <a:lstStyle/>
+                    <a:p>
+                      <a:pPr algn="ctr"/>
+                      <a:r>
+                        <a:rPr sz="1000" b="0">
+                          <a:solidFill>
+                            <a:srgbClr val="000000"/>
+                          </a:solidFill>
+                        </a:rPr>
+                        <a:t>Universal representations via LP / FT</a:t>
                       </a:r>
                     </a:p>
                   </a:txBody>
@@ -3531,6 +3515,529 @@
           </a:graphicData>
         </a:graphic>
       </p:graphicFrame>
+      <p:sp>
+        <p:nvSpPr>
+          <p:cNvPr id="4" name="Rectangle 3"/>
+          <p:cNvSpPr/>
+          <p:nvPr/>
+        </p:nvSpPr>
+        <p:spPr>
+          <a:xfrm>
+            <a:off x="13716000" y="731520"/>
+            <a:ext cx="5029200" cy="4434840"/>
+          </a:xfrm>
+          <a:prstGeom prst="rect">
+            <a:avLst/>
+          </a:prstGeom>
+          <a:solidFill>
+            <a:srgbClr val="F0F0F0"/>
+          </a:solidFill>
+          <a:ln w="12700">
+            <a:solidFill>
+              <a:srgbClr val="C8C8C8"/>
+            </a:solidFill>
+          </a:ln>
+        </p:spPr>
+        <p:style>
+          <a:lnRef idx="1">
+            <a:schemeClr val="accent1"/>
+          </a:lnRef>
+          <a:fillRef idx="3">
+            <a:schemeClr val="accent1"/>
+          </a:fillRef>
+          <a:effectRef idx="2">
+            <a:schemeClr val="accent1"/>
+          </a:effectRef>
+          <a:fontRef idx="minor">
+            <a:schemeClr val="lt1"/>
+          </a:fontRef>
+        </p:style>
+        <p:txBody>
+          <a:bodyPr rtlCol="0" anchor="ctr"/>
+          <a:lstStyle/>
+          <a:p>
+            <a:pPr algn="ctr"/>
+          </a:p>
+        </p:txBody>
+      </p:sp>
+      <p:sp>
+        <p:nvSpPr>
+          <p:cNvPr id="5" name="TextBox 4"/>
+          <p:cNvSpPr txBox="1"/>
+          <p:nvPr/>
+        </p:nvSpPr>
+        <p:spPr>
+          <a:xfrm>
+            <a:off x="13990320" y="868680"/>
+            <a:ext cx="4480560" cy="411480"/>
+          </a:xfrm>
+          <a:prstGeom prst="rect">
+            <a:avLst/>
+          </a:prstGeom>
+          <a:noFill/>
+        </p:spPr>
+        <p:txBody>
+          <a:bodyPr wrap="square">
+            <a:spAutoFit/>
+          </a:bodyPr>
+          <a:lstStyle/>
+          <a:p>
+            <a:pPr algn="ctr"/>
+            <a:r>
+              <a:rPr sz="1800" b="1">
+                <a:solidFill>
+                  <a:srgbClr val="000000"/>
+                </a:solidFill>
+              </a:rPr>
+              <a:t>Key Insight</a:t>
+            </a:r>
+          </a:p>
+        </p:txBody>
+      </p:sp>
+      <p:sp>
+        <p:nvSpPr>
+          <p:cNvPr id="6" name="Oval 5"/>
+          <p:cNvSpPr/>
+          <p:nvPr/>
+        </p:nvSpPr>
+        <p:spPr>
+          <a:xfrm>
+            <a:off x="14081760" y="1426464"/>
+            <a:ext cx="256032" cy="256032"/>
+          </a:xfrm>
+          <a:prstGeom prst="ellipse">
+            <a:avLst/>
+          </a:prstGeom>
+          <a:solidFill>
+            <a:srgbClr val="27AE60"/>
+          </a:solidFill>
+          <a:ln>
+            <a:noFill/>
+          </a:ln>
+        </p:spPr>
+        <p:style>
+          <a:lnRef idx="1">
+            <a:schemeClr val="accent1"/>
+          </a:lnRef>
+          <a:fillRef idx="3">
+            <a:schemeClr val="accent1"/>
+          </a:fillRef>
+          <a:effectRef idx="2">
+            <a:schemeClr val="accent1"/>
+          </a:effectRef>
+          <a:fontRef idx="minor">
+            <a:schemeClr val="lt1"/>
+          </a:fontRef>
+        </p:style>
+        <p:txBody>
+          <a:bodyPr rtlCol="0" anchor="ctr"/>
+          <a:lstStyle/>
+          <a:p>
+            <a:pPr algn="ctr"/>
+          </a:p>
+        </p:txBody>
+      </p:sp>
+      <p:sp>
+        <p:nvSpPr>
+          <p:cNvPr id="7" name="TextBox 6"/>
+          <p:cNvSpPr txBox="1"/>
+          <p:nvPr/>
+        </p:nvSpPr>
+        <p:spPr>
+          <a:xfrm>
+            <a:off x="14493240" y="1371600"/>
+            <a:ext cx="1645920" cy="365760"/>
+          </a:xfrm>
+          <a:prstGeom prst="rect">
+            <a:avLst/>
+          </a:prstGeom>
+          <a:noFill/>
+        </p:spPr>
+        <p:txBody>
+          <a:bodyPr wrap="square">
+            <a:spAutoFit/>
+          </a:bodyPr>
+          <a:lstStyle/>
+          <a:p>
+            <a:pPr algn="l"/>
+            <a:r>
+              <a:rPr sz="1300" b="1">
+                <a:solidFill>
+                  <a:srgbClr val="000000"/>
+                </a:solidFill>
+              </a:rPr>
+              <a:t>EEGNet</a:t>
+            </a:r>
+          </a:p>
+        </p:txBody>
+      </p:sp>
+      <p:sp>
+        <p:nvSpPr>
+          <p:cNvPr id="8" name="TextBox 7"/>
+          <p:cNvSpPr txBox="1"/>
+          <p:nvPr/>
+        </p:nvSpPr>
+        <p:spPr>
+          <a:xfrm>
+            <a:off x="16184880" y="1371600"/>
+            <a:ext cx="2286000" cy="365760"/>
+          </a:xfrm>
+          <a:prstGeom prst="rect">
+            <a:avLst/>
+          </a:prstGeom>
+          <a:noFill/>
+        </p:spPr>
+        <p:txBody>
+          <a:bodyPr wrap="square">
+            <a:spAutoFit/>
+          </a:bodyPr>
+          <a:lstStyle/>
+          <a:p>
+            <a:pPr algn="l"/>
+            <a:r>
+              <a:rPr sz="1100" b="0">
+                <a:solidFill>
+                  <a:srgbClr val="27AE60"/>
+                </a:solidFill>
+              </a:rPr>
+              <a:t>Task-specific expert, compact</a:t>
+            </a:r>
+          </a:p>
+        </p:txBody>
+      </p:sp>
+      <p:sp>
+        <p:nvSpPr>
+          <p:cNvPr id="9" name="Oval 8"/>
+          <p:cNvSpPr/>
+          <p:nvPr/>
+        </p:nvSpPr>
+        <p:spPr>
+          <a:xfrm>
+            <a:off x="14081760" y="1883664"/>
+            <a:ext cx="256032" cy="256032"/>
+          </a:xfrm>
+          <a:prstGeom prst="ellipse">
+            <a:avLst/>
+          </a:prstGeom>
+          <a:solidFill>
+            <a:srgbClr val="0071A2"/>
+          </a:solidFill>
+          <a:ln>
+            <a:noFill/>
+          </a:ln>
+        </p:spPr>
+        <p:style>
+          <a:lnRef idx="1">
+            <a:schemeClr val="accent1"/>
+          </a:lnRef>
+          <a:fillRef idx="3">
+            <a:schemeClr val="accent1"/>
+          </a:fillRef>
+          <a:effectRef idx="2">
+            <a:schemeClr val="accent1"/>
+          </a:effectRef>
+          <a:fontRef idx="minor">
+            <a:schemeClr val="lt1"/>
+          </a:fontRef>
+        </p:style>
+        <p:txBody>
+          <a:bodyPr rtlCol="0" anchor="ctr"/>
+          <a:lstStyle/>
+          <a:p>
+            <a:pPr algn="ctr"/>
+          </a:p>
+        </p:txBody>
+      </p:sp>
+      <p:sp>
+        <p:nvSpPr>
+          <p:cNvPr id="10" name="TextBox 9"/>
+          <p:cNvSpPr txBox="1"/>
+          <p:nvPr/>
+        </p:nvSpPr>
+        <p:spPr>
+          <a:xfrm>
+            <a:off x="14493240" y="1828800"/>
+            <a:ext cx="1645920" cy="365760"/>
+          </a:xfrm>
+          <a:prstGeom prst="rect">
+            <a:avLst/>
+          </a:prstGeom>
+          <a:noFill/>
+        </p:spPr>
+        <p:txBody>
+          <a:bodyPr wrap="square">
+            <a:spAutoFit/>
+          </a:bodyPr>
+          <a:lstStyle/>
+          <a:p>
+            <a:pPr algn="l"/>
+            <a:r>
+              <a:rPr sz="1300" b="1">
+                <a:solidFill>
+                  <a:srgbClr val="000000"/>
+                </a:solidFill>
+              </a:rPr>
+              <a:t>EEG Conformer</a:t>
+            </a:r>
+          </a:p>
+        </p:txBody>
+      </p:sp>
+      <p:sp>
+        <p:nvSpPr>
+          <p:cNvPr id="11" name="TextBox 10"/>
+          <p:cNvSpPr txBox="1"/>
+          <p:nvPr/>
+        </p:nvSpPr>
+        <p:spPr>
+          <a:xfrm>
+            <a:off x="16184880" y="1828800"/>
+            <a:ext cx="2286000" cy="365760"/>
+          </a:xfrm>
+          <a:prstGeom prst="rect">
+            <a:avLst/>
+          </a:prstGeom>
+          <a:noFill/>
+        </p:spPr>
+        <p:txBody>
+          <a:bodyPr wrap="square">
+            <a:spAutoFit/>
+          </a:bodyPr>
+          <a:lstStyle/>
+          <a:p>
+            <a:pPr algn="l"/>
+            <a:r>
+              <a:rPr sz="1100" b="0">
+                <a:solidFill>
+                  <a:srgbClr val="0071A2"/>
+                </a:solidFill>
+              </a:rPr>
+              <a:t>Transformer enables global modeling</a:t>
+            </a:r>
+          </a:p>
+        </p:txBody>
+      </p:sp>
+      <p:sp>
+        <p:nvSpPr>
+          <p:cNvPr id="12" name="Oval 11"/>
+          <p:cNvSpPr/>
+          <p:nvPr/>
+        </p:nvSpPr>
+        <p:spPr>
+          <a:xfrm>
+            <a:off x="14081760" y="2340864"/>
+            <a:ext cx="256032" cy="256032"/>
+          </a:xfrm>
+          <a:prstGeom prst="ellipse">
+            <a:avLst/>
+          </a:prstGeom>
+          <a:solidFill>
+            <a:srgbClr val="0071A2"/>
+          </a:solidFill>
+          <a:ln>
+            <a:noFill/>
+          </a:ln>
+        </p:spPr>
+        <p:style>
+          <a:lnRef idx="1">
+            <a:schemeClr val="accent1"/>
+          </a:lnRef>
+          <a:fillRef idx="3">
+            <a:schemeClr val="accent1"/>
+          </a:fillRef>
+          <a:effectRef idx="2">
+            <a:schemeClr val="accent1"/>
+          </a:effectRef>
+          <a:fontRef idx="minor">
+            <a:schemeClr val="lt1"/>
+          </a:fontRef>
+        </p:style>
+        <p:txBody>
+          <a:bodyPr rtlCol="0" anchor="ctr"/>
+          <a:lstStyle/>
+          <a:p>
+            <a:pPr algn="ctr"/>
+          </a:p>
+        </p:txBody>
+      </p:sp>
+      <p:sp>
+        <p:nvSpPr>
+          <p:cNvPr id="13" name="TextBox 12"/>
+          <p:cNvSpPr txBox="1"/>
+          <p:nvPr/>
+        </p:nvSpPr>
+        <p:spPr>
+          <a:xfrm>
+            <a:off x="14493240" y="2286000"/>
+            <a:ext cx="1645920" cy="365760"/>
+          </a:xfrm>
+          <a:prstGeom prst="rect">
+            <a:avLst/>
+          </a:prstGeom>
+          <a:noFill/>
+        </p:spPr>
+        <p:txBody>
+          <a:bodyPr wrap="square">
+            <a:spAutoFit/>
+          </a:bodyPr>
+          <a:lstStyle/>
+          <a:p>
+            <a:pPr algn="l"/>
+            <a:r>
+              <a:rPr sz="1300" b="1">
+                <a:solidFill>
+                  <a:srgbClr val="000000"/>
+                </a:solidFill>
+              </a:rPr>
+              <a:t>CBraMod</a:t>
+            </a:r>
+          </a:p>
+        </p:txBody>
+      </p:sp>
+      <p:sp>
+        <p:nvSpPr>
+          <p:cNvPr id="14" name="TextBox 13"/>
+          <p:cNvSpPr txBox="1"/>
+          <p:nvPr/>
+        </p:nvSpPr>
+        <p:spPr>
+          <a:xfrm>
+            <a:off x="16184880" y="2286000"/>
+            <a:ext cx="2286000" cy="365760"/>
+          </a:xfrm>
+          <a:prstGeom prst="rect">
+            <a:avLst/>
+          </a:prstGeom>
+          <a:noFill/>
+        </p:spPr>
+        <p:txBody>
+          <a:bodyPr wrap="square">
+            <a:spAutoFit/>
+          </a:bodyPr>
+          <a:lstStyle/>
+          <a:p>
+            <a:pPr algn="l"/>
+            <a:r>
+              <a:rPr sz="1100" b="0">
+                <a:solidFill>
+                  <a:srgbClr val="0071A2"/>
+                </a:solidFill>
+              </a:rPr>
+              <a:t>Pretraining to cross-task transfer</a:t>
+            </a:r>
+          </a:p>
+        </p:txBody>
+      </p:sp>
+      <p:sp>
+        <p:nvSpPr>
+          <p:cNvPr id="15" name="Rectangle 14"/>
+          <p:cNvSpPr/>
+          <p:nvPr/>
+        </p:nvSpPr>
+        <p:spPr>
+          <a:xfrm>
+            <a:off x="14081760" y="2880360"/>
+            <a:ext cx="4297680" cy="13716"/>
+          </a:xfrm>
+          <a:prstGeom prst="rect">
+            <a:avLst/>
+          </a:prstGeom>
+          <a:solidFill>
+            <a:srgbClr val="C8C8C8"/>
+          </a:solidFill>
+          <a:ln>
+            <a:noFill/>
+          </a:ln>
+        </p:spPr>
+        <p:style>
+          <a:lnRef idx="1">
+            <a:schemeClr val="accent1"/>
+          </a:lnRef>
+          <a:fillRef idx="3">
+            <a:schemeClr val="accent1"/>
+          </a:fillRef>
+          <a:effectRef idx="2">
+            <a:schemeClr val="accent1"/>
+          </a:effectRef>
+          <a:fontRef idx="minor">
+            <a:schemeClr val="lt1"/>
+          </a:fontRef>
+        </p:style>
+        <p:txBody>
+          <a:bodyPr rtlCol="0" anchor="ctr"/>
+          <a:lstStyle/>
+          <a:p>
+            <a:pPr algn="ctr"/>
+          </a:p>
+        </p:txBody>
+      </p:sp>
+      <p:sp>
+        <p:nvSpPr>
+          <p:cNvPr id="16" name="TextBox 15"/>
+          <p:cNvSpPr txBox="1"/>
+          <p:nvPr/>
+        </p:nvSpPr>
+        <p:spPr>
+          <a:xfrm>
+            <a:off x="14173200" y="3154679"/>
+            <a:ext cx="4114800" cy="365760"/>
+          </a:xfrm>
+          <a:prstGeom prst="rect">
+            <a:avLst/>
+          </a:prstGeom>
+          <a:noFill/>
+        </p:spPr>
+        <p:txBody>
+          <a:bodyPr wrap="square">
+            <a:spAutoFit/>
+          </a:bodyPr>
+          <a:lstStyle/>
+          <a:p>
+            <a:pPr algn="l"/>
+            <a:r>
+              <a:rPr sz="1400" b="1">
+                <a:solidFill>
+                  <a:srgbClr val="0071A2"/>
+                </a:solidFill>
+              </a:rPr>
+              <a:t>Paradigm: per-task training -&gt; pretrain then adapt</a:t>
+            </a:r>
+          </a:p>
+        </p:txBody>
+      </p:sp>
+      <p:sp>
+        <p:nvSpPr>
+          <p:cNvPr id="17" name="TextBox 16"/>
+          <p:cNvSpPr txBox="1"/>
+          <p:nvPr/>
+        </p:nvSpPr>
+        <p:spPr>
+          <a:xfrm>
+            <a:off x="13990320" y="3840480"/>
+            <a:ext cx="4480560" cy="457200"/>
+          </a:xfrm>
+          <a:prstGeom prst="rect">
+            <a:avLst/>
+          </a:prstGeom>
+          <a:noFill/>
+        </p:spPr>
+        <p:txBody>
+          <a:bodyPr wrap="square">
+            <a:spAutoFit/>
+          </a:bodyPr>
+          <a:lstStyle/>
+          <a:p>
+            <a:pPr algn="ctr"/>
+            <a:r>
+              <a:rPr sz="1300" b="0">
+                <a:solidFill>
+                  <a:srgbClr val="145A32"/>
+                </a:solidFill>
+              </a:rPr>
+              <a:t>Generalization improves; interpretability becomes the new bottleneck.</a:t>
+            </a:r>
+          </a:p>
+        </p:txBody>
+      </p:sp>
     </p:spTree>
   </p:cSld>
   <p:clrMapOvr>
@@ -3557,8 +4064,8 @@
         </p:nvSpPr>
         <p:spPr>
           <a:xfrm>
-            <a:off x="457200" y="274320"/>
-            <a:ext cx="13716000" cy="548640"/>
+            <a:off x="457200" y="137160"/>
+            <a:ext cx="18288000" cy="411480"/>
           </a:xfrm>
           <a:prstGeom prst="rect">
             <a:avLst/>
@@ -3566,19 +4073,18 @@
           <a:noFill/>
         </p:spPr>
         <p:txBody>
-          <a:bodyPr wrap="none">
+          <a:bodyPr wrap="square">
             <a:spAutoFit/>
           </a:bodyPr>
           <a:lstStyle/>
           <a:p>
-            <a:pPr>
-              <a:defRPr sz="2400" b="1">
+            <a:pPr algn="l"/>
+            <a:r>
+              <a:rPr sz="2000" b="1">
                 <a:solidFill>
                   <a:srgbClr val="000000"/>
                 </a:solidFill>
-              </a:defRPr>
-            </a:pPr>
-            <a:r>
+              </a:rPr>
               <a:t>Table 2: CBraMod Reproduction Results Across 8 Downstream Tasks</a:t>
             </a:r>
           </a:p>
@@ -3593,8 +4099,8 @@
           <p:nvPr/>
         </p:nvGraphicFramePr>
         <p:xfrm>
-          <a:off x="457200" y="1005840"/>
-          <a:ext cx="11247120" cy="3291840"/>
+          <a:off x="274320" y="731520"/>
+          <a:ext cx="10698480" cy="4526280"/>
         </p:xfrm>
         <a:graphic>
           <a:graphicData uri="http://schemas.openxmlformats.org/drawingml/2006/table">
@@ -3604,238 +4110,228 @@
               </a:tblPr>
               <a:tblGrid>
                 <a:gridCol w="1097280"/>
-                <a:gridCol w="1828800"/>
+                <a:gridCol w="2011680"/>
                 <a:gridCol w="1371600"/>
-                <a:gridCol w="1097280"/>
-                <a:gridCol w="1097280"/>
-                <a:gridCol w="1097280"/>
-                <a:gridCol w="1097280"/>
+                <a:gridCol w="914400"/>
+                <a:gridCol w="914400"/>
+                <a:gridCol w="914400"/>
+                <a:gridCol w="914400"/>
+                <a:gridCol w="1188720"/>
                 <a:gridCol w="1371600"/>
-                <a:gridCol w="1188720"/>
               </a:tblGrid>
-              <a:tr h="365760">
-                <a:tc>
-                  <a:txBody>
-                    <a:bodyPr/>
-                    <a:lstStyle/>
-                    <a:p>
-                      <a:pPr algn="ctr">
-                        <a:defRPr sz="1200" b="1">
-                          <a:solidFill>
-                            <a:srgbClr val="000000"/>
-                          </a:solidFill>
-                        </a:defRPr>
-                      </a:pPr>
-                      <a:r>
+              <a:tr h="502920">
+                <a:tc>
+                  <a:txBody>
+                    <a:bodyPr/>
+                    <a:lstStyle/>
+                    <a:p>
+                      <a:pPr algn="ctr"/>
+                      <a:r>
+                        <a:rPr sz="1000" b="1">
+                          <a:solidFill>
+                            <a:srgbClr val="FFFFFF"/>
+                          </a:solidFill>
+                        </a:rPr>
                         <a:t>Dataset</a:t>
                       </a:r>
                     </a:p>
                   </a:txBody>
                   <a:tcPr>
                     <a:solidFill>
-                      <a:srgbClr val="F0F0F0"/>
-                    </a:solidFill>
-                  </a:tcPr>
-                </a:tc>
-                <a:tc>
-                  <a:txBody>
-                    <a:bodyPr/>
-                    <a:lstStyle/>
-                    <a:p>
-                      <a:pPr algn="ctr">
-                        <a:defRPr sz="1200" b="1">
-                          <a:solidFill>
-                            <a:srgbClr val="000000"/>
-                          </a:solidFill>
-                        </a:defRPr>
-                      </a:pPr>
-                      <a:r>
+                      <a:srgbClr val="3C3C3C"/>
+                    </a:solidFill>
+                  </a:tcPr>
+                </a:tc>
+                <a:tc>
+                  <a:txBody>
+                    <a:bodyPr/>
+                    <a:lstStyle/>
+                    <a:p>
+                      <a:pPr algn="ctr"/>
+                      <a:r>
+                        <a:rPr sz="1000" b="1">
+                          <a:solidFill>
+                            <a:srgbClr val="FFFFFF"/>
+                          </a:solidFill>
+                        </a:rPr>
                         <a:t>Config</a:t>
                       </a:r>
                     </a:p>
                   </a:txBody>
                   <a:tcPr>
                     <a:solidFill>
-                      <a:srgbClr val="F0F0F0"/>
-                    </a:solidFill>
-                  </a:tcPr>
-                </a:tc>
-                <a:tc>
-                  <a:txBody>
-                    <a:bodyPr/>
-                    <a:lstStyle/>
-                    <a:p>
-                      <a:pPr algn="ctr">
-                        <a:defRPr sz="1200" b="1">
-                          <a:solidFill>
-                            <a:srgbClr val="000000"/>
-                          </a:solidFill>
-                        </a:defRPr>
-                      </a:pPr>
-                      <a:r>
+                      <a:srgbClr val="3C3C3C"/>
+                    </a:solidFill>
+                  </a:tcPr>
+                </a:tc>
+                <a:tc>
+                  <a:txBody>
+                    <a:bodyPr/>
+                    <a:lstStyle/>
+                    <a:p>
+                      <a:pPr algn="ctr"/>
+                      <a:r>
+                        <a:rPr sz="1000" b="1">
+                          <a:solidFill>
+                            <a:srgbClr val="FFFFFF"/>
+                          </a:solidFill>
+                        </a:rPr>
                         <a:t>Seeds</a:t>
                       </a:r>
                     </a:p>
                   </a:txBody>
                   <a:tcPr>
                     <a:solidFill>
-                      <a:srgbClr val="F0F0F0"/>
-                    </a:solidFill>
-                  </a:tcPr>
-                </a:tc>
-                <a:tc>
-                  <a:txBody>
-                    <a:bodyPr/>
-                    <a:lstStyle/>
-                    <a:p>
-                      <a:pPr algn="ctr">
-                        <a:defRPr sz="1200" b="1">
-                          <a:solidFill>
-                            <a:srgbClr val="000000"/>
-                          </a:solidFill>
-                        </a:defRPr>
-                      </a:pPr>
-                      <a:r>
+                      <a:srgbClr val="3C3C3C"/>
+                    </a:solidFill>
+                  </a:tcPr>
+                </a:tc>
+                <a:tc>
+                  <a:txBody>
+                    <a:bodyPr/>
+                    <a:lstStyle/>
+                    <a:p>
+                      <a:pPr algn="ctr"/>
+                      <a:r>
+                        <a:rPr sz="1000" b="1">
+                          <a:solidFill>
+                            <a:srgbClr val="FFFFFF"/>
+                          </a:solidFill>
+                        </a:rPr>
                         <a:t>Mean bAcc</a:t>
                       </a:r>
                     </a:p>
                   </a:txBody>
                   <a:tcPr>
                     <a:solidFill>
-                      <a:srgbClr val="F0F0F0"/>
-                    </a:solidFill>
-                  </a:tcPr>
-                </a:tc>
-                <a:tc>
-                  <a:txBody>
-                    <a:bodyPr/>
-                    <a:lstStyle/>
-                    <a:p>
-                      <a:pPr algn="ctr">
-                        <a:defRPr sz="1200" b="1">
-                          <a:solidFill>
-                            <a:srgbClr val="000000"/>
-                          </a:solidFill>
-                        </a:defRPr>
-                      </a:pPr>
-                      <a:r>
+                      <a:srgbClr val="3C3C3C"/>
+                    </a:solidFill>
+                  </a:tcPr>
+                </a:tc>
+                <a:tc>
+                  <a:txBody>
+                    <a:bodyPr/>
+                    <a:lstStyle/>
+                    <a:p>
+                      <a:pPr algn="ctr"/>
+                      <a:r>
+                        <a:rPr sz="1000" b="1">
+                          <a:solidFill>
+                            <a:srgbClr val="FFFFFF"/>
+                          </a:solidFill>
+                        </a:rPr>
                         <a:t>Best bAcc</a:t>
                       </a:r>
                     </a:p>
                   </a:txBody>
                   <a:tcPr>
                     <a:solidFill>
-                      <a:srgbClr val="F0F0F0"/>
-                    </a:solidFill>
-                  </a:tcPr>
-                </a:tc>
-                <a:tc>
-                  <a:txBody>
-                    <a:bodyPr/>
-                    <a:lstStyle/>
-                    <a:p>
-                      <a:pPr algn="ctr">
-                        <a:defRPr sz="1200" b="1">
-                          <a:solidFill>
-                            <a:srgbClr val="000000"/>
-                          </a:solidFill>
-                        </a:defRPr>
-                      </a:pPr>
-                      <a:r>
-                        <a:t>Mean κ</a:t>
-                      </a:r>
-                    </a:p>
-                  </a:txBody>
-                  <a:tcPr>
-                    <a:solidFill>
-                      <a:srgbClr val="F0F0F0"/>
-                    </a:solidFill>
-                  </a:tcPr>
-                </a:tc>
-                <a:tc>
-                  <a:txBody>
-                    <a:bodyPr/>
-                    <a:lstStyle/>
-                    <a:p>
-                      <a:pPr algn="ctr">
-                        <a:defRPr sz="1200" b="1">
-                          <a:solidFill>
-                            <a:srgbClr val="000000"/>
-                          </a:solidFill>
-                        </a:defRPr>
-                      </a:pPr>
-                      <a:r>
-                        <a:t>Best κ</a:t>
-                      </a:r>
-                    </a:p>
-                  </a:txBody>
-                  <a:tcPr>
-                    <a:solidFill>
-                      <a:srgbClr val="F0F0F0"/>
-                    </a:solidFill>
-                  </a:tcPr>
-                </a:tc>
-                <a:tc>
-                  <a:txBody>
-                    <a:bodyPr/>
-                    <a:lstStyle/>
-                    <a:p>
-                      <a:pPr algn="ctr">
-                        <a:defRPr sz="1200" b="1">
-                          <a:solidFill>
-                            <a:srgbClr val="000000"/>
-                          </a:solidFill>
-                        </a:defRPr>
-                      </a:pPr>
-                      <a:r>
+                      <a:srgbClr val="3C3C3C"/>
+                    </a:solidFill>
+                  </a:tcPr>
+                </a:tc>
+                <a:tc>
+                  <a:txBody>
+                    <a:bodyPr/>
+                    <a:lstStyle/>
+                    <a:p>
+                      <a:pPr algn="ctr"/>
+                      <a:r>
+                        <a:rPr sz="1000" b="1">
+                          <a:solidFill>
+                            <a:srgbClr val="FFFFFF"/>
+                          </a:solidFill>
+                        </a:rPr>
+                        <a:t>Mean k</a:t>
+                      </a:r>
+                    </a:p>
+                  </a:txBody>
+                  <a:tcPr>
+                    <a:solidFill>
+                      <a:srgbClr val="3C3C3C"/>
+                    </a:solidFill>
+                  </a:tcPr>
+                </a:tc>
+                <a:tc>
+                  <a:txBody>
+                    <a:bodyPr/>
+                    <a:lstStyle/>
+                    <a:p>
+                      <a:pPr algn="ctr"/>
+                      <a:r>
+                        <a:rPr sz="1000" b="1">
+                          <a:solidFill>
+                            <a:srgbClr val="FFFFFF"/>
+                          </a:solidFill>
+                        </a:rPr>
+                        <a:t>Best k</a:t>
+                      </a:r>
+                    </a:p>
+                  </a:txBody>
+                  <a:tcPr>
+                    <a:solidFill>
+                      <a:srgbClr val="3C3C3C"/>
+                    </a:solidFill>
+                  </a:tcPr>
+                </a:tc>
+                <a:tc>
+                  <a:txBody>
+                    <a:bodyPr/>
+                    <a:lstStyle/>
+                    <a:p>
+                      <a:pPr algn="ctr"/>
+                      <a:r>
+                        <a:rPr sz="1000" b="1">
+                          <a:solidFill>
+                            <a:srgbClr val="FFFFFF"/>
+                          </a:solidFill>
+                        </a:rPr>
                         <a:t>Paper Ref.</a:t>
                       </a:r>
                     </a:p>
                   </a:txBody>
                   <a:tcPr>
                     <a:solidFill>
-                      <a:srgbClr val="F0F0F0"/>
-                    </a:solidFill>
-                  </a:tcPr>
-                </a:tc>
-                <a:tc>
-                  <a:txBody>
-                    <a:bodyPr/>
-                    <a:lstStyle/>
-                    <a:p>
-                      <a:pPr algn="ctr">
-                        <a:defRPr sz="1200" b="1">
-                          <a:solidFill>
-                            <a:srgbClr val="000000"/>
-                          </a:solidFill>
-                        </a:defRPr>
-                      </a:pPr>
-                      <a:r>
+                      <a:srgbClr val="3C3C3C"/>
+                    </a:solidFill>
+                  </a:tcPr>
+                </a:tc>
+                <a:tc>
+                  <a:txBody>
+                    <a:bodyPr/>
+                    <a:lstStyle/>
+                    <a:p>
+                      <a:pPr algn="ctr"/>
+                      <a:r>
+                        <a:rPr sz="1000" b="1">
+                          <a:solidFill>
+                            <a:srgbClr val="FFFFFF"/>
+                          </a:solidFill>
+                        </a:rPr>
                         <a:t>Conclusion</a:t>
                       </a:r>
                     </a:p>
                   </a:txBody>
                   <a:tcPr>
                     <a:solidFill>
-                      <a:srgbClr val="F0F0F0"/>
+                      <a:srgbClr val="3C3C3C"/>
                     </a:solidFill>
                   </a:tcPr>
                 </a:tc>
               </a:tr>
-              <a:tr h="365760">
-                <a:tc>
-                  <a:txBody>
-                    <a:bodyPr/>
-                    <a:lstStyle/>
-                    <a:p>
-                      <a:pPr>
-                        <a:defRPr sz="1100">
-                          <a:solidFill>
-                            <a:srgbClr val="000000"/>
-                          </a:solidFill>
-                        </a:defRPr>
-                      </a:pPr>
-                      <a:r>
+              <a:tr h="502920">
+                <a:tc>
+                  <a:txBody>
+                    <a:bodyPr/>
+                    <a:lstStyle/>
+                    <a:p>
+                      <a:pPr algn="l"/>
+                      <a:r>
+                        <a:rPr sz="1000" b="0">
+                          <a:solidFill>
+                            <a:srgbClr val="000000"/>
+                          </a:solidFill>
+                        </a:rPr>
                         <a:t>BCIC2A</a:t>
                       </a:r>
                     </a:p>
@@ -3851,14 +4347,13 @@
                     <a:bodyPr/>
                     <a:lstStyle/>
                     <a:p>
-                      <a:pPr>
-                        <a:defRPr sz="1100">
-                          <a:solidFill>
-                            <a:srgbClr val="000000"/>
-                          </a:solidFill>
-                        </a:defRPr>
-                      </a:pPr>
-                      <a:r>
+                      <a:pPr algn="ctr"/>
+                      <a:r>
+                        <a:rPr sz="1000" b="0">
+                          <a:solidFill>
+                            <a:srgbClr val="000000"/>
+                          </a:solidFill>
+                        </a:rPr>
                         <a:t>session T/E+CAR</a:t>
                       </a:r>
                     </a:p>
@@ -3874,14 +4369,13 @@
                     <a:bodyPr/>
                     <a:lstStyle/>
                     <a:p>
-                      <a:pPr algn="ctr">
-                        <a:defRPr sz="1100">
-                          <a:solidFill>
-                            <a:srgbClr val="000000"/>
-                          </a:solidFill>
-                        </a:defRPr>
-                      </a:pPr>
-                      <a:r>
+                      <a:pPr algn="ctr"/>
+                      <a:r>
+                        <a:rPr sz="1000" b="0">
+                          <a:solidFill>
+                            <a:srgbClr val="000000"/>
+                          </a:solidFill>
+                        </a:rPr>
                         <a:t>42/2024/3407</a:t>
                       </a:r>
                     </a:p>
@@ -3897,14 +4391,13 @@
                     <a:bodyPr/>
                     <a:lstStyle/>
                     <a:p>
-                      <a:pPr algn="ctr">
-                        <a:defRPr sz="1100">
-                          <a:solidFill>
-                            <a:srgbClr val="000000"/>
-                          </a:solidFill>
-                        </a:defRPr>
-                      </a:pPr>
-                      <a:r>
+                      <a:pPr algn="ctr"/>
+                      <a:r>
+                        <a:rPr sz="1000" b="0">
+                          <a:solidFill>
+                            <a:srgbClr val="000000"/>
+                          </a:solidFill>
+                        </a:rPr>
                         <a:t>0.6382</a:t>
                       </a:r>
                     </a:p>
@@ -3920,14 +4413,13 @@
                     <a:bodyPr/>
                     <a:lstStyle/>
                     <a:p>
-                      <a:pPr algn="ctr">
-                        <a:defRPr sz="1100">
-                          <a:solidFill>
-                            <a:srgbClr val="000000"/>
-                          </a:solidFill>
-                        </a:defRPr>
-                      </a:pPr>
-                      <a:r>
+                      <a:pPr algn="ctr"/>
+                      <a:r>
+                        <a:rPr sz="1000" b="0">
+                          <a:solidFill>
+                            <a:srgbClr val="000000"/>
+                          </a:solidFill>
+                        </a:rPr>
                         <a:t>0.6709</a:t>
                       </a:r>
                     </a:p>
@@ -3943,14 +4435,13 @@
                     <a:bodyPr/>
                     <a:lstStyle/>
                     <a:p>
-                      <a:pPr algn="ctr">
-                        <a:defRPr sz="1100">
-                          <a:solidFill>
-                            <a:srgbClr val="000000"/>
-                          </a:solidFill>
-                        </a:defRPr>
-                      </a:pPr>
-                      <a:r>
+                      <a:pPr algn="ctr"/>
+                      <a:r>
+                        <a:rPr sz="1000" b="0">
+                          <a:solidFill>
+                            <a:srgbClr val="000000"/>
+                          </a:solidFill>
+                        </a:rPr>
                         <a:t>0.5177</a:t>
                       </a:r>
                     </a:p>
@@ -3966,14 +4457,13 @@
                     <a:bodyPr/>
                     <a:lstStyle/>
                     <a:p>
-                      <a:pPr algn="ctr">
-                        <a:defRPr sz="1100">
-                          <a:solidFill>
-                            <a:srgbClr val="000000"/>
-                          </a:solidFill>
-                        </a:defRPr>
-                      </a:pPr>
-                      <a:r>
+                      <a:pPr algn="ctr"/>
+                      <a:r>
+                        <a:rPr sz="1000" b="0">
+                          <a:solidFill>
+                            <a:srgbClr val="000000"/>
+                          </a:solidFill>
+                        </a:rPr>
                         <a:t>0.5612</a:t>
                       </a:r>
                     </a:p>
@@ -3989,37 +4479,35 @@
                     <a:bodyPr/>
                     <a:lstStyle/>
                     <a:p>
-                      <a:pPr>
-                        <a:defRPr sz="1100">
-                          <a:solidFill>
-                            <a:srgbClr val="000000"/>
-                          </a:solidFill>
-                        </a:defRPr>
-                      </a:pPr>
-                      <a:r>
-                        <a:t>κ 0.5138</a:t>
-                      </a:r>
-                    </a:p>
-                  </a:txBody>
-                  <a:tcPr>
-                    <a:solidFill>
-                      <a:srgbClr val="FFFFFF"/>
-                    </a:solidFill>
-                  </a:tcPr>
-                </a:tc>
-                <a:tc>
-                  <a:txBody>
-                    <a:bodyPr/>
-                    <a:lstStyle/>
-                    <a:p>
-                      <a:pPr>
-                        <a:defRPr sz="1100">
-                          <a:solidFill>
-                            <a:srgbClr val="000000"/>
-                          </a:solidFill>
-                        </a:defRPr>
-                      </a:pPr>
-                      <a:r>
+                      <a:pPr algn="ctr"/>
+                      <a:r>
+                        <a:rPr sz="1000" b="0">
+                          <a:solidFill>
+                            <a:srgbClr val="000000"/>
+                          </a:solidFill>
+                        </a:rPr>
+                        <a:t>k 0.5138</a:t>
+                      </a:r>
+                    </a:p>
+                  </a:txBody>
+                  <a:tcPr>
+                    <a:solidFill>
+                      <a:srgbClr val="FFFFFF"/>
+                    </a:solidFill>
+                  </a:tcPr>
+                </a:tc>
+                <a:tc>
+                  <a:txBody>
+                    <a:bodyPr/>
+                    <a:lstStyle/>
+                    <a:p>
+                      <a:pPr algn="ctr"/>
+                      <a:r>
+                        <a:rPr sz="1000" b="0">
+                          <a:solidFill>
+                            <a:srgbClr val="000000"/>
+                          </a:solidFill>
+                        </a:rPr>
                         <a:t>Matched</a:t>
                       </a:r>
                     </a:p>
@@ -4031,20 +4519,19 @@
                   </a:tcPr>
                 </a:tc>
               </a:tr>
-              <a:tr h="365760">
-                <a:tc>
-                  <a:txBody>
-                    <a:bodyPr/>
-                    <a:lstStyle/>
-                    <a:p>
-                      <a:pPr>
-                        <a:defRPr sz="1100">
-                          <a:solidFill>
-                            <a:srgbClr val="000000"/>
-                          </a:solidFill>
-                        </a:defRPr>
-                      </a:pPr>
-                      <a:r>
+              <a:tr h="502920">
+                <a:tc>
+                  <a:txBody>
+                    <a:bodyPr/>
+                    <a:lstStyle/>
+                    <a:p>
+                      <a:pPr algn="l"/>
+                      <a:r>
+                        <a:rPr sz="1000" b="0">
+                          <a:solidFill>
+                            <a:srgbClr val="000000"/>
+                          </a:solidFill>
+                        </a:rPr>
                         <a:t>FACED</a:t>
                       </a:r>
                     </a:p>
@@ -4060,14 +4547,13 @@
                     <a:bodyPr/>
                     <a:lstStyle/>
                     <a:p>
-                      <a:pPr>
-                        <a:defRPr sz="1100">
-                          <a:solidFill>
-                            <a:srgbClr val="000000"/>
-                          </a:solidFill>
-                        </a:defRPr>
-                      </a:pPr>
-                      <a:r>
+                      <a:pPr algn="ctr"/>
+                      <a:r>
+                        <a:rPr sz="1000" b="0">
+                          <a:solidFill>
+                            <a:srgbClr val="000000"/>
+                          </a:solidFill>
+                        </a:rPr>
                         <a:t>baseline official FT</a:t>
                       </a:r>
                     </a:p>
@@ -4083,14 +4569,13 @@
                     <a:bodyPr/>
                     <a:lstStyle/>
                     <a:p>
-                      <a:pPr algn="ctr">
-                        <a:defRPr sz="1100">
-                          <a:solidFill>
-                            <a:srgbClr val="000000"/>
-                          </a:solidFill>
-                        </a:defRPr>
-                      </a:pPr>
-                      <a:r>
+                      <a:pPr algn="ctr"/>
+                      <a:r>
+                        <a:rPr sz="1000" b="0">
+                          <a:solidFill>
+                            <a:srgbClr val="000000"/>
+                          </a:solidFill>
+                        </a:rPr>
                         <a:t>42/2024/3407</a:t>
                       </a:r>
                     </a:p>
@@ -4106,14 +4591,13 @@
                     <a:bodyPr/>
                     <a:lstStyle/>
                     <a:p>
-                      <a:pPr algn="ctr">
-                        <a:defRPr sz="1100">
-                          <a:solidFill>
-                            <a:srgbClr val="000000"/>
-                          </a:solidFill>
-                        </a:defRPr>
-                      </a:pPr>
-                      <a:r>
+                      <a:pPr algn="ctr"/>
+                      <a:r>
+                        <a:rPr sz="1000" b="0">
+                          <a:solidFill>
+                            <a:srgbClr val="000000"/>
+                          </a:solidFill>
+                        </a:rPr>
                         <a:t>0.5245</a:t>
                       </a:r>
                     </a:p>
@@ -4129,14 +4613,13 @@
                     <a:bodyPr/>
                     <a:lstStyle/>
                     <a:p>
-                      <a:pPr algn="ctr">
-                        <a:defRPr sz="1100">
-                          <a:solidFill>
-                            <a:srgbClr val="000000"/>
-                          </a:solidFill>
-                        </a:defRPr>
-                      </a:pPr>
-                      <a:r>
+                      <a:pPr algn="ctr"/>
+                      <a:r>
+                        <a:rPr sz="1000" b="0">
+                          <a:solidFill>
+                            <a:srgbClr val="000000"/>
+                          </a:solidFill>
+                        </a:rPr>
                         <a:t>0.5340</a:t>
                       </a:r>
                     </a:p>
@@ -4152,14 +4635,13 @@
                     <a:bodyPr/>
                     <a:lstStyle/>
                     <a:p>
-                      <a:pPr algn="ctr">
-                        <a:defRPr sz="1100">
-                          <a:solidFill>
-                            <a:srgbClr val="000000"/>
-                          </a:solidFill>
-                        </a:defRPr>
-                      </a:pPr>
-                      <a:r>
+                      <a:pPr algn="ctr"/>
+                      <a:r>
+                        <a:rPr sz="1000" b="0">
+                          <a:solidFill>
+                            <a:srgbClr val="000000"/>
+                          </a:solidFill>
+                        </a:rPr>
                         <a:t>0.4617</a:t>
                       </a:r>
                     </a:p>
@@ -4175,14 +4657,13 @@
                     <a:bodyPr/>
                     <a:lstStyle/>
                     <a:p>
-                      <a:pPr algn="ctr">
-                        <a:defRPr sz="1100">
-                          <a:solidFill>
-                            <a:srgbClr val="000000"/>
-                          </a:solidFill>
-                        </a:defRPr>
-                      </a:pPr>
-                      <a:r>
+                      <a:pPr algn="ctr"/>
+                      <a:r>
+                        <a:rPr sz="1000" b="0">
+                          <a:solidFill>
+                            <a:srgbClr val="000000"/>
+                          </a:solidFill>
+                        </a:rPr>
                         <a:t>0.4718</a:t>
                       </a:r>
                     </a:p>
@@ -4198,14 +4679,13 @@
                     <a:bodyPr/>
                     <a:lstStyle/>
                     <a:p>
-                      <a:pPr>
-                        <a:defRPr sz="1100">
-                          <a:solidFill>
-                            <a:srgbClr val="000000"/>
-                          </a:solidFill>
-                        </a:defRPr>
-                      </a:pPr>
-                      <a:r>
+                      <a:pPr algn="ctr"/>
+                      <a:r>
+                        <a:rPr sz="1000" b="0">
+                          <a:solidFill>
+                            <a:srgbClr val="000000"/>
+                          </a:solidFill>
+                        </a:rPr>
                         <a:t>bAcc 0.5509</a:t>
                       </a:r>
                     </a:p>
@@ -4221,14 +4701,13 @@
                     <a:bodyPr/>
                     <a:lstStyle/>
                     <a:p>
-                      <a:pPr>
-                        <a:defRPr sz="1100">
-                          <a:solidFill>
-                            <a:srgbClr val="000000"/>
-                          </a:solidFill>
-                        </a:defRPr>
-                      </a:pPr>
-                      <a:r>
+                      <a:pPr algn="ctr"/>
+                      <a:r>
+                        <a:rPr sz="1000" b="0">
+                          <a:solidFill>
+                            <a:srgbClr val="000000"/>
+                          </a:solidFill>
+                        </a:rPr>
                         <a:t>Close</a:t>
                       </a:r>
                     </a:p>
@@ -4240,20 +4719,19 @@
                   </a:tcPr>
                 </a:tc>
               </a:tr>
-              <a:tr h="365760">
-                <a:tc>
-                  <a:txBody>
-                    <a:bodyPr/>
-                    <a:lstStyle/>
-                    <a:p>
-                      <a:pPr>
-                        <a:defRPr sz="1100">
-                          <a:solidFill>
-                            <a:srgbClr val="000000"/>
-                          </a:solidFill>
-                        </a:defRPr>
-                      </a:pPr>
-                      <a:r>
+              <a:tr h="502920">
+                <a:tc>
+                  <a:txBody>
+                    <a:bodyPr/>
+                    <a:lstStyle/>
+                    <a:p>
+                      <a:pPr algn="l"/>
+                      <a:r>
+                        <a:rPr sz="1000" b="0">
+                          <a:solidFill>
+                            <a:srgbClr val="000000"/>
+                          </a:solidFill>
+                        </a:rPr>
                         <a:t>ISRUC-S1</a:t>
                       </a:r>
                     </a:p>
@@ -4269,14 +4747,13 @@
                     <a:bodyPr/>
                     <a:lstStyle/>
                     <a:p>
-                      <a:pPr>
-                        <a:defRPr sz="1100">
-                          <a:solidFill>
-                            <a:srgbClr val="000000"/>
-                          </a:solidFill>
-                        </a:defRPr>
-                      </a:pPr>
-                      <a:r>
+                      <a:pPr algn="ctr"/>
+                      <a:r>
+                        <a:rPr sz="1000" b="0">
+                          <a:solidFill>
+                            <a:srgbClr val="000000"/>
+                          </a:solidFill>
+                        </a:rPr>
                         <a:t>baseline official FT</a:t>
                       </a:r>
                     </a:p>
@@ -4292,14 +4769,13 @@
                     <a:bodyPr/>
                     <a:lstStyle/>
                     <a:p>
-                      <a:pPr algn="ctr">
-                        <a:defRPr sz="1100">
-                          <a:solidFill>
-                            <a:srgbClr val="000000"/>
-                          </a:solidFill>
-                        </a:defRPr>
-                      </a:pPr>
-                      <a:r>
+                      <a:pPr algn="ctr"/>
+                      <a:r>
+                        <a:rPr sz="1000" b="0">
+                          <a:solidFill>
+                            <a:srgbClr val="000000"/>
+                          </a:solidFill>
+                        </a:rPr>
                         <a:t>42/2024/3407</a:t>
                       </a:r>
                     </a:p>
@@ -4315,14 +4791,13 @@
                     <a:bodyPr/>
                     <a:lstStyle/>
                     <a:p>
-                      <a:pPr algn="ctr">
-                        <a:defRPr sz="1100">
-                          <a:solidFill>
-                            <a:srgbClr val="000000"/>
-                          </a:solidFill>
-                        </a:defRPr>
-                      </a:pPr>
-                      <a:r>
+                      <a:pPr algn="ctr"/>
+                      <a:r>
+                        <a:rPr sz="1000" b="0">
+                          <a:solidFill>
+                            <a:srgbClr val="000000"/>
+                          </a:solidFill>
+                        </a:rPr>
                         <a:t>0.7780</a:t>
                       </a:r>
                     </a:p>
@@ -4338,14 +4813,13 @@
                     <a:bodyPr/>
                     <a:lstStyle/>
                     <a:p>
-                      <a:pPr algn="ctr">
-                        <a:defRPr sz="1100">
-                          <a:solidFill>
-                            <a:srgbClr val="000000"/>
-                          </a:solidFill>
-                        </a:defRPr>
-                      </a:pPr>
-                      <a:r>
+                      <a:pPr algn="ctr"/>
+                      <a:r>
+                        <a:rPr sz="1000" b="0">
+                          <a:solidFill>
+                            <a:srgbClr val="000000"/>
+                          </a:solidFill>
+                        </a:rPr>
                         <a:t>0.7850</a:t>
                       </a:r>
                     </a:p>
@@ -4361,14 +4835,13 @@
                     <a:bodyPr/>
                     <a:lstStyle/>
                     <a:p>
-                      <a:pPr algn="ctr">
-                        <a:defRPr sz="1100">
-                          <a:solidFill>
-                            <a:srgbClr val="000000"/>
-                          </a:solidFill>
-                        </a:defRPr>
-                      </a:pPr>
-                      <a:r>
+                      <a:pPr algn="ctr"/>
+                      <a:r>
+                        <a:rPr sz="1000" b="0">
+                          <a:solidFill>
+                            <a:srgbClr val="000000"/>
+                          </a:solidFill>
+                        </a:rPr>
                         <a:t>0.7128</a:t>
                       </a:r>
                     </a:p>
@@ -4384,14 +4857,13 @@
                     <a:bodyPr/>
                     <a:lstStyle/>
                     <a:p>
-                      <a:pPr algn="ctr">
-                        <a:defRPr sz="1100">
-                          <a:solidFill>
-                            <a:srgbClr val="000000"/>
-                          </a:solidFill>
-                        </a:defRPr>
-                      </a:pPr>
-                      <a:r>
+                      <a:pPr algn="ctr"/>
+                      <a:r>
+                        <a:rPr sz="1000" b="0">
+                          <a:solidFill>
+                            <a:srgbClr val="000000"/>
+                          </a:solidFill>
+                        </a:rPr>
                         <a:t>0.7373</a:t>
                       </a:r>
                     </a:p>
@@ -4407,14 +4879,13 @@
                     <a:bodyPr/>
                     <a:lstStyle/>
                     <a:p>
-                      <a:pPr>
-                        <a:defRPr sz="1100">
-                          <a:solidFill>
-                            <a:srgbClr val="000000"/>
-                          </a:solidFill>
-                        </a:defRPr>
-                      </a:pPr>
-                      <a:r>
+                      <a:pPr algn="ctr"/>
+                      <a:r>
+                        <a:rPr sz="1000" b="0">
+                          <a:solidFill>
+                            <a:srgbClr val="000000"/>
+                          </a:solidFill>
+                        </a:rPr>
                         <a:t>bAcc 0.7865</a:t>
                       </a:r>
                     </a:p>
@@ -4430,14 +4901,13 @@
                     <a:bodyPr/>
                     <a:lstStyle/>
                     <a:p>
-                      <a:pPr>
-                        <a:defRPr sz="1100">
-                          <a:solidFill>
-                            <a:srgbClr val="000000"/>
-                          </a:solidFill>
-                        </a:defRPr>
-                      </a:pPr>
-                      <a:r>
+                      <a:pPr algn="ctr"/>
+                      <a:r>
+                        <a:rPr sz="1000" b="0">
+                          <a:solidFill>
+                            <a:srgbClr val="000000"/>
+                          </a:solidFill>
+                        </a:rPr>
                         <a:t>Reproduced</a:t>
                       </a:r>
                     </a:p>
@@ -4449,20 +4919,19 @@
                   </a:tcPr>
                 </a:tc>
               </a:tr>
-              <a:tr h="365760">
-                <a:tc>
-                  <a:txBody>
-                    <a:bodyPr/>
-                    <a:lstStyle/>
-                    <a:p>
-                      <a:pPr>
-                        <a:defRPr sz="1100">
-                          <a:solidFill>
-                            <a:srgbClr val="000000"/>
-                          </a:solidFill>
-                        </a:defRPr>
-                      </a:pPr>
-                      <a:r>
+              <a:tr h="502920">
+                <a:tc>
+                  <a:txBody>
+                    <a:bodyPr/>
+                    <a:lstStyle/>
+                    <a:p>
+                      <a:pPr algn="l"/>
+                      <a:r>
+                        <a:rPr sz="1000" b="0">
+                          <a:solidFill>
+                            <a:srgbClr val="000000"/>
+                          </a:solidFill>
+                        </a:rPr>
                         <a:t>Physionet-MI</a:t>
                       </a:r>
                     </a:p>
@@ -4478,14 +4947,13 @@
                     <a:bodyPr/>
                     <a:lstStyle/>
                     <a:p>
-                      <a:pPr>
-                        <a:defRPr sz="1100">
-                          <a:solidFill>
-                            <a:srgbClr val="000000"/>
-                          </a:solidFill>
-                        </a:defRPr>
-                      </a:pPr>
-                      <a:r>
+                      <a:pPr algn="ctr"/>
+                      <a:r>
+                        <a:rPr sz="1000" b="0">
+                          <a:solidFill>
+                            <a:srgbClr val="000000"/>
+                          </a:solidFill>
+                        </a:rPr>
                         <a:t>flatten FT</a:t>
                       </a:r>
                     </a:p>
@@ -4501,14 +4969,13 @@
                     <a:bodyPr/>
                     <a:lstStyle/>
                     <a:p>
-                      <a:pPr algn="ctr">
-                        <a:defRPr sz="1100">
-                          <a:solidFill>
-                            <a:srgbClr val="000000"/>
-                          </a:solidFill>
-                        </a:defRPr>
-                      </a:pPr>
-                      <a:r>
+                      <a:pPr algn="ctr"/>
+                      <a:r>
+                        <a:rPr sz="1000" b="0">
+                          <a:solidFill>
+                            <a:srgbClr val="000000"/>
+                          </a:solidFill>
+                        </a:rPr>
                         <a:t>42/2024/3047</a:t>
                       </a:r>
                     </a:p>
@@ -4524,14 +4991,13 @@
                     <a:bodyPr/>
                     <a:lstStyle/>
                     <a:p>
-                      <a:pPr algn="ctr">
-                        <a:defRPr sz="1100">
-                          <a:solidFill>
-                            <a:srgbClr val="000000"/>
-                          </a:solidFill>
-                        </a:defRPr>
-                      </a:pPr>
-                      <a:r>
+                      <a:pPr algn="ctr"/>
+                      <a:r>
+                        <a:rPr sz="1000" b="0">
+                          <a:solidFill>
+                            <a:srgbClr val="000000"/>
+                          </a:solidFill>
+                        </a:rPr>
                         <a:t>0.5975</a:t>
                       </a:r>
                     </a:p>
@@ -4547,14 +5013,13 @@
                     <a:bodyPr/>
                     <a:lstStyle/>
                     <a:p>
-                      <a:pPr algn="ctr">
-                        <a:defRPr sz="1100">
-                          <a:solidFill>
-                            <a:srgbClr val="000000"/>
-                          </a:solidFill>
-                        </a:defRPr>
-                      </a:pPr>
-                      <a:r>
+                      <a:pPr algn="ctr"/>
+                      <a:r>
+                        <a:rPr sz="1000" b="0">
+                          <a:solidFill>
+                            <a:srgbClr val="000000"/>
+                          </a:solidFill>
+                        </a:rPr>
                         <a:t>0.6181</a:t>
                       </a:r>
                     </a:p>
@@ -4570,14 +5035,13 @@
                     <a:bodyPr/>
                     <a:lstStyle/>
                     <a:p>
-                      <a:pPr algn="ctr">
-                        <a:defRPr sz="1100">
-                          <a:solidFill>
-                            <a:srgbClr val="000000"/>
-                          </a:solidFill>
-                        </a:defRPr>
-                      </a:pPr>
-                      <a:r>
+                      <a:pPr algn="ctr"/>
+                      <a:r>
+                        <a:rPr sz="1000" b="0">
+                          <a:solidFill>
+                            <a:srgbClr val="000000"/>
+                          </a:solidFill>
+                        </a:rPr>
                         <a:t>0.4631</a:t>
                       </a:r>
                     </a:p>
@@ -4593,14 +5057,13 @@
                     <a:bodyPr/>
                     <a:lstStyle/>
                     <a:p>
-                      <a:pPr algn="ctr">
-                        <a:defRPr sz="1100">
-                          <a:solidFill>
-                            <a:srgbClr val="000000"/>
-                          </a:solidFill>
-                        </a:defRPr>
-                      </a:pPr>
-                      <a:r>
+                      <a:pPr algn="ctr"/>
+                      <a:r>
+                        <a:rPr sz="1000" b="0">
+                          <a:solidFill>
+                            <a:srgbClr val="000000"/>
+                          </a:solidFill>
+                        </a:rPr>
                         <a:t>0.4903</a:t>
                       </a:r>
                     </a:p>
@@ -4616,14 +5079,13 @@
                     <a:bodyPr/>
                     <a:lstStyle/>
                     <a:p>
-                      <a:pPr>
-                        <a:defRPr sz="1100">
-                          <a:solidFill>
-                            <a:srgbClr val="000000"/>
-                          </a:solidFill>
-                        </a:defRPr>
-                      </a:pPr>
-                      <a:r>
+                      <a:pPr algn="ctr"/>
+                      <a:r>
+                        <a:rPr sz="1000" b="0">
+                          <a:solidFill>
+                            <a:srgbClr val="000000"/>
+                          </a:solidFill>
+                        </a:rPr>
                         <a:t>bAcc 0.6417</a:t>
                       </a:r>
                     </a:p>
@@ -4639,14 +5101,13 @@
                     <a:bodyPr/>
                     <a:lstStyle/>
                     <a:p>
-                      <a:pPr>
-                        <a:defRPr sz="1100">
-                          <a:solidFill>
-                            <a:srgbClr val="000000"/>
-                          </a:solidFill>
-                        </a:defRPr>
-                      </a:pPr>
-                      <a:r>
+                      <a:pPr algn="ctr"/>
+                      <a:r>
+                        <a:rPr sz="1000" b="0">
+                          <a:solidFill>
+                            <a:srgbClr val="000000"/>
+                          </a:solidFill>
+                        </a:rPr>
                         <a:t>Close</a:t>
                       </a:r>
                     </a:p>
@@ -4658,20 +5119,19 @@
                   </a:tcPr>
                 </a:tc>
               </a:tr>
-              <a:tr h="365760">
-                <a:tc>
-                  <a:txBody>
-                    <a:bodyPr/>
-                    <a:lstStyle/>
-                    <a:p>
-                      <a:pPr>
-                        <a:defRPr sz="1100">
-                          <a:solidFill>
-                            <a:srgbClr val="000000"/>
-                          </a:solidFill>
-                        </a:defRPr>
-                      </a:pPr>
-                      <a:r>
+              <a:tr h="502920">
+                <a:tc>
+                  <a:txBody>
+                    <a:bodyPr/>
+                    <a:lstStyle/>
+                    <a:p>
+                      <a:pPr algn="l"/>
+                      <a:r>
+                        <a:rPr sz="1000" b="0">
+                          <a:solidFill>
+                            <a:srgbClr val="000000"/>
+                          </a:solidFill>
+                        </a:rPr>
                         <a:t>SEED-V</a:t>
                       </a:r>
                     </a:p>
@@ -4687,14 +5147,13 @@
                     <a:bodyPr/>
                     <a:lstStyle/>
                     <a:p>
-                      <a:pPr>
-                        <a:defRPr sz="1100">
-                          <a:solidFill>
-                            <a:srgbClr val="000000"/>
-                          </a:solidFill>
-                        </a:defRPr>
-                      </a:pPr>
-                      <a:r>
+                      <a:pPr algn="ctr"/>
+                      <a:r>
+                        <a:rPr sz="1000" b="0">
+                          <a:solidFill>
+                            <a:srgbClr val="000000"/>
+                          </a:solidFill>
+                        </a:rPr>
                         <a:t>baseline official FT</a:t>
                       </a:r>
                     </a:p>
@@ -4710,14 +5169,13 @@
                     <a:bodyPr/>
                     <a:lstStyle/>
                     <a:p>
-                      <a:pPr algn="ctr">
-                        <a:defRPr sz="1100">
-                          <a:solidFill>
-                            <a:srgbClr val="000000"/>
-                          </a:solidFill>
-                        </a:defRPr>
-                      </a:pPr>
-                      <a:r>
+                      <a:pPr algn="ctr"/>
+                      <a:r>
+                        <a:rPr sz="1000" b="0">
+                          <a:solidFill>
+                            <a:srgbClr val="000000"/>
+                          </a:solidFill>
+                        </a:rPr>
                         <a:t>42/2024/3407</a:t>
                       </a:r>
                     </a:p>
@@ -4733,14 +5191,13 @@
                     <a:bodyPr/>
                     <a:lstStyle/>
                     <a:p>
-                      <a:pPr algn="ctr">
-                        <a:defRPr sz="1100">
-                          <a:solidFill>
-                            <a:srgbClr val="000000"/>
-                          </a:solidFill>
-                        </a:defRPr>
-                      </a:pPr>
-                      <a:r>
+                      <a:pPr algn="ctr"/>
+                      <a:r>
+                        <a:rPr sz="1000" b="0">
+                          <a:solidFill>
+                            <a:srgbClr val="000000"/>
+                          </a:solidFill>
+                        </a:rPr>
                         <a:t>0.3927</a:t>
                       </a:r>
                     </a:p>
@@ -4756,14 +5213,13 @@
                     <a:bodyPr/>
                     <a:lstStyle/>
                     <a:p>
-                      <a:pPr algn="ctr">
-                        <a:defRPr sz="1100">
-                          <a:solidFill>
-                            <a:srgbClr val="000000"/>
-                          </a:solidFill>
-                        </a:defRPr>
-                      </a:pPr>
-                      <a:r>
+                      <a:pPr algn="ctr"/>
+                      <a:r>
+                        <a:rPr sz="1000" b="0">
+                          <a:solidFill>
+                            <a:srgbClr val="000000"/>
+                          </a:solidFill>
+                        </a:rPr>
                         <a:t>0.4018</a:t>
                       </a:r>
                     </a:p>
@@ -4779,14 +5235,13 @@
                     <a:bodyPr/>
                     <a:lstStyle/>
                     <a:p>
-                      <a:pPr algn="ctr">
-                        <a:defRPr sz="1100">
-                          <a:solidFill>
-                            <a:srgbClr val="000000"/>
-                          </a:solidFill>
-                        </a:defRPr>
-                      </a:pPr>
-                      <a:r>
+                      <a:pPr algn="ctr"/>
+                      <a:r>
+                        <a:rPr sz="1000" b="0">
+                          <a:solidFill>
+                            <a:srgbClr val="000000"/>
+                          </a:solidFill>
+                        </a:rPr>
                         <a:t>0.2450</a:t>
                       </a:r>
                     </a:p>
@@ -4802,14 +5257,13 @@
                     <a:bodyPr/>
                     <a:lstStyle/>
                     <a:p>
-                      <a:pPr algn="ctr">
-                        <a:defRPr sz="1100">
-                          <a:solidFill>
-                            <a:srgbClr val="000000"/>
-                          </a:solidFill>
-                        </a:defRPr>
-                      </a:pPr>
-                      <a:r>
+                      <a:pPr algn="ctr"/>
+                      <a:r>
+                        <a:rPr sz="1000" b="0">
+                          <a:solidFill>
+                            <a:srgbClr val="000000"/>
+                          </a:solidFill>
+                        </a:rPr>
                         <a:t>0.2592</a:t>
                       </a:r>
                     </a:p>
@@ -4825,14 +5279,13 @@
                     <a:bodyPr/>
                     <a:lstStyle/>
                     <a:p>
-                      <a:pPr>
-                        <a:defRPr sz="1100">
-                          <a:solidFill>
-                            <a:srgbClr val="000000"/>
-                          </a:solidFill>
-                        </a:defRPr>
-                      </a:pPr>
-                      <a:r>
+                      <a:pPr algn="ctr"/>
+                      <a:r>
+                        <a:rPr sz="1000" b="0">
+                          <a:solidFill>
+                            <a:srgbClr val="000000"/>
+                          </a:solidFill>
+                        </a:rPr>
                         <a:t>bAcc 0.4091</a:t>
                       </a:r>
                     </a:p>
@@ -4848,14 +5301,13 @@
                     <a:bodyPr/>
                     <a:lstStyle/>
                     <a:p>
-                      <a:pPr>
-                        <a:defRPr sz="1100">
-                          <a:solidFill>
-                            <a:srgbClr val="000000"/>
-                          </a:solidFill>
-                        </a:defRPr>
-                      </a:pPr>
-                      <a:r>
+                      <a:pPr algn="ctr"/>
+                      <a:r>
+                        <a:rPr sz="1000" b="0">
+                          <a:solidFill>
+                            <a:srgbClr val="000000"/>
+                          </a:solidFill>
+                        </a:rPr>
                         <a:t>Close</a:t>
                       </a:r>
                     </a:p>
@@ -4867,20 +5319,19 @@
                   </a:tcPr>
                 </a:tc>
               </a:tr>
-              <a:tr h="365760">
-                <a:tc>
-                  <a:txBody>
-                    <a:bodyPr/>
-                    <a:lstStyle/>
-                    <a:p>
-                      <a:pPr>
-                        <a:defRPr sz="1100">
-                          <a:solidFill>
-                            <a:srgbClr val="000000"/>
-                          </a:solidFill>
-                        </a:defRPr>
-                      </a:pPr>
-                      <a:r>
+              <a:tr h="502920">
+                <a:tc>
+                  <a:txBody>
+                    <a:bodyPr/>
+                    <a:lstStyle/>
+                    <a:p>
+                      <a:pPr algn="l"/>
+                      <a:r>
+                        <a:rPr sz="1000" b="0">
+                          <a:solidFill>
+                            <a:srgbClr val="000000"/>
+                          </a:solidFill>
+                        </a:rPr>
                         <a:t>SHU-MI</a:t>
                       </a:r>
                     </a:p>
@@ -4896,14 +5347,13 @@
                     <a:bodyPr/>
                     <a:lstStyle/>
                     <a:p>
-                      <a:pPr>
-                        <a:defRPr sz="1100">
-                          <a:solidFill>
-                            <a:srgbClr val="000000"/>
-                          </a:solidFill>
-                        </a:defRPr>
-                      </a:pPr>
-                      <a:r>
+                      <a:pPr algn="ctr"/>
+                      <a:r>
+                        <a:rPr sz="1000" b="0">
+                          <a:solidFill>
+                            <a:srgbClr val="000000"/>
+                          </a:solidFill>
+                        </a:rPr>
                         <a:t>flatten FT</a:t>
                       </a:r>
                     </a:p>
@@ -4919,14 +5369,13 @@
                     <a:bodyPr/>
                     <a:lstStyle/>
                     <a:p>
-                      <a:pPr algn="ctr">
-                        <a:defRPr sz="1100">
-                          <a:solidFill>
-                            <a:srgbClr val="000000"/>
-                          </a:solidFill>
-                        </a:defRPr>
-                      </a:pPr>
-                      <a:r>
+                      <a:pPr algn="ctr"/>
+                      <a:r>
+                        <a:rPr sz="1000" b="0">
+                          <a:solidFill>
+                            <a:srgbClr val="000000"/>
+                          </a:solidFill>
+                        </a:rPr>
                         <a:t>42/2024/3047</a:t>
                       </a:r>
                     </a:p>
@@ -4942,14 +5391,13 @@
                     <a:bodyPr/>
                     <a:lstStyle/>
                     <a:p>
-                      <a:pPr algn="ctr">
-                        <a:defRPr sz="1100">
-                          <a:solidFill>
-                            <a:srgbClr val="000000"/>
-                          </a:solidFill>
-                        </a:defRPr>
-                      </a:pPr>
-                      <a:r>
+                      <a:pPr algn="ctr"/>
+                      <a:r>
+                        <a:rPr sz="1000" b="0">
+                          <a:solidFill>
+                            <a:srgbClr val="000000"/>
+                          </a:solidFill>
+                        </a:rPr>
                         <a:t>0.5851</a:t>
                       </a:r>
                     </a:p>
@@ -4965,14 +5413,13 @@
                     <a:bodyPr/>
                     <a:lstStyle/>
                     <a:p>
-                      <a:pPr algn="ctr">
-                        <a:defRPr sz="1100">
-                          <a:solidFill>
-                            <a:srgbClr val="000000"/>
-                          </a:solidFill>
-                        </a:defRPr>
-                      </a:pPr>
-                      <a:r>
+                      <a:pPr algn="ctr"/>
+                      <a:r>
+                        <a:rPr sz="1000" b="0">
+                          <a:solidFill>
+                            <a:srgbClr val="000000"/>
+                          </a:solidFill>
+                        </a:rPr>
                         <a:t>0.6380</a:t>
                       </a:r>
                     </a:p>
@@ -4988,14 +5435,13 @@
                     <a:bodyPr/>
                     <a:lstStyle/>
                     <a:p>
-                      <a:pPr algn="ctr">
-                        <a:defRPr sz="1100">
-                          <a:solidFill>
-                            <a:srgbClr val="000000"/>
-                          </a:solidFill>
-                        </a:defRPr>
-                      </a:pPr>
-                      <a:r>
+                      <a:pPr algn="ctr"/>
+                      <a:r>
+                        <a:rPr sz="1000" b="0">
+                          <a:solidFill>
+                            <a:srgbClr val="000000"/>
+                          </a:solidFill>
+                        </a:rPr>
                         <a:t>0.1700</a:t>
                       </a:r>
                     </a:p>
@@ -5011,14 +5457,13 @@
                     <a:bodyPr/>
                     <a:lstStyle/>
                     <a:p>
-                      <a:pPr algn="ctr">
-                        <a:defRPr sz="1100">
-                          <a:solidFill>
-                            <a:srgbClr val="000000"/>
-                          </a:solidFill>
-                        </a:defRPr>
-                      </a:pPr>
-                      <a:r>
+                      <a:pPr algn="ctr"/>
+                      <a:r>
+                        <a:rPr sz="1000" b="0">
+                          <a:solidFill>
+                            <a:srgbClr val="000000"/>
+                          </a:solidFill>
+                        </a:rPr>
                         <a:t>0.2756</a:t>
                       </a:r>
                     </a:p>
@@ -5034,14 +5479,13 @@
                     <a:bodyPr/>
                     <a:lstStyle/>
                     <a:p>
-                      <a:pPr>
-                        <a:defRPr sz="1100">
-                          <a:solidFill>
-                            <a:srgbClr val="000000"/>
-                          </a:solidFill>
-                        </a:defRPr>
-                      </a:pPr>
-                      <a:r>
+                      <a:pPr algn="ctr"/>
+                      <a:r>
+                        <a:rPr sz="1000" b="0">
+                          <a:solidFill>
+                            <a:srgbClr val="000000"/>
+                          </a:solidFill>
+                        </a:rPr>
                         <a:t>bAcc 0.6370</a:t>
                       </a:r>
                     </a:p>
@@ -5057,14 +5501,13 @@
                     <a:bodyPr/>
                     <a:lstStyle/>
                     <a:p>
-                      <a:pPr>
-                        <a:defRPr sz="1100">
-                          <a:solidFill>
-                            <a:srgbClr val="000000"/>
-                          </a:solidFill>
-                        </a:defRPr>
-                      </a:pPr>
-                      <a:r>
+                      <a:pPr algn="ctr"/>
+                      <a:r>
+                        <a:rPr sz="1000" b="0">
+                          <a:solidFill>
+                            <a:srgbClr val="000000"/>
+                          </a:solidFill>
+                        </a:rPr>
                         <a:t>Best matches</a:t>
                       </a:r>
                     </a:p>
@@ -5076,20 +5519,19 @@
                   </a:tcPr>
                 </a:tc>
               </a:tr>
-              <a:tr h="365760">
-                <a:tc>
-                  <a:txBody>
-                    <a:bodyPr/>
-                    <a:lstStyle/>
-                    <a:p>
-                      <a:pPr>
-                        <a:defRPr sz="1100">
-                          <a:solidFill>
-                            <a:srgbClr val="000000"/>
-                          </a:solidFill>
-                        </a:defRPr>
-                      </a:pPr>
-                      <a:r>
+              <a:tr h="502920">
+                <a:tc>
+                  <a:txBody>
+                    <a:bodyPr/>
+                    <a:lstStyle/>
+                    <a:p>
+                      <a:pPr algn="l"/>
+                      <a:r>
+                        <a:rPr sz="1000" b="0">
+                          <a:solidFill>
+                            <a:srgbClr val="000000"/>
+                          </a:solidFill>
+                        </a:rPr>
                         <a:t>MDD</a:t>
                       </a:r>
                     </a:p>
@@ -5105,14 +5547,13 @@
                     <a:bodyPr/>
                     <a:lstStyle/>
                     <a:p>
-                      <a:pPr>
-                        <a:defRPr sz="1100">
-                          <a:solidFill>
-                            <a:srgbClr val="000000"/>
-                          </a:solidFill>
-                        </a:defRPr>
-                      </a:pPr>
-                      <a:r>
+                      <a:pPr algn="ctr"/>
+                      <a:r>
+                        <a:rPr sz="1000" b="0">
+                          <a:solidFill>
+                            <a:srgbClr val="000000"/>
+                          </a:solidFill>
+                        </a:rPr>
                         <a:t>flatten FT</a:t>
                       </a:r>
                     </a:p>
@@ -5128,14 +5569,13 @@
                     <a:bodyPr/>
                     <a:lstStyle/>
                     <a:p>
-                      <a:pPr algn="ctr">
-                        <a:defRPr sz="1100">
-                          <a:solidFill>
-                            <a:srgbClr val="000000"/>
-                          </a:solidFill>
-                        </a:defRPr>
-                      </a:pPr>
-                      <a:r>
+                      <a:pPr algn="ctr"/>
+                      <a:r>
+                        <a:rPr sz="1000" b="0">
+                          <a:solidFill>
+                            <a:srgbClr val="000000"/>
+                          </a:solidFill>
+                        </a:rPr>
                         <a:t>42/2024/3047</a:t>
                       </a:r>
                     </a:p>
@@ -5151,14 +5591,13 @@
                     <a:bodyPr/>
                     <a:lstStyle/>
                     <a:p>
-                      <a:pPr algn="ctr">
-                        <a:defRPr sz="1100">
-                          <a:solidFill>
-                            <a:srgbClr val="000000"/>
-                          </a:solidFill>
-                        </a:defRPr>
-                      </a:pPr>
-                      <a:r>
+                      <a:pPr algn="ctr"/>
+                      <a:r>
+                        <a:rPr sz="1000" b="0">
+                          <a:solidFill>
+                            <a:srgbClr val="000000"/>
+                          </a:solidFill>
+                        </a:rPr>
                         <a:t>0.9034</a:t>
                       </a:r>
                     </a:p>
@@ -5174,14 +5613,13 @@
                     <a:bodyPr/>
                     <a:lstStyle/>
                     <a:p>
-                      <a:pPr algn="ctr">
-                        <a:defRPr sz="1100">
-                          <a:solidFill>
-                            <a:srgbClr val="000000"/>
-                          </a:solidFill>
-                        </a:defRPr>
-                      </a:pPr>
-                      <a:r>
+                      <a:pPr algn="ctr"/>
+                      <a:r>
+                        <a:rPr sz="1000" b="0">
+                          <a:solidFill>
+                            <a:srgbClr val="000000"/>
+                          </a:solidFill>
+                        </a:rPr>
                         <a:t>0.9674</a:t>
                       </a:r>
                     </a:p>
@@ -5197,14 +5635,13 @@
                     <a:bodyPr/>
                     <a:lstStyle/>
                     <a:p>
-                      <a:pPr algn="ctr">
-                        <a:defRPr sz="1100">
-                          <a:solidFill>
-                            <a:srgbClr val="000000"/>
-                          </a:solidFill>
-                        </a:defRPr>
-                      </a:pPr>
-                      <a:r>
+                      <a:pPr algn="ctr"/>
+                      <a:r>
+                        <a:rPr sz="1000" b="0">
+                          <a:solidFill>
+                            <a:srgbClr val="000000"/>
+                          </a:solidFill>
+                        </a:rPr>
                         <a:t>0.8008</a:t>
                       </a:r>
                     </a:p>
@@ -5220,14 +5657,13 @@
                     <a:bodyPr/>
                     <a:lstStyle/>
                     <a:p>
-                      <a:pPr algn="ctr">
-                        <a:defRPr sz="1100">
-                          <a:solidFill>
-                            <a:srgbClr val="000000"/>
-                          </a:solidFill>
-                        </a:defRPr>
-                      </a:pPr>
-                      <a:r>
+                      <a:pPr algn="ctr"/>
+                      <a:r>
+                        <a:rPr sz="1000" b="0">
+                          <a:solidFill>
+                            <a:srgbClr val="000000"/>
+                          </a:solidFill>
+                        </a:rPr>
                         <a:t>0.9099</a:t>
                       </a:r>
                     </a:p>
@@ -5243,14 +5679,13 @@
                     <a:bodyPr/>
                     <a:lstStyle/>
                     <a:p>
-                      <a:pPr>
-                        <a:defRPr sz="1100">
-                          <a:solidFill>
-                            <a:srgbClr val="000000"/>
-                          </a:solidFill>
-                        </a:defRPr>
-                      </a:pPr>
-                      <a:r>
+                      <a:pPr algn="ctr"/>
+                      <a:r>
+                        <a:rPr sz="1000" b="0">
+                          <a:solidFill>
+                            <a:srgbClr val="000000"/>
+                          </a:solidFill>
+                        </a:rPr>
                         <a:t>bAcc 0.9560</a:t>
                       </a:r>
                     </a:p>
@@ -5266,14 +5701,13 @@
                     <a:bodyPr/>
                     <a:lstStyle/>
                     <a:p>
-                      <a:pPr>
-                        <a:defRPr sz="1100">
-                          <a:solidFill>
-                            <a:srgbClr val="000000"/>
-                          </a:solidFill>
-                        </a:defRPr>
-                      </a:pPr>
-                      <a:r>
+                      <a:pPr algn="ctr"/>
+                      <a:r>
+                        <a:rPr sz="1000" b="0">
+                          <a:solidFill>
+                            <a:srgbClr val="000000"/>
+                          </a:solidFill>
+                        </a:rPr>
                         <a:t>Best exceeds</a:t>
                       </a:r>
                     </a:p>
@@ -5285,20 +5719,19 @@
                   </a:tcPr>
                 </a:tc>
               </a:tr>
-              <a:tr h="365760">
-                <a:tc>
-                  <a:txBody>
-                    <a:bodyPr/>
-                    <a:lstStyle/>
-                    <a:p>
-                      <a:pPr>
-                        <a:defRPr sz="1100">
-                          <a:solidFill>
-                            <a:srgbClr val="000000"/>
-                          </a:solidFill>
-                        </a:defRPr>
-                      </a:pPr>
-                      <a:r>
+              <a:tr h="502920">
+                <a:tc>
+                  <a:txBody>
+                    <a:bodyPr/>
+                    <a:lstStyle/>
+                    <a:p>
+                      <a:pPr algn="l"/>
+                      <a:r>
+                        <a:rPr sz="1000" b="0">
+                          <a:solidFill>
+                            <a:srgbClr val="000000"/>
+                          </a:solidFill>
+                        </a:rPr>
                         <a:t>TUEV</a:t>
                       </a:r>
                     </a:p>
@@ -5314,14 +5747,13 @@
                     <a:bodyPr/>
                     <a:lstStyle/>
                     <a:p>
-                      <a:pPr>
-                        <a:defRPr sz="1100">
-                          <a:solidFill>
-                            <a:srgbClr val="000000"/>
-                          </a:solidFill>
-                        </a:defRPr>
-                      </a:pPr>
-                      <a:r>
+                      <a:pPr algn="ctr"/>
+                      <a:r>
+                        <a:rPr sz="1000" b="0">
+                          <a:solidFill>
+                            <a:srgbClr val="000000"/>
+                          </a:solidFill>
+                        </a:rPr>
                         <a:t>baseline official FT</a:t>
                       </a:r>
                     </a:p>
@@ -5337,14 +5769,13 @@
                     <a:bodyPr/>
                     <a:lstStyle/>
                     <a:p>
-                      <a:pPr algn="ctr">
-                        <a:defRPr sz="1100">
-                          <a:solidFill>
-                            <a:srgbClr val="000000"/>
-                          </a:solidFill>
-                        </a:defRPr>
-                      </a:pPr>
-                      <a:r>
+                      <a:pPr algn="ctr"/>
+                      <a:r>
+                        <a:rPr sz="1000" b="0">
+                          <a:solidFill>
+                            <a:srgbClr val="000000"/>
+                          </a:solidFill>
+                        </a:rPr>
                         <a:t>42/2024/3407</a:t>
                       </a:r>
                     </a:p>
@@ -5360,14 +5791,13 @@
                     <a:bodyPr/>
                     <a:lstStyle/>
                     <a:p>
-                      <a:pPr algn="ctr">
-                        <a:defRPr sz="1100">
-                          <a:solidFill>
-                            <a:srgbClr val="000000"/>
-                          </a:solidFill>
-                        </a:defRPr>
-                      </a:pPr>
-                      <a:r>
+                      <a:pPr algn="ctr"/>
+                      <a:r>
+                        <a:rPr sz="1000" b="0">
+                          <a:solidFill>
+                            <a:srgbClr val="000000"/>
+                          </a:solidFill>
+                        </a:rPr>
                         <a:t>0.5499</a:t>
                       </a:r>
                     </a:p>
@@ -5383,14 +5813,13 @@
                     <a:bodyPr/>
                     <a:lstStyle/>
                     <a:p>
-                      <a:pPr algn="ctr">
-                        <a:defRPr sz="1100">
-                          <a:solidFill>
-                            <a:srgbClr val="000000"/>
-                          </a:solidFill>
-                        </a:defRPr>
-                      </a:pPr>
-                      <a:r>
+                      <a:pPr algn="ctr"/>
+                      <a:r>
+                        <a:rPr sz="1000" b="0">
+                          <a:solidFill>
+                            <a:srgbClr val="000000"/>
+                          </a:solidFill>
+                        </a:rPr>
                         <a:t>0.5755</a:t>
                       </a:r>
                     </a:p>
@@ -5406,14 +5835,13 @@
                     <a:bodyPr/>
                     <a:lstStyle/>
                     <a:p>
-                      <a:pPr algn="ctr">
-                        <a:defRPr sz="1100">
-                          <a:solidFill>
-                            <a:srgbClr val="000000"/>
-                          </a:solidFill>
-                        </a:defRPr>
-                      </a:pPr>
-                      <a:r>
+                      <a:pPr algn="ctr"/>
+                      <a:r>
+                        <a:rPr sz="1000" b="0">
+                          <a:solidFill>
+                            <a:srgbClr val="000000"/>
+                          </a:solidFill>
+                        </a:rPr>
                         <a:t>0.5964</a:t>
                       </a:r>
                     </a:p>
@@ -5429,14 +5857,13 @@
                     <a:bodyPr/>
                     <a:lstStyle/>
                     <a:p>
-                      <a:pPr algn="ctr">
-                        <a:defRPr sz="1100">
-                          <a:solidFill>
-                            <a:srgbClr val="000000"/>
-                          </a:solidFill>
-                        </a:defRPr>
-                      </a:pPr>
-                      <a:r>
+                      <a:pPr algn="ctr"/>
+                      <a:r>
+                        <a:rPr sz="1000" b="0">
+                          <a:solidFill>
+                            <a:srgbClr val="000000"/>
+                          </a:solidFill>
+                        </a:rPr>
                         <a:t>0.6343</a:t>
                       </a:r>
                     </a:p>
@@ -5452,38 +5879,36 @@
                     <a:bodyPr/>
                     <a:lstStyle/>
                     <a:p>
-                      <a:pPr>
-                        <a:defRPr sz="1100">
-                          <a:solidFill>
-                            <a:srgbClr val="000000"/>
-                          </a:solidFill>
-                        </a:defRPr>
-                      </a:pPr>
-                      <a:r>
-                        <a:t>κ 0.6671</a:t>
-                      </a:r>
-                    </a:p>
-                  </a:txBody>
-                  <a:tcPr>
-                    <a:solidFill>
-                      <a:srgbClr val="FFFFFF"/>
-                    </a:solidFill>
-                  </a:tcPr>
-                </a:tc>
-                <a:tc>
-                  <a:txBody>
-                    <a:bodyPr/>
-                    <a:lstStyle/>
-                    <a:p>
-                      <a:pPr>
-                        <a:defRPr sz="1100">
-                          <a:solidFill>
-                            <a:srgbClr val="000000"/>
-                          </a:solidFill>
-                        </a:defRPr>
-                      </a:pPr>
-                      <a:r>
-                        <a:t>Below ref.</a:t>
+                      <a:pPr algn="ctr"/>
+                      <a:r>
+                        <a:rPr sz="1000" b="0">
+                          <a:solidFill>
+                            <a:srgbClr val="000000"/>
+                          </a:solidFill>
+                        </a:rPr>
+                        <a:t>k 0.6671</a:t>
+                      </a:r>
+                    </a:p>
+                  </a:txBody>
+                  <a:tcPr>
+                    <a:solidFill>
+                      <a:srgbClr val="FFFFFF"/>
+                    </a:solidFill>
+                  </a:tcPr>
+                </a:tc>
+                <a:tc>
+                  <a:txBody>
+                    <a:bodyPr/>
+                    <a:lstStyle/>
+                    <a:p>
+                      <a:pPr algn="ctr"/>
+                      <a:r>
+                        <a:rPr sz="1000" b="0">
+                          <a:solidFill>
+                            <a:srgbClr val="000000"/>
+                          </a:solidFill>
+                        </a:rPr>
+                        <a:t>Below Ref.</a:t>
                       </a:r>
                     </a:p>
                   </a:txBody>
@@ -5498,6 +5923,1152 @@
           </a:graphicData>
         </a:graphic>
       </p:graphicFrame>
+      <p:sp>
+        <p:nvSpPr>
+          <p:cNvPr id="4" name="Rectangle 3"/>
+          <p:cNvSpPr/>
+          <p:nvPr/>
+        </p:nvSpPr>
+        <p:spPr>
+          <a:xfrm>
+            <a:off x="13716000" y="731520"/>
+            <a:ext cx="5029200" cy="7863840"/>
+          </a:xfrm>
+          <a:prstGeom prst="rect">
+            <a:avLst/>
+          </a:prstGeom>
+          <a:solidFill>
+            <a:srgbClr val="F0F0F0"/>
+          </a:solidFill>
+          <a:ln w="12700">
+            <a:solidFill>
+              <a:srgbClr val="C8C8C8"/>
+            </a:solidFill>
+          </a:ln>
+        </p:spPr>
+        <p:style>
+          <a:lnRef idx="1">
+            <a:schemeClr val="accent1"/>
+          </a:lnRef>
+          <a:fillRef idx="3">
+            <a:schemeClr val="accent1"/>
+          </a:fillRef>
+          <a:effectRef idx="2">
+            <a:schemeClr val="accent1"/>
+          </a:effectRef>
+          <a:fontRef idx="minor">
+            <a:schemeClr val="lt1"/>
+          </a:fontRef>
+        </p:style>
+        <p:txBody>
+          <a:bodyPr rtlCol="0" anchor="ctr"/>
+          <a:lstStyle/>
+          <a:p>
+            <a:pPr algn="ctr"/>
+          </a:p>
+        </p:txBody>
+      </p:sp>
+      <p:sp>
+        <p:nvSpPr>
+          <p:cNvPr id="5" name="TextBox 4"/>
+          <p:cNvSpPr txBox="1"/>
+          <p:nvPr/>
+        </p:nvSpPr>
+        <p:spPr>
+          <a:xfrm>
+            <a:off x="13990320" y="868680"/>
+            <a:ext cx="4480560" cy="411480"/>
+          </a:xfrm>
+          <a:prstGeom prst="rect">
+            <a:avLst/>
+          </a:prstGeom>
+          <a:noFill/>
+        </p:spPr>
+        <p:txBody>
+          <a:bodyPr wrap="square">
+            <a:spAutoFit/>
+          </a:bodyPr>
+          <a:lstStyle/>
+          <a:p>
+            <a:pPr algn="ctr"/>
+            <a:r>
+              <a:rPr sz="1800" b="1">
+                <a:solidFill>
+                  <a:srgbClr val="000000"/>
+                </a:solidFill>
+              </a:rPr>
+              <a:t>At a Glance</a:t>
+            </a:r>
+          </a:p>
+        </p:txBody>
+      </p:sp>
+      <p:sp>
+        <p:nvSpPr>
+          <p:cNvPr id="6" name="Oval 5"/>
+          <p:cNvSpPr/>
+          <p:nvPr/>
+        </p:nvSpPr>
+        <p:spPr>
+          <a:xfrm>
+            <a:off x="14081760" y="1426464"/>
+            <a:ext cx="256032" cy="256032"/>
+          </a:xfrm>
+          <a:prstGeom prst="ellipse">
+            <a:avLst/>
+          </a:prstGeom>
+          <a:solidFill>
+            <a:srgbClr val="27AE60"/>
+          </a:solidFill>
+          <a:ln>
+            <a:noFill/>
+          </a:ln>
+        </p:spPr>
+        <p:style>
+          <a:lnRef idx="1">
+            <a:schemeClr val="accent1"/>
+          </a:lnRef>
+          <a:fillRef idx="3">
+            <a:schemeClr val="accent1"/>
+          </a:fillRef>
+          <a:effectRef idx="2">
+            <a:schemeClr val="accent1"/>
+          </a:effectRef>
+          <a:fontRef idx="minor">
+            <a:schemeClr val="lt1"/>
+          </a:fontRef>
+        </p:style>
+        <p:txBody>
+          <a:bodyPr rtlCol="0" anchor="ctr"/>
+          <a:lstStyle/>
+          <a:p>
+            <a:pPr algn="ctr"/>
+          </a:p>
+        </p:txBody>
+      </p:sp>
+      <p:sp>
+        <p:nvSpPr>
+          <p:cNvPr id="7" name="TextBox 6"/>
+          <p:cNvSpPr txBox="1"/>
+          <p:nvPr/>
+        </p:nvSpPr>
+        <p:spPr>
+          <a:xfrm>
+            <a:off x="14493240" y="1371600"/>
+            <a:ext cx="1645920" cy="365760"/>
+          </a:xfrm>
+          <a:prstGeom prst="rect">
+            <a:avLst/>
+          </a:prstGeom>
+          <a:noFill/>
+        </p:spPr>
+        <p:txBody>
+          <a:bodyPr wrap="square">
+            <a:spAutoFit/>
+          </a:bodyPr>
+          <a:lstStyle/>
+          <a:p>
+            <a:pPr algn="l"/>
+            <a:r>
+              <a:rPr sz="1300" b="1">
+                <a:solidFill>
+                  <a:srgbClr val="000000"/>
+                </a:solidFill>
+              </a:rPr>
+              <a:t>BCIC2A</a:t>
+            </a:r>
+          </a:p>
+        </p:txBody>
+      </p:sp>
+      <p:sp>
+        <p:nvSpPr>
+          <p:cNvPr id="8" name="TextBox 7"/>
+          <p:cNvSpPr txBox="1"/>
+          <p:nvPr/>
+        </p:nvSpPr>
+        <p:spPr>
+          <a:xfrm>
+            <a:off x="16184880" y="1371600"/>
+            <a:ext cx="2286000" cy="365760"/>
+          </a:xfrm>
+          <a:prstGeom prst="rect">
+            <a:avLst/>
+          </a:prstGeom>
+          <a:noFill/>
+        </p:spPr>
+        <p:txBody>
+          <a:bodyPr wrap="square">
+            <a:spAutoFit/>
+          </a:bodyPr>
+          <a:lstStyle/>
+          <a:p>
+            <a:pPr algn="l"/>
+            <a:r>
+              <a:rPr sz="1100" b="0">
+                <a:solidFill>
+                  <a:srgbClr val="27AE60"/>
+                </a:solidFill>
+              </a:rPr>
+              <a:t>Matched</a:t>
+            </a:r>
+          </a:p>
+        </p:txBody>
+      </p:sp>
+      <p:sp>
+        <p:nvSpPr>
+          <p:cNvPr id="9" name="Oval 8"/>
+          <p:cNvSpPr/>
+          <p:nvPr/>
+        </p:nvSpPr>
+        <p:spPr>
+          <a:xfrm>
+            <a:off x="14081760" y="1883664"/>
+            <a:ext cx="256032" cy="256032"/>
+          </a:xfrm>
+          <a:prstGeom prst="ellipse">
+            <a:avLst/>
+          </a:prstGeom>
+          <a:solidFill>
+            <a:srgbClr val="F1C40F"/>
+          </a:solidFill>
+          <a:ln>
+            <a:noFill/>
+          </a:ln>
+        </p:spPr>
+        <p:style>
+          <a:lnRef idx="1">
+            <a:schemeClr val="accent1"/>
+          </a:lnRef>
+          <a:fillRef idx="3">
+            <a:schemeClr val="accent1"/>
+          </a:fillRef>
+          <a:effectRef idx="2">
+            <a:schemeClr val="accent1"/>
+          </a:effectRef>
+          <a:fontRef idx="minor">
+            <a:schemeClr val="lt1"/>
+          </a:fontRef>
+        </p:style>
+        <p:txBody>
+          <a:bodyPr rtlCol="0" anchor="ctr"/>
+          <a:lstStyle/>
+          <a:p>
+            <a:pPr algn="ctr"/>
+          </a:p>
+        </p:txBody>
+      </p:sp>
+      <p:sp>
+        <p:nvSpPr>
+          <p:cNvPr id="10" name="TextBox 9"/>
+          <p:cNvSpPr txBox="1"/>
+          <p:nvPr/>
+        </p:nvSpPr>
+        <p:spPr>
+          <a:xfrm>
+            <a:off x="14493240" y="1828800"/>
+            <a:ext cx="1645920" cy="365760"/>
+          </a:xfrm>
+          <a:prstGeom prst="rect">
+            <a:avLst/>
+          </a:prstGeom>
+          <a:noFill/>
+        </p:spPr>
+        <p:txBody>
+          <a:bodyPr wrap="square">
+            <a:spAutoFit/>
+          </a:bodyPr>
+          <a:lstStyle/>
+          <a:p>
+            <a:pPr algn="l"/>
+            <a:r>
+              <a:rPr sz="1300" b="1">
+                <a:solidFill>
+                  <a:srgbClr val="000000"/>
+                </a:solidFill>
+              </a:rPr>
+              <a:t>FACED</a:t>
+            </a:r>
+          </a:p>
+        </p:txBody>
+      </p:sp>
+      <p:sp>
+        <p:nvSpPr>
+          <p:cNvPr id="11" name="TextBox 10"/>
+          <p:cNvSpPr txBox="1"/>
+          <p:nvPr/>
+        </p:nvSpPr>
+        <p:spPr>
+          <a:xfrm>
+            <a:off x="16184880" y="1828800"/>
+            <a:ext cx="2286000" cy="365760"/>
+          </a:xfrm>
+          <a:prstGeom prst="rect">
+            <a:avLst/>
+          </a:prstGeom>
+          <a:noFill/>
+        </p:spPr>
+        <p:txBody>
+          <a:bodyPr wrap="square">
+            <a:spAutoFit/>
+          </a:bodyPr>
+          <a:lstStyle/>
+          <a:p>
+            <a:pPr algn="l"/>
+            <a:r>
+              <a:rPr sz="1100" b="0">
+                <a:solidFill>
+                  <a:srgbClr val="F1C40F"/>
+                </a:solidFill>
+              </a:rPr>
+              <a:t>Close</a:t>
+            </a:r>
+          </a:p>
+        </p:txBody>
+      </p:sp>
+      <p:sp>
+        <p:nvSpPr>
+          <p:cNvPr id="12" name="Oval 11"/>
+          <p:cNvSpPr/>
+          <p:nvPr/>
+        </p:nvSpPr>
+        <p:spPr>
+          <a:xfrm>
+            <a:off x="14081760" y="2340864"/>
+            <a:ext cx="256032" cy="256032"/>
+          </a:xfrm>
+          <a:prstGeom prst="ellipse">
+            <a:avLst/>
+          </a:prstGeom>
+          <a:solidFill>
+            <a:srgbClr val="27AE60"/>
+          </a:solidFill>
+          <a:ln>
+            <a:noFill/>
+          </a:ln>
+        </p:spPr>
+        <p:style>
+          <a:lnRef idx="1">
+            <a:schemeClr val="accent1"/>
+          </a:lnRef>
+          <a:fillRef idx="3">
+            <a:schemeClr val="accent1"/>
+          </a:fillRef>
+          <a:effectRef idx="2">
+            <a:schemeClr val="accent1"/>
+          </a:effectRef>
+          <a:fontRef idx="minor">
+            <a:schemeClr val="lt1"/>
+          </a:fontRef>
+        </p:style>
+        <p:txBody>
+          <a:bodyPr rtlCol="0" anchor="ctr"/>
+          <a:lstStyle/>
+          <a:p>
+            <a:pPr algn="ctr"/>
+          </a:p>
+        </p:txBody>
+      </p:sp>
+      <p:sp>
+        <p:nvSpPr>
+          <p:cNvPr id="13" name="TextBox 12"/>
+          <p:cNvSpPr txBox="1"/>
+          <p:nvPr/>
+        </p:nvSpPr>
+        <p:spPr>
+          <a:xfrm>
+            <a:off x="14493240" y="2286000"/>
+            <a:ext cx="1645920" cy="365760"/>
+          </a:xfrm>
+          <a:prstGeom prst="rect">
+            <a:avLst/>
+          </a:prstGeom>
+          <a:noFill/>
+        </p:spPr>
+        <p:txBody>
+          <a:bodyPr wrap="square">
+            <a:spAutoFit/>
+          </a:bodyPr>
+          <a:lstStyle/>
+          <a:p>
+            <a:pPr algn="l"/>
+            <a:r>
+              <a:rPr sz="1300" b="1">
+                <a:solidFill>
+                  <a:srgbClr val="000000"/>
+                </a:solidFill>
+              </a:rPr>
+              <a:t>ISRUC-S1</a:t>
+            </a:r>
+          </a:p>
+        </p:txBody>
+      </p:sp>
+      <p:sp>
+        <p:nvSpPr>
+          <p:cNvPr id="14" name="TextBox 13"/>
+          <p:cNvSpPr txBox="1"/>
+          <p:nvPr/>
+        </p:nvSpPr>
+        <p:spPr>
+          <a:xfrm>
+            <a:off x="16184880" y="2286000"/>
+            <a:ext cx="2286000" cy="365760"/>
+          </a:xfrm>
+          <a:prstGeom prst="rect">
+            <a:avLst/>
+          </a:prstGeom>
+          <a:noFill/>
+        </p:spPr>
+        <p:txBody>
+          <a:bodyPr wrap="square">
+            <a:spAutoFit/>
+          </a:bodyPr>
+          <a:lstStyle/>
+          <a:p>
+            <a:pPr algn="l"/>
+            <a:r>
+              <a:rPr sz="1100" b="0">
+                <a:solidFill>
+                  <a:srgbClr val="27AE60"/>
+                </a:solidFill>
+              </a:rPr>
+              <a:t>Reproduced</a:t>
+            </a:r>
+          </a:p>
+        </p:txBody>
+      </p:sp>
+      <p:sp>
+        <p:nvSpPr>
+          <p:cNvPr id="15" name="Oval 14"/>
+          <p:cNvSpPr/>
+          <p:nvPr/>
+        </p:nvSpPr>
+        <p:spPr>
+          <a:xfrm>
+            <a:off x="14081760" y="2798064"/>
+            <a:ext cx="256032" cy="256032"/>
+          </a:xfrm>
+          <a:prstGeom prst="ellipse">
+            <a:avLst/>
+          </a:prstGeom>
+          <a:solidFill>
+            <a:srgbClr val="F1C40F"/>
+          </a:solidFill>
+          <a:ln>
+            <a:noFill/>
+          </a:ln>
+        </p:spPr>
+        <p:style>
+          <a:lnRef idx="1">
+            <a:schemeClr val="accent1"/>
+          </a:lnRef>
+          <a:fillRef idx="3">
+            <a:schemeClr val="accent1"/>
+          </a:fillRef>
+          <a:effectRef idx="2">
+            <a:schemeClr val="accent1"/>
+          </a:effectRef>
+          <a:fontRef idx="minor">
+            <a:schemeClr val="lt1"/>
+          </a:fontRef>
+        </p:style>
+        <p:txBody>
+          <a:bodyPr rtlCol="0" anchor="ctr"/>
+          <a:lstStyle/>
+          <a:p>
+            <a:pPr algn="ctr"/>
+          </a:p>
+        </p:txBody>
+      </p:sp>
+      <p:sp>
+        <p:nvSpPr>
+          <p:cNvPr id="16" name="TextBox 15"/>
+          <p:cNvSpPr txBox="1"/>
+          <p:nvPr/>
+        </p:nvSpPr>
+        <p:spPr>
+          <a:xfrm>
+            <a:off x="14493240" y="2743200"/>
+            <a:ext cx="1645920" cy="365760"/>
+          </a:xfrm>
+          <a:prstGeom prst="rect">
+            <a:avLst/>
+          </a:prstGeom>
+          <a:noFill/>
+        </p:spPr>
+        <p:txBody>
+          <a:bodyPr wrap="square">
+            <a:spAutoFit/>
+          </a:bodyPr>
+          <a:lstStyle/>
+          <a:p>
+            <a:pPr algn="l"/>
+            <a:r>
+              <a:rPr sz="1300" b="1">
+                <a:solidFill>
+                  <a:srgbClr val="000000"/>
+                </a:solidFill>
+              </a:rPr>
+              <a:t>Physionet-MI</a:t>
+            </a:r>
+          </a:p>
+        </p:txBody>
+      </p:sp>
+      <p:sp>
+        <p:nvSpPr>
+          <p:cNvPr id="17" name="TextBox 16"/>
+          <p:cNvSpPr txBox="1"/>
+          <p:nvPr/>
+        </p:nvSpPr>
+        <p:spPr>
+          <a:xfrm>
+            <a:off x="16184880" y="2743200"/>
+            <a:ext cx="2286000" cy="365760"/>
+          </a:xfrm>
+          <a:prstGeom prst="rect">
+            <a:avLst/>
+          </a:prstGeom>
+          <a:noFill/>
+        </p:spPr>
+        <p:txBody>
+          <a:bodyPr wrap="square">
+            <a:spAutoFit/>
+          </a:bodyPr>
+          <a:lstStyle/>
+          <a:p>
+            <a:pPr algn="l"/>
+            <a:r>
+              <a:rPr sz="1100" b="0">
+                <a:solidFill>
+                  <a:srgbClr val="F1C40F"/>
+                </a:solidFill>
+              </a:rPr>
+              <a:t>Close</a:t>
+            </a:r>
+          </a:p>
+        </p:txBody>
+      </p:sp>
+      <p:sp>
+        <p:nvSpPr>
+          <p:cNvPr id="18" name="Oval 17"/>
+          <p:cNvSpPr/>
+          <p:nvPr/>
+        </p:nvSpPr>
+        <p:spPr>
+          <a:xfrm>
+            <a:off x="14081760" y="3255264"/>
+            <a:ext cx="256032" cy="256032"/>
+          </a:xfrm>
+          <a:prstGeom prst="ellipse">
+            <a:avLst/>
+          </a:prstGeom>
+          <a:solidFill>
+            <a:srgbClr val="F1C40F"/>
+          </a:solidFill>
+          <a:ln>
+            <a:noFill/>
+          </a:ln>
+        </p:spPr>
+        <p:style>
+          <a:lnRef idx="1">
+            <a:schemeClr val="accent1"/>
+          </a:lnRef>
+          <a:fillRef idx="3">
+            <a:schemeClr val="accent1"/>
+          </a:fillRef>
+          <a:effectRef idx="2">
+            <a:schemeClr val="accent1"/>
+          </a:effectRef>
+          <a:fontRef idx="minor">
+            <a:schemeClr val="lt1"/>
+          </a:fontRef>
+        </p:style>
+        <p:txBody>
+          <a:bodyPr rtlCol="0" anchor="ctr"/>
+          <a:lstStyle/>
+          <a:p>
+            <a:pPr algn="ctr"/>
+          </a:p>
+        </p:txBody>
+      </p:sp>
+      <p:sp>
+        <p:nvSpPr>
+          <p:cNvPr id="19" name="TextBox 18"/>
+          <p:cNvSpPr txBox="1"/>
+          <p:nvPr/>
+        </p:nvSpPr>
+        <p:spPr>
+          <a:xfrm>
+            <a:off x="14493240" y="3200400"/>
+            <a:ext cx="1645920" cy="365760"/>
+          </a:xfrm>
+          <a:prstGeom prst="rect">
+            <a:avLst/>
+          </a:prstGeom>
+          <a:noFill/>
+        </p:spPr>
+        <p:txBody>
+          <a:bodyPr wrap="square">
+            <a:spAutoFit/>
+          </a:bodyPr>
+          <a:lstStyle/>
+          <a:p>
+            <a:pPr algn="l"/>
+            <a:r>
+              <a:rPr sz="1300" b="1">
+                <a:solidFill>
+                  <a:srgbClr val="000000"/>
+                </a:solidFill>
+              </a:rPr>
+              <a:t>SEED-V</a:t>
+            </a:r>
+          </a:p>
+        </p:txBody>
+      </p:sp>
+      <p:sp>
+        <p:nvSpPr>
+          <p:cNvPr id="20" name="TextBox 19"/>
+          <p:cNvSpPr txBox="1"/>
+          <p:nvPr/>
+        </p:nvSpPr>
+        <p:spPr>
+          <a:xfrm>
+            <a:off x="16184880" y="3200400"/>
+            <a:ext cx="2286000" cy="365760"/>
+          </a:xfrm>
+          <a:prstGeom prst="rect">
+            <a:avLst/>
+          </a:prstGeom>
+          <a:noFill/>
+        </p:spPr>
+        <p:txBody>
+          <a:bodyPr wrap="square">
+            <a:spAutoFit/>
+          </a:bodyPr>
+          <a:lstStyle/>
+          <a:p>
+            <a:pPr algn="l"/>
+            <a:r>
+              <a:rPr sz="1100" b="0">
+                <a:solidFill>
+                  <a:srgbClr val="F1C40F"/>
+                </a:solidFill>
+              </a:rPr>
+              <a:t>Close</a:t>
+            </a:r>
+          </a:p>
+        </p:txBody>
+      </p:sp>
+      <p:sp>
+        <p:nvSpPr>
+          <p:cNvPr id="21" name="Oval 20"/>
+          <p:cNvSpPr/>
+          <p:nvPr/>
+        </p:nvSpPr>
+        <p:spPr>
+          <a:xfrm>
+            <a:off x="14081760" y="3712463"/>
+            <a:ext cx="256032" cy="256032"/>
+          </a:xfrm>
+          <a:prstGeom prst="ellipse">
+            <a:avLst/>
+          </a:prstGeom>
+          <a:solidFill>
+            <a:srgbClr val="27AE60"/>
+          </a:solidFill>
+          <a:ln>
+            <a:noFill/>
+          </a:ln>
+        </p:spPr>
+        <p:style>
+          <a:lnRef idx="1">
+            <a:schemeClr val="accent1"/>
+          </a:lnRef>
+          <a:fillRef idx="3">
+            <a:schemeClr val="accent1"/>
+          </a:fillRef>
+          <a:effectRef idx="2">
+            <a:schemeClr val="accent1"/>
+          </a:effectRef>
+          <a:fontRef idx="minor">
+            <a:schemeClr val="lt1"/>
+          </a:fontRef>
+        </p:style>
+        <p:txBody>
+          <a:bodyPr rtlCol="0" anchor="ctr"/>
+          <a:lstStyle/>
+          <a:p>
+            <a:pPr algn="ctr"/>
+          </a:p>
+        </p:txBody>
+      </p:sp>
+      <p:sp>
+        <p:nvSpPr>
+          <p:cNvPr id="22" name="TextBox 21"/>
+          <p:cNvSpPr txBox="1"/>
+          <p:nvPr/>
+        </p:nvSpPr>
+        <p:spPr>
+          <a:xfrm>
+            <a:off x="14493240" y="3657600"/>
+            <a:ext cx="1645920" cy="365760"/>
+          </a:xfrm>
+          <a:prstGeom prst="rect">
+            <a:avLst/>
+          </a:prstGeom>
+          <a:noFill/>
+        </p:spPr>
+        <p:txBody>
+          <a:bodyPr wrap="square">
+            <a:spAutoFit/>
+          </a:bodyPr>
+          <a:lstStyle/>
+          <a:p>
+            <a:pPr algn="l"/>
+            <a:r>
+              <a:rPr sz="1300" b="1">
+                <a:solidFill>
+                  <a:srgbClr val="000000"/>
+                </a:solidFill>
+              </a:rPr>
+              <a:t>SHU-MI</a:t>
+            </a:r>
+          </a:p>
+        </p:txBody>
+      </p:sp>
+      <p:sp>
+        <p:nvSpPr>
+          <p:cNvPr id="23" name="TextBox 22"/>
+          <p:cNvSpPr txBox="1"/>
+          <p:nvPr/>
+        </p:nvSpPr>
+        <p:spPr>
+          <a:xfrm>
+            <a:off x="16184880" y="3657600"/>
+            <a:ext cx="2286000" cy="365760"/>
+          </a:xfrm>
+          <a:prstGeom prst="rect">
+            <a:avLst/>
+          </a:prstGeom>
+          <a:noFill/>
+        </p:spPr>
+        <p:txBody>
+          <a:bodyPr wrap="square">
+            <a:spAutoFit/>
+          </a:bodyPr>
+          <a:lstStyle/>
+          <a:p>
+            <a:pPr algn="l"/>
+            <a:r>
+              <a:rPr sz="1100" b="0">
+                <a:solidFill>
+                  <a:srgbClr val="27AE60"/>
+                </a:solidFill>
+              </a:rPr>
+              <a:t>Best matches</a:t>
+            </a:r>
+          </a:p>
+        </p:txBody>
+      </p:sp>
+      <p:sp>
+        <p:nvSpPr>
+          <p:cNvPr id="24" name="Oval 23"/>
+          <p:cNvSpPr/>
+          <p:nvPr/>
+        </p:nvSpPr>
+        <p:spPr>
+          <a:xfrm>
+            <a:off x="14081760" y="4169663"/>
+            <a:ext cx="256032" cy="256032"/>
+          </a:xfrm>
+          <a:prstGeom prst="ellipse">
+            <a:avLst/>
+          </a:prstGeom>
+          <a:solidFill>
+            <a:srgbClr val="27AE60"/>
+          </a:solidFill>
+          <a:ln>
+            <a:noFill/>
+          </a:ln>
+        </p:spPr>
+        <p:style>
+          <a:lnRef idx="1">
+            <a:schemeClr val="accent1"/>
+          </a:lnRef>
+          <a:fillRef idx="3">
+            <a:schemeClr val="accent1"/>
+          </a:fillRef>
+          <a:effectRef idx="2">
+            <a:schemeClr val="accent1"/>
+          </a:effectRef>
+          <a:fontRef idx="minor">
+            <a:schemeClr val="lt1"/>
+          </a:fontRef>
+        </p:style>
+        <p:txBody>
+          <a:bodyPr rtlCol="0" anchor="ctr"/>
+          <a:lstStyle/>
+          <a:p>
+            <a:pPr algn="ctr"/>
+          </a:p>
+        </p:txBody>
+      </p:sp>
+      <p:sp>
+        <p:nvSpPr>
+          <p:cNvPr id="25" name="TextBox 24"/>
+          <p:cNvSpPr txBox="1"/>
+          <p:nvPr/>
+        </p:nvSpPr>
+        <p:spPr>
+          <a:xfrm>
+            <a:off x="14493240" y="4114800"/>
+            <a:ext cx="1645920" cy="365760"/>
+          </a:xfrm>
+          <a:prstGeom prst="rect">
+            <a:avLst/>
+          </a:prstGeom>
+          <a:noFill/>
+        </p:spPr>
+        <p:txBody>
+          <a:bodyPr wrap="square">
+            <a:spAutoFit/>
+          </a:bodyPr>
+          <a:lstStyle/>
+          <a:p>
+            <a:pPr algn="l"/>
+            <a:r>
+              <a:rPr sz="1300" b="1">
+                <a:solidFill>
+                  <a:srgbClr val="000000"/>
+                </a:solidFill>
+              </a:rPr>
+              <a:t>MDD</a:t>
+            </a:r>
+          </a:p>
+        </p:txBody>
+      </p:sp>
+      <p:sp>
+        <p:nvSpPr>
+          <p:cNvPr id="26" name="TextBox 25"/>
+          <p:cNvSpPr txBox="1"/>
+          <p:nvPr/>
+        </p:nvSpPr>
+        <p:spPr>
+          <a:xfrm>
+            <a:off x="16184880" y="4114800"/>
+            <a:ext cx="2286000" cy="365760"/>
+          </a:xfrm>
+          <a:prstGeom prst="rect">
+            <a:avLst/>
+          </a:prstGeom>
+          <a:noFill/>
+        </p:spPr>
+        <p:txBody>
+          <a:bodyPr wrap="square">
+            <a:spAutoFit/>
+          </a:bodyPr>
+          <a:lstStyle/>
+          <a:p>
+            <a:pPr algn="l"/>
+            <a:r>
+              <a:rPr sz="1100" b="0">
+                <a:solidFill>
+                  <a:srgbClr val="27AE60"/>
+                </a:solidFill>
+              </a:rPr>
+              <a:t>Best exceeds</a:t>
+            </a:r>
+          </a:p>
+        </p:txBody>
+      </p:sp>
+      <p:sp>
+        <p:nvSpPr>
+          <p:cNvPr id="27" name="Oval 26"/>
+          <p:cNvSpPr/>
+          <p:nvPr/>
+        </p:nvSpPr>
+        <p:spPr>
+          <a:xfrm>
+            <a:off x="14081760" y="4626864"/>
+            <a:ext cx="256032" cy="256032"/>
+          </a:xfrm>
+          <a:prstGeom prst="ellipse">
+            <a:avLst/>
+          </a:prstGeom>
+          <a:solidFill>
+            <a:srgbClr val="E74C3C"/>
+          </a:solidFill>
+          <a:ln>
+            <a:noFill/>
+          </a:ln>
+        </p:spPr>
+        <p:style>
+          <a:lnRef idx="1">
+            <a:schemeClr val="accent1"/>
+          </a:lnRef>
+          <a:fillRef idx="3">
+            <a:schemeClr val="accent1"/>
+          </a:fillRef>
+          <a:effectRef idx="2">
+            <a:schemeClr val="accent1"/>
+          </a:effectRef>
+          <a:fontRef idx="minor">
+            <a:schemeClr val="lt1"/>
+          </a:fontRef>
+        </p:style>
+        <p:txBody>
+          <a:bodyPr rtlCol="0" anchor="ctr"/>
+          <a:lstStyle/>
+          <a:p>
+            <a:pPr algn="ctr"/>
+          </a:p>
+        </p:txBody>
+      </p:sp>
+      <p:sp>
+        <p:nvSpPr>
+          <p:cNvPr id="28" name="TextBox 27"/>
+          <p:cNvSpPr txBox="1"/>
+          <p:nvPr/>
+        </p:nvSpPr>
+        <p:spPr>
+          <a:xfrm>
+            <a:off x="14493240" y="4572000"/>
+            <a:ext cx="1645920" cy="365760"/>
+          </a:xfrm>
+          <a:prstGeom prst="rect">
+            <a:avLst/>
+          </a:prstGeom>
+          <a:noFill/>
+        </p:spPr>
+        <p:txBody>
+          <a:bodyPr wrap="square">
+            <a:spAutoFit/>
+          </a:bodyPr>
+          <a:lstStyle/>
+          <a:p>
+            <a:pPr algn="l"/>
+            <a:r>
+              <a:rPr sz="1300" b="1">
+                <a:solidFill>
+                  <a:srgbClr val="000000"/>
+                </a:solidFill>
+              </a:rPr>
+              <a:t>TUEV</a:t>
+            </a:r>
+          </a:p>
+        </p:txBody>
+      </p:sp>
+      <p:sp>
+        <p:nvSpPr>
+          <p:cNvPr id="29" name="TextBox 28"/>
+          <p:cNvSpPr txBox="1"/>
+          <p:nvPr/>
+        </p:nvSpPr>
+        <p:spPr>
+          <a:xfrm>
+            <a:off x="16184880" y="4572000"/>
+            <a:ext cx="2286000" cy="365760"/>
+          </a:xfrm>
+          <a:prstGeom prst="rect">
+            <a:avLst/>
+          </a:prstGeom>
+          <a:noFill/>
+        </p:spPr>
+        <p:txBody>
+          <a:bodyPr wrap="square">
+            <a:spAutoFit/>
+          </a:bodyPr>
+          <a:lstStyle/>
+          <a:p>
+            <a:pPr algn="l"/>
+            <a:r>
+              <a:rPr sz="1100" b="0">
+                <a:solidFill>
+                  <a:srgbClr val="E74C3C"/>
+                </a:solidFill>
+              </a:rPr>
+              <a:t>Below Ref.</a:t>
+            </a:r>
+          </a:p>
+        </p:txBody>
+      </p:sp>
+      <p:sp>
+        <p:nvSpPr>
+          <p:cNvPr id="30" name="Rectangle 29"/>
+          <p:cNvSpPr/>
+          <p:nvPr/>
+        </p:nvSpPr>
+        <p:spPr>
+          <a:xfrm>
+            <a:off x="14081760" y="5166360"/>
+            <a:ext cx="4297680" cy="13716"/>
+          </a:xfrm>
+          <a:prstGeom prst="rect">
+            <a:avLst/>
+          </a:prstGeom>
+          <a:solidFill>
+            <a:srgbClr val="C8C8C8"/>
+          </a:solidFill>
+          <a:ln>
+            <a:noFill/>
+          </a:ln>
+        </p:spPr>
+        <p:style>
+          <a:lnRef idx="1">
+            <a:schemeClr val="accent1"/>
+          </a:lnRef>
+          <a:fillRef idx="3">
+            <a:schemeClr val="accent1"/>
+          </a:fillRef>
+          <a:effectRef idx="2">
+            <a:schemeClr val="accent1"/>
+          </a:effectRef>
+          <a:fontRef idx="minor">
+            <a:schemeClr val="lt1"/>
+          </a:fontRef>
+        </p:style>
+        <p:txBody>
+          <a:bodyPr rtlCol="0" anchor="ctr"/>
+          <a:lstStyle/>
+          <a:p>
+            <a:pPr algn="ctr"/>
+          </a:p>
+        </p:txBody>
+      </p:sp>
+      <p:sp>
+        <p:nvSpPr>
+          <p:cNvPr id="31" name="TextBox 30"/>
+          <p:cNvSpPr txBox="1"/>
+          <p:nvPr/>
+        </p:nvSpPr>
+        <p:spPr>
+          <a:xfrm>
+            <a:off x="14173200" y="5440680"/>
+            <a:ext cx="4114800" cy="365760"/>
+          </a:xfrm>
+          <a:prstGeom prst="rect">
+            <a:avLst/>
+          </a:prstGeom>
+          <a:noFill/>
+        </p:spPr>
+        <p:txBody>
+          <a:bodyPr wrap="square">
+            <a:spAutoFit/>
+          </a:bodyPr>
+          <a:lstStyle/>
+          <a:p>
+            <a:pPr algn="l"/>
+            <a:r>
+              <a:rPr sz="1400" b="1">
+                <a:solidFill>
+                  <a:srgbClr val="27AE60"/>
+                </a:solidFill>
+              </a:rPr>
+              <a:t>Matched / Reproduced :  4</a:t>
+            </a:r>
+          </a:p>
+        </p:txBody>
+      </p:sp>
+      <p:sp>
+        <p:nvSpPr>
+          <p:cNvPr id="32" name="TextBox 31"/>
+          <p:cNvSpPr txBox="1"/>
+          <p:nvPr/>
+        </p:nvSpPr>
+        <p:spPr>
+          <a:xfrm>
+            <a:off x="14173200" y="5852160"/>
+            <a:ext cx="4114800" cy="365760"/>
+          </a:xfrm>
+          <a:prstGeom prst="rect">
+            <a:avLst/>
+          </a:prstGeom>
+          <a:noFill/>
+        </p:spPr>
+        <p:txBody>
+          <a:bodyPr wrap="square">
+            <a:spAutoFit/>
+          </a:bodyPr>
+          <a:lstStyle/>
+          <a:p>
+            <a:pPr algn="l"/>
+            <a:r>
+              <a:rPr sz="1400" b="1">
+                <a:solidFill>
+                  <a:srgbClr val="F1C40F"/>
+                </a:solidFill>
+              </a:rPr>
+              <a:t>Close                :  3</a:t>
+            </a:r>
+          </a:p>
+        </p:txBody>
+      </p:sp>
+      <p:sp>
+        <p:nvSpPr>
+          <p:cNvPr id="33" name="TextBox 32"/>
+          <p:cNvSpPr txBox="1"/>
+          <p:nvPr/>
+        </p:nvSpPr>
+        <p:spPr>
+          <a:xfrm>
+            <a:off x="14173200" y="6263640"/>
+            <a:ext cx="4114800" cy="365760"/>
+          </a:xfrm>
+          <a:prstGeom prst="rect">
+            <a:avLst/>
+          </a:prstGeom>
+          <a:noFill/>
+        </p:spPr>
+        <p:txBody>
+          <a:bodyPr wrap="square">
+            <a:spAutoFit/>
+          </a:bodyPr>
+          <a:lstStyle/>
+          <a:p>
+            <a:pPr algn="l"/>
+            <a:r>
+              <a:rPr sz="1400" b="1">
+                <a:solidFill>
+                  <a:srgbClr val="E74C3C"/>
+                </a:solidFill>
+              </a:rPr>
+              <a:t>Below Ref.           :  1</a:t>
+            </a:r>
+          </a:p>
+        </p:txBody>
+      </p:sp>
+      <p:sp>
+        <p:nvSpPr>
+          <p:cNvPr id="34" name="TextBox 33"/>
+          <p:cNvSpPr txBox="1"/>
+          <p:nvPr/>
+        </p:nvSpPr>
+        <p:spPr>
+          <a:xfrm>
+            <a:off x="13990320" y="6949440"/>
+            <a:ext cx="4480560" cy="457200"/>
+          </a:xfrm>
+          <a:prstGeom prst="rect">
+            <a:avLst/>
+          </a:prstGeom>
+          <a:noFill/>
+        </p:spPr>
+        <p:txBody>
+          <a:bodyPr wrap="square">
+            <a:spAutoFit/>
+          </a:bodyPr>
+          <a:lstStyle/>
+          <a:p>
+            <a:pPr algn="ctr"/>
+            <a:r>
+              <a:rPr sz="1300" b="0">
+                <a:solidFill>
+                  <a:srgbClr val="145A32"/>
+                </a:solidFill>
+              </a:rPr>
+              <a:t>6 / 8 on or near paper reference</a:t>
+            </a:r>
+          </a:p>
+        </p:txBody>
+      </p:sp>
     </p:spTree>
   </p:cSld>
   <p:clrMapOvr>
@@ -5524,8 +7095,8 @@
         </p:nvSpPr>
         <p:spPr>
           <a:xfrm>
-            <a:off x="457200" y="274320"/>
-            <a:ext cx="13716000" cy="548640"/>
+            <a:off x="457200" y="137160"/>
+            <a:ext cx="18288000" cy="411480"/>
           </a:xfrm>
           <a:prstGeom prst="rect">
             <a:avLst/>
@@ -5533,19 +7104,18 @@
           <a:noFill/>
         </p:spPr>
         <p:txBody>
-          <a:bodyPr wrap="none">
+          <a:bodyPr wrap="square">
             <a:spAutoFit/>
           </a:bodyPr>
           <a:lstStyle/>
           <a:p>
-            <a:pPr>
-              <a:defRPr sz="2400" b="1">
+            <a:pPr algn="l"/>
+            <a:r>
+              <a:rPr sz="2000" b="1">
                 <a:solidFill>
                   <a:srgbClr val="000000"/>
                 </a:solidFill>
-              </a:defRPr>
-            </a:pPr>
-            <a:r>
+              </a:rPr>
               <a:t>Table 3: Original EEGNet Performance on Motor Imagery Datasets</a:t>
             </a:r>
           </a:p>
@@ -5560,8 +7130,8 @@
           <p:nvPr/>
         </p:nvGraphicFramePr>
         <p:xfrm>
-          <a:off x="457200" y="1005840"/>
-          <a:ext cx="11430000" cy="1828800"/>
+          <a:off x="274320" y="731520"/>
+          <a:ext cx="11430000" cy="2514600"/>
         </p:xfrm>
         <a:graphic>
           <a:graphicData uri="http://schemas.openxmlformats.org/drawingml/2006/table">
@@ -5576,137 +7146,131 @@
                 <a:gridCol w="2286000"/>
                 <a:gridCol w="2286000"/>
               </a:tblGrid>
-              <a:tr h="365760">
-                <a:tc>
-                  <a:txBody>
-                    <a:bodyPr/>
-                    <a:lstStyle/>
-                    <a:p>
-                      <a:pPr algn="ctr">
-                        <a:defRPr sz="1200" b="1">
-                          <a:solidFill>
-                            <a:srgbClr val="000000"/>
-                          </a:solidFill>
-                        </a:defRPr>
-                      </a:pPr>
-                      <a:r>
+              <a:tr h="502920">
+                <a:tc>
+                  <a:txBody>
+                    <a:bodyPr/>
+                    <a:lstStyle/>
+                    <a:p>
+                      <a:pPr algn="ctr"/>
+                      <a:r>
+                        <a:rPr sz="1000" b="1">
+                          <a:solidFill>
+                            <a:srgbClr val="FFFFFF"/>
+                          </a:solidFill>
+                        </a:rPr>
                         <a:t>Dataset</a:t>
                       </a:r>
                     </a:p>
                   </a:txBody>
                   <a:tcPr>
                     <a:solidFill>
-                      <a:srgbClr val="F0F0F0"/>
-                    </a:solidFill>
-                  </a:tcPr>
-                </a:tc>
-                <a:tc>
-                  <a:txBody>
-                    <a:bodyPr/>
-                    <a:lstStyle/>
-                    <a:p>
-                      <a:pPr algn="ctr">
-                        <a:defRPr sz="1200" b="1">
-                          <a:solidFill>
-                            <a:srgbClr val="000000"/>
-                          </a:solidFill>
-                        </a:defRPr>
-                      </a:pPr>
-                      <a:r>
+                      <a:srgbClr val="3C3C3C"/>
+                    </a:solidFill>
+                  </a:tcPr>
+                </a:tc>
+                <a:tc>
+                  <a:txBody>
+                    <a:bodyPr/>
+                    <a:lstStyle/>
+                    <a:p>
+                      <a:pPr algn="ctr"/>
+                      <a:r>
+                        <a:rPr sz="1000" b="1">
+                          <a:solidFill>
+                            <a:srgbClr val="FFFFFF"/>
+                          </a:solidFill>
+                        </a:rPr>
                         <a:t>Classes</a:t>
                       </a:r>
                     </a:p>
                   </a:txBody>
                   <a:tcPr>
                     <a:solidFill>
-                      <a:srgbClr val="F0F0F0"/>
-                    </a:solidFill>
-                  </a:tcPr>
-                </a:tc>
-                <a:tc>
-                  <a:txBody>
-                    <a:bodyPr/>
-                    <a:lstStyle/>
-                    <a:p>
-                      <a:pPr algn="ctr">
-                        <a:defRPr sz="1200" b="1">
-                          <a:solidFill>
-                            <a:srgbClr val="000000"/>
-                          </a:solidFill>
-                        </a:defRPr>
-                      </a:pPr>
-                      <a:r>
+                      <a:srgbClr val="3C3C3C"/>
+                    </a:solidFill>
+                  </a:tcPr>
+                </a:tc>
+                <a:tc>
+                  <a:txBody>
+                    <a:bodyPr/>
+                    <a:lstStyle/>
+                    <a:p>
+                      <a:pPr algn="ctr"/>
+                      <a:r>
+                        <a:rPr sz="1000" b="1">
+                          <a:solidFill>
+                            <a:srgbClr val="FFFFFF"/>
+                          </a:solidFill>
+                        </a:rPr>
                         <a:t>Val Acc (%)</a:t>
                       </a:r>
                     </a:p>
                   </a:txBody>
                   <a:tcPr>
                     <a:solidFill>
-                      <a:srgbClr val="F0F0F0"/>
-                    </a:solidFill>
-                  </a:tcPr>
-                </a:tc>
-                <a:tc>
-                  <a:txBody>
-                    <a:bodyPr/>
-                    <a:lstStyle/>
-                    <a:p>
-                      <a:pPr algn="ctr">
-                        <a:defRPr sz="1200" b="1">
-                          <a:solidFill>
-                            <a:srgbClr val="000000"/>
-                          </a:solidFill>
-                        </a:defRPr>
-                      </a:pPr>
-                      <a:r>
+                      <a:srgbClr val="3C3C3C"/>
+                    </a:solidFill>
+                  </a:tcPr>
+                </a:tc>
+                <a:tc>
+                  <a:txBody>
+                    <a:bodyPr/>
+                    <a:lstStyle/>
+                    <a:p>
+                      <a:pPr algn="ctr"/>
+                      <a:r>
+                        <a:rPr sz="1000" b="1">
+                          <a:solidFill>
+                            <a:srgbClr val="FFFFFF"/>
+                          </a:solidFill>
+                        </a:rPr>
                         <a:t>Test Acc (%)</a:t>
                       </a:r>
                     </a:p>
                   </a:txBody>
                   <a:tcPr>
                     <a:solidFill>
-                      <a:srgbClr val="F0F0F0"/>
-                    </a:solidFill>
-                  </a:tcPr>
-                </a:tc>
-                <a:tc>
-                  <a:txBody>
-                    <a:bodyPr/>
-                    <a:lstStyle/>
-                    <a:p>
-                      <a:pPr algn="ctr">
-                        <a:defRPr sz="1200" b="1">
-                          <a:solidFill>
-                            <a:srgbClr val="000000"/>
-                          </a:solidFill>
-                        </a:defRPr>
-                      </a:pPr>
-                      <a:r>
-                        <a:t>Test κ</a:t>
-                      </a:r>
-                    </a:p>
-                  </a:txBody>
-                  <a:tcPr>
-                    <a:solidFill>
-                      <a:srgbClr val="F0F0F0"/>
+                      <a:srgbClr val="3C3C3C"/>
+                    </a:solidFill>
+                  </a:tcPr>
+                </a:tc>
+                <a:tc>
+                  <a:txBody>
+                    <a:bodyPr/>
+                    <a:lstStyle/>
+                    <a:p>
+                      <a:pPr algn="ctr"/>
+                      <a:r>
+                        <a:rPr sz="1000" b="1">
+                          <a:solidFill>
+                            <a:srgbClr val="FFFFFF"/>
+                          </a:solidFill>
+                        </a:rPr>
+                        <a:t>Test Kappa</a:t>
+                      </a:r>
+                    </a:p>
+                  </a:txBody>
+                  <a:tcPr>
+                    <a:solidFill>
+                      <a:srgbClr val="3C3C3C"/>
                     </a:solidFill>
                   </a:tcPr>
                 </a:tc>
               </a:tr>
-              <a:tr h="365760">
-                <a:tc>
-                  <a:txBody>
-                    <a:bodyPr/>
-                    <a:lstStyle/>
-                    <a:p>
-                      <a:pPr>
-                        <a:defRPr sz="1100">
-                          <a:solidFill>
-                            <a:srgbClr val="000000"/>
-                          </a:solidFill>
-                        </a:defRPr>
-                      </a:pPr>
-                      <a:r>
+              <a:tr h="502920">
+                <a:tc>
+                  <a:txBody>
+                    <a:bodyPr/>
+                    <a:lstStyle/>
+                    <a:p>
+                      <a:pPr algn="l"/>
+                      <a:r>
+                        <a:rPr sz="1000" b="0">
+                          <a:solidFill>
+                            <a:srgbClr val="000000"/>
+                          </a:solidFill>
+                        </a:rPr>
                         <a:t>BCICIV2A</a:t>
                       </a:r>
                     </a:p>
@@ -5722,14 +7286,13 @@
                     <a:bodyPr/>
                     <a:lstStyle/>
                     <a:p>
-                      <a:pPr algn="ctr">
-                        <a:defRPr sz="1100">
-                          <a:solidFill>
-                            <a:srgbClr val="000000"/>
-                          </a:solidFill>
-                        </a:defRPr>
-                      </a:pPr>
-                      <a:r>
+                      <a:pPr algn="ctr"/>
+                      <a:r>
+                        <a:rPr sz="1000" b="0">
+                          <a:solidFill>
+                            <a:srgbClr val="000000"/>
+                          </a:solidFill>
+                        </a:rPr>
                         <a:t>4</a:t>
                       </a:r>
                     </a:p>
@@ -5745,14 +7308,13 @@
                     <a:bodyPr/>
                     <a:lstStyle/>
                     <a:p>
-                      <a:pPr algn="ctr">
-                        <a:defRPr sz="1100">
-                          <a:solidFill>
-                            <a:srgbClr val="000000"/>
-                          </a:solidFill>
-                        </a:defRPr>
-                      </a:pPr>
-                      <a:r>
+                      <a:pPr algn="ctr"/>
+                      <a:r>
+                        <a:rPr sz="1000" b="0">
+                          <a:solidFill>
+                            <a:srgbClr val="000000"/>
+                          </a:solidFill>
+                        </a:rPr>
                         <a:t>79.17</a:t>
                       </a:r>
                     </a:p>
@@ -5768,14 +7330,13 @@
                     <a:bodyPr/>
                     <a:lstStyle/>
                     <a:p>
-                      <a:pPr>
-                        <a:defRPr sz="1100">
-                          <a:solidFill>
-                            <a:srgbClr val="000000"/>
-                          </a:solidFill>
-                        </a:defRPr>
-                      </a:pPr>
-                      <a:r>
+                      <a:pPr algn="ctr"/>
+                      <a:r>
+                        <a:rPr sz="1000" b="0">
+                          <a:solidFill>
+                            <a:srgbClr val="000000"/>
+                          </a:solidFill>
+                        </a:rPr>
                         <a:t>--</a:t>
                       </a:r>
                     </a:p>
@@ -5791,14 +7352,13 @@
                     <a:bodyPr/>
                     <a:lstStyle/>
                     <a:p>
-                      <a:pPr>
-                        <a:defRPr sz="1100">
-                          <a:solidFill>
-                            <a:srgbClr val="000000"/>
-                          </a:solidFill>
-                        </a:defRPr>
-                      </a:pPr>
-                      <a:r>
+                      <a:pPr algn="ctr"/>
+                      <a:r>
+                        <a:rPr sz="1000" b="0">
+                          <a:solidFill>
+                            <a:srgbClr val="000000"/>
+                          </a:solidFill>
+                        </a:rPr>
                         <a:t>--</a:t>
                       </a:r>
                     </a:p>
@@ -5810,20 +7370,19 @@
                   </a:tcPr>
                 </a:tc>
               </a:tr>
-              <a:tr h="365760">
-                <a:tc>
-                  <a:txBody>
-                    <a:bodyPr/>
-                    <a:lstStyle/>
-                    <a:p>
-                      <a:pPr>
-                        <a:defRPr sz="1100">
-                          <a:solidFill>
-                            <a:srgbClr val="000000"/>
-                          </a:solidFill>
-                        </a:defRPr>
-                      </a:pPr>
-                      <a:r>
+              <a:tr h="502920">
+                <a:tc>
+                  <a:txBody>
+                    <a:bodyPr/>
+                    <a:lstStyle/>
+                    <a:p>
+                      <a:pPr algn="l"/>
+                      <a:r>
+                        <a:rPr sz="1000" b="0">
+                          <a:solidFill>
+                            <a:srgbClr val="000000"/>
+                          </a:solidFill>
+                        </a:rPr>
                         <a:t>BCICIV2B</a:t>
                       </a:r>
                     </a:p>
@@ -5839,14 +7398,13 @@
                     <a:bodyPr/>
                     <a:lstStyle/>
                     <a:p>
-                      <a:pPr algn="ctr">
-                        <a:defRPr sz="1100">
-                          <a:solidFill>
-                            <a:srgbClr val="000000"/>
-                          </a:solidFill>
-                        </a:defRPr>
-                      </a:pPr>
-                      <a:r>
+                      <a:pPr algn="ctr"/>
+                      <a:r>
+                        <a:rPr sz="1000" b="0">
+                          <a:solidFill>
+                            <a:srgbClr val="000000"/>
+                          </a:solidFill>
+                        </a:rPr>
                         <a:t>2</a:t>
                       </a:r>
                     </a:p>
@@ -5862,14 +7420,13 @@
                     <a:bodyPr/>
                     <a:lstStyle/>
                     <a:p>
-                      <a:pPr algn="ctr">
-                        <a:defRPr sz="1100">
-                          <a:solidFill>
-                            <a:srgbClr val="000000"/>
-                          </a:solidFill>
-                        </a:defRPr>
-                      </a:pPr>
-                      <a:r>
+                      <a:pPr algn="ctr"/>
+                      <a:r>
+                        <a:rPr sz="1000" b="0">
+                          <a:solidFill>
+                            <a:srgbClr val="000000"/>
+                          </a:solidFill>
+                        </a:rPr>
                         <a:t>77.72</a:t>
                       </a:r>
                     </a:p>
@@ -5885,14 +7442,13 @@
                     <a:bodyPr/>
                     <a:lstStyle/>
                     <a:p>
-                      <a:pPr algn="ctr">
-                        <a:defRPr sz="1100">
-                          <a:solidFill>
-                            <a:srgbClr val="000000"/>
-                          </a:solidFill>
-                        </a:defRPr>
-                      </a:pPr>
-                      <a:r>
+                      <a:pPr algn="ctr"/>
+                      <a:r>
+                        <a:rPr sz="1000" b="0">
+                          <a:solidFill>
+                            <a:srgbClr val="000000"/>
+                          </a:solidFill>
+                        </a:rPr>
                         <a:t>78.35</a:t>
                       </a:r>
                     </a:p>
@@ -5908,14 +7464,13 @@
                     <a:bodyPr/>
                     <a:lstStyle/>
                     <a:p>
-                      <a:pPr algn="ctr">
-                        <a:defRPr sz="1100">
-                          <a:solidFill>
-                            <a:srgbClr val="000000"/>
-                          </a:solidFill>
-                        </a:defRPr>
-                      </a:pPr>
-                      <a:r>
+                      <a:pPr algn="ctr"/>
+                      <a:r>
+                        <a:rPr sz="1000" b="0">
+                          <a:solidFill>
+                            <a:srgbClr val="000000"/>
+                          </a:solidFill>
+                        </a:rPr>
                         <a:t>0.5669</a:t>
                       </a:r>
                     </a:p>
@@ -5927,20 +7482,19 @@
                   </a:tcPr>
                 </a:tc>
               </a:tr>
-              <a:tr h="365760">
-                <a:tc>
-                  <a:txBody>
-                    <a:bodyPr/>
-                    <a:lstStyle/>
-                    <a:p>
-                      <a:pPr>
-                        <a:defRPr sz="1100">
-                          <a:solidFill>
-                            <a:srgbClr val="000000"/>
-                          </a:solidFill>
-                        </a:defRPr>
-                      </a:pPr>
-                      <a:r>
+              <a:tr h="502920">
+                <a:tc>
+                  <a:txBody>
+                    <a:bodyPr/>
+                    <a:lstStyle/>
+                    <a:p>
+                      <a:pPr algn="l"/>
+                      <a:r>
+                        <a:rPr sz="1000" b="0">
+                          <a:solidFill>
+                            <a:srgbClr val="000000"/>
+                          </a:solidFill>
+                        </a:rPr>
                         <a:t>IIIa</a:t>
                       </a:r>
                     </a:p>
@@ -5956,14 +7510,13 @@
                     <a:bodyPr/>
                     <a:lstStyle/>
                     <a:p>
-                      <a:pPr algn="ctr">
-                        <a:defRPr sz="1100">
-                          <a:solidFill>
-                            <a:srgbClr val="000000"/>
-                          </a:solidFill>
-                        </a:defRPr>
-                      </a:pPr>
-                      <a:r>
+                      <a:pPr algn="ctr"/>
+                      <a:r>
+                        <a:rPr sz="1000" b="0">
+                          <a:solidFill>
+                            <a:srgbClr val="000000"/>
+                          </a:solidFill>
+                        </a:rPr>
                         <a:t>4</a:t>
                       </a:r>
                     </a:p>
@@ -5979,14 +7532,13 @@
                     <a:bodyPr/>
                     <a:lstStyle/>
                     <a:p>
-                      <a:pPr algn="ctr">
-                        <a:defRPr sz="1100">
-                          <a:solidFill>
-                            <a:srgbClr val="000000"/>
-                          </a:solidFill>
-                        </a:defRPr>
-                      </a:pPr>
-                      <a:r>
+                      <a:pPr algn="ctr"/>
+                      <a:r>
+                        <a:rPr sz="1000" b="0">
+                          <a:solidFill>
+                            <a:srgbClr val="000000"/>
+                          </a:solidFill>
+                        </a:rPr>
                         <a:t>55.95</a:t>
                       </a:r>
                     </a:p>
@@ -6002,14 +7554,13 @@
                     <a:bodyPr/>
                     <a:lstStyle/>
                     <a:p>
-                      <a:pPr>
-                        <a:defRPr sz="1100">
-                          <a:solidFill>
-                            <a:srgbClr val="000000"/>
-                          </a:solidFill>
-                        </a:defRPr>
-                      </a:pPr>
-                      <a:r>
+                      <a:pPr algn="ctr"/>
+                      <a:r>
+                        <a:rPr sz="1000" b="0">
+                          <a:solidFill>
+                            <a:srgbClr val="000000"/>
+                          </a:solidFill>
+                        </a:rPr>
                         <a:t>--</a:t>
                       </a:r>
                     </a:p>
@@ -6025,14 +7576,13 @@
                     <a:bodyPr/>
                     <a:lstStyle/>
                     <a:p>
-                      <a:pPr>
-                        <a:defRPr sz="1100">
-                          <a:solidFill>
-                            <a:srgbClr val="000000"/>
-                          </a:solidFill>
-                        </a:defRPr>
-                      </a:pPr>
-                      <a:r>
+                      <a:pPr algn="ctr"/>
+                      <a:r>
+                        <a:rPr sz="1000" b="0">
+                          <a:solidFill>
+                            <a:srgbClr val="000000"/>
+                          </a:solidFill>
+                        </a:rPr>
                         <a:t>--</a:t>
                       </a:r>
                     </a:p>
@@ -6044,20 +7594,19 @@
                   </a:tcPr>
                 </a:tc>
               </a:tr>
-              <a:tr h="365760">
-                <a:tc>
-                  <a:txBody>
-                    <a:bodyPr/>
-                    <a:lstStyle/>
-                    <a:p>
-                      <a:pPr>
-                        <a:defRPr sz="1100">
-                          <a:solidFill>
-                            <a:srgbClr val="000000"/>
-                          </a:solidFill>
-                        </a:defRPr>
-                      </a:pPr>
-                      <a:r>
+              <a:tr h="502920">
+                <a:tc>
+                  <a:txBody>
+                    <a:bodyPr/>
+                    <a:lstStyle/>
+                    <a:p>
+                      <a:pPr algn="l"/>
+                      <a:r>
+                        <a:rPr sz="1000" b="0">
+                          <a:solidFill>
+                            <a:srgbClr val="000000"/>
+                          </a:solidFill>
+                        </a:rPr>
                         <a:t>Physionet MI (22ch)</a:t>
                       </a:r>
                     </a:p>
@@ -6073,14 +7622,13 @@
                     <a:bodyPr/>
                     <a:lstStyle/>
                     <a:p>
-                      <a:pPr algn="ctr">
-                        <a:defRPr sz="1100">
-                          <a:solidFill>
-                            <a:srgbClr val="000000"/>
-                          </a:solidFill>
-                        </a:defRPr>
-                      </a:pPr>
-                      <a:r>
+                      <a:pPr algn="ctr"/>
+                      <a:r>
+                        <a:rPr sz="1000" b="0">
+                          <a:solidFill>
+                            <a:srgbClr val="000000"/>
+                          </a:solidFill>
+                        </a:rPr>
                         <a:t>4</a:t>
                       </a:r>
                     </a:p>
@@ -6096,14 +7644,13 @@
                     <a:bodyPr/>
                     <a:lstStyle/>
                     <a:p>
-                      <a:pPr algn="ctr">
-                        <a:defRPr sz="1100">
-                          <a:solidFill>
-                            <a:srgbClr val="000000"/>
-                          </a:solidFill>
-                        </a:defRPr>
-                      </a:pPr>
-                      <a:r>
+                      <a:pPr algn="ctr"/>
+                      <a:r>
+                        <a:rPr sz="1000" b="0">
+                          <a:solidFill>
+                            <a:srgbClr val="000000"/>
+                          </a:solidFill>
+                        </a:rPr>
                         <a:t>49.30</a:t>
                       </a:r>
                     </a:p>
@@ -6119,14 +7666,13 @@
                     <a:bodyPr/>
                     <a:lstStyle/>
                     <a:p>
-                      <a:pPr>
-                        <a:defRPr sz="1100">
-                          <a:solidFill>
-                            <a:srgbClr val="000000"/>
-                          </a:solidFill>
-                        </a:defRPr>
-                      </a:pPr>
-                      <a:r>
+                      <a:pPr algn="ctr"/>
+                      <a:r>
+                        <a:rPr sz="1000" b="0">
+                          <a:solidFill>
+                            <a:srgbClr val="000000"/>
+                          </a:solidFill>
+                        </a:rPr>
                         <a:t>--</a:t>
                       </a:r>
                     </a:p>
@@ -6142,14 +7688,13 @@
                     <a:bodyPr/>
                     <a:lstStyle/>
                     <a:p>
-                      <a:pPr>
-                        <a:defRPr sz="1100">
-                          <a:solidFill>
-                            <a:srgbClr val="000000"/>
-                          </a:solidFill>
-                        </a:defRPr>
-                      </a:pPr>
-                      <a:r>
+                      <a:pPr algn="ctr"/>
+                      <a:r>
+                        <a:rPr sz="1000" b="0">
+                          <a:solidFill>
+                            <a:srgbClr val="000000"/>
+                          </a:solidFill>
+                        </a:rPr>
                         <a:t>--</a:t>
                       </a:r>
                     </a:p>
@@ -6165,6 +7710,674 @@
           </a:graphicData>
         </a:graphic>
       </p:graphicFrame>
+      <p:sp>
+        <p:nvSpPr>
+          <p:cNvPr id="4" name="Rectangle 3"/>
+          <p:cNvSpPr/>
+          <p:nvPr/>
+        </p:nvSpPr>
+        <p:spPr>
+          <a:xfrm>
+            <a:off x="13716000" y="731520"/>
+            <a:ext cx="5029200" cy="5394960"/>
+          </a:xfrm>
+          <a:prstGeom prst="rect">
+            <a:avLst/>
+          </a:prstGeom>
+          <a:solidFill>
+            <a:srgbClr val="F0F0F0"/>
+          </a:solidFill>
+          <a:ln w="12700">
+            <a:solidFill>
+              <a:srgbClr val="C8C8C8"/>
+            </a:solidFill>
+          </a:ln>
+        </p:spPr>
+        <p:style>
+          <a:lnRef idx="1">
+            <a:schemeClr val="accent1"/>
+          </a:lnRef>
+          <a:fillRef idx="3">
+            <a:schemeClr val="accent1"/>
+          </a:fillRef>
+          <a:effectRef idx="2">
+            <a:schemeClr val="accent1"/>
+          </a:effectRef>
+          <a:fontRef idx="minor">
+            <a:schemeClr val="lt1"/>
+          </a:fontRef>
+        </p:style>
+        <p:txBody>
+          <a:bodyPr rtlCol="0" anchor="ctr"/>
+          <a:lstStyle/>
+          <a:p>
+            <a:pPr algn="ctr"/>
+          </a:p>
+        </p:txBody>
+      </p:sp>
+      <p:sp>
+        <p:nvSpPr>
+          <p:cNvPr id="5" name="TextBox 4"/>
+          <p:cNvSpPr txBox="1"/>
+          <p:nvPr/>
+        </p:nvSpPr>
+        <p:spPr>
+          <a:xfrm>
+            <a:off x="13990320" y="868680"/>
+            <a:ext cx="4480560" cy="411480"/>
+          </a:xfrm>
+          <a:prstGeom prst="rect">
+            <a:avLst/>
+          </a:prstGeom>
+          <a:noFill/>
+        </p:spPr>
+        <p:txBody>
+          <a:bodyPr wrap="square">
+            <a:spAutoFit/>
+          </a:bodyPr>
+          <a:lstStyle/>
+          <a:p>
+            <a:pPr algn="ctr"/>
+            <a:r>
+              <a:rPr sz="1800" b="1">
+                <a:solidFill>
+                  <a:srgbClr val="000000"/>
+                </a:solidFill>
+              </a:rPr>
+              <a:t>Summary</a:t>
+            </a:r>
+          </a:p>
+        </p:txBody>
+      </p:sp>
+      <p:sp>
+        <p:nvSpPr>
+          <p:cNvPr id="6" name="Oval 5"/>
+          <p:cNvSpPr/>
+          <p:nvPr/>
+        </p:nvSpPr>
+        <p:spPr>
+          <a:xfrm>
+            <a:off x="14081760" y="1426464"/>
+            <a:ext cx="256032" cy="256032"/>
+          </a:xfrm>
+          <a:prstGeom prst="ellipse">
+            <a:avLst/>
+          </a:prstGeom>
+          <a:solidFill>
+            <a:srgbClr val="27AE60"/>
+          </a:solidFill>
+          <a:ln>
+            <a:noFill/>
+          </a:ln>
+        </p:spPr>
+        <p:style>
+          <a:lnRef idx="1">
+            <a:schemeClr val="accent1"/>
+          </a:lnRef>
+          <a:fillRef idx="3">
+            <a:schemeClr val="accent1"/>
+          </a:fillRef>
+          <a:effectRef idx="2">
+            <a:schemeClr val="accent1"/>
+          </a:effectRef>
+          <a:fontRef idx="minor">
+            <a:schemeClr val="lt1"/>
+          </a:fontRef>
+        </p:style>
+        <p:txBody>
+          <a:bodyPr rtlCol="0" anchor="ctr"/>
+          <a:lstStyle/>
+          <a:p>
+            <a:pPr algn="ctr"/>
+          </a:p>
+        </p:txBody>
+      </p:sp>
+      <p:sp>
+        <p:nvSpPr>
+          <p:cNvPr id="7" name="TextBox 6"/>
+          <p:cNvSpPr txBox="1"/>
+          <p:nvPr/>
+        </p:nvSpPr>
+        <p:spPr>
+          <a:xfrm>
+            <a:off x="14493240" y="1371600"/>
+            <a:ext cx="1645920" cy="365760"/>
+          </a:xfrm>
+          <a:prstGeom prst="rect">
+            <a:avLst/>
+          </a:prstGeom>
+          <a:noFill/>
+        </p:spPr>
+        <p:txBody>
+          <a:bodyPr wrap="square">
+            <a:spAutoFit/>
+          </a:bodyPr>
+          <a:lstStyle/>
+          <a:p>
+            <a:pPr algn="l"/>
+            <a:r>
+              <a:rPr sz="1300" b="1">
+                <a:solidFill>
+                  <a:srgbClr val="000000"/>
+                </a:solidFill>
+              </a:rPr>
+              <a:t>BCICIV2A</a:t>
+            </a:r>
+          </a:p>
+        </p:txBody>
+      </p:sp>
+      <p:sp>
+        <p:nvSpPr>
+          <p:cNvPr id="8" name="TextBox 7"/>
+          <p:cNvSpPr txBox="1"/>
+          <p:nvPr/>
+        </p:nvSpPr>
+        <p:spPr>
+          <a:xfrm>
+            <a:off x="16184880" y="1371600"/>
+            <a:ext cx="2286000" cy="365760"/>
+          </a:xfrm>
+          <a:prstGeom prst="rect">
+            <a:avLst/>
+          </a:prstGeom>
+          <a:noFill/>
+        </p:spPr>
+        <p:txBody>
+          <a:bodyPr wrap="square">
+            <a:spAutoFit/>
+          </a:bodyPr>
+          <a:lstStyle/>
+          <a:p>
+            <a:pPr algn="l"/>
+            <a:r>
+              <a:rPr sz="1100" b="0">
+                <a:solidFill>
+                  <a:srgbClr val="27AE60"/>
+                </a:solidFill>
+              </a:rPr>
+              <a:t>Primary - val 79.17%</a:t>
+            </a:r>
+          </a:p>
+        </p:txBody>
+      </p:sp>
+      <p:sp>
+        <p:nvSpPr>
+          <p:cNvPr id="9" name="Oval 8"/>
+          <p:cNvSpPr/>
+          <p:nvPr/>
+        </p:nvSpPr>
+        <p:spPr>
+          <a:xfrm>
+            <a:off x="14081760" y="1883664"/>
+            <a:ext cx="256032" cy="256032"/>
+          </a:xfrm>
+          <a:prstGeom prst="ellipse">
+            <a:avLst/>
+          </a:prstGeom>
+          <a:solidFill>
+            <a:srgbClr val="27AE60"/>
+          </a:solidFill>
+          <a:ln>
+            <a:noFill/>
+          </a:ln>
+        </p:spPr>
+        <p:style>
+          <a:lnRef idx="1">
+            <a:schemeClr val="accent1"/>
+          </a:lnRef>
+          <a:fillRef idx="3">
+            <a:schemeClr val="accent1"/>
+          </a:fillRef>
+          <a:effectRef idx="2">
+            <a:schemeClr val="accent1"/>
+          </a:effectRef>
+          <a:fontRef idx="minor">
+            <a:schemeClr val="lt1"/>
+          </a:fontRef>
+        </p:style>
+        <p:txBody>
+          <a:bodyPr rtlCol="0" anchor="ctr"/>
+          <a:lstStyle/>
+          <a:p>
+            <a:pPr algn="ctr"/>
+          </a:p>
+        </p:txBody>
+      </p:sp>
+      <p:sp>
+        <p:nvSpPr>
+          <p:cNvPr id="10" name="TextBox 9"/>
+          <p:cNvSpPr txBox="1"/>
+          <p:nvPr/>
+        </p:nvSpPr>
+        <p:spPr>
+          <a:xfrm>
+            <a:off x="14493240" y="1828800"/>
+            <a:ext cx="1645920" cy="365760"/>
+          </a:xfrm>
+          <a:prstGeom prst="rect">
+            <a:avLst/>
+          </a:prstGeom>
+          <a:noFill/>
+        </p:spPr>
+        <p:txBody>
+          <a:bodyPr wrap="square">
+            <a:spAutoFit/>
+          </a:bodyPr>
+          <a:lstStyle/>
+          <a:p>
+            <a:pPr algn="l"/>
+            <a:r>
+              <a:rPr sz="1300" b="1">
+                <a:solidFill>
+                  <a:srgbClr val="000000"/>
+                </a:solidFill>
+              </a:rPr>
+              <a:t>BCICIV2B</a:t>
+            </a:r>
+          </a:p>
+        </p:txBody>
+      </p:sp>
+      <p:sp>
+        <p:nvSpPr>
+          <p:cNvPr id="11" name="TextBox 10"/>
+          <p:cNvSpPr txBox="1"/>
+          <p:nvPr/>
+        </p:nvSpPr>
+        <p:spPr>
+          <a:xfrm>
+            <a:off x="16184880" y="1828800"/>
+            <a:ext cx="2286000" cy="365760"/>
+          </a:xfrm>
+          <a:prstGeom prst="rect">
+            <a:avLst/>
+          </a:prstGeom>
+          <a:noFill/>
+        </p:spPr>
+        <p:txBody>
+          <a:bodyPr wrap="square">
+            <a:spAutoFit/>
+          </a:bodyPr>
+          <a:lstStyle/>
+          <a:p>
+            <a:pPr algn="l"/>
+            <a:r>
+              <a:rPr sz="1100" b="0">
+                <a:solidFill>
+                  <a:srgbClr val="27AE60"/>
+                </a:solidFill>
+              </a:rPr>
+              <a:t>Primary - test 78.35%, k=0.57</a:t>
+            </a:r>
+          </a:p>
+        </p:txBody>
+      </p:sp>
+      <p:sp>
+        <p:nvSpPr>
+          <p:cNvPr id="12" name="Oval 11"/>
+          <p:cNvSpPr/>
+          <p:nvPr/>
+        </p:nvSpPr>
+        <p:spPr>
+          <a:xfrm>
+            <a:off x="14081760" y="2340864"/>
+            <a:ext cx="256032" cy="256032"/>
+          </a:xfrm>
+          <a:prstGeom prst="ellipse">
+            <a:avLst/>
+          </a:prstGeom>
+          <a:solidFill>
+            <a:srgbClr val="F1C40F"/>
+          </a:solidFill>
+          <a:ln>
+            <a:noFill/>
+          </a:ln>
+        </p:spPr>
+        <p:style>
+          <a:lnRef idx="1">
+            <a:schemeClr val="accent1"/>
+          </a:lnRef>
+          <a:fillRef idx="3">
+            <a:schemeClr val="accent1"/>
+          </a:fillRef>
+          <a:effectRef idx="2">
+            <a:schemeClr val="accent1"/>
+          </a:effectRef>
+          <a:fontRef idx="minor">
+            <a:schemeClr val="lt1"/>
+          </a:fontRef>
+        </p:style>
+        <p:txBody>
+          <a:bodyPr rtlCol="0" anchor="ctr"/>
+          <a:lstStyle/>
+          <a:p>
+            <a:pPr algn="ctr"/>
+          </a:p>
+        </p:txBody>
+      </p:sp>
+      <p:sp>
+        <p:nvSpPr>
+          <p:cNvPr id="13" name="TextBox 12"/>
+          <p:cNvSpPr txBox="1"/>
+          <p:nvPr/>
+        </p:nvSpPr>
+        <p:spPr>
+          <a:xfrm>
+            <a:off x="14493240" y="2286000"/>
+            <a:ext cx="1645920" cy="365760"/>
+          </a:xfrm>
+          <a:prstGeom prst="rect">
+            <a:avLst/>
+          </a:prstGeom>
+          <a:noFill/>
+        </p:spPr>
+        <p:txBody>
+          <a:bodyPr wrap="square">
+            <a:spAutoFit/>
+          </a:bodyPr>
+          <a:lstStyle/>
+          <a:p>
+            <a:pPr algn="l"/>
+            <a:r>
+              <a:rPr sz="1300" b="1">
+                <a:solidFill>
+                  <a:srgbClr val="000000"/>
+                </a:solidFill>
+              </a:rPr>
+              <a:t>IIIa</a:t>
+            </a:r>
+          </a:p>
+        </p:txBody>
+      </p:sp>
+      <p:sp>
+        <p:nvSpPr>
+          <p:cNvPr id="14" name="TextBox 13"/>
+          <p:cNvSpPr txBox="1"/>
+          <p:nvPr/>
+        </p:nvSpPr>
+        <p:spPr>
+          <a:xfrm>
+            <a:off x="16184880" y="2286000"/>
+            <a:ext cx="2286000" cy="365760"/>
+          </a:xfrm>
+          <a:prstGeom prst="rect">
+            <a:avLst/>
+          </a:prstGeom>
+          <a:noFill/>
+        </p:spPr>
+        <p:txBody>
+          <a:bodyPr wrap="square">
+            <a:spAutoFit/>
+          </a:bodyPr>
+          <a:lstStyle/>
+          <a:p>
+            <a:pPr algn="l"/>
+            <a:r>
+              <a:rPr sz="1100" b="0">
+                <a:solidFill>
+                  <a:srgbClr val="F1C40F"/>
+                </a:solidFill>
+              </a:rPr>
+              <a:t>Quick baseline - val 55.95%</a:t>
+            </a:r>
+          </a:p>
+        </p:txBody>
+      </p:sp>
+      <p:sp>
+        <p:nvSpPr>
+          <p:cNvPr id="15" name="Oval 14"/>
+          <p:cNvSpPr/>
+          <p:nvPr/>
+        </p:nvSpPr>
+        <p:spPr>
+          <a:xfrm>
+            <a:off x="14081760" y="2798064"/>
+            <a:ext cx="256032" cy="256032"/>
+          </a:xfrm>
+          <a:prstGeom prst="ellipse">
+            <a:avLst/>
+          </a:prstGeom>
+          <a:solidFill>
+            <a:srgbClr val="F1C40F"/>
+          </a:solidFill>
+          <a:ln>
+            <a:noFill/>
+          </a:ln>
+        </p:spPr>
+        <p:style>
+          <a:lnRef idx="1">
+            <a:schemeClr val="accent1"/>
+          </a:lnRef>
+          <a:fillRef idx="3">
+            <a:schemeClr val="accent1"/>
+          </a:fillRef>
+          <a:effectRef idx="2">
+            <a:schemeClr val="accent1"/>
+          </a:effectRef>
+          <a:fontRef idx="minor">
+            <a:schemeClr val="lt1"/>
+          </a:fontRef>
+        </p:style>
+        <p:txBody>
+          <a:bodyPr rtlCol="0" anchor="ctr"/>
+          <a:lstStyle/>
+          <a:p>
+            <a:pPr algn="ctr"/>
+          </a:p>
+        </p:txBody>
+      </p:sp>
+      <p:sp>
+        <p:nvSpPr>
+          <p:cNvPr id="16" name="TextBox 15"/>
+          <p:cNvSpPr txBox="1"/>
+          <p:nvPr/>
+        </p:nvSpPr>
+        <p:spPr>
+          <a:xfrm>
+            <a:off x="14493240" y="2743200"/>
+            <a:ext cx="1645920" cy="365760"/>
+          </a:xfrm>
+          <a:prstGeom prst="rect">
+            <a:avLst/>
+          </a:prstGeom>
+          <a:noFill/>
+        </p:spPr>
+        <p:txBody>
+          <a:bodyPr wrap="square">
+            <a:spAutoFit/>
+          </a:bodyPr>
+          <a:lstStyle/>
+          <a:p>
+            <a:pPr algn="l"/>
+            <a:r>
+              <a:rPr sz="1300" b="1">
+                <a:solidFill>
+                  <a:srgbClr val="000000"/>
+                </a:solidFill>
+              </a:rPr>
+              <a:t>Physionet MI</a:t>
+            </a:r>
+          </a:p>
+        </p:txBody>
+      </p:sp>
+      <p:sp>
+        <p:nvSpPr>
+          <p:cNvPr id="17" name="TextBox 16"/>
+          <p:cNvSpPr txBox="1"/>
+          <p:nvPr/>
+        </p:nvSpPr>
+        <p:spPr>
+          <a:xfrm>
+            <a:off x="16184880" y="2743200"/>
+            <a:ext cx="2286000" cy="365760"/>
+          </a:xfrm>
+          <a:prstGeom prst="rect">
+            <a:avLst/>
+          </a:prstGeom>
+          <a:noFill/>
+        </p:spPr>
+        <p:txBody>
+          <a:bodyPr wrap="square">
+            <a:spAutoFit/>
+          </a:bodyPr>
+          <a:lstStyle/>
+          <a:p>
+            <a:pPr algn="l"/>
+            <a:r>
+              <a:rPr sz="1100" b="0">
+                <a:solidFill>
+                  <a:srgbClr val="F1C40F"/>
+                </a:solidFill>
+              </a:rPr>
+              <a:t>Quick baseline - val 49.30%</a:t>
+            </a:r>
+          </a:p>
+        </p:txBody>
+      </p:sp>
+      <p:sp>
+        <p:nvSpPr>
+          <p:cNvPr id="18" name="Rectangle 17"/>
+          <p:cNvSpPr/>
+          <p:nvPr/>
+        </p:nvSpPr>
+        <p:spPr>
+          <a:xfrm>
+            <a:off x="14081760" y="3337560"/>
+            <a:ext cx="4297680" cy="13716"/>
+          </a:xfrm>
+          <a:prstGeom prst="rect">
+            <a:avLst/>
+          </a:prstGeom>
+          <a:solidFill>
+            <a:srgbClr val="C8C8C8"/>
+          </a:solidFill>
+          <a:ln>
+            <a:noFill/>
+          </a:ln>
+        </p:spPr>
+        <p:style>
+          <a:lnRef idx="1">
+            <a:schemeClr val="accent1"/>
+          </a:lnRef>
+          <a:fillRef idx="3">
+            <a:schemeClr val="accent1"/>
+          </a:fillRef>
+          <a:effectRef idx="2">
+            <a:schemeClr val="accent1"/>
+          </a:effectRef>
+          <a:fontRef idx="minor">
+            <a:schemeClr val="lt1"/>
+          </a:fontRef>
+        </p:style>
+        <p:txBody>
+          <a:bodyPr rtlCol="0" anchor="ctr"/>
+          <a:lstStyle/>
+          <a:p>
+            <a:pPr algn="ctr"/>
+          </a:p>
+        </p:txBody>
+      </p:sp>
+      <p:sp>
+        <p:nvSpPr>
+          <p:cNvPr id="19" name="TextBox 18"/>
+          <p:cNvSpPr txBox="1"/>
+          <p:nvPr/>
+        </p:nvSpPr>
+        <p:spPr>
+          <a:xfrm>
+            <a:off x="14173200" y="3611879"/>
+            <a:ext cx="4114800" cy="365760"/>
+          </a:xfrm>
+          <a:prstGeom prst="rect">
+            <a:avLst/>
+          </a:prstGeom>
+          <a:noFill/>
+        </p:spPr>
+        <p:txBody>
+          <a:bodyPr wrap="square">
+            <a:spAutoFit/>
+          </a:bodyPr>
+          <a:lstStyle/>
+          <a:p>
+            <a:pPr algn="l"/>
+            <a:r>
+              <a:rPr sz="1400" b="1">
+                <a:solidFill>
+                  <a:srgbClr val="27AE60"/>
+                </a:solidFill>
+              </a:rPr>
+              <a:t>Primary (300 ep): 2 datasets available</a:t>
+            </a:r>
+          </a:p>
+        </p:txBody>
+      </p:sp>
+      <p:sp>
+        <p:nvSpPr>
+          <p:cNvPr id="20" name="TextBox 19"/>
+          <p:cNvSpPr txBox="1"/>
+          <p:nvPr/>
+        </p:nvSpPr>
+        <p:spPr>
+          <a:xfrm>
+            <a:off x="14173200" y="4023359"/>
+            <a:ext cx="4114800" cy="365760"/>
+          </a:xfrm>
+          <a:prstGeom prst="rect">
+            <a:avLst/>
+          </a:prstGeom>
+          <a:noFill/>
+        </p:spPr>
+        <p:txBody>
+          <a:bodyPr wrap="square">
+            <a:spAutoFit/>
+          </a:bodyPr>
+          <a:lstStyle/>
+          <a:p>
+            <a:pPr algn="l"/>
+            <a:r>
+              <a:rPr sz="1400" b="1">
+                <a:solidFill>
+                  <a:srgbClr val="F1C40F"/>
+                </a:solidFill>
+              </a:rPr>
+              <a:t>Quick baseline (100 ep): 2 datasets</a:t>
+            </a:r>
+          </a:p>
+        </p:txBody>
+      </p:sp>
+      <p:sp>
+        <p:nvSpPr>
+          <p:cNvPr id="21" name="TextBox 20"/>
+          <p:cNvSpPr txBox="1"/>
+          <p:nvPr/>
+        </p:nvSpPr>
+        <p:spPr>
+          <a:xfrm>
+            <a:off x="13990320" y="4709159"/>
+            <a:ext cx="4480560" cy="457200"/>
+          </a:xfrm>
+          <a:prstGeom prst="rect">
+            <a:avLst/>
+          </a:prstGeom>
+          <a:noFill/>
+        </p:spPr>
+        <p:txBody>
+          <a:bodyPr wrap="square">
+            <a:spAutoFit/>
+          </a:bodyPr>
+          <a:lstStyle/>
+          <a:p>
+            <a:pPr algn="ctr"/>
+            <a:r>
+              <a:rPr sz="1300" b="0">
+                <a:solidFill>
+                  <a:srgbClr val="145A32"/>
+                </a:solidFill>
+              </a:rPr>
+              <a:t>EEGNet serves as the task-specific expert baseline.</a:t>
+            </a:r>
+          </a:p>
+        </p:txBody>
+      </p:sp>
     </p:spTree>
   </p:cSld>
   <p:clrMapOvr>
@@ -6191,8 +8404,8 @@
         </p:nvSpPr>
         <p:spPr>
           <a:xfrm>
-            <a:off x="457200" y="274320"/>
-            <a:ext cx="13716000" cy="548640"/>
+            <a:off x="457200" y="137160"/>
+            <a:ext cx="18288000" cy="411480"/>
           </a:xfrm>
           <a:prstGeom prst="rect">
             <a:avLst/>
@@ -6200,20 +8413,19 @@
           <a:noFill/>
         </p:spPr>
         <p:txBody>
-          <a:bodyPr wrap="none">
+          <a:bodyPr wrap="square">
             <a:spAutoFit/>
           </a:bodyPr>
           <a:lstStyle/>
           <a:p>
-            <a:pPr>
-              <a:defRPr sz="2400" b="1">
+            <a:pPr algn="l"/>
+            <a:r>
+              <a:rPr sz="2000" b="1">
                 <a:solidFill>
                   <a:srgbClr val="000000"/>
                 </a:solidFill>
-              </a:defRPr>
-            </a:pPr>
-            <a:r>
-              <a:t>Table 4: NeuroGate — Linear Probing with Frozen Backbone</a:t>
+              </a:rPr>
+              <a:t>Table 4: NeuroGate - Linear Probing with Frozen Backbone</a:t>
             </a:r>
           </a:p>
         </p:txBody>
@@ -6227,8 +8439,8 @@
           <p:nvPr/>
         </p:nvGraphicFramePr>
         <p:xfrm>
-          <a:off x="457200" y="1005840"/>
-          <a:ext cx="11887200" cy="1828800"/>
+          <a:off x="274320" y="731520"/>
+          <a:ext cx="10515600" cy="2514600"/>
         </p:xfrm>
         <a:graphic>
           <a:graphicData uri="http://schemas.openxmlformats.org/drawingml/2006/table">
@@ -6237,119 +8449,114 @@
                 <a:tableStyleId>{5C22544A-7EE6-4342-B048-85BDC9FD1C3A}</a:tableStyleId>
               </a:tblPr>
               <a:tblGrid>
-                <a:gridCol w="2743200"/>
-                <a:gridCol w="3657600"/>
-                <a:gridCol w="3657600"/>
+                <a:gridCol w="2286000"/>
+                <a:gridCol w="3200400"/>
+                <a:gridCol w="3200400"/>
                 <a:gridCol w="1828800"/>
               </a:tblGrid>
-              <a:tr h="365760">
-                <a:tc>
-                  <a:txBody>
-                    <a:bodyPr/>
-                    <a:lstStyle/>
-                    <a:p>
-                      <a:pPr algn="ctr">
-                        <a:defRPr sz="1200" b="1">
-                          <a:solidFill>
-                            <a:srgbClr val="000000"/>
-                          </a:solidFill>
-                        </a:defRPr>
-                      </a:pPr>
-                      <a:r>
+              <a:tr h="502920">
+                <a:tc>
+                  <a:txBody>
+                    <a:bodyPr/>
+                    <a:lstStyle/>
+                    <a:p>
+                      <a:pPr algn="ctr"/>
+                      <a:r>
+                        <a:rPr sz="1000" b="1">
+                          <a:solidFill>
+                            <a:srgbClr val="FFFFFF"/>
+                          </a:solidFill>
+                        </a:rPr>
                         <a:t>Dataset</a:t>
                       </a:r>
                     </a:p>
                   </a:txBody>
                   <a:tcPr>
                     <a:solidFill>
-                      <a:srgbClr val="F0F0F0"/>
-                    </a:solidFill>
-                  </a:tcPr>
-                </a:tc>
-                <a:tc>
-                  <a:txBody>
-                    <a:bodyPr/>
-                    <a:lstStyle/>
-                    <a:p>
-                      <a:pPr algn="ctr">
-                        <a:defRPr sz="1200" b="1">
-                          <a:solidFill>
-                            <a:srgbClr val="000000"/>
-                          </a:solidFill>
-                        </a:defRPr>
-                      </a:pPr>
-                      <a:r>
+                      <a:srgbClr val="3C3C3C"/>
+                    </a:solidFill>
+                  </a:tcPr>
+                </a:tc>
+                <a:tc>
+                  <a:txBody>
+                    <a:bodyPr/>
+                    <a:lstStyle/>
+                    <a:p>
+                      <a:pPr algn="ctr"/>
+                      <a:r>
+                        <a:rPr sz="1000" b="1">
+                          <a:solidFill>
+                            <a:srgbClr val="FFFFFF"/>
+                          </a:solidFill>
+                        </a:rPr>
                         <a:t>CBraMod LP bAcc</a:t>
                       </a:r>
                     </a:p>
                   </a:txBody>
                   <a:tcPr>
                     <a:solidFill>
-                      <a:srgbClr val="F0F0F0"/>
-                    </a:solidFill>
-                  </a:tcPr>
-                </a:tc>
-                <a:tc>
-                  <a:txBody>
-                    <a:bodyPr/>
-                    <a:lstStyle/>
-                    <a:p>
-                      <a:pPr algn="ctr">
-                        <a:defRPr sz="1200" b="1">
-                          <a:solidFill>
-                            <a:srgbClr val="000000"/>
-                          </a:solidFill>
-                        </a:defRPr>
-                      </a:pPr>
-                      <a:r>
+                      <a:srgbClr val="3C3C3C"/>
+                    </a:solidFill>
+                  </a:tcPr>
+                </a:tc>
+                <a:tc>
+                  <a:txBody>
+                    <a:bodyPr/>
+                    <a:lstStyle/>
+                    <a:p>
+                      <a:pPr algn="ctr"/>
+                      <a:r>
+                        <a:rPr sz="1000" b="1">
+                          <a:solidFill>
+                            <a:srgbClr val="FFFFFF"/>
+                          </a:solidFill>
+                        </a:rPr>
                         <a:t>NeuroGate LP bAcc</a:t>
                       </a:r>
                     </a:p>
                   </a:txBody>
                   <a:tcPr>
                     <a:solidFill>
-                      <a:srgbClr val="F0F0F0"/>
-                    </a:solidFill>
-                  </a:tcPr>
-                </a:tc>
-                <a:tc>
-                  <a:txBody>
-                    <a:bodyPr/>
-                    <a:lstStyle/>
-                    <a:p>
-                      <a:pPr algn="ctr">
-                        <a:defRPr sz="1200" b="1">
-                          <a:solidFill>
-                            <a:srgbClr val="000000"/>
-                          </a:solidFill>
-                        </a:defRPr>
-                      </a:pPr>
-                      <a:r>
-                        <a:t>Δ</a:t>
-                      </a:r>
-                    </a:p>
-                  </a:txBody>
-                  <a:tcPr>
-                    <a:solidFill>
-                      <a:srgbClr val="F0F0F0"/>
+                      <a:srgbClr val="3C3C3C"/>
+                    </a:solidFill>
+                  </a:tcPr>
+                </a:tc>
+                <a:tc>
+                  <a:txBody>
+                    <a:bodyPr/>
+                    <a:lstStyle/>
+                    <a:p>
+                      <a:pPr algn="ctr"/>
+                      <a:r>
+                        <a:rPr sz="1000" b="1">
+                          <a:solidFill>
+                            <a:srgbClr val="FFFFFF"/>
+                          </a:solidFill>
+                        </a:rPr>
+                        <a:t>Delta</a:t>
+                      </a:r>
+                    </a:p>
+                  </a:txBody>
+                  <a:tcPr>
+                    <a:solidFill>
+                      <a:srgbClr val="3C3C3C"/>
                     </a:solidFill>
                   </a:tcPr>
                 </a:tc>
               </a:tr>
-              <a:tr h="365760">
-                <a:tc>
-                  <a:txBody>
-                    <a:bodyPr/>
-                    <a:lstStyle/>
-                    <a:p>
-                      <a:pPr>
-                        <a:defRPr sz="1100">
-                          <a:solidFill>
-                            <a:srgbClr val="000000"/>
-                          </a:solidFill>
-                        </a:defRPr>
-                      </a:pPr>
-                      <a:r>
+              <a:tr h="502920">
+                <a:tc>
+                  <a:txBody>
+                    <a:bodyPr/>
+                    <a:lstStyle/>
+                    <a:p>
+                      <a:pPr algn="l"/>
+                      <a:r>
+                        <a:rPr sz="1000" b="0">
+                          <a:solidFill>
+                            <a:srgbClr val="000000"/>
+                          </a:solidFill>
+                        </a:rPr>
                         <a:t>HMC</a:t>
                       </a:r>
                     </a:p>
@@ -6365,60 +8572,57 @@
                     <a:bodyPr/>
                     <a:lstStyle/>
                     <a:p>
-                      <a:pPr algn="ctr">
-                        <a:defRPr sz="1100">
-                          <a:solidFill>
-                            <a:srgbClr val="000000"/>
-                          </a:solidFill>
-                        </a:defRPr>
-                      </a:pPr>
-                      <a:r>
-                        <a:t>0.6149 ± 0.0256</a:t>
-                      </a:r>
-                    </a:p>
-                  </a:txBody>
-                  <a:tcPr>
-                    <a:solidFill>
-                      <a:srgbClr val="FFFFFF"/>
-                    </a:solidFill>
-                  </a:tcPr>
-                </a:tc>
-                <a:tc>
-                  <a:txBody>
-                    <a:bodyPr/>
-                    <a:lstStyle/>
-                    <a:p>
-                      <a:pPr algn="ctr">
-                        <a:defRPr sz="1100">
-                          <a:solidFill>
-                            <a:srgbClr val="000000"/>
-                          </a:solidFill>
-                        </a:defRPr>
-                      </a:pPr>
-                      <a:r>
-                        <a:t>0.6922 ± 0.0172</a:t>
-                      </a:r>
-                    </a:p>
-                  </a:txBody>
-                  <a:tcPr>
-                    <a:solidFill>
-                      <a:srgbClr val="FFFFFF"/>
-                    </a:solidFill>
-                  </a:tcPr>
-                </a:tc>
-                <a:tc>
-                  <a:txBody>
-                    <a:bodyPr/>
-                    <a:lstStyle/>
-                    <a:p>
-                      <a:pPr algn="ctr">
-                        <a:defRPr sz="1100">
-                          <a:solidFill>
-                            <a:srgbClr val="000000"/>
-                          </a:solidFill>
-                        </a:defRPr>
-                      </a:pPr>
-                      <a:r>
+                      <a:pPr algn="ctr"/>
+                      <a:r>
+                        <a:rPr sz="1000" b="0">
+                          <a:solidFill>
+                            <a:srgbClr val="000000"/>
+                          </a:solidFill>
+                        </a:rPr>
+                        <a:t>0.6149 +- 0.0256</a:t>
+                      </a:r>
+                    </a:p>
+                  </a:txBody>
+                  <a:tcPr>
+                    <a:solidFill>
+                      <a:srgbClr val="FFFFFF"/>
+                    </a:solidFill>
+                  </a:tcPr>
+                </a:tc>
+                <a:tc>
+                  <a:txBody>
+                    <a:bodyPr/>
+                    <a:lstStyle/>
+                    <a:p>
+                      <a:pPr algn="ctr"/>
+                      <a:r>
+                        <a:rPr sz="1000" b="0">
+                          <a:solidFill>
+                            <a:srgbClr val="000000"/>
+                          </a:solidFill>
+                        </a:rPr>
+                        <a:t>0.6922 +- 0.0172</a:t>
+                      </a:r>
+                    </a:p>
+                  </a:txBody>
+                  <a:tcPr>
+                    <a:solidFill>
+                      <a:srgbClr val="FFFFFF"/>
+                    </a:solidFill>
+                  </a:tcPr>
+                </a:tc>
+                <a:tc>
+                  <a:txBody>
+                    <a:bodyPr/>
+                    <a:lstStyle/>
+                    <a:p>
+                      <a:pPr algn="ctr"/>
+                      <a:r>
+                        <a:rPr sz="1000" b="0">
+                          <a:solidFill>
+                            <a:srgbClr val="000000"/>
+                          </a:solidFill>
+                        </a:rPr>
                         <a:t>+0.0773</a:t>
                       </a:r>
                     </a:p>
@@ -6430,20 +8634,19 @@
                   </a:tcPr>
                 </a:tc>
               </a:tr>
-              <a:tr h="365760">
-                <a:tc>
-                  <a:txBody>
-                    <a:bodyPr/>
-                    <a:lstStyle/>
-                    <a:p>
-                      <a:pPr>
-                        <a:defRPr sz="1100">
-                          <a:solidFill>
-                            <a:srgbClr val="000000"/>
-                          </a:solidFill>
-                        </a:defRPr>
-                      </a:pPr>
-                      <a:r>
+              <a:tr h="502920">
+                <a:tc>
+                  <a:txBody>
+                    <a:bodyPr/>
+                    <a:lstStyle/>
+                    <a:p>
+                      <a:pPr algn="l"/>
+                      <a:r>
+                        <a:rPr sz="1000" b="0">
+                          <a:solidFill>
+                            <a:srgbClr val="000000"/>
+                          </a:solidFill>
+                        </a:rPr>
                         <a:t>ISRUC-S1</a:t>
                       </a:r>
                     </a:p>
@@ -6459,60 +8662,57 @@
                     <a:bodyPr/>
                     <a:lstStyle/>
                     <a:p>
-                      <a:pPr algn="ctr">
-                        <a:defRPr sz="1100">
-                          <a:solidFill>
-                            <a:srgbClr val="000000"/>
-                          </a:solidFill>
-                        </a:defRPr>
-                      </a:pPr>
-                      <a:r>
-                        <a:t>0.5962 ± 0.0579</a:t>
-                      </a:r>
-                    </a:p>
-                  </a:txBody>
-                  <a:tcPr>
-                    <a:solidFill>
-                      <a:srgbClr val="FFFFFF"/>
-                    </a:solidFill>
-                  </a:tcPr>
-                </a:tc>
-                <a:tc>
-                  <a:txBody>
-                    <a:bodyPr/>
-                    <a:lstStyle/>
-                    <a:p>
-                      <a:pPr algn="ctr">
-                        <a:defRPr sz="1100">
-                          <a:solidFill>
-                            <a:srgbClr val="000000"/>
-                          </a:solidFill>
-                        </a:defRPr>
-                      </a:pPr>
-                      <a:r>
-                        <a:t>0.6934 ± 0.0156</a:t>
-                      </a:r>
-                    </a:p>
-                  </a:txBody>
-                  <a:tcPr>
-                    <a:solidFill>
-                      <a:srgbClr val="FFFFFF"/>
-                    </a:solidFill>
-                  </a:tcPr>
-                </a:tc>
-                <a:tc>
-                  <a:txBody>
-                    <a:bodyPr/>
-                    <a:lstStyle/>
-                    <a:p>
-                      <a:pPr algn="ctr">
-                        <a:defRPr sz="1100">
-                          <a:solidFill>
-                            <a:srgbClr val="000000"/>
-                          </a:solidFill>
-                        </a:defRPr>
-                      </a:pPr>
-                      <a:r>
+                      <a:pPr algn="ctr"/>
+                      <a:r>
+                        <a:rPr sz="1000" b="0">
+                          <a:solidFill>
+                            <a:srgbClr val="000000"/>
+                          </a:solidFill>
+                        </a:rPr>
+                        <a:t>0.5962 +- 0.0579</a:t>
+                      </a:r>
+                    </a:p>
+                  </a:txBody>
+                  <a:tcPr>
+                    <a:solidFill>
+                      <a:srgbClr val="FFFFFF"/>
+                    </a:solidFill>
+                  </a:tcPr>
+                </a:tc>
+                <a:tc>
+                  <a:txBody>
+                    <a:bodyPr/>
+                    <a:lstStyle/>
+                    <a:p>
+                      <a:pPr algn="ctr"/>
+                      <a:r>
+                        <a:rPr sz="1000" b="0">
+                          <a:solidFill>
+                            <a:srgbClr val="000000"/>
+                          </a:solidFill>
+                        </a:rPr>
+                        <a:t>0.6934 +- 0.0156</a:t>
+                      </a:r>
+                    </a:p>
+                  </a:txBody>
+                  <a:tcPr>
+                    <a:solidFill>
+                      <a:srgbClr val="FFFFFF"/>
+                    </a:solidFill>
+                  </a:tcPr>
+                </a:tc>
+                <a:tc>
+                  <a:txBody>
+                    <a:bodyPr/>
+                    <a:lstStyle/>
+                    <a:p>
+                      <a:pPr algn="ctr"/>
+                      <a:r>
+                        <a:rPr sz="1000" b="0">
+                          <a:solidFill>
+                            <a:srgbClr val="000000"/>
+                          </a:solidFill>
+                        </a:rPr>
                         <a:t>+0.0972</a:t>
                       </a:r>
                     </a:p>
@@ -6524,20 +8724,19 @@
                   </a:tcPr>
                 </a:tc>
               </a:tr>
-              <a:tr h="365760">
-                <a:tc>
-                  <a:txBody>
-                    <a:bodyPr/>
-                    <a:lstStyle/>
-                    <a:p>
-                      <a:pPr>
-                        <a:defRPr sz="1100">
-                          <a:solidFill>
-                            <a:srgbClr val="000000"/>
-                          </a:solidFill>
-                        </a:defRPr>
-                      </a:pPr>
-                      <a:r>
+              <a:tr h="502920">
+                <a:tc>
+                  <a:txBody>
+                    <a:bodyPr/>
+                    <a:lstStyle/>
+                    <a:p>
+                      <a:pPr algn="l"/>
+                      <a:r>
+                        <a:rPr sz="1000" b="0">
+                          <a:solidFill>
+                            <a:srgbClr val="000000"/>
+                          </a:solidFill>
+                        </a:rPr>
                         <a:t>MDD</a:t>
                       </a:r>
                     </a:p>
@@ -6553,60 +8752,57 @@
                     <a:bodyPr/>
                     <a:lstStyle/>
                     <a:p>
-                      <a:pPr algn="ctr">
-                        <a:defRPr sz="1100">
-                          <a:solidFill>
-                            <a:srgbClr val="000000"/>
-                          </a:solidFill>
-                        </a:defRPr>
-                      </a:pPr>
-                      <a:r>
-                        <a:t>0.8907 ± 0.0477</a:t>
-                      </a:r>
-                    </a:p>
-                  </a:txBody>
-                  <a:tcPr>
-                    <a:solidFill>
-                      <a:srgbClr val="FFFFFF"/>
-                    </a:solidFill>
-                  </a:tcPr>
-                </a:tc>
-                <a:tc>
-                  <a:txBody>
-                    <a:bodyPr/>
-                    <a:lstStyle/>
-                    <a:p>
-                      <a:pPr algn="ctr">
-                        <a:defRPr sz="1100">
-                          <a:solidFill>
-                            <a:srgbClr val="000000"/>
-                          </a:solidFill>
-                        </a:defRPr>
-                      </a:pPr>
-                      <a:r>
-                        <a:t>0.9062 ± 0.1101</a:t>
-                      </a:r>
-                    </a:p>
-                  </a:txBody>
-                  <a:tcPr>
-                    <a:solidFill>
-                      <a:srgbClr val="FFFFFF"/>
-                    </a:solidFill>
-                  </a:tcPr>
-                </a:tc>
-                <a:tc>
-                  <a:txBody>
-                    <a:bodyPr/>
-                    <a:lstStyle/>
-                    <a:p>
-                      <a:pPr algn="ctr">
-                        <a:defRPr sz="1100">
-                          <a:solidFill>
-                            <a:srgbClr val="000000"/>
-                          </a:solidFill>
-                        </a:defRPr>
-                      </a:pPr>
-                      <a:r>
+                      <a:pPr algn="ctr"/>
+                      <a:r>
+                        <a:rPr sz="1000" b="0">
+                          <a:solidFill>
+                            <a:srgbClr val="000000"/>
+                          </a:solidFill>
+                        </a:rPr>
+                        <a:t>0.8907 +- 0.0477</a:t>
+                      </a:r>
+                    </a:p>
+                  </a:txBody>
+                  <a:tcPr>
+                    <a:solidFill>
+                      <a:srgbClr val="FFFFFF"/>
+                    </a:solidFill>
+                  </a:tcPr>
+                </a:tc>
+                <a:tc>
+                  <a:txBody>
+                    <a:bodyPr/>
+                    <a:lstStyle/>
+                    <a:p>
+                      <a:pPr algn="ctr"/>
+                      <a:r>
+                        <a:rPr sz="1000" b="0">
+                          <a:solidFill>
+                            <a:srgbClr val="000000"/>
+                          </a:solidFill>
+                        </a:rPr>
+                        <a:t>0.9062 +- 0.1101</a:t>
+                      </a:r>
+                    </a:p>
+                  </a:txBody>
+                  <a:tcPr>
+                    <a:solidFill>
+                      <a:srgbClr val="FFFFFF"/>
+                    </a:solidFill>
+                  </a:tcPr>
+                </a:tc>
+                <a:tc>
+                  <a:txBody>
+                    <a:bodyPr/>
+                    <a:lstStyle/>
+                    <a:p>
+                      <a:pPr algn="ctr"/>
+                      <a:r>
+                        <a:rPr sz="1000" b="0">
+                          <a:solidFill>
+                            <a:srgbClr val="000000"/>
+                          </a:solidFill>
+                        </a:rPr>
                         <a:t>+0.0154</a:t>
                       </a:r>
                     </a:p>
@@ -6618,20 +8814,19 @@
                   </a:tcPr>
                 </a:tc>
               </a:tr>
-              <a:tr h="365760">
-                <a:tc>
-                  <a:txBody>
-                    <a:bodyPr/>
-                    <a:lstStyle/>
-                    <a:p>
-                      <a:pPr>
-                        <a:defRPr sz="1100">
-                          <a:solidFill>
-                            <a:srgbClr val="000000"/>
-                          </a:solidFill>
-                        </a:defRPr>
-                      </a:pPr>
-                      <a:r>
+              <a:tr h="502920">
+                <a:tc>
+                  <a:txBody>
+                    <a:bodyPr/>
+                    <a:lstStyle/>
+                    <a:p>
+                      <a:pPr algn="l"/>
+                      <a:r>
+                        <a:rPr sz="1000" b="0">
+                          <a:solidFill>
+                            <a:srgbClr val="000000"/>
+                          </a:solidFill>
+                        </a:rPr>
                         <a:t>Physionet-MI</a:t>
                       </a:r>
                     </a:p>
@@ -6647,60 +8842,57 @@
                     <a:bodyPr/>
                     <a:lstStyle/>
                     <a:p>
-                      <a:pPr algn="ctr">
-                        <a:defRPr sz="1100">
-                          <a:solidFill>
-                            <a:srgbClr val="000000"/>
-                          </a:solidFill>
-                        </a:defRPr>
-                      </a:pPr>
-                      <a:r>
-                        <a:t>0.2719 ± 0.0176</a:t>
-                      </a:r>
-                    </a:p>
-                  </a:txBody>
-                  <a:tcPr>
-                    <a:solidFill>
-                      <a:srgbClr val="FFFFFF"/>
-                    </a:solidFill>
-                  </a:tcPr>
-                </a:tc>
-                <a:tc>
-                  <a:txBody>
-                    <a:bodyPr/>
-                    <a:lstStyle/>
-                    <a:p>
-                      <a:pPr algn="ctr">
-                        <a:defRPr sz="1100">
-                          <a:solidFill>
-                            <a:srgbClr val="000000"/>
-                          </a:solidFill>
-                        </a:defRPr>
-                      </a:pPr>
-                      <a:r>
-                        <a:t>0.2875 ± 0.0083</a:t>
-                      </a:r>
-                    </a:p>
-                  </a:txBody>
-                  <a:tcPr>
-                    <a:solidFill>
-                      <a:srgbClr val="FFFFFF"/>
-                    </a:solidFill>
-                  </a:tcPr>
-                </a:tc>
-                <a:tc>
-                  <a:txBody>
-                    <a:bodyPr/>
-                    <a:lstStyle/>
-                    <a:p>
-                      <a:pPr algn="ctr">
-                        <a:defRPr sz="1100">
-                          <a:solidFill>
-                            <a:srgbClr val="000000"/>
-                          </a:solidFill>
-                        </a:defRPr>
-                      </a:pPr>
-                      <a:r>
+                      <a:pPr algn="ctr"/>
+                      <a:r>
+                        <a:rPr sz="1000" b="0">
+                          <a:solidFill>
+                            <a:srgbClr val="000000"/>
+                          </a:solidFill>
+                        </a:rPr>
+                        <a:t>0.2719 +- 0.0176</a:t>
+                      </a:r>
+                    </a:p>
+                  </a:txBody>
+                  <a:tcPr>
+                    <a:solidFill>
+                      <a:srgbClr val="FFFFFF"/>
+                    </a:solidFill>
+                  </a:tcPr>
+                </a:tc>
+                <a:tc>
+                  <a:txBody>
+                    <a:bodyPr/>
+                    <a:lstStyle/>
+                    <a:p>
+                      <a:pPr algn="ctr"/>
+                      <a:r>
+                        <a:rPr sz="1000" b="0">
+                          <a:solidFill>
+                            <a:srgbClr val="000000"/>
+                          </a:solidFill>
+                        </a:rPr>
+                        <a:t>0.2875 +- 0.0083</a:t>
+                      </a:r>
+                    </a:p>
+                  </a:txBody>
+                  <a:tcPr>
+                    <a:solidFill>
+                      <a:srgbClr val="FFFFFF"/>
+                    </a:solidFill>
+                  </a:tcPr>
+                </a:tc>
+                <a:tc>
+                  <a:txBody>
+                    <a:bodyPr/>
+                    <a:lstStyle/>
+                    <a:p>
+                      <a:pPr algn="ctr"/>
+                      <a:r>
+                        <a:rPr sz="1000" b="0">
+                          <a:solidFill>
+                            <a:srgbClr val="000000"/>
+                          </a:solidFill>
+                        </a:rPr>
                         <a:t>+0.0156</a:t>
                       </a:r>
                     </a:p>
@@ -6716,6 +8908,674 @@
           </a:graphicData>
         </a:graphic>
       </p:graphicFrame>
+      <p:sp>
+        <p:nvSpPr>
+          <p:cNvPr id="4" name="Rectangle 3"/>
+          <p:cNvSpPr/>
+          <p:nvPr/>
+        </p:nvSpPr>
+        <p:spPr>
+          <a:xfrm>
+            <a:off x="13716000" y="731520"/>
+            <a:ext cx="5029200" cy="5394960"/>
+          </a:xfrm>
+          <a:prstGeom prst="rect">
+            <a:avLst/>
+          </a:prstGeom>
+          <a:solidFill>
+            <a:srgbClr val="F0F0F0"/>
+          </a:solidFill>
+          <a:ln w="12700">
+            <a:solidFill>
+              <a:srgbClr val="C8C8C8"/>
+            </a:solidFill>
+          </a:ln>
+        </p:spPr>
+        <p:style>
+          <a:lnRef idx="1">
+            <a:schemeClr val="accent1"/>
+          </a:lnRef>
+          <a:fillRef idx="3">
+            <a:schemeClr val="accent1"/>
+          </a:fillRef>
+          <a:effectRef idx="2">
+            <a:schemeClr val="accent1"/>
+          </a:effectRef>
+          <a:fontRef idx="minor">
+            <a:schemeClr val="lt1"/>
+          </a:fontRef>
+        </p:style>
+        <p:txBody>
+          <a:bodyPr rtlCol="0" anchor="ctr"/>
+          <a:lstStyle/>
+          <a:p>
+            <a:pPr algn="ctr"/>
+          </a:p>
+        </p:txBody>
+      </p:sp>
+      <p:sp>
+        <p:nvSpPr>
+          <p:cNvPr id="5" name="TextBox 4"/>
+          <p:cNvSpPr txBox="1"/>
+          <p:nvPr/>
+        </p:nvSpPr>
+        <p:spPr>
+          <a:xfrm>
+            <a:off x="13990320" y="868680"/>
+            <a:ext cx="4480560" cy="411480"/>
+          </a:xfrm>
+          <a:prstGeom prst="rect">
+            <a:avLst/>
+          </a:prstGeom>
+          <a:noFill/>
+        </p:spPr>
+        <p:txBody>
+          <a:bodyPr wrap="square">
+            <a:spAutoFit/>
+          </a:bodyPr>
+          <a:lstStyle/>
+          <a:p>
+            <a:pPr algn="ctr"/>
+            <a:r>
+              <a:rPr sz="1800" b="1">
+                <a:solidFill>
+                  <a:srgbClr val="000000"/>
+                </a:solidFill>
+              </a:rPr>
+              <a:t>LP Gains</a:t>
+            </a:r>
+          </a:p>
+        </p:txBody>
+      </p:sp>
+      <p:sp>
+        <p:nvSpPr>
+          <p:cNvPr id="6" name="Oval 5"/>
+          <p:cNvSpPr/>
+          <p:nvPr/>
+        </p:nvSpPr>
+        <p:spPr>
+          <a:xfrm>
+            <a:off x="14081760" y="1426464"/>
+            <a:ext cx="256032" cy="256032"/>
+          </a:xfrm>
+          <a:prstGeom prst="ellipse">
+            <a:avLst/>
+          </a:prstGeom>
+          <a:solidFill>
+            <a:srgbClr val="27AE60"/>
+          </a:solidFill>
+          <a:ln>
+            <a:noFill/>
+          </a:ln>
+        </p:spPr>
+        <p:style>
+          <a:lnRef idx="1">
+            <a:schemeClr val="accent1"/>
+          </a:lnRef>
+          <a:fillRef idx="3">
+            <a:schemeClr val="accent1"/>
+          </a:fillRef>
+          <a:effectRef idx="2">
+            <a:schemeClr val="accent1"/>
+          </a:effectRef>
+          <a:fontRef idx="minor">
+            <a:schemeClr val="lt1"/>
+          </a:fontRef>
+        </p:style>
+        <p:txBody>
+          <a:bodyPr rtlCol="0" anchor="ctr"/>
+          <a:lstStyle/>
+          <a:p>
+            <a:pPr algn="ctr"/>
+          </a:p>
+        </p:txBody>
+      </p:sp>
+      <p:sp>
+        <p:nvSpPr>
+          <p:cNvPr id="7" name="TextBox 6"/>
+          <p:cNvSpPr txBox="1"/>
+          <p:nvPr/>
+        </p:nvSpPr>
+        <p:spPr>
+          <a:xfrm>
+            <a:off x="14493240" y="1371600"/>
+            <a:ext cx="1645920" cy="365760"/>
+          </a:xfrm>
+          <a:prstGeom prst="rect">
+            <a:avLst/>
+          </a:prstGeom>
+          <a:noFill/>
+        </p:spPr>
+        <p:txBody>
+          <a:bodyPr wrap="square">
+            <a:spAutoFit/>
+          </a:bodyPr>
+          <a:lstStyle/>
+          <a:p>
+            <a:pPr algn="l"/>
+            <a:r>
+              <a:rPr sz="1300" b="1">
+                <a:solidFill>
+                  <a:srgbClr val="000000"/>
+                </a:solidFill>
+              </a:rPr>
+              <a:t>HMC</a:t>
+            </a:r>
+          </a:p>
+        </p:txBody>
+      </p:sp>
+      <p:sp>
+        <p:nvSpPr>
+          <p:cNvPr id="8" name="TextBox 7"/>
+          <p:cNvSpPr txBox="1"/>
+          <p:nvPr/>
+        </p:nvSpPr>
+        <p:spPr>
+          <a:xfrm>
+            <a:off x="16184880" y="1371600"/>
+            <a:ext cx="2286000" cy="365760"/>
+          </a:xfrm>
+          <a:prstGeom prst="rect">
+            <a:avLst/>
+          </a:prstGeom>
+          <a:noFill/>
+        </p:spPr>
+        <p:txBody>
+          <a:bodyPr wrap="square">
+            <a:spAutoFit/>
+          </a:bodyPr>
+          <a:lstStyle/>
+          <a:p>
+            <a:pPr algn="l"/>
+            <a:r>
+              <a:rPr sz="1100" b="0">
+                <a:solidFill>
+                  <a:srgbClr val="27AE60"/>
+                </a:solidFill>
+              </a:rPr>
+              <a:t>+0.0773</a:t>
+            </a:r>
+          </a:p>
+        </p:txBody>
+      </p:sp>
+      <p:sp>
+        <p:nvSpPr>
+          <p:cNvPr id="9" name="Oval 8"/>
+          <p:cNvSpPr/>
+          <p:nvPr/>
+        </p:nvSpPr>
+        <p:spPr>
+          <a:xfrm>
+            <a:off x="14081760" y="1883664"/>
+            <a:ext cx="256032" cy="256032"/>
+          </a:xfrm>
+          <a:prstGeom prst="ellipse">
+            <a:avLst/>
+          </a:prstGeom>
+          <a:solidFill>
+            <a:srgbClr val="27AE60"/>
+          </a:solidFill>
+          <a:ln>
+            <a:noFill/>
+          </a:ln>
+        </p:spPr>
+        <p:style>
+          <a:lnRef idx="1">
+            <a:schemeClr val="accent1"/>
+          </a:lnRef>
+          <a:fillRef idx="3">
+            <a:schemeClr val="accent1"/>
+          </a:fillRef>
+          <a:effectRef idx="2">
+            <a:schemeClr val="accent1"/>
+          </a:effectRef>
+          <a:fontRef idx="minor">
+            <a:schemeClr val="lt1"/>
+          </a:fontRef>
+        </p:style>
+        <p:txBody>
+          <a:bodyPr rtlCol="0" anchor="ctr"/>
+          <a:lstStyle/>
+          <a:p>
+            <a:pPr algn="ctr"/>
+          </a:p>
+        </p:txBody>
+      </p:sp>
+      <p:sp>
+        <p:nvSpPr>
+          <p:cNvPr id="10" name="TextBox 9"/>
+          <p:cNvSpPr txBox="1"/>
+          <p:nvPr/>
+        </p:nvSpPr>
+        <p:spPr>
+          <a:xfrm>
+            <a:off x="14493240" y="1828800"/>
+            <a:ext cx="1645920" cy="365760"/>
+          </a:xfrm>
+          <a:prstGeom prst="rect">
+            <a:avLst/>
+          </a:prstGeom>
+          <a:noFill/>
+        </p:spPr>
+        <p:txBody>
+          <a:bodyPr wrap="square">
+            <a:spAutoFit/>
+          </a:bodyPr>
+          <a:lstStyle/>
+          <a:p>
+            <a:pPr algn="l"/>
+            <a:r>
+              <a:rPr sz="1300" b="1">
+                <a:solidFill>
+                  <a:srgbClr val="000000"/>
+                </a:solidFill>
+              </a:rPr>
+              <a:t>ISRUC-S1</a:t>
+            </a:r>
+          </a:p>
+        </p:txBody>
+      </p:sp>
+      <p:sp>
+        <p:nvSpPr>
+          <p:cNvPr id="11" name="TextBox 10"/>
+          <p:cNvSpPr txBox="1"/>
+          <p:nvPr/>
+        </p:nvSpPr>
+        <p:spPr>
+          <a:xfrm>
+            <a:off x="16184880" y="1828800"/>
+            <a:ext cx="2286000" cy="365760"/>
+          </a:xfrm>
+          <a:prstGeom prst="rect">
+            <a:avLst/>
+          </a:prstGeom>
+          <a:noFill/>
+        </p:spPr>
+        <p:txBody>
+          <a:bodyPr wrap="square">
+            <a:spAutoFit/>
+          </a:bodyPr>
+          <a:lstStyle/>
+          <a:p>
+            <a:pPr algn="l"/>
+            <a:r>
+              <a:rPr sz="1100" b="0">
+                <a:solidFill>
+                  <a:srgbClr val="27AE60"/>
+                </a:solidFill>
+              </a:rPr>
+              <a:t>+0.0972</a:t>
+            </a:r>
+          </a:p>
+        </p:txBody>
+      </p:sp>
+      <p:sp>
+        <p:nvSpPr>
+          <p:cNvPr id="12" name="Oval 11"/>
+          <p:cNvSpPr/>
+          <p:nvPr/>
+        </p:nvSpPr>
+        <p:spPr>
+          <a:xfrm>
+            <a:off x="14081760" y="2340864"/>
+            <a:ext cx="256032" cy="256032"/>
+          </a:xfrm>
+          <a:prstGeom prst="ellipse">
+            <a:avLst/>
+          </a:prstGeom>
+          <a:solidFill>
+            <a:srgbClr val="F1C40F"/>
+          </a:solidFill>
+          <a:ln>
+            <a:noFill/>
+          </a:ln>
+        </p:spPr>
+        <p:style>
+          <a:lnRef idx="1">
+            <a:schemeClr val="accent1"/>
+          </a:lnRef>
+          <a:fillRef idx="3">
+            <a:schemeClr val="accent1"/>
+          </a:fillRef>
+          <a:effectRef idx="2">
+            <a:schemeClr val="accent1"/>
+          </a:effectRef>
+          <a:fontRef idx="minor">
+            <a:schemeClr val="lt1"/>
+          </a:fontRef>
+        </p:style>
+        <p:txBody>
+          <a:bodyPr rtlCol="0" anchor="ctr"/>
+          <a:lstStyle/>
+          <a:p>
+            <a:pPr algn="ctr"/>
+          </a:p>
+        </p:txBody>
+      </p:sp>
+      <p:sp>
+        <p:nvSpPr>
+          <p:cNvPr id="13" name="TextBox 12"/>
+          <p:cNvSpPr txBox="1"/>
+          <p:nvPr/>
+        </p:nvSpPr>
+        <p:spPr>
+          <a:xfrm>
+            <a:off x="14493240" y="2286000"/>
+            <a:ext cx="1645920" cy="365760"/>
+          </a:xfrm>
+          <a:prstGeom prst="rect">
+            <a:avLst/>
+          </a:prstGeom>
+          <a:noFill/>
+        </p:spPr>
+        <p:txBody>
+          <a:bodyPr wrap="square">
+            <a:spAutoFit/>
+          </a:bodyPr>
+          <a:lstStyle/>
+          <a:p>
+            <a:pPr algn="l"/>
+            <a:r>
+              <a:rPr sz="1300" b="1">
+                <a:solidFill>
+                  <a:srgbClr val="000000"/>
+                </a:solidFill>
+              </a:rPr>
+              <a:t>MDD</a:t>
+            </a:r>
+          </a:p>
+        </p:txBody>
+      </p:sp>
+      <p:sp>
+        <p:nvSpPr>
+          <p:cNvPr id="14" name="TextBox 13"/>
+          <p:cNvSpPr txBox="1"/>
+          <p:nvPr/>
+        </p:nvSpPr>
+        <p:spPr>
+          <a:xfrm>
+            <a:off x="16184880" y="2286000"/>
+            <a:ext cx="2286000" cy="365760"/>
+          </a:xfrm>
+          <a:prstGeom prst="rect">
+            <a:avLst/>
+          </a:prstGeom>
+          <a:noFill/>
+        </p:spPr>
+        <p:txBody>
+          <a:bodyPr wrap="square">
+            <a:spAutoFit/>
+          </a:bodyPr>
+          <a:lstStyle/>
+          <a:p>
+            <a:pPr algn="l"/>
+            <a:r>
+              <a:rPr sz="1100" b="0">
+                <a:solidFill>
+                  <a:srgbClr val="F1C40F"/>
+                </a:solidFill>
+              </a:rPr>
+              <a:t>+0.0154</a:t>
+            </a:r>
+          </a:p>
+        </p:txBody>
+      </p:sp>
+      <p:sp>
+        <p:nvSpPr>
+          <p:cNvPr id="15" name="Oval 14"/>
+          <p:cNvSpPr/>
+          <p:nvPr/>
+        </p:nvSpPr>
+        <p:spPr>
+          <a:xfrm>
+            <a:off x="14081760" y="2798064"/>
+            <a:ext cx="256032" cy="256032"/>
+          </a:xfrm>
+          <a:prstGeom prst="ellipse">
+            <a:avLst/>
+          </a:prstGeom>
+          <a:solidFill>
+            <a:srgbClr val="F1C40F"/>
+          </a:solidFill>
+          <a:ln>
+            <a:noFill/>
+          </a:ln>
+        </p:spPr>
+        <p:style>
+          <a:lnRef idx="1">
+            <a:schemeClr val="accent1"/>
+          </a:lnRef>
+          <a:fillRef idx="3">
+            <a:schemeClr val="accent1"/>
+          </a:fillRef>
+          <a:effectRef idx="2">
+            <a:schemeClr val="accent1"/>
+          </a:effectRef>
+          <a:fontRef idx="minor">
+            <a:schemeClr val="lt1"/>
+          </a:fontRef>
+        </p:style>
+        <p:txBody>
+          <a:bodyPr rtlCol="0" anchor="ctr"/>
+          <a:lstStyle/>
+          <a:p>
+            <a:pPr algn="ctr"/>
+          </a:p>
+        </p:txBody>
+      </p:sp>
+      <p:sp>
+        <p:nvSpPr>
+          <p:cNvPr id="16" name="TextBox 15"/>
+          <p:cNvSpPr txBox="1"/>
+          <p:nvPr/>
+        </p:nvSpPr>
+        <p:spPr>
+          <a:xfrm>
+            <a:off x="14493240" y="2743200"/>
+            <a:ext cx="1645920" cy="365760"/>
+          </a:xfrm>
+          <a:prstGeom prst="rect">
+            <a:avLst/>
+          </a:prstGeom>
+          <a:noFill/>
+        </p:spPr>
+        <p:txBody>
+          <a:bodyPr wrap="square">
+            <a:spAutoFit/>
+          </a:bodyPr>
+          <a:lstStyle/>
+          <a:p>
+            <a:pPr algn="l"/>
+            <a:r>
+              <a:rPr sz="1300" b="1">
+                <a:solidFill>
+                  <a:srgbClr val="000000"/>
+                </a:solidFill>
+              </a:rPr>
+              <a:t>Physionet-MI</a:t>
+            </a:r>
+          </a:p>
+        </p:txBody>
+      </p:sp>
+      <p:sp>
+        <p:nvSpPr>
+          <p:cNvPr id="17" name="TextBox 16"/>
+          <p:cNvSpPr txBox="1"/>
+          <p:nvPr/>
+        </p:nvSpPr>
+        <p:spPr>
+          <a:xfrm>
+            <a:off x="16184880" y="2743200"/>
+            <a:ext cx="2286000" cy="365760"/>
+          </a:xfrm>
+          <a:prstGeom prst="rect">
+            <a:avLst/>
+          </a:prstGeom>
+          <a:noFill/>
+        </p:spPr>
+        <p:txBody>
+          <a:bodyPr wrap="square">
+            <a:spAutoFit/>
+          </a:bodyPr>
+          <a:lstStyle/>
+          <a:p>
+            <a:pPr algn="l"/>
+            <a:r>
+              <a:rPr sz="1100" b="0">
+                <a:solidFill>
+                  <a:srgbClr val="F1C40F"/>
+                </a:solidFill>
+              </a:rPr>
+              <a:t>+0.0156</a:t>
+            </a:r>
+          </a:p>
+        </p:txBody>
+      </p:sp>
+      <p:sp>
+        <p:nvSpPr>
+          <p:cNvPr id="18" name="Rectangle 17"/>
+          <p:cNvSpPr/>
+          <p:nvPr/>
+        </p:nvSpPr>
+        <p:spPr>
+          <a:xfrm>
+            <a:off x="14081760" y="3337560"/>
+            <a:ext cx="4297680" cy="13716"/>
+          </a:xfrm>
+          <a:prstGeom prst="rect">
+            <a:avLst/>
+          </a:prstGeom>
+          <a:solidFill>
+            <a:srgbClr val="C8C8C8"/>
+          </a:solidFill>
+          <a:ln>
+            <a:noFill/>
+          </a:ln>
+        </p:spPr>
+        <p:style>
+          <a:lnRef idx="1">
+            <a:schemeClr val="accent1"/>
+          </a:lnRef>
+          <a:fillRef idx="3">
+            <a:schemeClr val="accent1"/>
+          </a:fillRef>
+          <a:effectRef idx="2">
+            <a:schemeClr val="accent1"/>
+          </a:effectRef>
+          <a:fontRef idx="minor">
+            <a:schemeClr val="lt1"/>
+          </a:fontRef>
+        </p:style>
+        <p:txBody>
+          <a:bodyPr rtlCol="0" anchor="ctr"/>
+          <a:lstStyle/>
+          <a:p>
+            <a:pPr algn="ctr"/>
+          </a:p>
+        </p:txBody>
+      </p:sp>
+      <p:sp>
+        <p:nvSpPr>
+          <p:cNvPr id="19" name="TextBox 18"/>
+          <p:cNvSpPr txBox="1"/>
+          <p:nvPr/>
+        </p:nvSpPr>
+        <p:spPr>
+          <a:xfrm>
+            <a:off x="14173200" y="3611879"/>
+            <a:ext cx="4114800" cy="365760"/>
+          </a:xfrm>
+          <a:prstGeom prst="rect">
+            <a:avLst/>
+          </a:prstGeom>
+          <a:noFill/>
+        </p:spPr>
+        <p:txBody>
+          <a:bodyPr wrap="square">
+            <a:spAutoFit/>
+          </a:bodyPr>
+          <a:lstStyle/>
+          <a:p>
+            <a:pPr algn="l"/>
+            <a:r>
+              <a:rPr sz="1400" b="1">
+                <a:solidFill>
+                  <a:srgbClr val="27AE60"/>
+                </a:solidFill>
+              </a:rPr>
+              <a:t>Sleep staging: large gains (&gt;= +0.07)</a:t>
+            </a:r>
+          </a:p>
+        </p:txBody>
+      </p:sp>
+      <p:sp>
+        <p:nvSpPr>
+          <p:cNvPr id="20" name="TextBox 19"/>
+          <p:cNvSpPr txBox="1"/>
+          <p:nvPr/>
+        </p:nvSpPr>
+        <p:spPr>
+          <a:xfrm>
+            <a:off x="14173200" y="4023359"/>
+            <a:ext cx="4114800" cy="365760"/>
+          </a:xfrm>
+          <a:prstGeom prst="rect">
+            <a:avLst/>
+          </a:prstGeom>
+          <a:noFill/>
+        </p:spPr>
+        <p:txBody>
+          <a:bodyPr wrap="square">
+            <a:spAutoFit/>
+          </a:bodyPr>
+          <a:lstStyle/>
+          <a:p>
+            <a:pPr algn="l"/>
+            <a:r>
+              <a:rPr sz="1400" b="1">
+                <a:solidFill>
+                  <a:srgbClr val="F1C40F"/>
+                </a:solidFill>
+              </a:rPr>
+              <a:t>Clinical / MI: small gains (~ +0.015)</a:t>
+            </a:r>
+          </a:p>
+        </p:txBody>
+      </p:sp>
+      <p:sp>
+        <p:nvSpPr>
+          <p:cNvPr id="21" name="TextBox 20"/>
+          <p:cNvSpPr txBox="1"/>
+          <p:nvPr/>
+        </p:nvSpPr>
+        <p:spPr>
+          <a:xfrm>
+            <a:off x="13990320" y="4709159"/>
+            <a:ext cx="4480560" cy="457200"/>
+          </a:xfrm>
+          <a:prstGeom prst="rect">
+            <a:avLst/>
+          </a:prstGeom>
+          <a:noFill/>
+        </p:spPr>
+        <p:txBody>
+          <a:bodyPr wrap="square">
+            <a:spAutoFit/>
+          </a:bodyPr>
+          <a:lstStyle/>
+          <a:p>
+            <a:pPr algn="ctr"/>
+            <a:r>
+              <a:rPr sz="1300" b="0">
+                <a:solidFill>
+                  <a:srgbClr val="145A32"/>
+                </a:solidFill>
+              </a:rPr>
+              <a:t>Neural priors most helpful where frozen embeddings lack spectral structure.</a:t>
+            </a:r>
+          </a:p>
+        </p:txBody>
+      </p:sp>
     </p:spTree>
   </p:cSld>
   <p:clrMapOvr>
@@ -6742,8 +9602,8 @@
         </p:nvSpPr>
         <p:spPr>
           <a:xfrm>
-            <a:off x="457200" y="274320"/>
-            <a:ext cx="13716000" cy="548640"/>
+            <a:off x="457200" y="137160"/>
+            <a:ext cx="18288000" cy="411480"/>
           </a:xfrm>
           <a:prstGeom prst="rect">
             <a:avLst/>
@@ -6751,20 +9611,19 @@
           <a:noFill/>
         </p:spPr>
         <p:txBody>
-          <a:bodyPr wrap="none">
+          <a:bodyPr wrap="square">
             <a:spAutoFit/>
           </a:bodyPr>
           <a:lstStyle/>
           <a:p>
-            <a:pPr>
-              <a:defRPr sz="2400" b="1">
+            <a:pPr algn="l"/>
+            <a:r>
+              <a:rPr sz="2000" b="1">
                 <a:solidFill>
                   <a:srgbClr val="000000"/>
                 </a:solidFill>
-              </a:defRPr>
-            </a:pPr>
-            <a:r>
-              <a:t>Table 5: NeuroGate — Fine-Tuning Summary on Selected-12 Datasets</a:t>
+              </a:rPr>
+              <a:t>Table 5: NeuroGate - Fine-Tuning Summary on Selected-12 Datasets</a:t>
             </a:r>
           </a:p>
         </p:txBody>
@@ -6778,8 +9637,8 @@
           <p:nvPr/>
         </p:nvGraphicFramePr>
         <p:xfrm>
-          <a:off x="457200" y="1005840"/>
-          <a:ext cx="11430000" cy="1828800"/>
+          <a:off x="274320" y="731520"/>
+          <a:ext cx="10972800" cy="2514600"/>
         </p:xfrm>
         <a:graphic>
           <a:graphicData uri="http://schemas.openxmlformats.org/drawingml/2006/table">
@@ -6788,71 +9647,68 @@
                 <a:tableStyleId>{5C22544A-7EE6-4342-B048-85BDC9FD1C3A}</a:tableStyleId>
               </a:tblPr>
               <a:tblGrid>
-                <a:gridCol w="6858000"/>
-                <a:gridCol w="4572000"/>
+                <a:gridCol w="7315200"/>
+                <a:gridCol w="3657600"/>
               </a:tblGrid>
-              <a:tr h="365760">
-                <a:tc>
-                  <a:txBody>
-                    <a:bodyPr/>
-                    <a:lstStyle/>
-                    <a:p>
-                      <a:pPr algn="ctr">
-                        <a:defRPr sz="1200" b="1">
-                          <a:solidFill>
-                            <a:srgbClr val="000000"/>
-                          </a:solidFill>
-                        </a:defRPr>
-                      </a:pPr>
-                      <a:r>
+              <a:tr h="502920">
+                <a:tc>
+                  <a:txBody>
+                    <a:bodyPr/>
+                    <a:lstStyle/>
+                    <a:p>
+                      <a:pPr algn="ctr"/>
+                      <a:r>
+                        <a:rPr sz="1000" b="1">
+                          <a:solidFill>
+                            <a:srgbClr val="FFFFFF"/>
+                          </a:solidFill>
+                        </a:rPr>
                         <a:t>Experiment</a:t>
                       </a:r>
                     </a:p>
                   </a:txBody>
                   <a:tcPr>
                     <a:solidFill>
-                      <a:srgbClr val="F0F0F0"/>
-                    </a:solidFill>
-                  </a:tcPr>
-                </a:tc>
-                <a:tc>
-                  <a:txBody>
-                    <a:bodyPr/>
-                    <a:lstStyle/>
-                    <a:p>
-                      <a:pPr algn="ctr">
-                        <a:defRPr sz="1200" b="1">
-                          <a:solidFill>
-                            <a:srgbClr val="000000"/>
-                          </a:solidFill>
-                        </a:defRPr>
-                      </a:pPr>
-                      <a:r>
+                      <a:srgbClr val="3C3C3C"/>
+                    </a:solidFill>
+                  </a:tcPr>
+                </a:tc>
+                <a:tc>
+                  <a:txBody>
+                    <a:bodyPr/>
+                    <a:lstStyle/>
+                    <a:p>
+                      <a:pPr algn="ctr"/>
+                      <a:r>
+                        <a:rPr sz="1000" b="1">
+                          <a:solidFill>
+                            <a:srgbClr val="FFFFFF"/>
+                          </a:solidFill>
+                        </a:rPr>
                         <a:t>Result</a:t>
                       </a:r>
                     </a:p>
                   </a:txBody>
                   <a:tcPr>
                     <a:solidFill>
-                      <a:srgbClr val="F0F0F0"/>
+                      <a:srgbClr val="3C3C3C"/>
                     </a:solidFill>
                   </a:tcPr>
                 </a:tc>
               </a:tr>
-              <a:tr h="365760">
-                <a:tc>
-                  <a:txBody>
-                    <a:bodyPr/>
-                    <a:lstStyle/>
-                    <a:p>
-                      <a:pPr>
-                        <a:defRPr sz="1100">
-                          <a:solidFill>
-                            <a:srgbClr val="000000"/>
-                          </a:solidFill>
-                        </a:defRPr>
-                      </a:pPr>
-                      <a:r>
+              <a:tr h="502920">
+                <a:tc>
+                  <a:txBody>
+                    <a:bodyPr/>
+                    <a:lstStyle/>
+                    <a:p>
+                      <a:pPr algn="l"/>
+                      <a:r>
+                        <a:rPr sz="1000" b="0">
+                          <a:solidFill>
+                            <a:srgbClr val="000000"/>
+                          </a:solidFill>
+                        </a:rPr>
                         <a:t>LP channel-gated fusion mean gain (vs. backbone-only)</a:t>
                       </a:r>
                     </a:p>
@@ -6868,14 +9724,13 @@
                     <a:bodyPr/>
                     <a:lstStyle/>
                     <a:p>
-                      <a:pPr>
-                        <a:defRPr sz="1100">
-                          <a:solidFill>
-                            <a:srgbClr val="000000"/>
-                          </a:solidFill>
-                        </a:defRPr>
-                      </a:pPr>
-                      <a:r>
+                      <a:pPr algn="ctr"/>
+                      <a:r>
+                        <a:rPr sz="1000" b="0">
+                          <a:solidFill>
+                            <a:srgbClr val="000000"/>
+                          </a:solidFill>
+                        </a:rPr>
                         <a:t>+0.0389 BA</a:t>
                       </a:r>
                     </a:p>
@@ -6887,20 +9742,19 @@
                   </a:tcPr>
                 </a:tc>
               </a:tr>
-              <a:tr h="365760">
-                <a:tc>
-                  <a:txBody>
-                    <a:bodyPr/>
-                    <a:lstStyle/>
-                    <a:p>
-                      <a:pPr>
-                        <a:defRPr sz="1100">
-                          <a:solidFill>
-                            <a:srgbClr val="000000"/>
-                          </a:solidFill>
-                        </a:defRPr>
-                      </a:pPr>
-                      <a:r>
+              <a:tr h="502920">
+                <a:tc>
+                  <a:txBody>
+                    <a:bodyPr/>
+                    <a:lstStyle/>
+                    <a:p>
+                      <a:pPr algn="l"/>
+                      <a:r>
+                        <a:rPr sz="1000" b="0">
+                          <a:solidFill>
+                            <a:srgbClr val="000000"/>
+                          </a:solidFill>
+                        </a:rPr>
                         <a:t>LP gated fusion positive rate (dataset-backbone units)</a:t>
                       </a:r>
                     </a:p>
@@ -6916,15 +9770,14 @@
                     <a:bodyPr/>
                     <a:lstStyle/>
                     <a:p>
-                      <a:pPr algn="ctr">
-                        <a:defRPr sz="1100">
-                          <a:solidFill>
-                            <a:srgbClr val="000000"/>
-                          </a:solidFill>
-                        </a:defRPr>
-                      </a:pPr>
-                      <a:r>
-                        <a:t>40/48</a:t>
+                      <a:pPr algn="ctr"/>
+                      <a:r>
+                        <a:rPr sz="1000" b="0">
+                          <a:solidFill>
+                            <a:srgbClr val="000000"/>
+                          </a:solidFill>
+                        </a:rPr>
+                        <a:t>40 / 48</a:t>
                       </a:r>
                     </a:p>
                   </a:txBody>
@@ -6935,20 +9788,19 @@
                   </a:tcPr>
                 </a:tc>
               </a:tr>
-              <a:tr h="365760">
-                <a:tc>
-                  <a:txBody>
-                    <a:bodyPr/>
-                    <a:lstStyle/>
-                    <a:p>
-                      <a:pPr>
-                        <a:defRPr sz="1100">
-                          <a:solidFill>
-                            <a:srgbClr val="000000"/>
-                          </a:solidFill>
-                        </a:defRPr>
-                      </a:pPr>
-                      <a:r>
+              <a:tr h="502920">
+                <a:tc>
+                  <a:txBody>
+                    <a:bodyPr/>
+                    <a:lstStyle/>
+                    <a:p>
+                      <a:pPr algn="l"/>
+                      <a:r>
+                        <a:rPr sz="1000" b="0">
+                          <a:solidFill>
+                            <a:srgbClr val="000000"/>
+                          </a:solidFill>
+                        </a:rPr>
                         <a:t>CBraMod flatten-FT gated fusion mean gain</a:t>
                       </a:r>
                     </a:p>
@@ -6964,14 +9816,13 @@
                     <a:bodyPr/>
                     <a:lstStyle/>
                     <a:p>
-                      <a:pPr>
-                        <a:defRPr sz="1100">
-                          <a:solidFill>
-                            <a:srgbClr val="000000"/>
-                          </a:solidFill>
-                        </a:defRPr>
-                      </a:pPr>
-                      <a:r>
+                      <a:pPr algn="ctr"/>
+                      <a:r>
+                        <a:rPr sz="1000" b="0">
+                          <a:solidFill>
+                            <a:srgbClr val="000000"/>
+                          </a:solidFill>
+                        </a:rPr>
                         <a:t>+0.0078 BA (9/12 positive)</a:t>
                       </a:r>
                     </a:p>
@@ -6983,20 +9834,19 @@
                   </a:tcPr>
                 </a:tc>
               </a:tr>
-              <a:tr h="365760">
-                <a:tc>
-                  <a:txBody>
-                    <a:bodyPr/>
-                    <a:lstStyle/>
-                    <a:p>
-                      <a:pPr>
-                        <a:defRPr sz="1100">
-                          <a:solidFill>
-                            <a:srgbClr val="000000"/>
-                          </a:solidFill>
-                        </a:defRPr>
-                      </a:pPr>
-                      <a:r>
+              <a:tr h="502920">
+                <a:tc>
+                  <a:txBody>
+                    <a:bodyPr/>
+                    <a:lstStyle/>
+                    <a:p>
+                      <a:pPr algn="l"/>
+                      <a:r>
+                        <a:rPr sz="1000" b="0">
+                          <a:solidFill>
+                            <a:srgbClr val="000000"/>
+                          </a:solidFill>
+                        </a:rPr>
                         <a:t>FT best-of-gated/logit mean gain</a:t>
                       </a:r>
                     </a:p>
@@ -7012,14 +9862,13 @@
                     <a:bodyPr/>
                     <a:lstStyle/>
                     <a:p>
-                      <a:pPr>
-                        <a:defRPr sz="1100">
-                          <a:solidFill>
-                            <a:srgbClr val="000000"/>
-                          </a:solidFill>
-                        </a:defRPr>
-                      </a:pPr>
-                      <a:r>
+                      <a:pPr algn="ctr"/>
+                      <a:r>
+                        <a:rPr sz="1000" b="0">
+                          <a:solidFill>
+                            <a:srgbClr val="000000"/>
+                          </a:solidFill>
+                        </a:rPr>
                         <a:t>+0.0097 BA</a:t>
                       </a:r>
                     </a:p>
@@ -7035,6 +9884,2161 @@
           </a:graphicData>
         </a:graphic>
       </p:graphicFrame>
+      <p:sp>
+        <p:nvSpPr>
+          <p:cNvPr id="4" name="Rectangle 3"/>
+          <p:cNvSpPr/>
+          <p:nvPr/>
+        </p:nvSpPr>
+        <p:spPr>
+          <a:xfrm>
+            <a:off x="13716000" y="731520"/>
+            <a:ext cx="5029200" cy="5394960"/>
+          </a:xfrm>
+          <a:prstGeom prst="rect">
+            <a:avLst/>
+          </a:prstGeom>
+          <a:solidFill>
+            <a:srgbClr val="F0F0F0"/>
+          </a:solidFill>
+          <a:ln w="12700">
+            <a:solidFill>
+              <a:srgbClr val="C8C8C8"/>
+            </a:solidFill>
+          </a:ln>
+        </p:spPr>
+        <p:style>
+          <a:lnRef idx="1">
+            <a:schemeClr val="accent1"/>
+          </a:lnRef>
+          <a:fillRef idx="3">
+            <a:schemeClr val="accent1"/>
+          </a:fillRef>
+          <a:effectRef idx="2">
+            <a:schemeClr val="accent1"/>
+          </a:effectRef>
+          <a:fontRef idx="minor">
+            <a:schemeClr val="lt1"/>
+          </a:fontRef>
+        </p:style>
+        <p:txBody>
+          <a:bodyPr rtlCol="0" anchor="ctr"/>
+          <a:lstStyle/>
+          <a:p>
+            <a:pPr algn="ctr"/>
+          </a:p>
+        </p:txBody>
+      </p:sp>
+      <p:sp>
+        <p:nvSpPr>
+          <p:cNvPr id="5" name="TextBox 4"/>
+          <p:cNvSpPr txBox="1"/>
+          <p:nvPr/>
+        </p:nvSpPr>
+        <p:spPr>
+          <a:xfrm>
+            <a:off x="13990320" y="868680"/>
+            <a:ext cx="4480560" cy="411480"/>
+          </a:xfrm>
+          <a:prstGeom prst="rect">
+            <a:avLst/>
+          </a:prstGeom>
+          <a:noFill/>
+        </p:spPr>
+        <p:txBody>
+          <a:bodyPr wrap="square">
+            <a:spAutoFit/>
+          </a:bodyPr>
+          <a:lstStyle/>
+          <a:p>
+            <a:pPr algn="ctr"/>
+            <a:r>
+              <a:rPr sz="1800" b="1">
+                <a:solidFill>
+                  <a:srgbClr val="000000"/>
+                </a:solidFill>
+              </a:rPr>
+              <a:t>FT Summary</a:t>
+            </a:r>
+          </a:p>
+        </p:txBody>
+      </p:sp>
+      <p:sp>
+        <p:nvSpPr>
+          <p:cNvPr id="6" name="Oval 5"/>
+          <p:cNvSpPr/>
+          <p:nvPr/>
+        </p:nvSpPr>
+        <p:spPr>
+          <a:xfrm>
+            <a:off x="14081760" y="1426464"/>
+            <a:ext cx="256032" cy="256032"/>
+          </a:xfrm>
+          <a:prstGeom prst="ellipse">
+            <a:avLst/>
+          </a:prstGeom>
+          <a:solidFill>
+            <a:srgbClr val="27AE60"/>
+          </a:solidFill>
+          <a:ln>
+            <a:noFill/>
+          </a:ln>
+        </p:spPr>
+        <p:style>
+          <a:lnRef idx="1">
+            <a:schemeClr val="accent1"/>
+          </a:lnRef>
+          <a:fillRef idx="3">
+            <a:schemeClr val="accent1"/>
+          </a:fillRef>
+          <a:effectRef idx="2">
+            <a:schemeClr val="accent1"/>
+          </a:effectRef>
+          <a:fontRef idx="minor">
+            <a:schemeClr val="lt1"/>
+          </a:fontRef>
+        </p:style>
+        <p:txBody>
+          <a:bodyPr rtlCol="0" anchor="ctr"/>
+          <a:lstStyle/>
+          <a:p>
+            <a:pPr algn="ctr"/>
+          </a:p>
+        </p:txBody>
+      </p:sp>
+      <p:sp>
+        <p:nvSpPr>
+          <p:cNvPr id="7" name="TextBox 6"/>
+          <p:cNvSpPr txBox="1"/>
+          <p:nvPr/>
+        </p:nvSpPr>
+        <p:spPr>
+          <a:xfrm>
+            <a:off x="14493240" y="1371600"/>
+            <a:ext cx="1645920" cy="365760"/>
+          </a:xfrm>
+          <a:prstGeom prst="rect">
+            <a:avLst/>
+          </a:prstGeom>
+          <a:noFill/>
+        </p:spPr>
+        <p:txBody>
+          <a:bodyPr wrap="square">
+            <a:spAutoFit/>
+          </a:bodyPr>
+          <a:lstStyle/>
+          <a:p>
+            <a:pPr algn="l"/>
+            <a:r>
+              <a:rPr sz="1300" b="1">
+                <a:solidFill>
+                  <a:srgbClr val="000000"/>
+                </a:solidFill>
+              </a:rPr>
+              <a:t>LP mean gain</a:t>
+            </a:r>
+          </a:p>
+        </p:txBody>
+      </p:sp>
+      <p:sp>
+        <p:nvSpPr>
+          <p:cNvPr id="8" name="TextBox 7"/>
+          <p:cNvSpPr txBox="1"/>
+          <p:nvPr/>
+        </p:nvSpPr>
+        <p:spPr>
+          <a:xfrm>
+            <a:off x="16184880" y="1371600"/>
+            <a:ext cx="2286000" cy="365760"/>
+          </a:xfrm>
+          <a:prstGeom prst="rect">
+            <a:avLst/>
+          </a:prstGeom>
+          <a:noFill/>
+        </p:spPr>
+        <p:txBody>
+          <a:bodyPr wrap="square">
+            <a:spAutoFit/>
+          </a:bodyPr>
+          <a:lstStyle/>
+          <a:p>
+            <a:pPr algn="l"/>
+            <a:r>
+              <a:rPr sz="1100" b="0">
+                <a:solidFill>
+                  <a:srgbClr val="27AE60"/>
+                </a:solidFill>
+              </a:rPr>
+              <a:t>+0.0389 BA</a:t>
+            </a:r>
+          </a:p>
+        </p:txBody>
+      </p:sp>
+      <p:sp>
+        <p:nvSpPr>
+          <p:cNvPr id="9" name="Oval 8"/>
+          <p:cNvSpPr/>
+          <p:nvPr/>
+        </p:nvSpPr>
+        <p:spPr>
+          <a:xfrm>
+            <a:off x="14081760" y="1883664"/>
+            <a:ext cx="256032" cy="256032"/>
+          </a:xfrm>
+          <a:prstGeom prst="ellipse">
+            <a:avLst/>
+          </a:prstGeom>
+          <a:solidFill>
+            <a:srgbClr val="27AE60"/>
+          </a:solidFill>
+          <a:ln>
+            <a:noFill/>
+          </a:ln>
+        </p:spPr>
+        <p:style>
+          <a:lnRef idx="1">
+            <a:schemeClr val="accent1"/>
+          </a:lnRef>
+          <a:fillRef idx="3">
+            <a:schemeClr val="accent1"/>
+          </a:fillRef>
+          <a:effectRef idx="2">
+            <a:schemeClr val="accent1"/>
+          </a:effectRef>
+          <a:fontRef idx="minor">
+            <a:schemeClr val="lt1"/>
+          </a:fontRef>
+        </p:style>
+        <p:txBody>
+          <a:bodyPr rtlCol="0" anchor="ctr"/>
+          <a:lstStyle/>
+          <a:p>
+            <a:pPr algn="ctr"/>
+          </a:p>
+        </p:txBody>
+      </p:sp>
+      <p:sp>
+        <p:nvSpPr>
+          <p:cNvPr id="10" name="TextBox 9"/>
+          <p:cNvSpPr txBox="1"/>
+          <p:nvPr/>
+        </p:nvSpPr>
+        <p:spPr>
+          <a:xfrm>
+            <a:off x="14493240" y="1828800"/>
+            <a:ext cx="1645920" cy="365760"/>
+          </a:xfrm>
+          <a:prstGeom prst="rect">
+            <a:avLst/>
+          </a:prstGeom>
+          <a:noFill/>
+        </p:spPr>
+        <p:txBody>
+          <a:bodyPr wrap="square">
+            <a:spAutoFit/>
+          </a:bodyPr>
+          <a:lstStyle/>
+          <a:p>
+            <a:pPr algn="l"/>
+            <a:r>
+              <a:rPr sz="1300" b="1">
+                <a:solidFill>
+                  <a:srgbClr val="000000"/>
+                </a:solidFill>
+              </a:rPr>
+              <a:t>LP positive rate</a:t>
+            </a:r>
+          </a:p>
+        </p:txBody>
+      </p:sp>
+      <p:sp>
+        <p:nvSpPr>
+          <p:cNvPr id="11" name="TextBox 10"/>
+          <p:cNvSpPr txBox="1"/>
+          <p:nvPr/>
+        </p:nvSpPr>
+        <p:spPr>
+          <a:xfrm>
+            <a:off x="16184880" y="1828800"/>
+            <a:ext cx="2286000" cy="365760"/>
+          </a:xfrm>
+          <a:prstGeom prst="rect">
+            <a:avLst/>
+          </a:prstGeom>
+          <a:noFill/>
+        </p:spPr>
+        <p:txBody>
+          <a:bodyPr wrap="square">
+            <a:spAutoFit/>
+          </a:bodyPr>
+          <a:lstStyle/>
+          <a:p>
+            <a:pPr algn="l"/>
+            <a:r>
+              <a:rPr sz="1100" b="0">
+                <a:solidFill>
+                  <a:srgbClr val="27AE60"/>
+                </a:solidFill>
+              </a:rPr>
+              <a:t>40 / 48 (83%)</a:t>
+            </a:r>
+          </a:p>
+        </p:txBody>
+      </p:sp>
+      <p:sp>
+        <p:nvSpPr>
+          <p:cNvPr id="12" name="Oval 11"/>
+          <p:cNvSpPr/>
+          <p:nvPr/>
+        </p:nvSpPr>
+        <p:spPr>
+          <a:xfrm>
+            <a:off x="14081760" y="2340864"/>
+            <a:ext cx="256032" cy="256032"/>
+          </a:xfrm>
+          <a:prstGeom prst="ellipse">
+            <a:avLst/>
+          </a:prstGeom>
+          <a:solidFill>
+            <a:srgbClr val="F1C40F"/>
+          </a:solidFill>
+          <a:ln>
+            <a:noFill/>
+          </a:ln>
+        </p:spPr>
+        <p:style>
+          <a:lnRef idx="1">
+            <a:schemeClr val="accent1"/>
+          </a:lnRef>
+          <a:fillRef idx="3">
+            <a:schemeClr val="accent1"/>
+          </a:fillRef>
+          <a:effectRef idx="2">
+            <a:schemeClr val="accent1"/>
+          </a:effectRef>
+          <a:fontRef idx="minor">
+            <a:schemeClr val="lt1"/>
+          </a:fontRef>
+        </p:style>
+        <p:txBody>
+          <a:bodyPr rtlCol="0" anchor="ctr"/>
+          <a:lstStyle/>
+          <a:p>
+            <a:pPr algn="ctr"/>
+          </a:p>
+        </p:txBody>
+      </p:sp>
+      <p:sp>
+        <p:nvSpPr>
+          <p:cNvPr id="13" name="TextBox 12"/>
+          <p:cNvSpPr txBox="1"/>
+          <p:nvPr/>
+        </p:nvSpPr>
+        <p:spPr>
+          <a:xfrm>
+            <a:off x="14493240" y="2286000"/>
+            <a:ext cx="1645920" cy="365760"/>
+          </a:xfrm>
+          <a:prstGeom prst="rect">
+            <a:avLst/>
+          </a:prstGeom>
+          <a:noFill/>
+        </p:spPr>
+        <p:txBody>
+          <a:bodyPr wrap="square">
+            <a:spAutoFit/>
+          </a:bodyPr>
+          <a:lstStyle/>
+          <a:p>
+            <a:pPr algn="l"/>
+            <a:r>
+              <a:rPr sz="1300" b="1">
+                <a:solidFill>
+                  <a:srgbClr val="000000"/>
+                </a:solidFill>
+              </a:rPr>
+              <a:t>FT mean gain</a:t>
+            </a:r>
+          </a:p>
+        </p:txBody>
+      </p:sp>
+      <p:sp>
+        <p:nvSpPr>
+          <p:cNvPr id="14" name="TextBox 13"/>
+          <p:cNvSpPr txBox="1"/>
+          <p:nvPr/>
+        </p:nvSpPr>
+        <p:spPr>
+          <a:xfrm>
+            <a:off x="16184880" y="2286000"/>
+            <a:ext cx="2286000" cy="365760"/>
+          </a:xfrm>
+          <a:prstGeom prst="rect">
+            <a:avLst/>
+          </a:prstGeom>
+          <a:noFill/>
+        </p:spPr>
+        <p:txBody>
+          <a:bodyPr wrap="square">
+            <a:spAutoFit/>
+          </a:bodyPr>
+          <a:lstStyle/>
+          <a:p>
+            <a:pPr algn="l"/>
+            <a:r>
+              <a:rPr sz="1100" b="0">
+                <a:solidFill>
+                  <a:srgbClr val="F1C40F"/>
+                </a:solidFill>
+              </a:rPr>
+              <a:t>+0.0078 BA</a:t>
+            </a:r>
+          </a:p>
+        </p:txBody>
+      </p:sp>
+      <p:sp>
+        <p:nvSpPr>
+          <p:cNvPr id="15" name="Oval 14"/>
+          <p:cNvSpPr/>
+          <p:nvPr/>
+        </p:nvSpPr>
+        <p:spPr>
+          <a:xfrm>
+            <a:off x="14081760" y="2798064"/>
+            <a:ext cx="256032" cy="256032"/>
+          </a:xfrm>
+          <a:prstGeom prst="ellipse">
+            <a:avLst/>
+          </a:prstGeom>
+          <a:solidFill>
+            <a:srgbClr val="F1C40F"/>
+          </a:solidFill>
+          <a:ln>
+            <a:noFill/>
+          </a:ln>
+        </p:spPr>
+        <p:style>
+          <a:lnRef idx="1">
+            <a:schemeClr val="accent1"/>
+          </a:lnRef>
+          <a:fillRef idx="3">
+            <a:schemeClr val="accent1"/>
+          </a:fillRef>
+          <a:effectRef idx="2">
+            <a:schemeClr val="accent1"/>
+          </a:effectRef>
+          <a:fontRef idx="minor">
+            <a:schemeClr val="lt1"/>
+          </a:fontRef>
+        </p:style>
+        <p:txBody>
+          <a:bodyPr rtlCol="0" anchor="ctr"/>
+          <a:lstStyle/>
+          <a:p>
+            <a:pPr algn="ctr"/>
+          </a:p>
+        </p:txBody>
+      </p:sp>
+      <p:sp>
+        <p:nvSpPr>
+          <p:cNvPr id="16" name="TextBox 15"/>
+          <p:cNvSpPr txBox="1"/>
+          <p:nvPr/>
+        </p:nvSpPr>
+        <p:spPr>
+          <a:xfrm>
+            <a:off x="14493240" y="2743200"/>
+            <a:ext cx="1645920" cy="365760"/>
+          </a:xfrm>
+          <a:prstGeom prst="rect">
+            <a:avLst/>
+          </a:prstGeom>
+          <a:noFill/>
+        </p:spPr>
+        <p:txBody>
+          <a:bodyPr wrap="square">
+            <a:spAutoFit/>
+          </a:bodyPr>
+          <a:lstStyle/>
+          <a:p>
+            <a:pPr algn="l"/>
+            <a:r>
+              <a:rPr sz="1300" b="1">
+                <a:solidFill>
+                  <a:srgbClr val="000000"/>
+                </a:solidFill>
+              </a:rPr>
+              <a:t>FT best-of gain</a:t>
+            </a:r>
+          </a:p>
+        </p:txBody>
+      </p:sp>
+      <p:sp>
+        <p:nvSpPr>
+          <p:cNvPr id="17" name="TextBox 16"/>
+          <p:cNvSpPr txBox="1"/>
+          <p:nvPr/>
+        </p:nvSpPr>
+        <p:spPr>
+          <a:xfrm>
+            <a:off x="16184880" y="2743200"/>
+            <a:ext cx="2286000" cy="365760"/>
+          </a:xfrm>
+          <a:prstGeom prst="rect">
+            <a:avLst/>
+          </a:prstGeom>
+          <a:noFill/>
+        </p:spPr>
+        <p:txBody>
+          <a:bodyPr wrap="square">
+            <a:spAutoFit/>
+          </a:bodyPr>
+          <a:lstStyle/>
+          <a:p>
+            <a:pPr algn="l"/>
+            <a:r>
+              <a:rPr sz="1100" b="0">
+                <a:solidFill>
+                  <a:srgbClr val="F1C40F"/>
+                </a:solidFill>
+              </a:rPr>
+              <a:t>+0.0097 BA</a:t>
+            </a:r>
+          </a:p>
+        </p:txBody>
+      </p:sp>
+      <p:sp>
+        <p:nvSpPr>
+          <p:cNvPr id="18" name="Rectangle 17"/>
+          <p:cNvSpPr/>
+          <p:nvPr/>
+        </p:nvSpPr>
+        <p:spPr>
+          <a:xfrm>
+            <a:off x="14081760" y="3337560"/>
+            <a:ext cx="4297680" cy="13716"/>
+          </a:xfrm>
+          <a:prstGeom prst="rect">
+            <a:avLst/>
+          </a:prstGeom>
+          <a:solidFill>
+            <a:srgbClr val="C8C8C8"/>
+          </a:solidFill>
+          <a:ln>
+            <a:noFill/>
+          </a:ln>
+        </p:spPr>
+        <p:style>
+          <a:lnRef idx="1">
+            <a:schemeClr val="accent1"/>
+          </a:lnRef>
+          <a:fillRef idx="3">
+            <a:schemeClr val="accent1"/>
+          </a:fillRef>
+          <a:effectRef idx="2">
+            <a:schemeClr val="accent1"/>
+          </a:effectRef>
+          <a:fontRef idx="minor">
+            <a:schemeClr val="lt1"/>
+          </a:fontRef>
+        </p:style>
+        <p:txBody>
+          <a:bodyPr rtlCol="0" anchor="ctr"/>
+          <a:lstStyle/>
+          <a:p>
+            <a:pPr algn="ctr"/>
+          </a:p>
+        </p:txBody>
+      </p:sp>
+      <p:sp>
+        <p:nvSpPr>
+          <p:cNvPr id="19" name="TextBox 18"/>
+          <p:cNvSpPr txBox="1"/>
+          <p:nvPr/>
+        </p:nvSpPr>
+        <p:spPr>
+          <a:xfrm>
+            <a:off x="14173200" y="3611879"/>
+            <a:ext cx="4114800" cy="365760"/>
+          </a:xfrm>
+          <a:prstGeom prst="rect">
+            <a:avLst/>
+          </a:prstGeom>
+          <a:noFill/>
+        </p:spPr>
+        <p:txBody>
+          <a:bodyPr wrap="square">
+            <a:spAutoFit/>
+          </a:bodyPr>
+          <a:lstStyle/>
+          <a:p>
+            <a:pPr algn="l"/>
+            <a:r>
+              <a:rPr sz="1400" b="1">
+                <a:solidFill>
+                  <a:srgbClr val="27AE60"/>
+                </a:solidFill>
+              </a:rPr>
+              <a:t>Main evidence: LP (frozen backbone)</a:t>
+            </a:r>
+          </a:p>
+        </p:txBody>
+      </p:sp>
+      <p:sp>
+        <p:nvSpPr>
+          <p:cNvPr id="20" name="TextBox 19"/>
+          <p:cNvSpPr txBox="1"/>
+          <p:nvPr/>
+        </p:nvSpPr>
+        <p:spPr>
+          <a:xfrm>
+            <a:off x="14173200" y="4023359"/>
+            <a:ext cx="4114800" cy="365760"/>
+          </a:xfrm>
+          <a:prstGeom prst="rect">
+            <a:avLst/>
+          </a:prstGeom>
+          <a:noFill/>
+        </p:spPr>
+        <p:txBody>
+          <a:bodyPr wrap="square">
+            <a:spAutoFit/>
+          </a:bodyPr>
+          <a:lstStyle/>
+          <a:p>
+            <a:pPr algn="l"/>
+            <a:r>
+              <a:rPr sz="1400" b="1">
+                <a:solidFill>
+                  <a:srgbClr val="F1C40F"/>
+                </a:solidFill>
+              </a:rPr>
+              <a:t>Supporting: FT (end-to-end)</a:t>
+            </a:r>
+          </a:p>
+        </p:txBody>
+      </p:sp>
+      <p:sp>
+        <p:nvSpPr>
+          <p:cNvPr id="21" name="TextBox 20"/>
+          <p:cNvSpPr txBox="1"/>
+          <p:nvPr/>
+        </p:nvSpPr>
+        <p:spPr>
+          <a:xfrm>
+            <a:off x="13990320" y="4709159"/>
+            <a:ext cx="4480560" cy="457200"/>
+          </a:xfrm>
+          <a:prstGeom prst="rect">
+            <a:avLst/>
+          </a:prstGeom>
+          <a:noFill/>
+        </p:spPr>
+        <p:txBody>
+          <a:bodyPr wrap="square">
+            <a:spAutoFit/>
+          </a:bodyPr>
+          <a:lstStyle/>
+          <a:p>
+            <a:pPr algn="ctr"/>
+            <a:r>
+              <a:rPr sz="1300" b="0">
+                <a:solidFill>
+                  <a:srgbClr val="145A32"/>
+                </a:solidFill>
+              </a:rPr>
+              <a:t>NeuroGate: supplementing frozen foundation embeddings (LP).</a:t>
+            </a:r>
+          </a:p>
+        </p:txBody>
+      </p:sp>
+    </p:spTree>
+  </p:cSld>
+  <p:clrMapOvr>
+    <a:masterClrMapping/>
+  </p:clrMapOvr>
+</p:sld>
+</file>
+
+<file path=ppt/slides/slide6.xml><?xml version="1.0" encoding="utf-8"?>
+<p:sld xmlns:a="http://schemas.openxmlformats.org/drawingml/2006/main" xmlns:p="http://schemas.openxmlformats.org/presentationml/2006/main" xmlns:r="http://schemas.openxmlformats.org/officeDocument/2006/relationships">
+  <p:cSld>
+    <p:spTree>
+      <p:nvGrpSpPr>
+        <p:cNvPr id="1" name=""/>
+        <p:cNvGrpSpPr/>
+        <p:nvPr/>
+      </p:nvGrpSpPr>
+      <p:grpSpPr/>
+      <p:sp>
+        <p:nvSpPr>
+          <p:cNvPr id="2" name="TextBox 1"/>
+          <p:cNvSpPr txBox="1"/>
+          <p:nvPr/>
+        </p:nvSpPr>
+        <p:spPr>
+          <a:xfrm>
+            <a:off x="457200" y="137160"/>
+            <a:ext cx="18288000" cy="411480"/>
+          </a:xfrm>
+          <a:prstGeom prst="rect">
+            <a:avLst/>
+          </a:prstGeom>
+          <a:noFill/>
+        </p:spPr>
+        <p:txBody>
+          <a:bodyPr wrap="square">
+            <a:spAutoFit/>
+          </a:bodyPr>
+          <a:lstStyle/>
+          <a:p>
+            <a:pPr algn="l"/>
+            <a:r>
+              <a:rPr sz="2000" b="1">
+                <a:solidFill>
+                  <a:srgbClr val="000000"/>
+                </a:solidFill>
+              </a:rPr>
+              <a:t>Table 6: EEG Conformer Reproduction on BCICIV2a (Per-Subject Accuracy %)</a:t>
+            </a:r>
+          </a:p>
+        </p:txBody>
+      </p:sp>
+      <p:graphicFrame>
+        <p:nvGraphicFramePr>
+          <p:cNvPr id="3" name="Table 2"/>
+          <p:cNvGraphicFramePr>
+            <a:graphicFrameLocks noGrp="1"/>
+          </p:cNvGraphicFramePr>
+          <p:nvPr/>
+        </p:nvGraphicFramePr>
+        <p:xfrm>
+          <a:off x="274320" y="731520"/>
+          <a:ext cx="10195560" cy="1508760"/>
+        </p:xfrm>
+        <a:graphic>
+          <a:graphicData uri="http://schemas.openxmlformats.org/drawingml/2006/table">
+            <a:tbl>
+              <a:tblPr firstRow="1" bandRow="1">
+                <a:tableStyleId>{5C22544A-7EE6-4342-B048-85BDC9FD1C3A}</a:tableStyleId>
+              </a:tblPr>
+              <a:tblGrid>
+                <a:gridCol w="2286000"/>
+                <a:gridCol w="777240"/>
+                <a:gridCol w="777240"/>
+                <a:gridCol w="777240"/>
+                <a:gridCol w="777240"/>
+                <a:gridCol w="777240"/>
+                <a:gridCol w="777240"/>
+                <a:gridCol w="777240"/>
+                <a:gridCol w="777240"/>
+                <a:gridCol w="777240"/>
+                <a:gridCol w="914400"/>
+              </a:tblGrid>
+              <a:tr h="502920">
+                <a:tc>
+                  <a:txBody>
+                    <a:bodyPr/>
+                    <a:lstStyle/>
+                    <a:p>
+                      <a:pPr algn="ctr"/>
+                      <a:r>
+                        <a:rPr sz="1000" b="1">
+                          <a:solidFill>
+                            <a:srgbClr val="FFFFFF"/>
+                          </a:solidFill>
+                        </a:rPr>
+                        <a:t>Model</a:t>
+                      </a:r>
+                    </a:p>
+                  </a:txBody>
+                  <a:tcPr>
+                    <a:solidFill>
+                      <a:srgbClr val="3C3C3C"/>
+                    </a:solidFill>
+                  </a:tcPr>
+                </a:tc>
+                <a:tc>
+                  <a:txBody>
+                    <a:bodyPr/>
+                    <a:lstStyle/>
+                    <a:p>
+                      <a:pPr algn="ctr"/>
+                      <a:r>
+                        <a:rPr sz="1000" b="1">
+                          <a:solidFill>
+                            <a:srgbClr val="FFFFFF"/>
+                          </a:solidFill>
+                        </a:rPr>
+                        <a:t>S01</a:t>
+                      </a:r>
+                    </a:p>
+                  </a:txBody>
+                  <a:tcPr>
+                    <a:solidFill>
+                      <a:srgbClr val="3C3C3C"/>
+                    </a:solidFill>
+                  </a:tcPr>
+                </a:tc>
+                <a:tc>
+                  <a:txBody>
+                    <a:bodyPr/>
+                    <a:lstStyle/>
+                    <a:p>
+                      <a:pPr algn="ctr"/>
+                      <a:r>
+                        <a:rPr sz="1000" b="1">
+                          <a:solidFill>
+                            <a:srgbClr val="FFFFFF"/>
+                          </a:solidFill>
+                        </a:rPr>
+                        <a:t>S02</a:t>
+                      </a:r>
+                    </a:p>
+                  </a:txBody>
+                  <a:tcPr>
+                    <a:solidFill>
+                      <a:srgbClr val="3C3C3C"/>
+                    </a:solidFill>
+                  </a:tcPr>
+                </a:tc>
+                <a:tc>
+                  <a:txBody>
+                    <a:bodyPr/>
+                    <a:lstStyle/>
+                    <a:p>
+                      <a:pPr algn="ctr"/>
+                      <a:r>
+                        <a:rPr sz="1000" b="1">
+                          <a:solidFill>
+                            <a:srgbClr val="FFFFFF"/>
+                          </a:solidFill>
+                        </a:rPr>
+                        <a:t>S03</a:t>
+                      </a:r>
+                    </a:p>
+                  </a:txBody>
+                  <a:tcPr>
+                    <a:solidFill>
+                      <a:srgbClr val="3C3C3C"/>
+                    </a:solidFill>
+                  </a:tcPr>
+                </a:tc>
+                <a:tc>
+                  <a:txBody>
+                    <a:bodyPr/>
+                    <a:lstStyle/>
+                    <a:p>
+                      <a:pPr algn="ctr"/>
+                      <a:r>
+                        <a:rPr sz="1000" b="1">
+                          <a:solidFill>
+                            <a:srgbClr val="FFFFFF"/>
+                          </a:solidFill>
+                        </a:rPr>
+                        <a:t>S04</a:t>
+                      </a:r>
+                    </a:p>
+                  </a:txBody>
+                  <a:tcPr>
+                    <a:solidFill>
+                      <a:srgbClr val="3C3C3C"/>
+                    </a:solidFill>
+                  </a:tcPr>
+                </a:tc>
+                <a:tc>
+                  <a:txBody>
+                    <a:bodyPr/>
+                    <a:lstStyle/>
+                    <a:p>
+                      <a:pPr algn="ctr"/>
+                      <a:r>
+                        <a:rPr sz="1000" b="1">
+                          <a:solidFill>
+                            <a:srgbClr val="FFFFFF"/>
+                          </a:solidFill>
+                        </a:rPr>
+                        <a:t>S05</a:t>
+                      </a:r>
+                    </a:p>
+                  </a:txBody>
+                  <a:tcPr>
+                    <a:solidFill>
+                      <a:srgbClr val="3C3C3C"/>
+                    </a:solidFill>
+                  </a:tcPr>
+                </a:tc>
+                <a:tc>
+                  <a:txBody>
+                    <a:bodyPr/>
+                    <a:lstStyle/>
+                    <a:p>
+                      <a:pPr algn="ctr"/>
+                      <a:r>
+                        <a:rPr sz="1000" b="1">
+                          <a:solidFill>
+                            <a:srgbClr val="FFFFFF"/>
+                          </a:solidFill>
+                        </a:rPr>
+                        <a:t>S06</a:t>
+                      </a:r>
+                    </a:p>
+                  </a:txBody>
+                  <a:tcPr>
+                    <a:solidFill>
+                      <a:srgbClr val="3C3C3C"/>
+                    </a:solidFill>
+                  </a:tcPr>
+                </a:tc>
+                <a:tc>
+                  <a:txBody>
+                    <a:bodyPr/>
+                    <a:lstStyle/>
+                    <a:p>
+                      <a:pPr algn="ctr"/>
+                      <a:r>
+                        <a:rPr sz="1000" b="1">
+                          <a:solidFill>
+                            <a:srgbClr val="FFFFFF"/>
+                          </a:solidFill>
+                        </a:rPr>
+                        <a:t>S07</a:t>
+                      </a:r>
+                    </a:p>
+                  </a:txBody>
+                  <a:tcPr>
+                    <a:solidFill>
+                      <a:srgbClr val="3C3C3C"/>
+                    </a:solidFill>
+                  </a:tcPr>
+                </a:tc>
+                <a:tc>
+                  <a:txBody>
+                    <a:bodyPr/>
+                    <a:lstStyle/>
+                    <a:p>
+                      <a:pPr algn="ctr"/>
+                      <a:r>
+                        <a:rPr sz="1000" b="1">
+                          <a:solidFill>
+                            <a:srgbClr val="FFFFFF"/>
+                          </a:solidFill>
+                        </a:rPr>
+                        <a:t>S08</a:t>
+                      </a:r>
+                    </a:p>
+                  </a:txBody>
+                  <a:tcPr>
+                    <a:solidFill>
+                      <a:srgbClr val="3C3C3C"/>
+                    </a:solidFill>
+                  </a:tcPr>
+                </a:tc>
+                <a:tc>
+                  <a:txBody>
+                    <a:bodyPr/>
+                    <a:lstStyle/>
+                    <a:p>
+                      <a:pPr algn="ctr"/>
+                      <a:r>
+                        <a:rPr sz="1000" b="1">
+                          <a:solidFill>
+                            <a:srgbClr val="FFFFFF"/>
+                          </a:solidFill>
+                        </a:rPr>
+                        <a:t>S09</a:t>
+                      </a:r>
+                    </a:p>
+                  </a:txBody>
+                  <a:tcPr>
+                    <a:solidFill>
+                      <a:srgbClr val="3C3C3C"/>
+                    </a:solidFill>
+                  </a:tcPr>
+                </a:tc>
+                <a:tc>
+                  <a:txBody>
+                    <a:bodyPr/>
+                    <a:lstStyle/>
+                    <a:p>
+                      <a:pPr algn="ctr"/>
+                      <a:r>
+                        <a:rPr sz="1000" b="1">
+                          <a:solidFill>
+                            <a:srgbClr val="FFFFFF"/>
+                          </a:solidFill>
+                        </a:rPr>
+                        <a:t>Average</a:t>
+                      </a:r>
+                    </a:p>
+                  </a:txBody>
+                  <a:tcPr>
+                    <a:solidFill>
+                      <a:srgbClr val="3C3C3C"/>
+                    </a:solidFill>
+                  </a:tcPr>
+                </a:tc>
+              </a:tr>
+              <a:tr h="502920">
+                <a:tc>
+                  <a:txBody>
+                    <a:bodyPr/>
+                    <a:lstStyle/>
+                    <a:p>
+                      <a:pPr algn="l"/>
+                      <a:r>
+                        <a:rPr sz="1000" b="0">
+                          <a:solidFill>
+                            <a:srgbClr val="000000"/>
+                          </a:solidFill>
+                        </a:rPr>
+                        <a:t>EEG Conformer</a:t>
+                      </a:r>
+                    </a:p>
+                  </a:txBody>
+                  <a:tcPr>
+                    <a:solidFill>
+                      <a:srgbClr val="FFFFFF"/>
+                    </a:solidFill>
+                  </a:tcPr>
+                </a:tc>
+                <a:tc>
+                  <a:txBody>
+                    <a:bodyPr/>
+                    <a:lstStyle/>
+                    <a:p>
+                      <a:pPr algn="ctr"/>
+                      <a:r>
+                        <a:rPr sz="1000" b="0">
+                          <a:solidFill>
+                            <a:srgbClr val="000000"/>
+                          </a:solidFill>
+                        </a:rPr>
+                        <a:t>88.19</a:t>
+                      </a:r>
+                    </a:p>
+                  </a:txBody>
+                  <a:tcPr>
+                    <a:solidFill>
+                      <a:srgbClr val="FFFFFF"/>
+                    </a:solidFill>
+                  </a:tcPr>
+                </a:tc>
+                <a:tc>
+                  <a:txBody>
+                    <a:bodyPr/>
+                    <a:lstStyle/>
+                    <a:p>
+                      <a:pPr algn="ctr"/>
+                      <a:r>
+                        <a:rPr sz="1000" b="0">
+                          <a:solidFill>
+                            <a:srgbClr val="000000"/>
+                          </a:solidFill>
+                        </a:rPr>
+                        <a:t>61.46</a:t>
+                      </a:r>
+                    </a:p>
+                  </a:txBody>
+                  <a:tcPr>
+                    <a:solidFill>
+                      <a:srgbClr val="FFFFFF"/>
+                    </a:solidFill>
+                  </a:tcPr>
+                </a:tc>
+                <a:tc>
+                  <a:txBody>
+                    <a:bodyPr/>
+                    <a:lstStyle/>
+                    <a:p>
+                      <a:pPr algn="ctr"/>
+                      <a:r>
+                        <a:rPr sz="1000" b="0">
+                          <a:solidFill>
+                            <a:srgbClr val="000000"/>
+                          </a:solidFill>
+                        </a:rPr>
+                        <a:t>93.40</a:t>
+                      </a:r>
+                    </a:p>
+                  </a:txBody>
+                  <a:tcPr>
+                    <a:solidFill>
+                      <a:srgbClr val="FFFFFF"/>
+                    </a:solidFill>
+                  </a:tcPr>
+                </a:tc>
+                <a:tc>
+                  <a:txBody>
+                    <a:bodyPr/>
+                    <a:lstStyle/>
+                    <a:p>
+                      <a:pPr algn="ctr"/>
+                      <a:r>
+                        <a:rPr sz="1000" b="0">
+                          <a:solidFill>
+                            <a:srgbClr val="000000"/>
+                          </a:solidFill>
+                        </a:rPr>
+                        <a:t>78.13</a:t>
+                      </a:r>
+                    </a:p>
+                  </a:txBody>
+                  <a:tcPr>
+                    <a:solidFill>
+                      <a:srgbClr val="FFFFFF"/>
+                    </a:solidFill>
+                  </a:tcPr>
+                </a:tc>
+                <a:tc>
+                  <a:txBody>
+                    <a:bodyPr/>
+                    <a:lstStyle/>
+                    <a:p>
+                      <a:pPr algn="ctr"/>
+                      <a:r>
+                        <a:rPr sz="1000" b="0">
+                          <a:solidFill>
+                            <a:srgbClr val="000000"/>
+                          </a:solidFill>
+                        </a:rPr>
+                        <a:t>52.08</a:t>
+                      </a:r>
+                    </a:p>
+                  </a:txBody>
+                  <a:tcPr>
+                    <a:solidFill>
+                      <a:srgbClr val="FFFFFF"/>
+                    </a:solidFill>
+                  </a:tcPr>
+                </a:tc>
+                <a:tc>
+                  <a:txBody>
+                    <a:bodyPr/>
+                    <a:lstStyle/>
+                    <a:p>
+                      <a:pPr algn="ctr"/>
+                      <a:r>
+                        <a:rPr sz="1000" b="0">
+                          <a:solidFill>
+                            <a:srgbClr val="000000"/>
+                          </a:solidFill>
+                        </a:rPr>
+                        <a:t>65.28</a:t>
+                      </a:r>
+                    </a:p>
+                  </a:txBody>
+                  <a:tcPr>
+                    <a:solidFill>
+                      <a:srgbClr val="FFFFFF"/>
+                    </a:solidFill>
+                  </a:tcPr>
+                </a:tc>
+                <a:tc>
+                  <a:txBody>
+                    <a:bodyPr/>
+                    <a:lstStyle/>
+                    <a:p>
+                      <a:pPr algn="ctr"/>
+                      <a:r>
+                        <a:rPr sz="1000" b="0">
+                          <a:solidFill>
+                            <a:srgbClr val="000000"/>
+                          </a:solidFill>
+                        </a:rPr>
+                        <a:t>92.36</a:t>
+                      </a:r>
+                    </a:p>
+                  </a:txBody>
+                  <a:tcPr>
+                    <a:solidFill>
+                      <a:srgbClr val="FFFFFF"/>
+                    </a:solidFill>
+                  </a:tcPr>
+                </a:tc>
+                <a:tc>
+                  <a:txBody>
+                    <a:bodyPr/>
+                    <a:lstStyle/>
+                    <a:p>
+                      <a:pPr algn="ctr"/>
+                      <a:r>
+                        <a:rPr sz="1000" b="0">
+                          <a:solidFill>
+                            <a:srgbClr val="000000"/>
+                          </a:solidFill>
+                        </a:rPr>
+                        <a:t>88.19</a:t>
+                      </a:r>
+                    </a:p>
+                  </a:txBody>
+                  <a:tcPr>
+                    <a:solidFill>
+                      <a:srgbClr val="FFFFFF"/>
+                    </a:solidFill>
+                  </a:tcPr>
+                </a:tc>
+                <a:tc>
+                  <a:txBody>
+                    <a:bodyPr/>
+                    <a:lstStyle/>
+                    <a:p>
+                      <a:pPr algn="ctr"/>
+                      <a:r>
+                        <a:rPr sz="1000" b="0">
+                          <a:solidFill>
+                            <a:srgbClr val="000000"/>
+                          </a:solidFill>
+                        </a:rPr>
+                        <a:t>88.89</a:t>
+                      </a:r>
+                    </a:p>
+                  </a:txBody>
+                  <a:tcPr>
+                    <a:solidFill>
+                      <a:srgbClr val="FFFFFF"/>
+                    </a:solidFill>
+                  </a:tcPr>
+                </a:tc>
+                <a:tc>
+                  <a:txBody>
+                    <a:bodyPr/>
+                    <a:lstStyle/>
+                    <a:p>
+                      <a:pPr algn="ctr"/>
+                      <a:r>
+                        <a:rPr sz="1000" b="0">
+                          <a:solidFill>
+                            <a:srgbClr val="000000"/>
+                          </a:solidFill>
+                        </a:rPr>
+                        <a:t>78.66</a:t>
+                      </a:r>
+                    </a:p>
+                  </a:txBody>
+                  <a:tcPr>
+                    <a:solidFill>
+                      <a:srgbClr val="FFFFFF"/>
+                    </a:solidFill>
+                  </a:tcPr>
+                </a:tc>
+              </a:tr>
+              <a:tr h="502920">
+                <a:tc>
+                  <a:txBody>
+                    <a:bodyPr/>
+                    <a:lstStyle/>
+                    <a:p>
+                      <a:pPr algn="l"/>
+                      <a:r>
+                        <a:rPr sz="1000" b="0">
+                          <a:solidFill>
+                            <a:srgbClr val="000000"/>
+                          </a:solidFill>
+                        </a:rPr>
+                        <a:t>w/o Transformer</a:t>
+                      </a:r>
+                    </a:p>
+                  </a:txBody>
+                  <a:tcPr>
+                    <a:solidFill>
+                      <a:srgbClr val="FFFFFF"/>
+                    </a:solidFill>
+                  </a:tcPr>
+                </a:tc>
+                <a:tc>
+                  <a:txBody>
+                    <a:bodyPr/>
+                    <a:lstStyle/>
+                    <a:p>
+                      <a:pPr algn="ctr"/>
+                      <a:r>
+                        <a:rPr sz="1000" b="0">
+                          <a:solidFill>
+                            <a:srgbClr val="000000"/>
+                          </a:solidFill>
+                        </a:rPr>
+                        <a:t>75.34</a:t>
+                      </a:r>
+                    </a:p>
+                  </a:txBody>
+                  <a:tcPr>
+                    <a:solidFill>
+                      <a:srgbClr val="FFFFFF"/>
+                    </a:solidFill>
+                  </a:tcPr>
+                </a:tc>
+                <a:tc>
+                  <a:txBody>
+                    <a:bodyPr/>
+                    <a:lstStyle/>
+                    <a:p>
+                      <a:pPr algn="ctr"/>
+                      <a:r>
+                        <a:rPr sz="1000" b="0">
+                          <a:solidFill>
+                            <a:srgbClr val="000000"/>
+                          </a:solidFill>
+                        </a:rPr>
+                        <a:t>42.01</a:t>
+                      </a:r>
+                    </a:p>
+                  </a:txBody>
+                  <a:tcPr>
+                    <a:solidFill>
+                      <a:srgbClr val="FFFFFF"/>
+                    </a:solidFill>
+                  </a:tcPr>
+                </a:tc>
+                <a:tc>
+                  <a:txBody>
+                    <a:bodyPr/>
+                    <a:lstStyle/>
+                    <a:p>
+                      <a:pPr algn="ctr"/>
+                      <a:r>
+                        <a:rPr sz="1000" b="0">
+                          <a:solidFill>
+                            <a:srgbClr val="000000"/>
+                          </a:solidFill>
+                        </a:rPr>
+                        <a:t>83.33</a:t>
+                      </a:r>
+                    </a:p>
+                  </a:txBody>
+                  <a:tcPr>
+                    <a:solidFill>
+                      <a:srgbClr val="FFFFFF"/>
+                    </a:solidFill>
+                  </a:tcPr>
+                </a:tc>
+                <a:tc>
+                  <a:txBody>
+                    <a:bodyPr/>
+                    <a:lstStyle/>
+                    <a:p>
+                      <a:pPr algn="ctr"/>
+                      <a:r>
+                        <a:rPr sz="1000" b="0">
+                          <a:solidFill>
+                            <a:srgbClr val="000000"/>
+                          </a:solidFill>
+                        </a:rPr>
+                        <a:t>28.47</a:t>
+                      </a:r>
+                    </a:p>
+                  </a:txBody>
+                  <a:tcPr>
+                    <a:solidFill>
+                      <a:srgbClr val="FFFFFF"/>
+                    </a:solidFill>
+                  </a:tcPr>
+                </a:tc>
+                <a:tc>
+                  <a:txBody>
+                    <a:bodyPr/>
+                    <a:lstStyle/>
+                    <a:p>
+                      <a:pPr algn="ctr"/>
+                      <a:r>
+                        <a:rPr sz="1000" b="0">
+                          <a:solidFill>
+                            <a:srgbClr val="000000"/>
+                          </a:solidFill>
+                        </a:rPr>
+                        <a:t>47.91</a:t>
+                      </a:r>
+                    </a:p>
+                  </a:txBody>
+                  <a:tcPr>
+                    <a:solidFill>
+                      <a:srgbClr val="FFFFFF"/>
+                    </a:solidFill>
+                  </a:tcPr>
+                </a:tc>
+                <a:tc>
+                  <a:txBody>
+                    <a:bodyPr/>
+                    <a:lstStyle/>
+                    <a:p>
+                      <a:pPr algn="ctr"/>
+                      <a:r>
+                        <a:rPr sz="1000" b="0">
+                          <a:solidFill>
+                            <a:srgbClr val="000000"/>
+                          </a:solidFill>
+                        </a:rPr>
+                        <a:t>58.68</a:t>
+                      </a:r>
+                    </a:p>
+                  </a:txBody>
+                  <a:tcPr>
+                    <a:solidFill>
+                      <a:srgbClr val="FFFFFF"/>
+                    </a:solidFill>
+                  </a:tcPr>
+                </a:tc>
+                <a:tc>
+                  <a:txBody>
+                    <a:bodyPr/>
+                    <a:lstStyle/>
+                    <a:p>
+                      <a:pPr algn="ctr"/>
+                      <a:r>
+                        <a:rPr sz="1000" b="0">
+                          <a:solidFill>
+                            <a:srgbClr val="000000"/>
+                          </a:solidFill>
+                        </a:rPr>
+                        <a:t>78.12</a:t>
+                      </a:r>
+                    </a:p>
+                  </a:txBody>
+                  <a:tcPr>
+                    <a:solidFill>
+                      <a:srgbClr val="FFFFFF"/>
+                    </a:solidFill>
+                  </a:tcPr>
+                </a:tc>
+                <a:tc>
+                  <a:txBody>
+                    <a:bodyPr/>
+                    <a:lstStyle/>
+                    <a:p>
+                      <a:pPr algn="ctr"/>
+                      <a:r>
+                        <a:rPr sz="1000" b="0">
+                          <a:solidFill>
+                            <a:srgbClr val="000000"/>
+                          </a:solidFill>
+                        </a:rPr>
+                        <a:t>76.04</a:t>
+                      </a:r>
+                    </a:p>
+                  </a:txBody>
+                  <a:tcPr>
+                    <a:solidFill>
+                      <a:srgbClr val="FFFFFF"/>
+                    </a:solidFill>
+                  </a:tcPr>
+                </a:tc>
+                <a:tc>
+                  <a:txBody>
+                    <a:bodyPr/>
+                    <a:lstStyle/>
+                    <a:p>
+                      <a:pPr algn="ctr"/>
+                      <a:r>
+                        <a:rPr sz="1000" b="0">
+                          <a:solidFill>
+                            <a:srgbClr val="000000"/>
+                          </a:solidFill>
+                        </a:rPr>
+                        <a:t>83.68</a:t>
+                      </a:r>
+                    </a:p>
+                  </a:txBody>
+                  <a:tcPr>
+                    <a:solidFill>
+                      <a:srgbClr val="FFFFFF"/>
+                    </a:solidFill>
+                  </a:tcPr>
+                </a:tc>
+                <a:tc>
+                  <a:txBody>
+                    <a:bodyPr/>
+                    <a:lstStyle/>
+                    <a:p>
+                      <a:pPr algn="ctr"/>
+                      <a:r>
+                        <a:rPr sz="1000" b="0">
+                          <a:solidFill>
+                            <a:srgbClr val="000000"/>
+                          </a:solidFill>
+                        </a:rPr>
+                        <a:t>63.73</a:t>
+                      </a:r>
+                    </a:p>
+                  </a:txBody>
+                  <a:tcPr>
+                    <a:solidFill>
+                      <a:srgbClr val="FFFFFF"/>
+                    </a:solidFill>
+                  </a:tcPr>
+                </a:tc>
+              </a:tr>
+            </a:tbl>
+          </a:graphicData>
+        </a:graphic>
+      </p:graphicFrame>
+      <p:sp>
+        <p:nvSpPr>
+          <p:cNvPr id="4" name="Rectangle 3"/>
+          <p:cNvSpPr/>
+          <p:nvPr/>
+        </p:nvSpPr>
+        <p:spPr>
+          <a:xfrm>
+            <a:off x="13716000" y="731520"/>
+            <a:ext cx="5029200" cy="5394960"/>
+          </a:xfrm>
+          <a:prstGeom prst="rect">
+            <a:avLst/>
+          </a:prstGeom>
+          <a:solidFill>
+            <a:srgbClr val="F0F0F0"/>
+          </a:solidFill>
+          <a:ln w="12700">
+            <a:solidFill>
+              <a:srgbClr val="C8C8C8"/>
+            </a:solidFill>
+          </a:ln>
+        </p:spPr>
+        <p:style>
+          <a:lnRef idx="1">
+            <a:schemeClr val="accent1"/>
+          </a:lnRef>
+          <a:fillRef idx="3">
+            <a:schemeClr val="accent1"/>
+          </a:fillRef>
+          <a:effectRef idx="2">
+            <a:schemeClr val="accent1"/>
+          </a:effectRef>
+          <a:fontRef idx="minor">
+            <a:schemeClr val="lt1"/>
+          </a:fontRef>
+        </p:style>
+        <p:txBody>
+          <a:bodyPr rtlCol="0" anchor="ctr"/>
+          <a:lstStyle/>
+          <a:p>
+            <a:pPr algn="ctr"/>
+          </a:p>
+        </p:txBody>
+      </p:sp>
+      <p:sp>
+        <p:nvSpPr>
+          <p:cNvPr id="5" name="TextBox 4"/>
+          <p:cNvSpPr txBox="1"/>
+          <p:nvPr/>
+        </p:nvSpPr>
+        <p:spPr>
+          <a:xfrm>
+            <a:off x="13990320" y="868680"/>
+            <a:ext cx="4480560" cy="411480"/>
+          </a:xfrm>
+          <a:prstGeom prst="rect">
+            <a:avLst/>
+          </a:prstGeom>
+          <a:noFill/>
+        </p:spPr>
+        <p:txBody>
+          <a:bodyPr wrap="square">
+            <a:spAutoFit/>
+          </a:bodyPr>
+          <a:lstStyle/>
+          <a:p>
+            <a:pPr algn="ctr"/>
+            <a:r>
+              <a:rPr sz="1800" b="1">
+                <a:solidFill>
+                  <a:srgbClr val="000000"/>
+                </a:solidFill>
+              </a:rPr>
+              <a:t>Ablation</a:t>
+            </a:r>
+          </a:p>
+        </p:txBody>
+      </p:sp>
+      <p:sp>
+        <p:nvSpPr>
+          <p:cNvPr id="6" name="Oval 5"/>
+          <p:cNvSpPr/>
+          <p:nvPr/>
+        </p:nvSpPr>
+        <p:spPr>
+          <a:xfrm>
+            <a:off x="14081760" y="1426464"/>
+            <a:ext cx="256032" cy="256032"/>
+          </a:xfrm>
+          <a:prstGeom prst="ellipse">
+            <a:avLst/>
+          </a:prstGeom>
+          <a:solidFill>
+            <a:srgbClr val="27AE60"/>
+          </a:solidFill>
+          <a:ln>
+            <a:noFill/>
+          </a:ln>
+        </p:spPr>
+        <p:style>
+          <a:lnRef idx="1">
+            <a:schemeClr val="accent1"/>
+          </a:lnRef>
+          <a:fillRef idx="3">
+            <a:schemeClr val="accent1"/>
+          </a:fillRef>
+          <a:effectRef idx="2">
+            <a:schemeClr val="accent1"/>
+          </a:effectRef>
+          <a:fontRef idx="minor">
+            <a:schemeClr val="lt1"/>
+          </a:fontRef>
+        </p:style>
+        <p:txBody>
+          <a:bodyPr rtlCol="0" anchor="ctr"/>
+          <a:lstStyle/>
+          <a:p>
+            <a:pPr algn="ctr"/>
+          </a:p>
+        </p:txBody>
+      </p:sp>
+      <p:sp>
+        <p:nvSpPr>
+          <p:cNvPr id="7" name="TextBox 6"/>
+          <p:cNvSpPr txBox="1"/>
+          <p:nvPr/>
+        </p:nvSpPr>
+        <p:spPr>
+          <a:xfrm>
+            <a:off x="14493240" y="1371600"/>
+            <a:ext cx="1645920" cy="365760"/>
+          </a:xfrm>
+          <a:prstGeom prst="rect">
+            <a:avLst/>
+          </a:prstGeom>
+          <a:noFill/>
+        </p:spPr>
+        <p:txBody>
+          <a:bodyPr wrap="square">
+            <a:spAutoFit/>
+          </a:bodyPr>
+          <a:lstStyle/>
+          <a:p>
+            <a:pPr algn="l"/>
+            <a:r>
+              <a:rPr sz="1300" b="1">
+                <a:solidFill>
+                  <a:srgbClr val="000000"/>
+                </a:solidFill>
+              </a:rPr>
+              <a:t>Full Conformer</a:t>
+            </a:r>
+          </a:p>
+        </p:txBody>
+      </p:sp>
+      <p:sp>
+        <p:nvSpPr>
+          <p:cNvPr id="8" name="TextBox 7"/>
+          <p:cNvSpPr txBox="1"/>
+          <p:nvPr/>
+        </p:nvSpPr>
+        <p:spPr>
+          <a:xfrm>
+            <a:off x="16184880" y="1371600"/>
+            <a:ext cx="2286000" cy="365760"/>
+          </a:xfrm>
+          <a:prstGeom prst="rect">
+            <a:avLst/>
+          </a:prstGeom>
+          <a:noFill/>
+        </p:spPr>
+        <p:txBody>
+          <a:bodyPr wrap="square">
+            <a:spAutoFit/>
+          </a:bodyPr>
+          <a:lstStyle/>
+          <a:p>
+            <a:pPr algn="l"/>
+            <a:r>
+              <a:rPr sz="1100" b="0">
+                <a:solidFill>
+                  <a:srgbClr val="27AE60"/>
+                </a:solidFill>
+              </a:rPr>
+              <a:t>Avg 78.66%</a:t>
+            </a:r>
+          </a:p>
+        </p:txBody>
+      </p:sp>
+      <p:sp>
+        <p:nvSpPr>
+          <p:cNvPr id="9" name="Oval 8"/>
+          <p:cNvSpPr/>
+          <p:nvPr/>
+        </p:nvSpPr>
+        <p:spPr>
+          <a:xfrm>
+            <a:off x="14081760" y="1883664"/>
+            <a:ext cx="256032" cy="256032"/>
+          </a:xfrm>
+          <a:prstGeom prst="ellipse">
+            <a:avLst/>
+          </a:prstGeom>
+          <a:solidFill>
+            <a:srgbClr val="E74C3C"/>
+          </a:solidFill>
+          <a:ln>
+            <a:noFill/>
+          </a:ln>
+        </p:spPr>
+        <p:style>
+          <a:lnRef idx="1">
+            <a:schemeClr val="accent1"/>
+          </a:lnRef>
+          <a:fillRef idx="3">
+            <a:schemeClr val="accent1"/>
+          </a:fillRef>
+          <a:effectRef idx="2">
+            <a:schemeClr val="accent1"/>
+          </a:effectRef>
+          <a:fontRef idx="minor">
+            <a:schemeClr val="lt1"/>
+          </a:fontRef>
+        </p:style>
+        <p:txBody>
+          <a:bodyPr rtlCol="0" anchor="ctr"/>
+          <a:lstStyle/>
+          <a:p>
+            <a:pPr algn="ctr"/>
+          </a:p>
+        </p:txBody>
+      </p:sp>
+      <p:sp>
+        <p:nvSpPr>
+          <p:cNvPr id="10" name="TextBox 9"/>
+          <p:cNvSpPr txBox="1"/>
+          <p:nvPr/>
+        </p:nvSpPr>
+        <p:spPr>
+          <a:xfrm>
+            <a:off x="14493240" y="1828800"/>
+            <a:ext cx="1645920" cy="365760"/>
+          </a:xfrm>
+          <a:prstGeom prst="rect">
+            <a:avLst/>
+          </a:prstGeom>
+          <a:noFill/>
+        </p:spPr>
+        <p:txBody>
+          <a:bodyPr wrap="square">
+            <a:spAutoFit/>
+          </a:bodyPr>
+          <a:lstStyle/>
+          <a:p>
+            <a:pPr algn="l"/>
+            <a:r>
+              <a:rPr sz="1300" b="1">
+                <a:solidFill>
+                  <a:srgbClr val="000000"/>
+                </a:solidFill>
+              </a:rPr>
+              <a:t>w/o Transformer</a:t>
+            </a:r>
+          </a:p>
+        </p:txBody>
+      </p:sp>
+      <p:sp>
+        <p:nvSpPr>
+          <p:cNvPr id="11" name="TextBox 10"/>
+          <p:cNvSpPr txBox="1"/>
+          <p:nvPr/>
+        </p:nvSpPr>
+        <p:spPr>
+          <a:xfrm>
+            <a:off x="16184880" y="1828800"/>
+            <a:ext cx="2286000" cy="365760"/>
+          </a:xfrm>
+          <a:prstGeom prst="rect">
+            <a:avLst/>
+          </a:prstGeom>
+          <a:noFill/>
+        </p:spPr>
+        <p:txBody>
+          <a:bodyPr wrap="square">
+            <a:spAutoFit/>
+          </a:bodyPr>
+          <a:lstStyle/>
+          <a:p>
+            <a:pPr algn="l"/>
+            <a:r>
+              <a:rPr sz="1100" b="0">
+                <a:solidFill>
+                  <a:srgbClr val="E74C3C"/>
+                </a:solidFill>
+              </a:rPr>
+              <a:t>Avg 63.73% (-14.93)</a:t>
+            </a:r>
+          </a:p>
+        </p:txBody>
+      </p:sp>
+      <p:sp>
+        <p:nvSpPr>
+          <p:cNvPr id="12" name="Oval 11"/>
+          <p:cNvSpPr/>
+          <p:nvPr/>
+        </p:nvSpPr>
+        <p:spPr>
+          <a:xfrm>
+            <a:off x="14081760" y="2340864"/>
+            <a:ext cx="256032" cy="256032"/>
+          </a:xfrm>
+          <a:prstGeom prst="ellipse">
+            <a:avLst/>
+          </a:prstGeom>
+          <a:solidFill>
+            <a:srgbClr val="E74C3C"/>
+          </a:solidFill>
+          <a:ln>
+            <a:noFill/>
+          </a:ln>
+        </p:spPr>
+        <p:style>
+          <a:lnRef idx="1">
+            <a:schemeClr val="accent1"/>
+          </a:lnRef>
+          <a:fillRef idx="3">
+            <a:schemeClr val="accent1"/>
+          </a:fillRef>
+          <a:effectRef idx="2">
+            <a:schemeClr val="accent1"/>
+          </a:effectRef>
+          <a:fontRef idx="minor">
+            <a:schemeClr val="lt1"/>
+          </a:fontRef>
+        </p:style>
+        <p:txBody>
+          <a:bodyPr rtlCol="0" anchor="ctr"/>
+          <a:lstStyle/>
+          <a:p>
+            <a:pPr algn="ctr"/>
+          </a:p>
+        </p:txBody>
+      </p:sp>
+      <p:sp>
+        <p:nvSpPr>
+          <p:cNvPr id="13" name="TextBox 12"/>
+          <p:cNvSpPr txBox="1"/>
+          <p:nvPr/>
+        </p:nvSpPr>
+        <p:spPr>
+          <a:xfrm>
+            <a:off x="14493240" y="2286000"/>
+            <a:ext cx="1645920" cy="365760"/>
+          </a:xfrm>
+          <a:prstGeom prst="rect">
+            <a:avLst/>
+          </a:prstGeom>
+          <a:noFill/>
+        </p:spPr>
+        <p:txBody>
+          <a:bodyPr wrap="square">
+            <a:spAutoFit/>
+          </a:bodyPr>
+          <a:lstStyle/>
+          <a:p>
+            <a:pPr algn="l"/>
+            <a:r>
+              <a:rPr sz="1300" b="1">
+                <a:solidFill>
+                  <a:srgbClr val="000000"/>
+                </a:solidFill>
+              </a:rPr>
+              <a:t>S04 extreme gap</a:t>
+            </a:r>
+          </a:p>
+        </p:txBody>
+      </p:sp>
+      <p:sp>
+        <p:nvSpPr>
+          <p:cNvPr id="14" name="TextBox 13"/>
+          <p:cNvSpPr txBox="1"/>
+          <p:nvPr/>
+        </p:nvSpPr>
+        <p:spPr>
+          <a:xfrm>
+            <a:off x="16184880" y="2286000"/>
+            <a:ext cx="2286000" cy="365760"/>
+          </a:xfrm>
+          <a:prstGeom prst="rect">
+            <a:avLst/>
+          </a:prstGeom>
+          <a:noFill/>
+        </p:spPr>
+        <p:txBody>
+          <a:bodyPr wrap="square">
+            <a:spAutoFit/>
+          </a:bodyPr>
+          <a:lstStyle/>
+          <a:p>
+            <a:pPr algn="l"/>
+            <a:r>
+              <a:rPr sz="1100" b="0">
+                <a:solidFill>
+                  <a:srgbClr val="E74C3C"/>
+                </a:solidFill>
+              </a:rPr>
+              <a:t>78.13 to 28.47 (-49.66)</a:t>
+            </a:r>
+          </a:p>
+        </p:txBody>
+      </p:sp>
+      <p:sp>
+        <p:nvSpPr>
+          <p:cNvPr id="15" name="Oval 14"/>
+          <p:cNvSpPr/>
+          <p:nvPr/>
+        </p:nvSpPr>
+        <p:spPr>
+          <a:xfrm>
+            <a:off x="14081760" y="2798064"/>
+            <a:ext cx="256032" cy="256032"/>
+          </a:xfrm>
+          <a:prstGeom prst="ellipse">
+            <a:avLst/>
+          </a:prstGeom>
+          <a:solidFill>
+            <a:srgbClr val="27AE60"/>
+          </a:solidFill>
+          <a:ln>
+            <a:noFill/>
+          </a:ln>
+        </p:spPr>
+        <p:style>
+          <a:lnRef idx="1">
+            <a:schemeClr val="accent1"/>
+          </a:lnRef>
+          <a:fillRef idx="3">
+            <a:schemeClr val="accent1"/>
+          </a:fillRef>
+          <a:effectRef idx="2">
+            <a:schemeClr val="accent1"/>
+          </a:effectRef>
+          <a:fontRef idx="minor">
+            <a:schemeClr val="lt1"/>
+          </a:fontRef>
+        </p:style>
+        <p:txBody>
+          <a:bodyPr rtlCol="0" anchor="ctr"/>
+          <a:lstStyle/>
+          <a:p>
+            <a:pPr algn="ctr"/>
+          </a:p>
+        </p:txBody>
+      </p:sp>
+      <p:sp>
+        <p:nvSpPr>
+          <p:cNvPr id="16" name="TextBox 15"/>
+          <p:cNvSpPr txBox="1"/>
+          <p:nvPr/>
+        </p:nvSpPr>
+        <p:spPr>
+          <a:xfrm>
+            <a:off x="14493240" y="2743200"/>
+            <a:ext cx="1645920" cy="365760"/>
+          </a:xfrm>
+          <a:prstGeom prst="rect">
+            <a:avLst/>
+          </a:prstGeom>
+          <a:noFill/>
+        </p:spPr>
+        <p:txBody>
+          <a:bodyPr wrap="square">
+            <a:spAutoFit/>
+          </a:bodyPr>
+          <a:lstStyle/>
+          <a:p>
+            <a:pPr algn="l"/>
+            <a:r>
+              <a:rPr sz="1300" b="1">
+                <a:solidFill>
+                  <a:srgbClr val="000000"/>
+                </a:solidFill>
+              </a:rPr>
+              <a:t>S01, S08, S09</a:t>
+            </a:r>
+          </a:p>
+        </p:txBody>
+      </p:sp>
+      <p:sp>
+        <p:nvSpPr>
+          <p:cNvPr id="17" name="TextBox 16"/>
+          <p:cNvSpPr txBox="1"/>
+          <p:nvPr/>
+        </p:nvSpPr>
+        <p:spPr>
+          <a:xfrm>
+            <a:off x="16184880" y="2743200"/>
+            <a:ext cx="2286000" cy="365760"/>
+          </a:xfrm>
+          <a:prstGeom prst="rect">
+            <a:avLst/>
+          </a:prstGeom>
+          <a:noFill/>
+        </p:spPr>
+        <p:txBody>
+          <a:bodyPr wrap="square">
+            <a:spAutoFit/>
+          </a:bodyPr>
+          <a:lstStyle/>
+          <a:p>
+            <a:pPr algn="l"/>
+            <a:r>
+              <a:rPr sz="1100" b="0">
+                <a:solidFill>
+                  <a:srgbClr val="27AE60"/>
+                </a:solidFill>
+              </a:rPr>
+              <a:t>Resilient (&lt; 6 pp drop)</a:t>
+            </a:r>
+          </a:p>
+        </p:txBody>
+      </p:sp>
+      <p:sp>
+        <p:nvSpPr>
+          <p:cNvPr id="18" name="Rectangle 17"/>
+          <p:cNvSpPr/>
+          <p:nvPr/>
+        </p:nvSpPr>
+        <p:spPr>
+          <a:xfrm>
+            <a:off x="14081760" y="3337560"/>
+            <a:ext cx="4297680" cy="13716"/>
+          </a:xfrm>
+          <a:prstGeom prst="rect">
+            <a:avLst/>
+          </a:prstGeom>
+          <a:solidFill>
+            <a:srgbClr val="C8C8C8"/>
+          </a:solidFill>
+          <a:ln>
+            <a:noFill/>
+          </a:ln>
+        </p:spPr>
+        <p:style>
+          <a:lnRef idx="1">
+            <a:schemeClr val="accent1"/>
+          </a:lnRef>
+          <a:fillRef idx="3">
+            <a:schemeClr val="accent1"/>
+          </a:fillRef>
+          <a:effectRef idx="2">
+            <a:schemeClr val="accent1"/>
+          </a:effectRef>
+          <a:fontRef idx="minor">
+            <a:schemeClr val="lt1"/>
+          </a:fontRef>
+        </p:style>
+        <p:txBody>
+          <a:bodyPr rtlCol="0" anchor="ctr"/>
+          <a:lstStyle/>
+          <a:p>
+            <a:pPr algn="ctr"/>
+          </a:p>
+        </p:txBody>
+      </p:sp>
+      <p:sp>
+        <p:nvSpPr>
+          <p:cNvPr id="19" name="TextBox 18"/>
+          <p:cNvSpPr txBox="1"/>
+          <p:nvPr/>
+        </p:nvSpPr>
+        <p:spPr>
+          <a:xfrm>
+            <a:off x="14173200" y="3611879"/>
+            <a:ext cx="4114800" cy="365760"/>
+          </a:xfrm>
+          <a:prstGeom prst="rect">
+            <a:avLst/>
+          </a:prstGeom>
+          <a:noFill/>
+        </p:spPr>
+        <p:txBody>
+          <a:bodyPr wrap="square">
+            <a:spAutoFit/>
+          </a:bodyPr>
+          <a:lstStyle/>
+          <a:p>
+            <a:pPr algn="l"/>
+            <a:r>
+              <a:rPr sz="1400" b="1">
+                <a:solidFill>
+                  <a:srgbClr val="27AE60"/>
+                </a:solidFill>
+              </a:rPr>
+              <a:t>Transformer contribution: +14.93 pp on avg</a:t>
+            </a:r>
+          </a:p>
+        </p:txBody>
+      </p:sp>
+      <p:sp>
+        <p:nvSpPr>
+          <p:cNvPr id="20" name="TextBox 19"/>
+          <p:cNvSpPr txBox="1"/>
+          <p:nvPr/>
+        </p:nvSpPr>
+        <p:spPr>
+          <a:xfrm>
+            <a:off x="14173200" y="4023359"/>
+            <a:ext cx="4114800" cy="365760"/>
+          </a:xfrm>
+          <a:prstGeom prst="rect">
+            <a:avLst/>
+          </a:prstGeom>
+          <a:noFill/>
+        </p:spPr>
+        <p:txBody>
+          <a:bodyPr wrap="square">
+            <a:spAutoFit/>
+          </a:bodyPr>
+          <a:lstStyle/>
+          <a:p>
+            <a:pPr algn="l"/>
+            <a:r>
+              <a:rPr sz="1400" b="1">
+                <a:solidFill>
+                  <a:srgbClr val="E74C3C"/>
+                </a:solidFill>
+              </a:rPr>
+              <a:t>Per-subject variance: very high (S04 extreme)</a:t>
+            </a:r>
+          </a:p>
+        </p:txBody>
+      </p:sp>
+      <p:sp>
+        <p:nvSpPr>
+          <p:cNvPr id="21" name="TextBox 20"/>
+          <p:cNvSpPr txBox="1"/>
+          <p:nvPr/>
+        </p:nvSpPr>
+        <p:spPr>
+          <a:xfrm>
+            <a:off x="13990320" y="4709159"/>
+            <a:ext cx="4480560" cy="457200"/>
+          </a:xfrm>
+          <a:prstGeom prst="rect">
+            <a:avLst/>
+          </a:prstGeom>
+          <a:noFill/>
+        </p:spPr>
+        <p:txBody>
+          <a:bodyPr wrap="square">
+            <a:spAutoFit/>
+          </a:bodyPr>
+          <a:lstStyle/>
+          <a:p>
+            <a:pPr algn="ctr"/>
+            <a:r>
+              <a:rPr sz="1300" b="0">
+                <a:solidFill>
+                  <a:srgbClr val="145A32"/>
+                </a:solidFill>
+              </a:rPr>
+              <a:t>Self-attention is critical: removing Transformer drops accuracy by ~15 pp.</a:t>
+            </a:r>
+          </a:p>
+        </p:txBody>
+      </p:sp>
     </p:spTree>
   </p:cSld>
   <p:clrMapOvr>

--- a/references/tables_v10.pptx
+++ b/references/tables_v10.pptx
@@ -12,7 +12,7 @@
     <p:sldId id="260" r:id="rId11"/>
     <p:sldId id="261" r:id="rId12"/>
   </p:sldIdLst>
-  <p:sldSz cx="19202400" cy="8229600" type="screen4x3"/>
+  <p:sldSz cx="17373600" cy="8229600" type="screen4x3"/>
   <p:notesSz cx="6858000" cy="9144000"/>
   <p:defaultTextStyle>
     <a:defPPr>
@@ -3101,8 +3101,8 @@
         </p:nvSpPr>
         <p:spPr>
           <a:xfrm>
-            <a:off x="457200" y="137160"/>
-            <a:ext cx="18288000" cy="411480"/>
+            <a:off x="457200" y="182880"/>
+            <a:ext cx="16459200" cy="457200"/>
           </a:xfrm>
           <a:prstGeom prst="rect">
             <a:avLst/>
@@ -3110,18 +3110,13 @@
           <a:noFill/>
         </p:spPr>
         <p:txBody>
-          <a:bodyPr wrap="square">
+          <a:bodyPr wrap="none">
             <a:spAutoFit/>
           </a:bodyPr>
           <a:lstStyle/>
           <a:p>
-            <a:pPr algn="l"/>
             <a:r>
-              <a:rPr sz="2000" b="1">
-                <a:solidFill>
-                  <a:srgbClr val="000000"/>
-                </a:solidFill>
-              </a:rPr>
+              <a:rPr sz="2200" b="1"/>
               <a:t>Table 1: Evolution of EEG Decoding Models</a:t>
             </a:r>
           </a:p>
@@ -3136,8 +3131,8 @@
           <p:nvPr/>
         </p:nvGraphicFramePr>
         <p:xfrm>
-          <a:off x="274320" y="731520"/>
-          <a:ext cx="12801600" cy="2011680"/>
+          <a:off x="457200" y="822960"/>
+          <a:ext cx="15544800" cy="2011680"/>
         </p:xfrm>
         <a:graphic>
           <a:graphicData uri="http://schemas.openxmlformats.org/drawingml/2006/table">
@@ -3146,10 +3141,10 @@
                 <a:tableStyleId>{5C22544A-7EE6-4342-B048-85BDC9FD1C3A}</a:tableStyleId>
               </a:tblPr>
               <a:tblGrid>
+                <a:gridCol w="3657600"/>
                 <a:gridCol w="3200400"/>
-                <a:gridCol w="2743200"/>
-                <a:gridCol w="4114800"/>
-                <a:gridCol w="2743200"/>
+                <a:gridCol w="5029200"/>
+                <a:gridCol w="3657600"/>
               </a:tblGrid>
               <a:tr h="502920">
                 <a:tc>
@@ -3159,7 +3154,7 @@
                     <a:p>
                       <a:pPr algn="ctr"/>
                       <a:r>
-                        <a:rPr sz="1000" b="1">
+                        <a:rPr sz="1200" b="1">
                           <a:solidFill>
                             <a:srgbClr val="FFFFFF"/>
                           </a:solidFill>
@@ -3181,7 +3176,7 @@
                     <a:p>
                       <a:pPr algn="ctr"/>
                       <a:r>
-                        <a:rPr sz="1000" b="1">
+                        <a:rPr sz="1200" b="1">
                           <a:solidFill>
                             <a:srgbClr val="FFFFFF"/>
                           </a:solidFill>
@@ -3203,7 +3198,7 @@
                     <a:p>
                       <a:pPr algn="ctr"/>
                       <a:r>
-                        <a:rPr sz="1000" b="1">
+                        <a:rPr sz="1200" b="1">
                           <a:solidFill>
                             <a:srgbClr val="FFFFFF"/>
                           </a:solidFill>
@@ -3225,7 +3220,7 @@
                     <a:p>
                       <a:pPr algn="ctr"/>
                       <a:r>
-                        <a:rPr sz="1000" b="1">
+                        <a:rPr sz="1200" b="1">
                           <a:solidFill>
                             <a:srgbClr val="FFFFFF"/>
                           </a:solidFill>
@@ -3249,7 +3244,7 @@
                     <a:p>
                       <a:pPr algn="l"/>
                       <a:r>
-                        <a:rPr sz="1000" b="0">
+                        <a:rPr sz="1300" b="0">
                           <a:solidFill>
                             <a:srgbClr val="000000"/>
                           </a:solidFill>
@@ -3269,9 +3264,9 @@
                     <a:bodyPr/>
                     <a:lstStyle/>
                     <a:p>
-                      <a:pPr algn="ctr"/>
-                      <a:r>
-                        <a:rPr sz="1000" b="0">
+                      <a:pPr algn="l"/>
+                      <a:r>
+                        <a:rPr sz="1300" b="0">
                           <a:solidFill>
                             <a:srgbClr val="000000"/>
                           </a:solidFill>
@@ -3291,9 +3286,9 @@
                     <a:bodyPr/>
                     <a:lstStyle/>
                     <a:p>
-                      <a:pPr algn="ctr"/>
-                      <a:r>
-                        <a:rPr sz="1000" b="0">
+                      <a:pPr algn="l"/>
+                      <a:r>
+                        <a:rPr sz="1300" b="0">
                           <a:solidFill>
                             <a:srgbClr val="000000"/>
                           </a:solidFill>
@@ -3313,9 +3308,9 @@
                     <a:bodyPr/>
                     <a:lstStyle/>
                     <a:p>
-                      <a:pPr algn="ctr"/>
-                      <a:r>
-                        <a:rPr sz="1000" b="0">
+                      <a:pPr algn="l"/>
+                      <a:r>
+                        <a:rPr sz="1300" b="0">
                           <a:solidFill>
                             <a:srgbClr val="000000"/>
                           </a:solidFill>
@@ -3339,7 +3334,7 @@
                     <a:p>
                       <a:pPr algn="l"/>
                       <a:r>
-                        <a:rPr sz="1000" b="0">
+                        <a:rPr sz="1300" b="0">
                           <a:solidFill>
                             <a:srgbClr val="000000"/>
                           </a:solidFill>
@@ -3359,9 +3354,9 @@
                     <a:bodyPr/>
                     <a:lstStyle/>
                     <a:p>
-                      <a:pPr algn="ctr"/>
-                      <a:r>
-                        <a:rPr sz="1000" b="0">
+                      <a:pPr algn="l"/>
+                      <a:r>
+                        <a:rPr sz="1300" b="0">
                           <a:solidFill>
                             <a:srgbClr val="000000"/>
                           </a:solidFill>
@@ -3381,9 +3376,9 @@
                     <a:bodyPr/>
                     <a:lstStyle/>
                     <a:p>
-                      <a:pPr algn="ctr"/>
-                      <a:r>
-                        <a:rPr sz="1000" b="0">
+                      <a:pPr algn="l"/>
+                      <a:r>
+                        <a:rPr sz="1300" b="0">
                           <a:solidFill>
                             <a:srgbClr val="000000"/>
                           </a:solidFill>
@@ -3403,9 +3398,9 @@
                     <a:bodyPr/>
                     <a:lstStyle/>
                     <a:p>
-                      <a:pPr algn="ctr"/>
-                      <a:r>
-                        <a:rPr sz="1000" b="0">
+                      <a:pPr algn="l"/>
+                      <a:r>
+                        <a:rPr sz="1300" b="0">
                           <a:solidFill>
                             <a:srgbClr val="000000"/>
                           </a:solidFill>
@@ -3429,7 +3424,7 @@
                     <a:p>
                       <a:pPr algn="l"/>
                       <a:r>
-                        <a:rPr sz="1000" b="0">
+                        <a:rPr sz="1300" b="0">
                           <a:solidFill>
                             <a:srgbClr val="000000"/>
                           </a:solidFill>
@@ -3449,9 +3444,9 @@
                     <a:bodyPr/>
                     <a:lstStyle/>
                     <a:p>
-                      <a:pPr algn="ctr"/>
-                      <a:r>
-                        <a:rPr sz="1000" b="0">
+                      <a:pPr algn="l"/>
+                      <a:r>
+                        <a:rPr sz="1300" b="0">
                           <a:solidFill>
                             <a:srgbClr val="000000"/>
                           </a:solidFill>
@@ -3471,9 +3466,9 @@
                     <a:bodyPr/>
                     <a:lstStyle/>
                     <a:p>
-                      <a:pPr algn="ctr"/>
-                      <a:r>
-                        <a:rPr sz="1000" b="0">
+                      <a:pPr algn="l"/>
+                      <a:r>
+                        <a:rPr sz="1300" b="0">
                           <a:solidFill>
                             <a:srgbClr val="000000"/>
                           </a:solidFill>
@@ -3493,9 +3488,9 @@
                     <a:bodyPr/>
                     <a:lstStyle/>
                     <a:p>
-                      <a:pPr algn="ctr"/>
-                      <a:r>
-                        <a:rPr sz="1000" b="0">
+                      <a:pPr algn="l"/>
+                      <a:r>
+                        <a:rPr sz="1300" b="0">
                           <a:solidFill>
                             <a:srgbClr val="000000"/>
                           </a:solidFill>
@@ -3515,529 +3510,6 @@
           </a:graphicData>
         </a:graphic>
       </p:graphicFrame>
-      <p:sp>
-        <p:nvSpPr>
-          <p:cNvPr id="4" name="Rectangle 3"/>
-          <p:cNvSpPr/>
-          <p:nvPr/>
-        </p:nvSpPr>
-        <p:spPr>
-          <a:xfrm>
-            <a:off x="13716000" y="731520"/>
-            <a:ext cx="5029200" cy="4434840"/>
-          </a:xfrm>
-          <a:prstGeom prst="rect">
-            <a:avLst/>
-          </a:prstGeom>
-          <a:solidFill>
-            <a:srgbClr val="F0F0F0"/>
-          </a:solidFill>
-          <a:ln w="12700">
-            <a:solidFill>
-              <a:srgbClr val="C8C8C8"/>
-            </a:solidFill>
-          </a:ln>
-        </p:spPr>
-        <p:style>
-          <a:lnRef idx="1">
-            <a:schemeClr val="accent1"/>
-          </a:lnRef>
-          <a:fillRef idx="3">
-            <a:schemeClr val="accent1"/>
-          </a:fillRef>
-          <a:effectRef idx="2">
-            <a:schemeClr val="accent1"/>
-          </a:effectRef>
-          <a:fontRef idx="minor">
-            <a:schemeClr val="lt1"/>
-          </a:fontRef>
-        </p:style>
-        <p:txBody>
-          <a:bodyPr rtlCol="0" anchor="ctr"/>
-          <a:lstStyle/>
-          <a:p>
-            <a:pPr algn="ctr"/>
-          </a:p>
-        </p:txBody>
-      </p:sp>
-      <p:sp>
-        <p:nvSpPr>
-          <p:cNvPr id="5" name="TextBox 4"/>
-          <p:cNvSpPr txBox="1"/>
-          <p:nvPr/>
-        </p:nvSpPr>
-        <p:spPr>
-          <a:xfrm>
-            <a:off x="13990320" y="868680"/>
-            <a:ext cx="4480560" cy="411480"/>
-          </a:xfrm>
-          <a:prstGeom prst="rect">
-            <a:avLst/>
-          </a:prstGeom>
-          <a:noFill/>
-        </p:spPr>
-        <p:txBody>
-          <a:bodyPr wrap="square">
-            <a:spAutoFit/>
-          </a:bodyPr>
-          <a:lstStyle/>
-          <a:p>
-            <a:pPr algn="ctr"/>
-            <a:r>
-              <a:rPr sz="1800" b="1">
-                <a:solidFill>
-                  <a:srgbClr val="000000"/>
-                </a:solidFill>
-              </a:rPr>
-              <a:t>Key Insight</a:t>
-            </a:r>
-          </a:p>
-        </p:txBody>
-      </p:sp>
-      <p:sp>
-        <p:nvSpPr>
-          <p:cNvPr id="6" name="Oval 5"/>
-          <p:cNvSpPr/>
-          <p:nvPr/>
-        </p:nvSpPr>
-        <p:spPr>
-          <a:xfrm>
-            <a:off x="14081760" y="1426464"/>
-            <a:ext cx="256032" cy="256032"/>
-          </a:xfrm>
-          <a:prstGeom prst="ellipse">
-            <a:avLst/>
-          </a:prstGeom>
-          <a:solidFill>
-            <a:srgbClr val="27AE60"/>
-          </a:solidFill>
-          <a:ln>
-            <a:noFill/>
-          </a:ln>
-        </p:spPr>
-        <p:style>
-          <a:lnRef idx="1">
-            <a:schemeClr val="accent1"/>
-          </a:lnRef>
-          <a:fillRef idx="3">
-            <a:schemeClr val="accent1"/>
-          </a:fillRef>
-          <a:effectRef idx="2">
-            <a:schemeClr val="accent1"/>
-          </a:effectRef>
-          <a:fontRef idx="minor">
-            <a:schemeClr val="lt1"/>
-          </a:fontRef>
-        </p:style>
-        <p:txBody>
-          <a:bodyPr rtlCol="0" anchor="ctr"/>
-          <a:lstStyle/>
-          <a:p>
-            <a:pPr algn="ctr"/>
-          </a:p>
-        </p:txBody>
-      </p:sp>
-      <p:sp>
-        <p:nvSpPr>
-          <p:cNvPr id="7" name="TextBox 6"/>
-          <p:cNvSpPr txBox="1"/>
-          <p:nvPr/>
-        </p:nvSpPr>
-        <p:spPr>
-          <a:xfrm>
-            <a:off x="14493240" y="1371600"/>
-            <a:ext cx="1645920" cy="365760"/>
-          </a:xfrm>
-          <a:prstGeom prst="rect">
-            <a:avLst/>
-          </a:prstGeom>
-          <a:noFill/>
-        </p:spPr>
-        <p:txBody>
-          <a:bodyPr wrap="square">
-            <a:spAutoFit/>
-          </a:bodyPr>
-          <a:lstStyle/>
-          <a:p>
-            <a:pPr algn="l"/>
-            <a:r>
-              <a:rPr sz="1300" b="1">
-                <a:solidFill>
-                  <a:srgbClr val="000000"/>
-                </a:solidFill>
-              </a:rPr>
-              <a:t>EEGNet</a:t>
-            </a:r>
-          </a:p>
-        </p:txBody>
-      </p:sp>
-      <p:sp>
-        <p:nvSpPr>
-          <p:cNvPr id="8" name="TextBox 7"/>
-          <p:cNvSpPr txBox="1"/>
-          <p:nvPr/>
-        </p:nvSpPr>
-        <p:spPr>
-          <a:xfrm>
-            <a:off x="16184880" y="1371600"/>
-            <a:ext cx="2286000" cy="365760"/>
-          </a:xfrm>
-          <a:prstGeom prst="rect">
-            <a:avLst/>
-          </a:prstGeom>
-          <a:noFill/>
-        </p:spPr>
-        <p:txBody>
-          <a:bodyPr wrap="square">
-            <a:spAutoFit/>
-          </a:bodyPr>
-          <a:lstStyle/>
-          <a:p>
-            <a:pPr algn="l"/>
-            <a:r>
-              <a:rPr sz="1100" b="0">
-                <a:solidFill>
-                  <a:srgbClr val="27AE60"/>
-                </a:solidFill>
-              </a:rPr>
-              <a:t>Task-specific expert, compact</a:t>
-            </a:r>
-          </a:p>
-        </p:txBody>
-      </p:sp>
-      <p:sp>
-        <p:nvSpPr>
-          <p:cNvPr id="9" name="Oval 8"/>
-          <p:cNvSpPr/>
-          <p:nvPr/>
-        </p:nvSpPr>
-        <p:spPr>
-          <a:xfrm>
-            <a:off x="14081760" y="1883664"/>
-            <a:ext cx="256032" cy="256032"/>
-          </a:xfrm>
-          <a:prstGeom prst="ellipse">
-            <a:avLst/>
-          </a:prstGeom>
-          <a:solidFill>
-            <a:srgbClr val="0071A2"/>
-          </a:solidFill>
-          <a:ln>
-            <a:noFill/>
-          </a:ln>
-        </p:spPr>
-        <p:style>
-          <a:lnRef idx="1">
-            <a:schemeClr val="accent1"/>
-          </a:lnRef>
-          <a:fillRef idx="3">
-            <a:schemeClr val="accent1"/>
-          </a:fillRef>
-          <a:effectRef idx="2">
-            <a:schemeClr val="accent1"/>
-          </a:effectRef>
-          <a:fontRef idx="minor">
-            <a:schemeClr val="lt1"/>
-          </a:fontRef>
-        </p:style>
-        <p:txBody>
-          <a:bodyPr rtlCol="0" anchor="ctr"/>
-          <a:lstStyle/>
-          <a:p>
-            <a:pPr algn="ctr"/>
-          </a:p>
-        </p:txBody>
-      </p:sp>
-      <p:sp>
-        <p:nvSpPr>
-          <p:cNvPr id="10" name="TextBox 9"/>
-          <p:cNvSpPr txBox="1"/>
-          <p:nvPr/>
-        </p:nvSpPr>
-        <p:spPr>
-          <a:xfrm>
-            <a:off x="14493240" y="1828800"/>
-            <a:ext cx="1645920" cy="365760"/>
-          </a:xfrm>
-          <a:prstGeom prst="rect">
-            <a:avLst/>
-          </a:prstGeom>
-          <a:noFill/>
-        </p:spPr>
-        <p:txBody>
-          <a:bodyPr wrap="square">
-            <a:spAutoFit/>
-          </a:bodyPr>
-          <a:lstStyle/>
-          <a:p>
-            <a:pPr algn="l"/>
-            <a:r>
-              <a:rPr sz="1300" b="1">
-                <a:solidFill>
-                  <a:srgbClr val="000000"/>
-                </a:solidFill>
-              </a:rPr>
-              <a:t>EEG Conformer</a:t>
-            </a:r>
-          </a:p>
-        </p:txBody>
-      </p:sp>
-      <p:sp>
-        <p:nvSpPr>
-          <p:cNvPr id="11" name="TextBox 10"/>
-          <p:cNvSpPr txBox="1"/>
-          <p:nvPr/>
-        </p:nvSpPr>
-        <p:spPr>
-          <a:xfrm>
-            <a:off x="16184880" y="1828800"/>
-            <a:ext cx="2286000" cy="365760"/>
-          </a:xfrm>
-          <a:prstGeom prst="rect">
-            <a:avLst/>
-          </a:prstGeom>
-          <a:noFill/>
-        </p:spPr>
-        <p:txBody>
-          <a:bodyPr wrap="square">
-            <a:spAutoFit/>
-          </a:bodyPr>
-          <a:lstStyle/>
-          <a:p>
-            <a:pPr algn="l"/>
-            <a:r>
-              <a:rPr sz="1100" b="0">
-                <a:solidFill>
-                  <a:srgbClr val="0071A2"/>
-                </a:solidFill>
-              </a:rPr>
-              <a:t>Transformer enables global modeling</a:t>
-            </a:r>
-          </a:p>
-        </p:txBody>
-      </p:sp>
-      <p:sp>
-        <p:nvSpPr>
-          <p:cNvPr id="12" name="Oval 11"/>
-          <p:cNvSpPr/>
-          <p:nvPr/>
-        </p:nvSpPr>
-        <p:spPr>
-          <a:xfrm>
-            <a:off x="14081760" y="2340864"/>
-            <a:ext cx="256032" cy="256032"/>
-          </a:xfrm>
-          <a:prstGeom prst="ellipse">
-            <a:avLst/>
-          </a:prstGeom>
-          <a:solidFill>
-            <a:srgbClr val="0071A2"/>
-          </a:solidFill>
-          <a:ln>
-            <a:noFill/>
-          </a:ln>
-        </p:spPr>
-        <p:style>
-          <a:lnRef idx="1">
-            <a:schemeClr val="accent1"/>
-          </a:lnRef>
-          <a:fillRef idx="3">
-            <a:schemeClr val="accent1"/>
-          </a:fillRef>
-          <a:effectRef idx="2">
-            <a:schemeClr val="accent1"/>
-          </a:effectRef>
-          <a:fontRef idx="minor">
-            <a:schemeClr val="lt1"/>
-          </a:fontRef>
-        </p:style>
-        <p:txBody>
-          <a:bodyPr rtlCol="0" anchor="ctr"/>
-          <a:lstStyle/>
-          <a:p>
-            <a:pPr algn="ctr"/>
-          </a:p>
-        </p:txBody>
-      </p:sp>
-      <p:sp>
-        <p:nvSpPr>
-          <p:cNvPr id="13" name="TextBox 12"/>
-          <p:cNvSpPr txBox="1"/>
-          <p:nvPr/>
-        </p:nvSpPr>
-        <p:spPr>
-          <a:xfrm>
-            <a:off x="14493240" y="2286000"/>
-            <a:ext cx="1645920" cy="365760"/>
-          </a:xfrm>
-          <a:prstGeom prst="rect">
-            <a:avLst/>
-          </a:prstGeom>
-          <a:noFill/>
-        </p:spPr>
-        <p:txBody>
-          <a:bodyPr wrap="square">
-            <a:spAutoFit/>
-          </a:bodyPr>
-          <a:lstStyle/>
-          <a:p>
-            <a:pPr algn="l"/>
-            <a:r>
-              <a:rPr sz="1300" b="1">
-                <a:solidFill>
-                  <a:srgbClr val="000000"/>
-                </a:solidFill>
-              </a:rPr>
-              <a:t>CBraMod</a:t>
-            </a:r>
-          </a:p>
-        </p:txBody>
-      </p:sp>
-      <p:sp>
-        <p:nvSpPr>
-          <p:cNvPr id="14" name="TextBox 13"/>
-          <p:cNvSpPr txBox="1"/>
-          <p:nvPr/>
-        </p:nvSpPr>
-        <p:spPr>
-          <a:xfrm>
-            <a:off x="16184880" y="2286000"/>
-            <a:ext cx="2286000" cy="365760"/>
-          </a:xfrm>
-          <a:prstGeom prst="rect">
-            <a:avLst/>
-          </a:prstGeom>
-          <a:noFill/>
-        </p:spPr>
-        <p:txBody>
-          <a:bodyPr wrap="square">
-            <a:spAutoFit/>
-          </a:bodyPr>
-          <a:lstStyle/>
-          <a:p>
-            <a:pPr algn="l"/>
-            <a:r>
-              <a:rPr sz="1100" b="0">
-                <a:solidFill>
-                  <a:srgbClr val="0071A2"/>
-                </a:solidFill>
-              </a:rPr>
-              <a:t>Pretraining to cross-task transfer</a:t>
-            </a:r>
-          </a:p>
-        </p:txBody>
-      </p:sp>
-      <p:sp>
-        <p:nvSpPr>
-          <p:cNvPr id="15" name="Rectangle 14"/>
-          <p:cNvSpPr/>
-          <p:nvPr/>
-        </p:nvSpPr>
-        <p:spPr>
-          <a:xfrm>
-            <a:off x="14081760" y="2880360"/>
-            <a:ext cx="4297680" cy="13716"/>
-          </a:xfrm>
-          <a:prstGeom prst="rect">
-            <a:avLst/>
-          </a:prstGeom>
-          <a:solidFill>
-            <a:srgbClr val="C8C8C8"/>
-          </a:solidFill>
-          <a:ln>
-            <a:noFill/>
-          </a:ln>
-        </p:spPr>
-        <p:style>
-          <a:lnRef idx="1">
-            <a:schemeClr val="accent1"/>
-          </a:lnRef>
-          <a:fillRef idx="3">
-            <a:schemeClr val="accent1"/>
-          </a:fillRef>
-          <a:effectRef idx="2">
-            <a:schemeClr val="accent1"/>
-          </a:effectRef>
-          <a:fontRef idx="minor">
-            <a:schemeClr val="lt1"/>
-          </a:fontRef>
-        </p:style>
-        <p:txBody>
-          <a:bodyPr rtlCol="0" anchor="ctr"/>
-          <a:lstStyle/>
-          <a:p>
-            <a:pPr algn="ctr"/>
-          </a:p>
-        </p:txBody>
-      </p:sp>
-      <p:sp>
-        <p:nvSpPr>
-          <p:cNvPr id="16" name="TextBox 15"/>
-          <p:cNvSpPr txBox="1"/>
-          <p:nvPr/>
-        </p:nvSpPr>
-        <p:spPr>
-          <a:xfrm>
-            <a:off x="14173200" y="3154679"/>
-            <a:ext cx="4114800" cy="365760"/>
-          </a:xfrm>
-          <a:prstGeom prst="rect">
-            <a:avLst/>
-          </a:prstGeom>
-          <a:noFill/>
-        </p:spPr>
-        <p:txBody>
-          <a:bodyPr wrap="square">
-            <a:spAutoFit/>
-          </a:bodyPr>
-          <a:lstStyle/>
-          <a:p>
-            <a:pPr algn="l"/>
-            <a:r>
-              <a:rPr sz="1400" b="1">
-                <a:solidFill>
-                  <a:srgbClr val="0071A2"/>
-                </a:solidFill>
-              </a:rPr>
-              <a:t>Paradigm: per-task training -&gt; pretrain then adapt</a:t>
-            </a:r>
-          </a:p>
-        </p:txBody>
-      </p:sp>
-      <p:sp>
-        <p:nvSpPr>
-          <p:cNvPr id="17" name="TextBox 16"/>
-          <p:cNvSpPr txBox="1"/>
-          <p:nvPr/>
-        </p:nvSpPr>
-        <p:spPr>
-          <a:xfrm>
-            <a:off x="13990320" y="3840480"/>
-            <a:ext cx="4480560" cy="457200"/>
-          </a:xfrm>
-          <a:prstGeom prst="rect">
-            <a:avLst/>
-          </a:prstGeom>
-          <a:noFill/>
-        </p:spPr>
-        <p:txBody>
-          <a:bodyPr wrap="square">
-            <a:spAutoFit/>
-          </a:bodyPr>
-          <a:lstStyle/>
-          <a:p>
-            <a:pPr algn="ctr"/>
-            <a:r>
-              <a:rPr sz="1300" b="0">
-                <a:solidFill>
-                  <a:srgbClr val="145A32"/>
-                </a:solidFill>
-              </a:rPr>
-              <a:t>Generalization improves; interpretability becomes the new bottleneck.</a:t>
-            </a:r>
-          </a:p>
-        </p:txBody>
-      </p:sp>
     </p:spTree>
   </p:cSld>
   <p:clrMapOvr>
@@ -4064,8 +3536,8 @@
         </p:nvSpPr>
         <p:spPr>
           <a:xfrm>
-            <a:off x="457200" y="137160"/>
-            <a:ext cx="18288000" cy="411480"/>
+            <a:off x="457200" y="182880"/>
+            <a:ext cx="16459200" cy="457200"/>
           </a:xfrm>
           <a:prstGeom prst="rect">
             <a:avLst/>
@@ -4073,18 +3545,13 @@
           <a:noFill/>
         </p:spPr>
         <p:txBody>
-          <a:bodyPr wrap="square">
+          <a:bodyPr wrap="none">
             <a:spAutoFit/>
           </a:bodyPr>
           <a:lstStyle/>
           <a:p>
-            <a:pPr algn="l"/>
             <a:r>
-              <a:rPr sz="2000" b="1">
-                <a:solidFill>
-                  <a:srgbClr val="000000"/>
-                </a:solidFill>
-              </a:rPr>
+              <a:rPr sz="2200" b="1"/>
               <a:t>Table 2: CBraMod Reproduction Results Across 8 Downstream Tasks</a:t>
             </a:r>
           </a:p>
@@ -4099,8 +3566,8 @@
           <p:nvPr/>
         </p:nvGraphicFramePr>
         <p:xfrm>
-          <a:off x="274320" y="731520"/>
-          <a:ext cx="10698480" cy="4526280"/>
+          <a:off x="457200" y="822960"/>
+          <a:ext cx="11338560" cy="4114800"/>
         </p:xfrm>
         <a:graphic>
           <a:graphicData uri="http://schemas.openxmlformats.org/drawingml/2006/table">
@@ -4109,25 +3576,25 @@
                 <a:tableStyleId>{5C22544A-7EE6-4342-B048-85BDC9FD1C3A}</a:tableStyleId>
               </a:tblPr>
               <a:tblGrid>
-                <a:gridCol w="1097280"/>
-                <a:gridCol w="2011680"/>
+                <a:gridCol w="1188720"/>
+                <a:gridCol w="2103120"/>
                 <a:gridCol w="1371600"/>
-                <a:gridCol w="914400"/>
-                <a:gridCol w="914400"/>
-                <a:gridCol w="914400"/>
-                <a:gridCol w="914400"/>
-                <a:gridCol w="1188720"/>
+                <a:gridCol w="1005840"/>
+                <a:gridCol w="1005840"/>
+                <a:gridCol w="1005840"/>
+                <a:gridCol w="1005840"/>
+                <a:gridCol w="1280160"/>
                 <a:gridCol w="1371600"/>
               </a:tblGrid>
-              <a:tr h="502920">
-                <a:tc>
-                  <a:txBody>
-                    <a:bodyPr/>
-                    <a:lstStyle/>
-                    <a:p>
-                      <a:pPr algn="ctr"/>
-                      <a:r>
-                        <a:rPr sz="1000" b="1">
+              <a:tr h="457200">
+                <a:tc>
+                  <a:txBody>
+                    <a:bodyPr/>
+                    <a:lstStyle/>
+                    <a:p>
+                      <a:pPr algn="ctr"/>
+                      <a:r>
+                        <a:rPr sz="1200" b="1">
                           <a:solidFill>
                             <a:srgbClr val="FFFFFF"/>
                           </a:solidFill>
@@ -4149,7 +3616,7 @@
                     <a:p>
                       <a:pPr algn="ctr"/>
                       <a:r>
-                        <a:rPr sz="1000" b="1">
+                        <a:rPr sz="1200" b="1">
                           <a:solidFill>
                             <a:srgbClr val="FFFFFF"/>
                           </a:solidFill>
@@ -4171,7 +3638,7 @@
                     <a:p>
                       <a:pPr algn="ctr"/>
                       <a:r>
-                        <a:rPr sz="1000" b="1">
+                        <a:rPr sz="1200" b="1">
                           <a:solidFill>
                             <a:srgbClr val="FFFFFF"/>
                           </a:solidFill>
@@ -4193,12 +3660,13 @@
                     <a:p>
                       <a:pPr algn="ctr"/>
                       <a:r>
-                        <a:rPr sz="1000" b="1">
+                        <a:rPr sz="1200" b="1">
                           <a:solidFill>
                             <a:srgbClr val="FFFFFF"/>
                           </a:solidFill>
                         </a:rPr>
-                        <a:t>Mean bAcc</a:t>
+                        <a:t>Mean
+bAcc</a:t>
                       </a:r>
                     </a:p>
                   </a:txBody>
@@ -4215,12 +3683,13 @@
                     <a:p>
                       <a:pPr algn="ctr"/>
                       <a:r>
-                        <a:rPr sz="1000" b="1">
+                        <a:rPr sz="1200" b="1">
                           <a:solidFill>
                             <a:srgbClr val="FFFFFF"/>
                           </a:solidFill>
                         </a:rPr>
-                        <a:t>Best bAcc</a:t>
+                        <a:t>Best
+bAcc</a:t>
                       </a:r>
                     </a:p>
                   </a:txBody>
@@ -4237,7 +3706,7 @@
                     <a:p>
                       <a:pPr algn="ctr"/>
                       <a:r>
-                        <a:rPr sz="1000" b="1">
+                        <a:rPr sz="1200" b="1">
                           <a:solidFill>
                             <a:srgbClr val="FFFFFF"/>
                           </a:solidFill>
@@ -4259,7 +3728,7 @@
                     <a:p>
                       <a:pPr algn="ctr"/>
                       <a:r>
-                        <a:rPr sz="1000" b="1">
+                        <a:rPr sz="1200" b="1">
                           <a:solidFill>
                             <a:srgbClr val="FFFFFF"/>
                           </a:solidFill>
@@ -4281,7 +3750,7 @@
                     <a:p>
                       <a:pPr algn="ctr"/>
                       <a:r>
-                        <a:rPr sz="1000" b="1">
+                        <a:rPr sz="1200" b="1">
                           <a:solidFill>
                             <a:srgbClr val="FFFFFF"/>
                           </a:solidFill>
@@ -4303,12 +3772,12 @@
                     <a:p>
                       <a:pPr algn="ctr"/>
                       <a:r>
-                        <a:rPr sz="1000" b="1">
+                        <a:rPr sz="1200" b="1">
                           <a:solidFill>
                             <a:srgbClr val="FFFFFF"/>
                           </a:solidFill>
                         </a:rPr>
-                        <a:t>Conclusion</a:t>
+                        <a:t>Status</a:t>
                       </a:r>
                     </a:p>
                   </a:txBody>
@@ -4319,7 +3788,7 @@
                   </a:tcPr>
                 </a:tc>
               </a:tr>
-              <a:tr h="502920">
+              <a:tr h="457200">
                 <a:tc>
                   <a:txBody>
                     <a:bodyPr/>
@@ -4327,7 +3796,7 @@
                     <a:p>
                       <a:pPr algn="l"/>
                       <a:r>
-                        <a:rPr sz="1000" b="0">
+                        <a:rPr sz="1100" b="0">
                           <a:solidFill>
                             <a:srgbClr val="000000"/>
                           </a:solidFill>
@@ -4347,9 +3816,9 @@
                     <a:bodyPr/>
                     <a:lstStyle/>
                     <a:p>
-                      <a:pPr algn="ctr"/>
-                      <a:r>
-                        <a:rPr sz="1000" b="0">
+                      <a:pPr algn="l"/>
+                      <a:r>
+                        <a:rPr sz="1100" b="0">
                           <a:solidFill>
                             <a:srgbClr val="000000"/>
                           </a:solidFill>
@@ -4369,9 +3838,9 @@
                     <a:bodyPr/>
                     <a:lstStyle/>
                     <a:p>
-                      <a:pPr algn="ctr"/>
-                      <a:r>
-                        <a:rPr sz="1000" b="0">
+                      <a:pPr algn="l"/>
+                      <a:r>
+                        <a:rPr sz="1100" b="0">
                           <a:solidFill>
                             <a:srgbClr val="000000"/>
                           </a:solidFill>
@@ -4393,7 +3862,7 @@
                     <a:p>
                       <a:pPr algn="ctr"/>
                       <a:r>
-                        <a:rPr sz="1000" b="0">
+                        <a:rPr sz="1100" b="0">
                           <a:solidFill>
                             <a:srgbClr val="000000"/>
                           </a:solidFill>
@@ -4415,7 +3884,7 @@
                     <a:p>
                       <a:pPr algn="ctr"/>
                       <a:r>
-                        <a:rPr sz="1000" b="0">
+                        <a:rPr sz="1100" b="0">
                           <a:solidFill>
                             <a:srgbClr val="000000"/>
                           </a:solidFill>
@@ -4437,7 +3906,7 @@
                     <a:p>
                       <a:pPr algn="ctr"/>
                       <a:r>
-                        <a:rPr sz="1000" b="0">
+                        <a:rPr sz="1100" b="0">
                           <a:solidFill>
                             <a:srgbClr val="000000"/>
                           </a:solidFill>
@@ -4459,7 +3928,7 @@
                     <a:p>
                       <a:pPr algn="ctr"/>
                       <a:r>
-                        <a:rPr sz="1000" b="0">
+                        <a:rPr sz="1100" b="0">
                           <a:solidFill>
                             <a:srgbClr val="000000"/>
                           </a:solidFill>
@@ -4481,7 +3950,7 @@
                     <a:p>
                       <a:pPr algn="ctr"/>
                       <a:r>
-                        <a:rPr sz="1000" b="0">
+                        <a:rPr sz="1100" b="0">
                           <a:solidFill>
                             <a:srgbClr val="000000"/>
                           </a:solidFill>
@@ -4503,9 +3972,9 @@
                     <a:p>
                       <a:pPr algn="ctr"/>
                       <a:r>
-                        <a:rPr sz="1000" b="0">
-                          <a:solidFill>
-                            <a:srgbClr val="000000"/>
+                        <a:rPr sz="1200" b="1">
+                          <a:solidFill>
+                            <a:srgbClr val="145A32"/>
                           </a:solidFill>
                         </a:rPr>
                         <a:t>Matched</a:t>
@@ -4514,12 +3983,12 @@
                   </a:txBody>
                   <a:tcPr>
                     <a:solidFill>
-                      <a:srgbClr val="FFFFFF"/>
+                      <a:srgbClr val="DCFFE6"/>
                     </a:solidFill>
                   </a:tcPr>
                 </a:tc>
               </a:tr>
-              <a:tr h="502920">
+              <a:tr h="457200">
                 <a:tc>
                   <a:txBody>
                     <a:bodyPr/>
@@ -4527,7 +3996,7 @@
                     <a:p>
                       <a:pPr algn="l"/>
                       <a:r>
-                        <a:rPr sz="1000" b="0">
+                        <a:rPr sz="1100" b="0">
                           <a:solidFill>
                             <a:srgbClr val="000000"/>
                           </a:solidFill>
@@ -4547,9 +4016,9 @@
                     <a:bodyPr/>
                     <a:lstStyle/>
                     <a:p>
-                      <a:pPr algn="ctr"/>
-                      <a:r>
-                        <a:rPr sz="1000" b="0">
+                      <a:pPr algn="l"/>
+                      <a:r>
+                        <a:rPr sz="1100" b="0">
                           <a:solidFill>
                             <a:srgbClr val="000000"/>
                           </a:solidFill>
@@ -4569,9 +4038,9 @@
                     <a:bodyPr/>
                     <a:lstStyle/>
                     <a:p>
-                      <a:pPr algn="ctr"/>
-                      <a:r>
-                        <a:rPr sz="1000" b="0">
+                      <a:pPr algn="l"/>
+                      <a:r>
+                        <a:rPr sz="1100" b="0">
                           <a:solidFill>
                             <a:srgbClr val="000000"/>
                           </a:solidFill>
@@ -4593,7 +4062,7 @@
                     <a:p>
                       <a:pPr algn="ctr"/>
                       <a:r>
-                        <a:rPr sz="1000" b="0">
+                        <a:rPr sz="1100" b="0">
                           <a:solidFill>
                             <a:srgbClr val="000000"/>
                           </a:solidFill>
@@ -4615,7 +4084,7 @@
                     <a:p>
                       <a:pPr algn="ctr"/>
                       <a:r>
-                        <a:rPr sz="1000" b="0">
+                        <a:rPr sz="1100" b="0">
                           <a:solidFill>
                             <a:srgbClr val="000000"/>
                           </a:solidFill>
@@ -4637,7 +4106,7 @@
                     <a:p>
                       <a:pPr algn="ctr"/>
                       <a:r>
-                        <a:rPr sz="1000" b="0">
+                        <a:rPr sz="1100" b="0">
                           <a:solidFill>
                             <a:srgbClr val="000000"/>
                           </a:solidFill>
@@ -4659,7 +4128,7 @@
                     <a:p>
                       <a:pPr algn="ctr"/>
                       <a:r>
-                        <a:rPr sz="1000" b="0">
+                        <a:rPr sz="1100" b="0">
                           <a:solidFill>
                             <a:srgbClr val="000000"/>
                           </a:solidFill>
@@ -4681,7 +4150,7 @@
                     <a:p>
                       <a:pPr algn="ctr"/>
                       <a:r>
-                        <a:rPr sz="1000" b="0">
+                        <a:rPr sz="1100" b="0">
                           <a:solidFill>
                             <a:srgbClr val="000000"/>
                           </a:solidFill>
@@ -4703,9 +4172,9 @@
                     <a:p>
                       <a:pPr algn="ctr"/>
                       <a:r>
-                        <a:rPr sz="1000" b="0">
-                          <a:solidFill>
-                            <a:srgbClr val="000000"/>
+                        <a:rPr sz="1200" b="1">
+                          <a:solidFill>
+                            <a:srgbClr val="B48200"/>
                           </a:solidFill>
                         </a:rPr>
                         <a:t>Close</a:t>
@@ -4714,12 +4183,12 @@
                   </a:txBody>
                   <a:tcPr>
                     <a:solidFill>
-                      <a:srgbClr val="FFFFFF"/>
+                      <a:srgbClr val="FFFADC"/>
                     </a:solidFill>
                   </a:tcPr>
                 </a:tc>
               </a:tr>
-              <a:tr h="502920">
+              <a:tr h="457200">
                 <a:tc>
                   <a:txBody>
                     <a:bodyPr/>
@@ -4727,7 +4196,7 @@
                     <a:p>
                       <a:pPr algn="l"/>
                       <a:r>
-                        <a:rPr sz="1000" b="0">
+                        <a:rPr sz="1100" b="0">
                           <a:solidFill>
                             <a:srgbClr val="000000"/>
                           </a:solidFill>
@@ -4747,9 +4216,9 @@
                     <a:bodyPr/>
                     <a:lstStyle/>
                     <a:p>
-                      <a:pPr algn="ctr"/>
-                      <a:r>
-                        <a:rPr sz="1000" b="0">
+                      <a:pPr algn="l"/>
+                      <a:r>
+                        <a:rPr sz="1100" b="0">
                           <a:solidFill>
                             <a:srgbClr val="000000"/>
                           </a:solidFill>
@@ -4769,9 +4238,9 @@
                     <a:bodyPr/>
                     <a:lstStyle/>
                     <a:p>
-                      <a:pPr algn="ctr"/>
-                      <a:r>
-                        <a:rPr sz="1000" b="0">
+                      <a:pPr algn="l"/>
+                      <a:r>
+                        <a:rPr sz="1100" b="0">
                           <a:solidFill>
                             <a:srgbClr val="000000"/>
                           </a:solidFill>
@@ -4793,7 +4262,7 @@
                     <a:p>
                       <a:pPr algn="ctr"/>
                       <a:r>
-                        <a:rPr sz="1000" b="0">
+                        <a:rPr sz="1100" b="0">
                           <a:solidFill>
                             <a:srgbClr val="000000"/>
                           </a:solidFill>
@@ -4815,7 +4284,7 @@
                     <a:p>
                       <a:pPr algn="ctr"/>
                       <a:r>
-                        <a:rPr sz="1000" b="0">
+                        <a:rPr sz="1100" b="0">
                           <a:solidFill>
                             <a:srgbClr val="000000"/>
                           </a:solidFill>
@@ -4837,7 +4306,7 @@
                     <a:p>
                       <a:pPr algn="ctr"/>
                       <a:r>
-                        <a:rPr sz="1000" b="0">
+                        <a:rPr sz="1100" b="0">
                           <a:solidFill>
                             <a:srgbClr val="000000"/>
                           </a:solidFill>
@@ -4859,7 +4328,7 @@
                     <a:p>
                       <a:pPr algn="ctr"/>
                       <a:r>
-                        <a:rPr sz="1000" b="0">
+                        <a:rPr sz="1100" b="0">
                           <a:solidFill>
                             <a:srgbClr val="000000"/>
                           </a:solidFill>
@@ -4881,7 +4350,7 @@
                     <a:p>
                       <a:pPr algn="ctr"/>
                       <a:r>
-                        <a:rPr sz="1000" b="0">
+                        <a:rPr sz="1100" b="0">
                           <a:solidFill>
                             <a:srgbClr val="000000"/>
                           </a:solidFill>
@@ -4903,9 +4372,9 @@
                     <a:p>
                       <a:pPr algn="ctr"/>
                       <a:r>
-                        <a:rPr sz="1000" b="0">
-                          <a:solidFill>
-                            <a:srgbClr val="000000"/>
+                        <a:rPr sz="1200" b="1">
+                          <a:solidFill>
+                            <a:srgbClr val="145A32"/>
                           </a:solidFill>
                         </a:rPr>
                         <a:t>Reproduced</a:t>
@@ -4914,12 +4383,12 @@
                   </a:txBody>
                   <a:tcPr>
                     <a:solidFill>
-                      <a:srgbClr val="FFFFFF"/>
+                      <a:srgbClr val="DCFFE6"/>
                     </a:solidFill>
                   </a:tcPr>
                 </a:tc>
               </a:tr>
-              <a:tr h="502920">
+              <a:tr h="457200">
                 <a:tc>
                   <a:txBody>
                     <a:bodyPr/>
@@ -4927,7 +4396,7 @@
                     <a:p>
                       <a:pPr algn="l"/>
                       <a:r>
-                        <a:rPr sz="1000" b="0">
+                        <a:rPr sz="1100" b="0">
                           <a:solidFill>
                             <a:srgbClr val="000000"/>
                           </a:solidFill>
@@ -4947,9 +4416,9 @@
                     <a:bodyPr/>
                     <a:lstStyle/>
                     <a:p>
-                      <a:pPr algn="ctr"/>
-                      <a:r>
-                        <a:rPr sz="1000" b="0">
+                      <a:pPr algn="l"/>
+                      <a:r>
+                        <a:rPr sz="1100" b="0">
                           <a:solidFill>
                             <a:srgbClr val="000000"/>
                           </a:solidFill>
@@ -4969,9 +4438,9 @@
                     <a:bodyPr/>
                     <a:lstStyle/>
                     <a:p>
-                      <a:pPr algn="ctr"/>
-                      <a:r>
-                        <a:rPr sz="1000" b="0">
+                      <a:pPr algn="l"/>
+                      <a:r>
+                        <a:rPr sz="1100" b="0">
                           <a:solidFill>
                             <a:srgbClr val="000000"/>
                           </a:solidFill>
@@ -4993,7 +4462,7 @@
                     <a:p>
                       <a:pPr algn="ctr"/>
                       <a:r>
-                        <a:rPr sz="1000" b="0">
+                        <a:rPr sz="1100" b="0">
                           <a:solidFill>
                             <a:srgbClr val="000000"/>
                           </a:solidFill>
@@ -5015,7 +4484,7 @@
                     <a:p>
                       <a:pPr algn="ctr"/>
                       <a:r>
-                        <a:rPr sz="1000" b="0">
+                        <a:rPr sz="1100" b="0">
                           <a:solidFill>
                             <a:srgbClr val="000000"/>
                           </a:solidFill>
@@ -5037,7 +4506,7 @@
                     <a:p>
                       <a:pPr algn="ctr"/>
                       <a:r>
-                        <a:rPr sz="1000" b="0">
+                        <a:rPr sz="1100" b="0">
                           <a:solidFill>
                             <a:srgbClr val="000000"/>
                           </a:solidFill>
@@ -5059,7 +4528,7 @@
                     <a:p>
                       <a:pPr algn="ctr"/>
                       <a:r>
-                        <a:rPr sz="1000" b="0">
+                        <a:rPr sz="1100" b="0">
                           <a:solidFill>
                             <a:srgbClr val="000000"/>
                           </a:solidFill>
@@ -5081,7 +4550,7 @@
                     <a:p>
                       <a:pPr algn="ctr"/>
                       <a:r>
-                        <a:rPr sz="1000" b="0">
+                        <a:rPr sz="1100" b="0">
                           <a:solidFill>
                             <a:srgbClr val="000000"/>
                           </a:solidFill>
@@ -5103,9 +4572,9 @@
                     <a:p>
                       <a:pPr algn="ctr"/>
                       <a:r>
-                        <a:rPr sz="1000" b="0">
-                          <a:solidFill>
-                            <a:srgbClr val="000000"/>
+                        <a:rPr sz="1200" b="1">
+                          <a:solidFill>
+                            <a:srgbClr val="B48200"/>
                           </a:solidFill>
                         </a:rPr>
                         <a:t>Close</a:t>
@@ -5114,12 +4583,12 @@
                   </a:txBody>
                   <a:tcPr>
                     <a:solidFill>
-                      <a:srgbClr val="FFFFFF"/>
+                      <a:srgbClr val="FFFADC"/>
                     </a:solidFill>
                   </a:tcPr>
                 </a:tc>
               </a:tr>
-              <a:tr h="502920">
+              <a:tr h="457200">
                 <a:tc>
                   <a:txBody>
                     <a:bodyPr/>
@@ -5127,7 +4596,7 @@
                     <a:p>
                       <a:pPr algn="l"/>
                       <a:r>
-                        <a:rPr sz="1000" b="0">
+                        <a:rPr sz="1100" b="0">
                           <a:solidFill>
                             <a:srgbClr val="000000"/>
                           </a:solidFill>
@@ -5147,9 +4616,9 @@
                     <a:bodyPr/>
                     <a:lstStyle/>
                     <a:p>
-                      <a:pPr algn="ctr"/>
-                      <a:r>
-                        <a:rPr sz="1000" b="0">
+                      <a:pPr algn="l"/>
+                      <a:r>
+                        <a:rPr sz="1100" b="0">
                           <a:solidFill>
                             <a:srgbClr val="000000"/>
                           </a:solidFill>
@@ -5169,9 +4638,9 @@
                     <a:bodyPr/>
                     <a:lstStyle/>
                     <a:p>
-                      <a:pPr algn="ctr"/>
-                      <a:r>
-                        <a:rPr sz="1000" b="0">
+                      <a:pPr algn="l"/>
+                      <a:r>
+                        <a:rPr sz="1100" b="0">
                           <a:solidFill>
                             <a:srgbClr val="000000"/>
                           </a:solidFill>
@@ -5193,7 +4662,7 @@
                     <a:p>
                       <a:pPr algn="ctr"/>
                       <a:r>
-                        <a:rPr sz="1000" b="0">
+                        <a:rPr sz="1100" b="0">
                           <a:solidFill>
                             <a:srgbClr val="000000"/>
                           </a:solidFill>
@@ -5215,7 +4684,7 @@
                     <a:p>
                       <a:pPr algn="ctr"/>
                       <a:r>
-                        <a:rPr sz="1000" b="0">
+                        <a:rPr sz="1100" b="0">
                           <a:solidFill>
                             <a:srgbClr val="000000"/>
                           </a:solidFill>
@@ -5237,7 +4706,7 @@
                     <a:p>
                       <a:pPr algn="ctr"/>
                       <a:r>
-                        <a:rPr sz="1000" b="0">
+                        <a:rPr sz="1100" b="0">
                           <a:solidFill>
                             <a:srgbClr val="000000"/>
                           </a:solidFill>
@@ -5259,7 +4728,7 @@
                     <a:p>
                       <a:pPr algn="ctr"/>
                       <a:r>
-                        <a:rPr sz="1000" b="0">
+                        <a:rPr sz="1100" b="0">
                           <a:solidFill>
                             <a:srgbClr val="000000"/>
                           </a:solidFill>
@@ -5281,7 +4750,7 @@
                     <a:p>
                       <a:pPr algn="ctr"/>
                       <a:r>
-                        <a:rPr sz="1000" b="0">
+                        <a:rPr sz="1100" b="0">
                           <a:solidFill>
                             <a:srgbClr val="000000"/>
                           </a:solidFill>
@@ -5303,9 +4772,9 @@
                     <a:p>
                       <a:pPr algn="ctr"/>
                       <a:r>
-                        <a:rPr sz="1000" b="0">
-                          <a:solidFill>
-                            <a:srgbClr val="000000"/>
+                        <a:rPr sz="1200" b="1">
+                          <a:solidFill>
+                            <a:srgbClr val="B48200"/>
                           </a:solidFill>
                         </a:rPr>
                         <a:t>Close</a:t>
@@ -5314,12 +4783,12 @@
                   </a:txBody>
                   <a:tcPr>
                     <a:solidFill>
-                      <a:srgbClr val="FFFFFF"/>
+                      <a:srgbClr val="FFFADC"/>
                     </a:solidFill>
                   </a:tcPr>
                 </a:tc>
               </a:tr>
-              <a:tr h="502920">
+              <a:tr h="457200">
                 <a:tc>
                   <a:txBody>
                     <a:bodyPr/>
@@ -5327,7 +4796,7 @@
                     <a:p>
                       <a:pPr algn="l"/>
                       <a:r>
-                        <a:rPr sz="1000" b="0">
+                        <a:rPr sz="1100" b="0">
                           <a:solidFill>
                             <a:srgbClr val="000000"/>
                           </a:solidFill>
@@ -5347,9 +4816,9 @@
                     <a:bodyPr/>
                     <a:lstStyle/>
                     <a:p>
-                      <a:pPr algn="ctr"/>
-                      <a:r>
-                        <a:rPr sz="1000" b="0">
+                      <a:pPr algn="l"/>
+                      <a:r>
+                        <a:rPr sz="1100" b="0">
                           <a:solidFill>
                             <a:srgbClr val="000000"/>
                           </a:solidFill>
@@ -5369,9 +4838,9 @@
                     <a:bodyPr/>
                     <a:lstStyle/>
                     <a:p>
-                      <a:pPr algn="ctr"/>
-                      <a:r>
-                        <a:rPr sz="1000" b="0">
+                      <a:pPr algn="l"/>
+                      <a:r>
+                        <a:rPr sz="1100" b="0">
                           <a:solidFill>
                             <a:srgbClr val="000000"/>
                           </a:solidFill>
@@ -5393,7 +4862,7 @@
                     <a:p>
                       <a:pPr algn="ctr"/>
                       <a:r>
-                        <a:rPr sz="1000" b="0">
+                        <a:rPr sz="1100" b="0">
                           <a:solidFill>
                             <a:srgbClr val="000000"/>
                           </a:solidFill>
@@ -5415,7 +4884,7 @@
                     <a:p>
                       <a:pPr algn="ctr"/>
                       <a:r>
-                        <a:rPr sz="1000" b="0">
+                        <a:rPr sz="1100" b="0">
                           <a:solidFill>
                             <a:srgbClr val="000000"/>
                           </a:solidFill>
@@ -5437,7 +4906,7 @@
                     <a:p>
                       <a:pPr algn="ctr"/>
                       <a:r>
-                        <a:rPr sz="1000" b="0">
+                        <a:rPr sz="1100" b="0">
                           <a:solidFill>
                             <a:srgbClr val="000000"/>
                           </a:solidFill>
@@ -5459,7 +4928,7 @@
                     <a:p>
                       <a:pPr algn="ctr"/>
                       <a:r>
-                        <a:rPr sz="1000" b="0">
+                        <a:rPr sz="1100" b="0">
                           <a:solidFill>
                             <a:srgbClr val="000000"/>
                           </a:solidFill>
@@ -5481,7 +4950,7 @@
                     <a:p>
                       <a:pPr algn="ctr"/>
                       <a:r>
-                        <a:rPr sz="1000" b="0">
+                        <a:rPr sz="1100" b="0">
                           <a:solidFill>
                             <a:srgbClr val="000000"/>
                           </a:solidFill>
@@ -5503,9 +4972,9 @@
                     <a:p>
                       <a:pPr algn="ctr"/>
                       <a:r>
-                        <a:rPr sz="1000" b="0">
-                          <a:solidFill>
-                            <a:srgbClr val="000000"/>
+                        <a:rPr sz="1200" b="1">
+                          <a:solidFill>
+                            <a:srgbClr val="145A32"/>
                           </a:solidFill>
                         </a:rPr>
                         <a:t>Best matches</a:t>
@@ -5514,12 +4983,12 @@
                   </a:txBody>
                   <a:tcPr>
                     <a:solidFill>
-                      <a:srgbClr val="FFFFFF"/>
+                      <a:srgbClr val="DCFFE6"/>
                     </a:solidFill>
                   </a:tcPr>
                 </a:tc>
               </a:tr>
-              <a:tr h="502920">
+              <a:tr h="457200">
                 <a:tc>
                   <a:txBody>
                     <a:bodyPr/>
@@ -5527,7 +4996,7 @@
                     <a:p>
                       <a:pPr algn="l"/>
                       <a:r>
-                        <a:rPr sz="1000" b="0">
+                        <a:rPr sz="1100" b="0">
                           <a:solidFill>
                             <a:srgbClr val="000000"/>
                           </a:solidFill>
@@ -5547,9 +5016,9 @@
                     <a:bodyPr/>
                     <a:lstStyle/>
                     <a:p>
-                      <a:pPr algn="ctr"/>
-                      <a:r>
-                        <a:rPr sz="1000" b="0">
+                      <a:pPr algn="l"/>
+                      <a:r>
+                        <a:rPr sz="1100" b="0">
                           <a:solidFill>
                             <a:srgbClr val="000000"/>
                           </a:solidFill>
@@ -5569,9 +5038,9 @@
                     <a:bodyPr/>
                     <a:lstStyle/>
                     <a:p>
-                      <a:pPr algn="ctr"/>
-                      <a:r>
-                        <a:rPr sz="1000" b="0">
+                      <a:pPr algn="l"/>
+                      <a:r>
+                        <a:rPr sz="1100" b="0">
                           <a:solidFill>
                             <a:srgbClr val="000000"/>
                           </a:solidFill>
@@ -5593,7 +5062,7 @@
                     <a:p>
                       <a:pPr algn="ctr"/>
                       <a:r>
-                        <a:rPr sz="1000" b="0">
+                        <a:rPr sz="1100" b="0">
                           <a:solidFill>
                             <a:srgbClr val="000000"/>
                           </a:solidFill>
@@ -5615,7 +5084,7 @@
                     <a:p>
                       <a:pPr algn="ctr"/>
                       <a:r>
-                        <a:rPr sz="1000" b="0">
+                        <a:rPr sz="1100" b="0">
                           <a:solidFill>
                             <a:srgbClr val="000000"/>
                           </a:solidFill>
@@ -5637,7 +5106,7 @@
                     <a:p>
                       <a:pPr algn="ctr"/>
                       <a:r>
-                        <a:rPr sz="1000" b="0">
+                        <a:rPr sz="1100" b="0">
                           <a:solidFill>
                             <a:srgbClr val="000000"/>
                           </a:solidFill>
@@ -5659,7 +5128,7 @@
                     <a:p>
                       <a:pPr algn="ctr"/>
                       <a:r>
-                        <a:rPr sz="1000" b="0">
+                        <a:rPr sz="1100" b="0">
                           <a:solidFill>
                             <a:srgbClr val="000000"/>
                           </a:solidFill>
@@ -5681,7 +5150,7 @@
                     <a:p>
                       <a:pPr algn="ctr"/>
                       <a:r>
-                        <a:rPr sz="1000" b="0">
+                        <a:rPr sz="1100" b="0">
                           <a:solidFill>
                             <a:srgbClr val="000000"/>
                           </a:solidFill>
@@ -5703,9 +5172,9 @@
                     <a:p>
                       <a:pPr algn="ctr"/>
                       <a:r>
-                        <a:rPr sz="1000" b="0">
-                          <a:solidFill>
-                            <a:srgbClr val="000000"/>
+                        <a:rPr sz="1200" b="1">
+                          <a:solidFill>
+                            <a:srgbClr val="145A32"/>
                           </a:solidFill>
                         </a:rPr>
                         <a:t>Best exceeds</a:t>
@@ -5714,12 +5183,12 @@
                   </a:txBody>
                   <a:tcPr>
                     <a:solidFill>
-                      <a:srgbClr val="FFFFFF"/>
+                      <a:srgbClr val="DCFFE6"/>
                     </a:solidFill>
                   </a:tcPr>
                 </a:tc>
               </a:tr>
-              <a:tr h="502920">
+              <a:tr h="457200">
                 <a:tc>
                   <a:txBody>
                     <a:bodyPr/>
@@ -5727,7 +5196,7 @@
                     <a:p>
                       <a:pPr algn="l"/>
                       <a:r>
-                        <a:rPr sz="1000" b="0">
+                        <a:rPr sz="1100" b="0">
                           <a:solidFill>
                             <a:srgbClr val="000000"/>
                           </a:solidFill>
@@ -5747,9 +5216,9 @@
                     <a:bodyPr/>
                     <a:lstStyle/>
                     <a:p>
-                      <a:pPr algn="ctr"/>
-                      <a:r>
-                        <a:rPr sz="1000" b="0">
+                      <a:pPr algn="l"/>
+                      <a:r>
+                        <a:rPr sz="1100" b="0">
                           <a:solidFill>
                             <a:srgbClr val="000000"/>
                           </a:solidFill>
@@ -5769,9 +5238,9 @@
                     <a:bodyPr/>
                     <a:lstStyle/>
                     <a:p>
-                      <a:pPr algn="ctr"/>
-                      <a:r>
-                        <a:rPr sz="1000" b="0">
+                      <a:pPr algn="l"/>
+                      <a:r>
+                        <a:rPr sz="1100" b="0">
                           <a:solidFill>
                             <a:srgbClr val="000000"/>
                           </a:solidFill>
@@ -5793,7 +5262,7 @@
                     <a:p>
                       <a:pPr algn="ctr"/>
                       <a:r>
-                        <a:rPr sz="1000" b="0">
+                        <a:rPr sz="1100" b="0">
                           <a:solidFill>
                             <a:srgbClr val="000000"/>
                           </a:solidFill>
@@ -5815,7 +5284,7 @@
                     <a:p>
                       <a:pPr algn="ctr"/>
                       <a:r>
-                        <a:rPr sz="1000" b="0">
+                        <a:rPr sz="1100" b="0">
                           <a:solidFill>
                             <a:srgbClr val="000000"/>
                           </a:solidFill>
@@ -5837,7 +5306,7 @@
                     <a:p>
                       <a:pPr algn="ctr"/>
                       <a:r>
-                        <a:rPr sz="1000" b="0">
+                        <a:rPr sz="1100" b="0">
                           <a:solidFill>
                             <a:srgbClr val="000000"/>
                           </a:solidFill>
@@ -5859,7 +5328,7 @@
                     <a:p>
                       <a:pPr algn="ctr"/>
                       <a:r>
-                        <a:rPr sz="1000" b="0">
+                        <a:rPr sz="1100" b="0">
                           <a:solidFill>
                             <a:srgbClr val="000000"/>
                           </a:solidFill>
@@ -5881,7 +5350,7 @@
                     <a:p>
                       <a:pPr algn="ctr"/>
                       <a:r>
-                        <a:rPr sz="1000" b="0">
+                        <a:rPr sz="1100" b="0">
                           <a:solidFill>
                             <a:srgbClr val="000000"/>
                           </a:solidFill>
@@ -5903,9 +5372,9 @@
                     <a:p>
                       <a:pPr algn="ctr"/>
                       <a:r>
-                        <a:rPr sz="1000" b="0">
-                          <a:solidFill>
-                            <a:srgbClr val="000000"/>
+                        <a:rPr sz="1200" b="1">
+                          <a:solidFill>
+                            <a:srgbClr val="E74C3C"/>
                           </a:solidFill>
                         </a:rPr>
                         <a:t>Below Ref.</a:t>
@@ -5914,7 +5383,7 @@
                   </a:txBody>
                   <a:tcPr>
                     <a:solidFill>
-                      <a:srgbClr val="FFFFFF"/>
+                      <a:srgbClr val="FFE6E6"/>
                     </a:solidFill>
                   </a:tcPr>
                 </a:tc>
@@ -5923,1152 +5392,259 @@
           </a:graphicData>
         </a:graphic>
       </p:graphicFrame>
-      <p:sp>
-        <p:nvSpPr>
-          <p:cNvPr id="4" name="Rectangle 3"/>
-          <p:cNvSpPr/>
+      <p:graphicFrame>
+        <p:nvGraphicFramePr>
+          <p:cNvPr id="4" name="Table 3"/>
+          <p:cNvGraphicFramePr>
+            <a:graphicFrameLocks noGrp="1"/>
+          </p:cNvGraphicFramePr>
           <p:nvPr/>
-        </p:nvSpPr>
-        <p:spPr>
-          <a:xfrm>
-            <a:off x="13716000" y="731520"/>
-            <a:ext cx="5029200" cy="7863840"/>
-          </a:xfrm>
-          <a:prstGeom prst="rect">
-            <a:avLst/>
-          </a:prstGeom>
-          <a:solidFill>
-            <a:srgbClr val="F0F0F0"/>
-          </a:solidFill>
-          <a:ln w="12700">
-            <a:solidFill>
-              <a:srgbClr val="C8C8C8"/>
-            </a:solidFill>
-          </a:ln>
-        </p:spPr>
-        <p:style>
-          <a:lnRef idx="1">
-            <a:schemeClr val="accent1"/>
-          </a:lnRef>
-          <a:fillRef idx="3">
-            <a:schemeClr val="accent1"/>
-          </a:fillRef>
-          <a:effectRef idx="2">
-            <a:schemeClr val="accent1"/>
-          </a:effectRef>
-          <a:fontRef idx="minor">
-            <a:schemeClr val="lt1"/>
-          </a:fontRef>
-        </p:style>
-        <p:txBody>
-          <a:bodyPr rtlCol="0" anchor="ctr"/>
-          <a:lstStyle/>
-          <a:p>
-            <a:pPr algn="ctr"/>
-          </a:p>
-        </p:txBody>
-      </p:sp>
-      <p:sp>
-        <p:nvSpPr>
-          <p:cNvPr id="5" name="TextBox 4"/>
-          <p:cNvSpPr txBox="1"/>
-          <p:nvPr/>
-        </p:nvSpPr>
-        <p:spPr>
-          <a:xfrm>
-            <a:off x="13990320" y="868680"/>
-            <a:ext cx="4480560" cy="411480"/>
-          </a:xfrm>
-          <a:prstGeom prst="rect">
-            <a:avLst/>
-          </a:prstGeom>
-          <a:noFill/>
-        </p:spPr>
-        <p:txBody>
-          <a:bodyPr wrap="square">
-            <a:spAutoFit/>
-          </a:bodyPr>
-          <a:lstStyle/>
-          <a:p>
-            <a:pPr algn="ctr"/>
-            <a:r>
-              <a:rPr sz="1800" b="1">
-                <a:solidFill>
-                  <a:srgbClr val="000000"/>
-                </a:solidFill>
-              </a:rPr>
-              <a:t>At a Glance</a:t>
-            </a:r>
-          </a:p>
-        </p:txBody>
-      </p:sp>
-      <p:sp>
-        <p:nvSpPr>
-          <p:cNvPr id="6" name="Oval 5"/>
-          <p:cNvSpPr/>
-          <p:nvPr/>
-        </p:nvSpPr>
-        <p:spPr>
-          <a:xfrm>
-            <a:off x="14081760" y="1426464"/>
-            <a:ext cx="256032" cy="256032"/>
-          </a:xfrm>
-          <a:prstGeom prst="ellipse">
-            <a:avLst/>
-          </a:prstGeom>
-          <a:solidFill>
-            <a:srgbClr val="27AE60"/>
-          </a:solidFill>
-          <a:ln>
-            <a:noFill/>
-          </a:ln>
-        </p:spPr>
-        <p:style>
-          <a:lnRef idx="1">
-            <a:schemeClr val="accent1"/>
-          </a:lnRef>
-          <a:fillRef idx="3">
-            <a:schemeClr val="accent1"/>
-          </a:fillRef>
-          <a:effectRef idx="2">
-            <a:schemeClr val="accent1"/>
-          </a:effectRef>
-          <a:fontRef idx="minor">
-            <a:schemeClr val="lt1"/>
-          </a:fontRef>
-        </p:style>
-        <p:txBody>
-          <a:bodyPr rtlCol="0" anchor="ctr"/>
-          <a:lstStyle/>
-          <a:p>
-            <a:pPr algn="ctr"/>
-          </a:p>
-        </p:txBody>
-      </p:sp>
-      <p:sp>
-        <p:nvSpPr>
-          <p:cNvPr id="7" name="TextBox 6"/>
-          <p:cNvSpPr txBox="1"/>
-          <p:nvPr/>
-        </p:nvSpPr>
-        <p:spPr>
-          <a:xfrm>
-            <a:off x="14493240" y="1371600"/>
-            <a:ext cx="1645920" cy="365760"/>
-          </a:xfrm>
-          <a:prstGeom prst="rect">
-            <a:avLst/>
-          </a:prstGeom>
-          <a:noFill/>
-        </p:spPr>
-        <p:txBody>
-          <a:bodyPr wrap="square">
-            <a:spAutoFit/>
-          </a:bodyPr>
-          <a:lstStyle/>
-          <a:p>
-            <a:pPr algn="l"/>
-            <a:r>
-              <a:rPr sz="1300" b="1">
-                <a:solidFill>
-                  <a:srgbClr val="000000"/>
-                </a:solidFill>
-              </a:rPr>
-              <a:t>BCIC2A</a:t>
-            </a:r>
-          </a:p>
-        </p:txBody>
-      </p:sp>
-      <p:sp>
-        <p:nvSpPr>
-          <p:cNvPr id="8" name="TextBox 7"/>
-          <p:cNvSpPr txBox="1"/>
-          <p:nvPr/>
-        </p:nvSpPr>
-        <p:spPr>
-          <a:xfrm>
-            <a:off x="16184880" y="1371600"/>
-            <a:ext cx="2286000" cy="365760"/>
-          </a:xfrm>
-          <a:prstGeom prst="rect">
-            <a:avLst/>
-          </a:prstGeom>
-          <a:noFill/>
-        </p:spPr>
-        <p:txBody>
-          <a:bodyPr wrap="square">
-            <a:spAutoFit/>
-          </a:bodyPr>
-          <a:lstStyle/>
-          <a:p>
-            <a:pPr algn="l"/>
-            <a:r>
-              <a:rPr sz="1100" b="0">
-                <a:solidFill>
-                  <a:srgbClr val="27AE60"/>
-                </a:solidFill>
-              </a:rPr>
-              <a:t>Matched</a:t>
-            </a:r>
-          </a:p>
-        </p:txBody>
-      </p:sp>
-      <p:sp>
-        <p:nvSpPr>
-          <p:cNvPr id="9" name="Oval 8"/>
-          <p:cNvSpPr/>
-          <p:nvPr/>
-        </p:nvSpPr>
-        <p:spPr>
-          <a:xfrm>
-            <a:off x="14081760" y="1883664"/>
-            <a:ext cx="256032" cy="256032"/>
-          </a:xfrm>
-          <a:prstGeom prst="ellipse">
-            <a:avLst/>
-          </a:prstGeom>
-          <a:solidFill>
-            <a:srgbClr val="F1C40F"/>
-          </a:solidFill>
-          <a:ln>
-            <a:noFill/>
-          </a:ln>
-        </p:spPr>
-        <p:style>
-          <a:lnRef idx="1">
-            <a:schemeClr val="accent1"/>
-          </a:lnRef>
-          <a:fillRef idx="3">
-            <a:schemeClr val="accent1"/>
-          </a:fillRef>
-          <a:effectRef idx="2">
-            <a:schemeClr val="accent1"/>
-          </a:effectRef>
-          <a:fontRef idx="minor">
-            <a:schemeClr val="lt1"/>
-          </a:fontRef>
-        </p:style>
-        <p:txBody>
-          <a:bodyPr rtlCol="0" anchor="ctr"/>
-          <a:lstStyle/>
-          <a:p>
-            <a:pPr algn="ctr"/>
-          </a:p>
-        </p:txBody>
-      </p:sp>
-      <p:sp>
-        <p:nvSpPr>
-          <p:cNvPr id="10" name="TextBox 9"/>
-          <p:cNvSpPr txBox="1"/>
-          <p:nvPr/>
-        </p:nvSpPr>
-        <p:spPr>
-          <a:xfrm>
-            <a:off x="14493240" y="1828800"/>
-            <a:ext cx="1645920" cy="365760"/>
-          </a:xfrm>
-          <a:prstGeom prst="rect">
-            <a:avLst/>
-          </a:prstGeom>
-          <a:noFill/>
-        </p:spPr>
-        <p:txBody>
-          <a:bodyPr wrap="square">
-            <a:spAutoFit/>
-          </a:bodyPr>
-          <a:lstStyle/>
-          <a:p>
-            <a:pPr algn="l"/>
-            <a:r>
-              <a:rPr sz="1300" b="1">
-                <a:solidFill>
-                  <a:srgbClr val="000000"/>
-                </a:solidFill>
-              </a:rPr>
-              <a:t>FACED</a:t>
-            </a:r>
-          </a:p>
-        </p:txBody>
-      </p:sp>
-      <p:sp>
-        <p:nvSpPr>
-          <p:cNvPr id="11" name="TextBox 10"/>
-          <p:cNvSpPr txBox="1"/>
-          <p:nvPr/>
-        </p:nvSpPr>
-        <p:spPr>
-          <a:xfrm>
-            <a:off x="16184880" y="1828800"/>
-            <a:ext cx="2286000" cy="365760"/>
-          </a:xfrm>
-          <a:prstGeom prst="rect">
-            <a:avLst/>
-          </a:prstGeom>
-          <a:noFill/>
-        </p:spPr>
-        <p:txBody>
-          <a:bodyPr wrap="square">
-            <a:spAutoFit/>
-          </a:bodyPr>
-          <a:lstStyle/>
-          <a:p>
-            <a:pPr algn="l"/>
-            <a:r>
-              <a:rPr sz="1100" b="0">
-                <a:solidFill>
-                  <a:srgbClr val="F1C40F"/>
-                </a:solidFill>
-              </a:rPr>
-              <a:t>Close</a:t>
-            </a:r>
-          </a:p>
-        </p:txBody>
-      </p:sp>
-      <p:sp>
-        <p:nvSpPr>
-          <p:cNvPr id="12" name="Oval 11"/>
-          <p:cNvSpPr/>
-          <p:nvPr/>
-        </p:nvSpPr>
-        <p:spPr>
-          <a:xfrm>
-            <a:off x="14081760" y="2340864"/>
-            <a:ext cx="256032" cy="256032"/>
-          </a:xfrm>
-          <a:prstGeom prst="ellipse">
-            <a:avLst/>
-          </a:prstGeom>
-          <a:solidFill>
-            <a:srgbClr val="27AE60"/>
-          </a:solidFill>
-          <a:ln>
-            <a:noFill/>
-          </a:ln>
-        </p:spPr>
-        <p:style>
-          <a:lnRef idx="1">
-            <a:schemeClr val="accent1"/>
-          </a:lnRef>
-          <a:fillRef idx="3">
-            <a:schemeClr val="accent1"/>
-          </a:fillRef>
-          <a:effectRef idx="2">
-            <a:schemeClr val="accent1"/>
-          </a:effectRef>
-          <a:fontRef idx="minor">
-            <a:schemeClr val="lt1"/>
-          </a:fontRef>
-        </p:style>
-        <p:txBody>
-          <a:bodyPr rtlCol="0" anchor="ctr"/>
-          <a:lstStyle/>
-          <a:p>
-            <a:pPr algn="ctr"/>
-          </a:p>
-        </p:txBody>
-      </p:sp>
-      <p:sp>
-        <p:nvSpPr>
-          <p:cNvPr id="13" name="TextBox 12"/>
-          <p:cNvSpPr txBox="1"/>
-          <p:nvPr/>
-        </p:nvSpPr>
-        <p:spPr>
-          <a:xfrm>
-            <a:off x="14493240" y="2286000"/>
-            <a:ext cx="1645920" cy="365760"/>
-          </a:xfrm>
-          <a:prstGeom prst="rect">
-            <a:avLst/>
-          </a:prstGeom>
-          <a:noFill/>
-        </p:spPr>
-        <p:txBody>
-          <a:bodyPr wrap="square">
-            <a:spAutoFit/>
-          </a:bodyPr>
-          <a:lstStyle/>
-          <a:p>
-            <a:pPr algn="l"/>
-            <a:r>
-              <a:rPr sz="1300" b="1">
-                <a:solidFill>
-                  <a:srgbClr val="000000"/>
-                </a:solidFill>
-              </a:rPr>
-              <a:t>ISRUC-S1</a:t>
-            </a:r>
-          </a:p>
-        </p:txBody>
-      </p:sp>
-      <p:sp>
-        <p:nvSpPr>
-          <p:cNvPr id="14" name="TextBox 13"/>
-          <p:cNvSpPr txBox="1"/>
-          <p:nvPr/>
-        </p:nvSpPr>
-        <p:spPr>
-          <a:xfrm>
-            <a:off x="16184880" y="2286000"/>
-            <a:ext cx="2286000" cy="365760"/>
-          </a:xfrm>
-          <a:prstGeom prst="rect">
-            <a:avLst/>
-          </a:prstGeom>
-          <a:noFill/>
-        </p:spPr>
-        <p:txBody>
-          <a:bodyPr wrap="square">
-            <a:spAutoFit/>
-          </a:bodyPr>
-          <a:lstStyle/>
-          <a:p>
-            <a:pPr algn="l"/>
-            <a:r>
-              <a:rPr sz="1100" b="0">
-                <a:solidFill>
-                  <a:srgbClr val="27AE60"/>
-                </a:solidFill>
-              </a:rPr>
-              <a:t>Reproduced</a:t>
-            </a:r>
-          </a:p>
-        </p:txBody>
-      </p:sp>
-      <p:sp>
-        <p:nvSpPr>
-          <p:cNvPr id="15" name="Oval 14"/>
-          <p:cNvSpPr/>
-          <p:nvPr/>
-        </p:nvSpPr>
-        <p:spPr>
-          <a:xfrm>
-            <a:off x="14081760" y="2798064"/>
-            <a:ext cx="256032" cy="256032"/>
-          </a:xfrm>
-          <a:prstGeom prst="ellipse">
-            <a:avLst/>
-          </a:prstGeom>
-          <a:solidFill>
-            <a:srgbClr val="F1C40F"/>
-          </a:solidFill>
-          <a:ln>
-            <a:noFill/>
-          </a:ln>
-        </p:spPr>
-        <p:style>
-          <a:lnRef idx="1">
-            <a:schemeClr val="accent1"/>
-          </a:lnRef>
-          <a:fillRef idx="3">
-            <a:schemeClr val="accent1"/>
-          </a:fillRef>
-          <a:effectRef idx="2">
-            <a:schemeClr val="accent1"/>
-          </a:effectRef>
-          <a:fontRef idx="minor">
-            <a:schemeClr val="lt1"/>
-          </a:fontRef>
-        </p:style>
-        <p:txBody>
-          <a:bodyPr rtlCol="0" anchor="ctr"/>
-          <a:lstStyle/>
-          <a:p>
-            <a:pPr algn="ctr"/>
-          </a:p>
-        </p:txBody>
-      </p:sp>
-      <p:sp>
-        <p:nvSpPr>
-          <p:cNvPr id="16" name="TextBox 15"/>
-          <p:cNvSpPr txBox="1"/>
-          <p:nvPr/>
-        </p:nvSpPr>
-        <p:spPr>
-          <a:xfrm>
-            <a:off x="14493240" y="2743200"/>
-            <a:ext cx="1645920" cy="365760"/>
-          </a:xfrm>
-          <a:prstGeom prst="rect">
-            <a:avLst/>
-          </a:prstGeom>
-          <a:noFill/>
-        </p:spPr>
-        <p:txBody>
-          <a:bodyPr wrap="square">
-            <a:spAutoFit/>
-          </a:bodyPr>
-          <a:lstStyle/>
-          <a:p>
-            <a:pPr algn="l"/>
-            <a:r>
-              <a:rPr sz="1300" b="1">
-                <a:solidFill>
-                  <a:srgbClr val="000000"/>
-                </a:solidFill>
-              </a:rPr>
-              <a:t>Physionet-MI</a:t>
-            </a:r>
-          </a:p>
-        </p:txBody>
-      </p:sp>
-      <p:sp>
-        <p:nvSpPr>
-          <p:cNvPr id="17" name="TextBox 16"/>
-          <p:cNvSpPr txBox="1"/>
-          <p:nvPr/>
-        </p:nvSpPr>
-        <p:spPr>
-          <a:xfrm>
-            <a:off x="16184880" y="2743200"/>
-            <a:ext cx="2286000" cy="365760"/>
-          </a:xfrm>
-          <a:prstGeom prst="rect">
-            <a:avLst/>
-          </a:prstGeom>
-          <a:noFill/>
-        </p:spPr>
-        <p:txBody>
-          <a:bodyPr wrap="square">
-            <a:spAutoFit/>
-          </a:bodyPr>
-          <a:lstStyle/>
-          <a:p>
-            <a:pPr algn="l"/>
-            <a:r>
-              <a:rPr sz="1100" b="0">
-                <a:solidFill>
-                  <a:srgbClr val="F1C40F"/>
-                </a:solidFill>
-              </a:rPr>
-              <a:t>Close</a:t>
-            </a:r>
-          </a:p>
-        </p:txBody>
-      </p:sp>
-      <p:sp>
-        <p:nvSpPr>
-          <p:cNvPr id="18" name="Oval 17"/>
-          <p:cNvSpPr/>
-          <p:nvPr/>
-        </p:nvSpPr>
-        <p:spPr>
-          <a:xfrm>
-            <a:off x="14081760" y="3255264"/>
-            <a:ext cx="256032" cy="256032"/>
-          </a:xfrm>
-          <a:prstGeom prst="ellipse">
-            <a:avLst/>
-          </a:prstGeom>
-          <a:solidFill>
-            <a:srgbClr val="F1C40F"/>
-          </a:solidFill>
-          <a:ln>
-            <a:noFill/>
-          </a:ln>
-        </p:spPr>
-        <p:style>
-          <a:lnRef idx="1">
-            <a:schemeClr val="accent1"/>
-          </a:lnRef>
-          <a:fillRef idx="3">
-            <a:schemeClr val="accent1"/>
-          </a:fillRef>
-          <a:effectRef idx="2">
-            <a:schemeClr val="accent1"/>
-          </a:effectRef>
-          <a:fontRef idx="minor">
-            <a:schemeClr val="lt1"/>
-          </a:fontRef>
-        </p:style>
-        <p:txBody>
-          <a:bodyPr rtlCol="0" anchor="ctr"/>
-          <a:lstStyle/>
-          <a:p>
-            <a:pPr algn="ctr"/>
-          </a:p>
-        </p:txBody>
-      </p:sp>
-      <p:sp>
-        <p:nvSpPr>
-          <p:cNvPr id="19" name="TextBox 18"/>
-          <p:cNvSpPr txBox="1"/>
-          <p:nvPr/>
-        </p:nvSpPr>
-        <p:spPr>
-          <a:xfrm>
-            <a:off x="14493240" y="3200400"/>
-            <a:ext cx="1645920" cy="365760"/>
-          </a:xfrm>
-          <a:prstGeom prst="rect">
-            <a:avLst/>
-          </a:prstGeom>
-          <a:noFill/>
-        </p:spPr>
-        <p:txBody>
-          <a:bodyPr wrap="square">
-            <a:spAutoFit/>
-          </a:bodyPr>
-          <a:lstStyle/>
-          <a:p>
-            <a:pPr algn="l"/>
-            <a:r>
-              <a:rPr sz="1300" b="1">
-                <a:solidFill>
-                  <a:srgbClr val="000000"/>
-                </a:solidFill>
-              </a:rPr>
-              <a:t>SEED-V</a:t>
-            </a:r>
-          </a:p>
-        </p:txBody>
-      </p:sp>
-      <p:sp>
-        <p:nvSpPr>
-          <p:cNvPr id="20" name="TextBox 19"/>
-          <p:cNvSpPr txBox="1"/>
-          <p:nvPr/>
-        </p:nvSpPr>
-        <p:spPr>
-          <a:xfrm>
-            <a:off x="16184880" y="3200400"/>
-            <a:ext cx="2286000" cy="365760"/>
-          </a:xfrm>
-          <a:prstGeom prst="rect">
-            <a:avLst/>
-          </a:prstGeom>
-          <a:noFill/>
-        </p:spPr>
-        <p:txBody>
-          <a:bodyPr wrap="square">
-            <a:spAutoFit/>
-          </a:bodyPr>
-          <a:lstStyle/>
-          <a:p>
-            <a:pPr algn="l"/>
-            <a:r>
-              <a:rPr sz="1100" b="0">
-                <a:solidFill>
-                  <a:srgbClr val="F1C40F"/>
-                </a:solidFill>
-              </a:rPr>
-              <a:t>Close</a:t>
-            </a:r>
-          </a:p>
-        </p:txBody>
-      </p:sp>
-      <p:sp>
-        <p:nvSpPr>
-          <p:cNvPr id="21" name="Oval 20"/>
-          <p:cNvSpPr/>
-          <p:nvPr/>
-        </p:nvSpPr>
-        <p:spPr>
-          <a:xfrm>
-            <a:off x="14081760" y="3712463"/>
-            <a:ext cx="256032" cy="256032"/>
-          </a:xfrm>
-          <a:prstGeom prst="ellipse">
-            <a:avLst/>
-          </a:prstGeom>
-          <a:solidFill>
-            <a:srgbClr val="27AE60"/>
-          </a:solidFill>
-          <a:ln>
-            <a:noFill/>
-          </a:ln>
-        </p:spPr>
-        <p:style>
-          <a:lnRef idx="1">
-            <a:schemeClr val="accent1"/>
-          </a:lnRef>
-          <a:fillRef idx="3">
-            <a:schemeClr val="accent1"/>
-          </a:fillRef>
-          <a:effectRef idx="2">
-            <a:schemeClr val="accent1"/>
-          </a:effectRef>
-          <a:fontRef idx="minor">
-            <a:schemeClr val="lt1"/>
-          </a:fontRef>
-        </p:style>
-        <p:txBody>
-          <a:bodyPr rtlCol="0" anchor="ctr"/>
-          <a:lstStyle/>
-          <a:p>
-            <a:pPr algn="ctr"/>
-          </a:p>
-        </p:txBody>
-      </p:sp>
-      <p:sp>
-        <p:nvSpPr>
-          <p:cNvPr id="22" name="TextBox 21"/>
-          <p:cNvSpPr txBox="1"/>
-          <p:nvPr/>
-        </p:nvSpPr>
-        <p:spPr>
-          <a:xfrm>
-            <a:off x="14493240" y="3657600"/>
-            <a:ext cx="1645920" cy="365760"/>
-          </a:xfrm>
-          <a:prstGeom prst="rect">
-            <a:avLst/>
-          </a:prstGeom>
-          <a:noFill/>
-        </p:spPr>
-        <p:txBody>
-          <a:bodyPr wrap="square">
-            <a:spAutoFit/>
-          </a:bodyPr>
-          <a:lstStyle/>
-          <a:p>
-            <a:pPr algn="l"/>
-            <a:r>
-              <a:rPr sz="1300" b="1">
-                <a:solidFill>
-                  <a:srgbClr val="000000"/>
-                </a:solidFill>
-              </a:rPr>
-              <a:t>SHU-MI</a:t>
-            </a:r>
-          </a:p>
-        </p:txBody>
-      </p:sp>
-      <p:sp>
-        <p:nvSpPr>
-          <p:cNvPr id="23" name="TextBox 22"/>
-          <p:cNvSpPr txBox="1"/>
-          <p:nvPr/>
-        </p:nvSpPr>
-        <p:spPr>
-          <a:xfrm>
-            <a:off x="16184880" y="3657600"/>
-            <a:ext cx="2286000" cy="365760"/>
-          </a:xfrm>
-          <a:prstGeom prst="rect">
-            <a:avLst/>
-          </a:prstGeom>
-          <a:noFill/>
-        </p:spPr>
-        <p:txBody>
-          <a:bodyPr wrap="square">
-            <a:spAutoFit/>
-          </a:bodyPr>
-          <a:lstStyle/>
-          <a:p>
-            <a:pPr algn="l"/>
-            <a:r>
-              <a:rPr sz="1100" b="0">
-                <a:solidFill>
-                  <a:srgbClr val="27AE60"/>
-                </a:solidFill>
-              </a:rPr>
-              <a:t>Best matches</a:t>
-            </a:r>
-          </a:p>
-        </p:txBody>
-      </p:sp>
-      <p:sp>
-        <p:nvSpPr>
-          <p:cNvPr id="24" name="Oval 23"/>
-          <p:cNvSpPr/>
-          <p:nvPr/>
-        </p:nvSpPr>
-        <p:spPr>
-          <a:xfrm>
-            <a:off x="14081760" y="4169663"/>
-            <a:ext cx="256032" cy="256032"/>
-          </a:xfrm>
-          <a:prstGeom prst="ellipse">
-            <a:avLst/>
-          </a:prstGeom>
-          <a:solidFill>
-            <a:srgbClr val="27AE60"/>
-          </a:solidFill>
-          <a:ln>
-            <a:noFill/>
-          </a:ln>
-        </p:spPr>
-        <p:style>
-          <a:lnRef idx="1">
-            <a:schemeClr val="accent1"/>
-          </a:lnRef>
-          <a:fillRef idx="3">
-            <a:schemeClr val="accent1"/>
-          </a:fillRef>
-          <a:effectRef idx="2">
-            <a:schemeClr val="accent1"/>
-          </a:effectRef>
-          <a:fontRef idx="minor">
-            <a:schemeClr val="lt1"/>
-          </a:fontRef>
-        </p:style>
-        <p:txBody>
-          <a:bodyPr rtlCol="0" anchor="ctr"/>
-          <a:lstStyle/>
-          <a:p>
-            <a:pPr algn="ctr"/>
-          </a:p>
-        </p:txBody>
-      </p:sp>
-      <p:sp>
-        <p:nvSpPr>
-          <p:cNvPr id="25" name="TextBox 24"/>
-          <p:cNvSpPr txBox="1"/>
-          <p:nvPr/>
-        </p:nvSpPr>
-        <p:spPr>
-          <a:xfrm>
-            <a:off x="14493240" y="4114800"/>
-            <a:ext cx="1645920" cy="365760"/>
-          </a:xfrm>
-          <a:prstGeom prst="rect">
-            <a:avLst/>
-          </a:prstGeom>
-          <a:noFill/>
-        </p:spPr>
-        <p:txBody>
-          <a:bodyPr wrap="square">
-            <a:spAutoFit/>
-          </a:bodyPr>
-          <a:lstStyle/>
-          <a:p>
-            <a:pPr algn="l"/>
-            <a:r>
-              <a:rPr sz="1300" b="1">
-                <a:solidFill>
-                  <a:srgbClr val="000000"/>
-                </a:solidFill>
-              </a:rPr>
-              <a:t>MDD</a:t>
-            </a:r>
-          </a:p>
-        </p:txBody>
-      </p:sp>
-      <p:sp>
-        <p:nvSpPr>
-          <p:cNvPr id="26" name="TextBox 25"/>
-          <p:cNvSpPr txBox="1"/>
-          <p:nvPr/>
-        </p:nvSpPr>
-        <p:spPr>
-          <a:xfrm>
-            <a:off x="16184880" y="4114800"/>
-            <a:ext cx="2286000" cy="365760"/>
-          </a:xfrm>
-          <a:prstGeom prst="rect">
-            <a:avLst/>
-          </a:prstGeom>
-          <a:noFill/>
-        </p:spPr>
-        <p:txBody>
-          <a:bodyPr wrap="square">
-            <a:spAutoFit/>
-          </a:bodyPr>
-          <a:lstStyle/>
-          <a:p>
-            <a:pPr algn="l"/>
-            <a:r>
-              <a:rPr sz="1100" b="0">
-                <a:solidFill>
-                  <a:srgbClr val="27AE60"/>
-                </a:solidFill>
-              </a:rPr>
-              <a:t>Best exceeds</a:t>
-            </a:r>
-          </a:p>
-        </p:txBody>
-      </p:sp>
-      <p:sp>
-        <p:nvSpPr>
-          <p:cNvPr id="27" name="Oval 26"/>
-          <p:cNvSpPr/>
-          <p:nvPr/>
-        </p:nvSpPr>
-        <p:spPr>
-          <a:xfrm>
-            <a:off x="14081760" y="4626864"/>
-            <a:ext cx="256032" cy="256032"/>
-          </a:xfrm>
-          <a:prstGeom prst="ellipse">
-            <a:avLst/>
-          </a:prstGeom>
-          <a:solidFill>
-            <a:srgbClr val="E74C3C"/>
-          </a:solidFill>
-          <a:ln>
-            <a:noFill/>
-          </a:ln>
-        </p:spPr>
-        <p:style>
-          <a:lnRef idx="1">
-            <a:schemeClr val="accent1"/>
-          </a:lnRef>
-          <a:fillRef idx="3">
-            <a:schemeClr val="accent1"/>
-          </a:fillRef>
-          <a:effectRef idx="2">
-            <a:schemeClr val="accent1"/>
-          </a:effectRef>
-          <a:fontRef idx="minor">
-            <a:schemeClr val="lt1"/>
-          </a:fontRef>
-        </p:style>
-        <p:txBody>
-          <a:bodyPr rtlCol="0" anchor="ctr"/>
-          <a:lstStyle/>
-          <a:p>
-            <a:pPr algn="ctr"/>
-          </a:p>
-        </p:txBody>
-      </p:sp>
-      <p:sp>
-        <p:nvSpPr>
-          <p:cNvPr id="28" name="TextBox 27"/>
-          <p:cNvSpPr txBox="1"/>
-          <p:nvPr/>
-        </p:nvSpPr>
-        <p:spPr>
-          <a:xfrm>
-            <a:off x="14493240" y="4572000"/>
-            <a:ext cx="1645920" cy="365760"/>
-          </a:xfrm>
-          <a:prstGeom prst="rect">
-            <a:avLst/>
-          </a:prstGeom>
-          <a:noFill/>
-        </p:spPr>
-        <p:txBody>
-          <a:bodyPr wrap="square">
-            <a:spAutoFit/>
-          </a:bodyPr>
-          <a:lstStyle/>
-          <a:p>
-            <a:pPr algn="l"/>
-            <a:r>
-              <a:rPr sz="1300" b="1">
-                <a:solidFill>
-                  <a:srgbClr val="000000"/>
-                </a:solidFill>
-              </a:rPr>
-              <a:t>TUEV</a:t>
-            </a:r>
-          </a:p>
-        </p:txBody>
-      </p:sp>
-      <p:sp>
-        <p:nvSpPr>
-          <p:cNvPr id="29" name="TextBox 28"/>
-          <p:cNvSpPr txBox="1"/>
-          <p:nvPr/>
-        </p:nvSpPr>
-        <p:spPr>
-          <a:xfrm>
-            <a:off x="16184880" y="4572000"/>
-            <a:ext cx="2286000" cy="365760"/>
-          </a:xfrm>
-          <a:prstGeom prst="rect">
-            <a:avLst/>
-          </a:prstGeom>
-          <a:noFill/>
-        </p:spPr>
-        <p:txBody>
-          <a:bodyPr wrap="square">
-            <a:spAutoFit/>
-          </a:bodyPr>
-          <a:lstStyle/>
-          <a:p>
-            <a:pPr algn="l"/>
-            <a:r>
-              <a:rPr sz="1100" b="0">
-                <a:solidFill>
-                  <a:srgbClr val="E74C3C"/>
-                </a:solidFill>
-              </a:rPr>
-              <a:t>Below Ref.</a:t>
-            </a:r>
-          </a:p>
-        </p:txBody>
-      </p:sp>
-      <p:sp>
-        <p:nvSpPr>
-          <p:cNvPr id="30" name="Rectangle 29"/>
-          <p:cNvSpPr/>
-          <p:nvPr/>
-        </p:nvSpPr>
-        <p:spPr>
-          <a:xfrm>
-            <a:off x="14081760" y="5166360"/>
-            <a:ext cx="4297680" cy="13716"/>
-          </a:xfrm>
-          <a:prstGeom prst="rect">
-            <a:avLst/>
-          </a:prstGeom>
-          <a:solidFill>
-            <a:srgbClr val="C8C8C8"/>
-          </a:solidFill>
-          <a:ln>
-            <a:noFill/>
-          </a:ln>
-        </p:spPr>
-        <p:style>
-          <a:lnRef idx="1">
-            <a:schemeClr val="accent1"/>
-          </a:lnRef>
-          <a:fillRef idx="3">
-            <a:schemeClr val="accent1"/>
-          </a:fillRef>
-          <a:effectRef idx="2">
-            <a:schemeClr val="accent1"/>
-          </a:effectRef>
-          <a:fontRef idx="minor">
-            <a:schemeClr val="lt1"/>
-          </a:fontRef>
-        </p:style>
-        <p:txBody>
-          <a:bodyPr rtlCol="0" anchor="ctr"/>
-          <a:lstStyle/>
-          <a:p>
-            <a:pPr algn="ctr"/>
-          </a:p>
-        </p:txBody>
-      </p:sp>
-      <p:sp>
-        <p:nvSpPr>
-          <p:cNvPr id="31" name="TextBox 30"/>
-          <p:cNvSpPr txBox="1"/>
-          <p:nvPr/>
-        </p:nvSpPr>
-        <p:spPr>
-          <a:xfrm>
-            <a:off x="14173200" y="5440680"/>
-            <a:ext cx="4114800" cy="365760"/>
-          </a:xfrm>
-          <a:prstGeom prst="rect">
-            <a:avLst/>
-          </a:prstGeom>
-          <a:noFill/>
-        </p:spPr>
-        <p:txBody>
-          <a:bodyPr wrap="square">
-            <a:spAutoFit/>
-          </a:bodyPr>
-          <a:lstStyle/>
-          <a:p>
-            <a:pPr algn="l"/>
-            <a:r>
-              <a:rPr sz="1400" b="1">
-                <a:solidFill>
-                  <a:srgbClr val="27AE60"/>
-                </a:solidFill>
-              </a:rPr>
-              <a:t>Matched / Reproduced :  4</a:t>
-            </a:r>
-          </a:p>
-        </p:txBody>
-      </p:sp>
-      <p:sp>
-        <p:nvSpPr>
-          <p:cNvPr id="32" name="TextBox 31"/>
-          <p:cNvSpPr txBox="1"/>
-          <p:nvPr/>
-        </p:nvSpPr>
-        <p:spPr>
-          <a:xfrm>
-            <a:off x="14173200" y="5852160"/>
-            <a:ext cx="4114800" cy="365760"/>
-          </a:xfrm>
-          <a:prstGeom prst="rect">
-            <a:avLst/>
-          </a:prstGeom>
-          <a:noFill/>
-        </p:spPr>
-        <p:txBody>
-          <a:bodyPr wrap="square">
-            <a:spAutoFit/>
-          </a:bodyPr>
-          <a:lstStyle/>
-          <a:p>
-            <a:pPr algn="l"/>
-            <a:r>
-              <a:rPr sz="1400" b="1">
-                <a:solidFill>
-                  <a:srgbClr val="F1C40F"/>
-                </a:solidFill>
-              </a:rPr>
-              <a:t>Close                :  3</a:t>
-            </a:r>
-          </a:p>
-        </p:txBody>
-      </p:sp>
-      <p:sp>
-        <p:nvSpPr>
-          <p:cNvPr id="33" name="TextBox 32"/>
-          <p:cNvSpPr txBox="1"/>
-          <p:nvPr/>
-        </p:nvSpPr>
-        <p:spPr>
-          <a:xfrm>
-            <a:off x="14173200" y="6263640"/>
-            <a:ext cx="4114800" cy="365760"/>
-          </a:xfrm>
-          <a:prstGeom prst="rect">
-            <a:avLst/>
-          </a:prstGeom>
-          <a:noFill/>
-        </p:spPr>
-        <p:txBody>
-          <a:bodyPr wrap="square">
-            <a:spAutoFit/>
-          </a:bodyPr>
-          <a:lstStyle/>
-          <a:p>
-            <a:pPr algn="l"/>
-            <a:r>
-              <a:rPr sz="1400" b="1">
-                <a:solidFill>
-                  <a:srgbClr val="E74C3C"/>
-                </a:solidFill>
-              </a:rPr>
-              <a:t>Below Ref.           :  1</a:t>
-            </a:r>
-          </a:p>
-        </p:txBody>
-      </p:sp>
-      <p:sp>
-        <p:nvSpPr>
-          <p:cNvPr id="34" name="TextBox 33"/>
-          <p:cNvSpPr txBox="1"/>
-          <p:nvPr/>
-        </p:nvSpPr>
-        <p:spPr>
-          <a:xfrm>
-            <a:off x="13990320" y="6949440"/>
-            <a:ext cx="4480560" cy="457200"/>
-          </a:xfrm>
-          <a:prstGeom prst="rect">
-            <a:avLst/>
-          </a:prstGeom>
-          <a:noFill/>
-        </p:spPr>
-        <p:txBody>
-          <a:bodyPr wrap="square">
-            <a:spAutoFit/>
-          </a:bodyPr>
-          <a:lstStyle/>
-          <a:p>
-            <a:pPr algn="ctr"/>
-            <a:r>
-              <a:rPr sz="1300" b="0">
-                <a:solidFill>
-                  <a:srgbClr val="145A32"/>
-                </a:solidFill>
-              </a:rPr>
-              <a:t>6 / 8 on or near paper reference</a:t>
-            </a:r>
-          </a:p>
-        </p:txBody>
-      </p:sp>
+        </p:nvGraphicFramePr>
+        <p:xfrm>
+          <a:off x="457200" y="5486400"/>
+          <a:ext cx="15544800" cy="822960"/>
+        </p:xfrm>
+        <a:graphic>
+          <a:graphicData uri="http://schemas.openxmlformats.org/drawingml/2006/table">
+            <a:tbl>
+              <a:tblPr firstRow="1" bandRow="1">
+                <a:tableStyleId>{5C22544A-7EE6-4342-B048-85BDC9FD1C3A}</a:tableStyleId>
+              </a:tblPr>
+              <a:tblGrid>
+                <a:gridCol w="6858000"/>
+                <a:gridCol w="2286000"/>
+                <a:gridCol w="2286000"/>
+                <a:gridCol w="2286000"/>
+                <a:gridCol w="1828800"/>
+              </a:tblGrid>
+              <a:tr h="411480">
+                <a:tc>
+                  <a:txBody>
+                    <a:bodyPr/>
+                    <a:lstStyle/>
+                    <a:p>
+                      <a:pPr algn="ctr"/>
+                      <a:r>
+                        <a:rPr sz="1200" b="1">
+                          <a:solidFill>
+                            <a:srgbClr val="FFFFFF"/>
+                          </a:solidFill>
+                        </a:rPr>
+                        <a:t/>
+                      </a:r>
+                    </a:p>
+                  </a:txBody>
+                  <a:tcPr>
+                    <a:solidFill>
+                      <a:srgbClr val="3C3C3C"/>
+                    </a:solidFill>
+                  </a:tcPr>
+                </a:tc>
+                <a:tc>
+                  <a:txBody>
+                    <a:bodyPr/>
+                    <a:lstStyle/>
+                    <a:p>
+                      <a:pPr algn="ctr"/>
+                      <a:r>
+                        <a:rPr sz="1200" b="1">
+                          <a:solidFill>
+                            <a:srgbClr val="FFFFFF"/>
+                          </a:solidFill>
+                        </a:rPr>
+                        <a:t>Matched / Reproduced</a:t>
+                      </a:r>
+                    </a:p>
+                  </a:txBody>
+                  <a:tcPr>
+                    <a:solidFill>
+                      <a:srgbClr val="3C3C3C"/>
+                    </a:solidFill>
+                  </a:tcPr>
+                </a:tc>
+                <a:tc>
+                  <a:txBody>
+                    <a:bodyPr/>
+                    <a:lstStyle/>
+                    <a:p>
+                      <a:pPr algn="ctr"/>
+                      <a:r>
+                        <a:rPr sz="1200" b="1">
+                          <a:solidFill>
+                            <a:srgbClr val="FFFFFF"/>
+                          </a:solidFill>
+                        </a:rPr>
+                        <a:t>Close</a:t>
+                      </a:r>
+                    </a:p>
+                  </a:txBody>
+                  <a:tcPr>
+                    <a:solidFill>
+                      <a:srgbClr val="3C3C3C"/>
+                    </a:solidFill>
+                  </a:tcPr>
+                </a:tc>
+                <a:tc>
+                  <a:txBody>
+                    <a:bodyPr/>
+                    <a:lstStyle/>
+                    <a:p>
+                      <a:pPr algn="ctr"/>
+                      <a:r>
+                        <a:rPr sz="1200" b="1">
+                          <a:solidFill>
+                            <a:srgbClr val="FFFFFF"/>
+                          </a:solidFill>
+                        </a:rPr>
+                        <a:t>Below Ref.</a:t>
+                      </a:r>
+                    </a:p>
+                  </a:txBody>
+                  <a:tcPr>
+                    <a:solidFill>
+                      <a:srgbClr val="3C3C3C"/>
+                    </a:solidFill>
+                  </a:tcPr>
+                </a:tc>
+                <a:tc>
+                  <a:txBody>
+                    <a:bodyPr/>
+                    <a:lstStyle/>
+                    <a:p>
+                      <a:pPr algn="ctr"/>
+                      <a:r>
+                        <a:rPr sz="1200" b="1">
+                          <a:solidFill>
+                            <a:srgbClr val="FFFFFF"/>
+                          </a:solidFill>
+                        </a:rPr>
+                        <a:t>Total</a:t>
+                      </a:r>
+                    </a:p>
+                  </a:txBody>
+                  <a:tcPr>
+                    <a:solidFill>
+                      <a:srgbClr val="3C3C3C"/>
+                    </a:solidFill>
+                  </a:tcPr>
+                </a:tc>
+              </a:tr>
+              <a:tr h="411480">
+                <a:tc>
+                  <a:txBody>
+                    <a:bodyPr/>
+                    <a:lstStyle/>
+                    <a:p>
+                      <a:pPr algn="ctr"/>
+                      <a:r>
+                        <a:rPr sz="1300" b="1">
+                          <a:solidFill>
+                            <a:srgbClr val="E74C3C"/>
+                          </a:solidFill>
+                        </a:rPr>
+                        <a:t>8 datasets</a:t>
+                      </a:r>
+                    </a:p>
+                  </a:txBody>
+                  <a:tcPr>
+                    <a:solidFill>
+                      <a:srgbClr val="FFE6E6"/>
+                    </a:solidFill>
+                  </a:tcPr>
+                </a:tc>
+                <a:tc>
+                  <a:txBody>
+                    <a:bodyPr/>
+                    <a:lstStyle/>
+                    <a:p>
+                      <a:pPr algn="ctr"/>
+                      <a:r>
+                        <a:rPr sz="1300" b="1">
+                          <a:solidFill>
+                            <a:srgbClr val="145A32"/>
+                          </a:solidFill>
+                        </a:rPr>
+                        <a:t>4</a:t>
+                      </a:r>
+                    </a:p>
+                  </a:txBody>
+                  <a:tcPr>
+                    <a:solidFill>
+                      <a:srgbClr val="DCFFE6"/>
+                    </a:solidFill>
+                  </a:tcPr>
+                </a:tc>
+                <a:tc>
+                  <a:txBody>
+                    <a:bodyPr/>
+                    <a:lstStyle/>
+                    <a:p>
+                      <a:pPr algn="ctr"/>
+                      <a:r>
+                        <a:rPr sz="1300" b="1">
+                          <a:solidFill>
+                            <a:srgbClr val="B48200"/>
+                          </a:solidFill>
+                        </a:rPr>
+                        <a:t>3</a:t>
+                      </a:r>
+                    </a:p>
+                  </a:txBody>
+                  <a:tcPr>
+                    <a:solidFill>
+                      <a:srgbClr val="FFFADC"/>
+                    </a:solidFill>
+                  </a:tcPr>
+                </a:tc>
+                <a:tc>
+                  <a:txBody>
+                    <a:bodyPr/>
+                    <a:lstStyle/>
+                    <a:p>
+                      <a:pPr algn="ctr"/>
+                      <a:r>
+                        <a:rPr sz="1300" b="1">
+                          <a:solidFill>
+                            <a:srgbClr val="E74C3C"/>
+                          </a:solidFill>
+                        </a:rPr>
+                        <a:t>1</a:t>
+                      </a:r>
+                    </a:p>
+                  </a:txBody>
+                  <a:tcPr>
+                    <a:solidFill>
+                      <a:srgbClr val="FFE6E6"/>
+                    </a:solidFill>
+                  </a:tcPr>
+                </a:tc>
+                <a:tc>
+                  <a:txBody>
+                    <a:bodyPr/>
+                    <a:lstStyle/>
+                    <a:p>
+                      <a:pPr algn="ctr"/>
+                      <a:r>
+                        <a:rPr sz="1300" b="1">
+                          <a:solidFill>
+                            <a:srgbClr val="145A32"/>
+                          </a:solidFill>
+                        </a:rPr>
+                        <a:t>6/8 on or near ref</a:t>
+                      </a:r>
+                    </a:p>
+                  </a:txBody>
+                  <a:tcPr>
+                    <a:solidFill>
+                      <a:srgbClr val="DCFFE6"/>
+                    </a:solidFill>
+                  </a:tcPr>
+                </a:tc>
+              </a:tr>
+            </a:tbl>
+          </a:graphicData>
+        </a:graphic>
+      </p:graphicFrame>
     </p:spTree>
   </p:cSld>
   <p:clrMapOvr>
@@ -7095,8 +5671,8 @@
         </p:nvSpPr>
         <p:spPr>
           <a:xfrm>
-            <a:off x="457200" y="137160"/>
-            <a:ext cx="18288000" cy="411480"/>
+            <a:off x="457200" y="182880"/>
+            <a:ext cx="16459200" cy="457200"/>
           </a:xfrm>
           <a:prstGeom prst="rect">
             <a:avLst/>
@@ -7104,18 +5680,13 @@
           <a:noFill/>
         </p:spPr>
         <p:txBody>
-          <a:bodyPr wrap="square">
+          <a:bodyPr wrap="none">
             <a:spAutoFit/>
           </a:bodyPr>
           <a:lstStyle/>
           <a:p>
-            <a:pPr algn="l"/>
             <a:r>
-              <a:rPr sz="2000" b="1">
-                <a:solidFill>
-                  <a:srgbClr val="000000"/>
-                </a:solidFill>
-              </a:rPr>
+              <a:rPr sz="2200" b="1"/>
               <a:t>Table 3: Original EEGNet Performance on Motor Imagery Datasets</a:t>
             </a:r>
           </a:p>
@@ -7130,8 +5701,8 @@
           <p:nvPr/>
         </p:nvGraphicFramePr>
         <p:xfrm>
-          <a:off x="274320" y="731520"/>
-          <a:ext cx="11430000" cy="2514600"/>
+          <a:off x="457200" y="822960"/>
+          <a:ext cx="15544800" cy="2286000"/>
         </p:xfrm>
         <a:graphic>
           <a:graphicData uri="http://schemas.openxmlformats.org/drawingml/2006/table">
@@ -7140,21 +5711,22 @@
                 <a:tableStyleId>{5C22544A-7EE6-4342-B048-85BDC9FD1C3A}</a:tableStyleId>
               </a:tblPr>
               <a:tblGrid>
-                <a:gridCol w="3200400"/>
-                <a:gridCol w="1371600"/>
-                <a:gridCol w="2286000"/>
-                <a:gridCol w="2286000"/>
-                <a:gridCol w="2286000"/>
+                <a:gridCol w="2743200"/>
+                <a:gridCol w="1188720"/>
+                <a:gridCol w="2103120"/>
+                <a:gridCol w="2103120"/>
+                <a:gridCol w="2103120"/>
+                <a:gridCol w="5303520"/>
               </a:tblGrid>
-              <a:tr h="502920">
-                <a:tc>
-                  <a:txBody>
-                    <a:bodyPr/>
-                    <a:lstStyle/>
-                    <a:p>
-                      <a:pPr algn="ctr"/>
-                      <a:r>
-                        <a:rPr sz="1000" b="1">
+              <a:tr h="457200">
+                <a:tc>
+                  <a:txBody>
+                    <a:bodyPr/>
+                    <a:lstStyle/>
+                    <a:p>
+                      <a:pPr algn="ctr"/>
+                      <a:r>
+                        <a:rPr sz="1200" b="1">
                           <a:solidFill>
                             <a:srgbClr val="FFFFFF"/>
                           </a:solidFill>
@@ -7176,7 +5748,7 @@
                     <a:p>
                       <a:pPr algn="ctr"/>
                       <a:r>
-                        <a:rPr sz="1000" b="1">
+                        <a:rPr sz="1200" b="1">
                           <a:solidFill>
                             <a:srgbClr val="FFFFFF"/>
                           </a:solidFill>
@@ -7198,7 +5770,7 @@
                     <a:p>
                       <a:pPr algn="ctr"/>
                       <a:r>
-                        <a:rPr sz="1000" b="1">
+                        <a:rPr sz="1200" b="1">
                           <a:solidFill>
                             <a:srgbClr val="FFFFFF"/>
                           </a:solidFill>
@@ -7220,7 +5792,7 @@
                     <a:p>
                       <a:pPr algn="ctr"/>
                       <a:r>
-                        <a:rPr sz="1000" b="1">
+                        <a:rPr sz="1200" b="1">
                           <a:solidFill>
                             <a:srgbClr val="FFFFFF"/>
                           </a:solidFill>
@@ -7242,7 +5814,7 @@
                     <a:p>
                       <a:pPr algn="ctr"/>
                       <a:r>
-                        <a:rPr sz="1000" b="1">
+                        <a:rPr sz="1200" b="1">
                           <a:solidFill>
                             <a:srgbClr val="FFFFFF"/>
                           </a:solidFill>
@@ -7257,8 +5829,30 @@
                     </a:solidFill>
                   </a:tcPr>
                 </a:tc>
+                <a:tc>
+                  <a:txBody>
+                    <a:bodyPr/>
+                    <a:lstStyle/>
+                    <a:p>
+                      <a:pPr algn="ctr"/>
+                      <a:r>
+                        <a:rPr sz="1200" b="1">
+                          <a:solidFill>
+                            <a:srgbClr val="FFFFFF"/>
+                          </a:solidFill>
+                        </a:rPr>
+                        <a:t>Note</a:t>
+                      </a:r>
+                    </a:p>
+                  </a:txBody>
+                  <a:tcPr>
+                    <a:solidFill>
+                      <a:srgbClr val="3C3C3C"/>
+                    </a:solidFill>
+                  </a:tcPr>
+                </a:tc>
               </a:tr>
-              <a:tr h="502920">
+              <a:tr h="457200">
                 <a:tc>
                   <a:txBody>
                     <a:bodyPr/>
@@ -7266,7 +5860,7 @@
                     <a:p>
                       <a:pPr algn="l"/>
                       <a:r>
-                        <a:rPr sz="1000" b="0">
+                        <a:rPr sz="1200" b="0">
                           <a:solidFill>
                             <a:srgbClr val="000000"/>
                           </a:solidFill>
@@ -7288,7 +5882,7 @@
                     <a:p>
                       <a:pPr algn="ctr"/>
                       <a:r>
-                        <a:rPr sz="1000" b="0">
+                        <a:rPr sz="1200" b="0">
                           <a:solidFill>
                             <a:srgbClr val="000000"/>
                           </a:solidFill>
@@ -7310,7 +5904,7 @@
                     <a:p>
                       <a:pPr algn="ctr"/>
                       <a:r>
-                        <a:rPr sz="1000" b="0">
+                        <a:rPr sz="1200" b="0">
                           <a:solidFill>
                             <a:srgbClr val="000000"/>
                           </a:solidFill>
@@ -7332,7 +5926,7 @@
                     <a:p>
                       <a:pPr algn="ctr"/>
                       <a:r>
-                        <a:rPr sz="1000" b="0">
+                        <a:rPr sz="1200" b="0">
                           <a:solidFill>
                             <a:srgbClr val="000000"/>
                           </a:solidFill>
@@ -7354,7 +5948,7 @@
                     <a:p>
                       <a:pPr algn="ctr"/>
                       <a:r>
-                        <a:rPr sz="1000" b="0">
+                        <a:rPr sz="1200" b="0">
                           <a:solidFill>
                             <a:srgbClr val="000000"/>
                           </a:solidFill>
@@ -7369,8 +5963,30 @@
                     </a:solidFill>
                   </a:tcPr>
                 </a:tc>
+                <a:tc>
+                  <a:txBody>
+                    <a:bodyPr/>
+                    <a:lstStyle/>
+                    <a:p>
+                      <a:pPr algn="l"/>
+                      <a:r>
+                        <a:rPr sz="1200" b="0">
+                          <a:solidFill>
+                            <a:srgbClr val="000000"/>
+                          </a:solidFill>
+                        </a:rPr>
+                        <a:t>Primary (300 epochs), val only</a:t>
+                      </a:r>
+                    </a:p>
+                  </a:txBody>
+                  <a:tcPr>
+                    <a:solidFill>
+                      <a:srgbClr val="FFFFFF"/>
+                    </a:solidFill>
+                  </a:tcPr>
+                </a:tc>
               </a:tr>
-              <a:tr h="502920">
+              <a:tr h="457200">
                 <a:tc>
                   <a:txBody>
                     <a:bodyPr/>
@@ -7378,7 +5994,7 @@
                     <a:p>
                       <a:pPr algn="l"/>
                       <a:r>
-                        <a:rPr sz="1000" b="0">
+                        <a:rPr sz="1200" b="0">
                           <a:solidFill>
                             <a:srgbClr val="000000"/>
                           </a:solidFill>
@@ -7400,7 +6016,7 @@
                     <a:p>
                       <a:pPr algn="ctr"/>
                       <a:r>
-                        <a:rPr sz="1000" b="0">
+                        <a:rPr sz="1200" b="0">
                           <a:solidFill>
                             <a:srgbClr val="000000"/>
                           </a:solidFill>
@@ -7422,7 +6038,7 @@
                     <a:p>
                       <a:pPr algn="ctr"/>
                       <a:r>
-                        <a:rPr sz="1000" b="0">
+                        <a:rPr sz="1200" b="0">
                           <a:solidFill>
                             <a:srgbClr val="000000"/>
                           </a:solidFill>
@@ -7444,7 +6060,7 @@
                     <a:p>
                       <a:pPr algn="ctr"/>
                       <a:r>
-                        <a:rPr sz="1000" b="0">
+                        <a:rPr sz="1200" b="0">
                           <a:solidFill>
                             <a:srgbClr val="000000"/>
                           </a:solidFill>
@@ -7466,7 +6082,7 @@
                     <a:p>
                       <a:pPr algn="ctr"/>
                       <a:r>
-                        <a:rPr sz="1000" b="0">
+                        <a:rPr sz="1200" b="0">
                           <a:solidFill>
                             <a:srgbClr val="000000"/>
                           </a:solidFill>
@@ -7481,8 +6097,30 @@
                     </a:solidFill>
                   </a:tcPr>
                 </a:tc>
+                <a:tc>
+                  <a:txBody>
+                    <a:bodyPr/>
+                    <a:lstStyle/>
+                    <a:p>
+                      <a:pPr algn="l"/>
+                      <a:r>
+                        <a:rPr sz="1200" b="0">
+                          <a:solidFill>
+                            <a:srgbClr val="000000"/>
+                          </a:solidFill>
+                        </a:rPr>
+                        <a:t>Primary (300 epochs), full test available</a:t>
+                      </a:r>
+                    </a:p>
+                  </a:txBody>
+                  <a:tcPr>
+                    <a:solidFill>
+                      <a:srgbClr val="FFFFFF"/>
+                    </a:solidFill>
+                  </a:tcPr>
+                </a:tc>
               </a:tr>
-              <a:tr h="502920">
+              <a:tr h="457200">
                 <a:tc>
                   <a:txBody>
                     <a:bodyPr/>
@@ -7490,7 +6128,7 @@
                     <a:p>
                       <a:pPr algn="l"/>
                       <a:r>
-                        <a:rPr sz="1000" b="0">
+                        <a:rPr sz="1200" b="0">
                           <a:solidFill>
                             <a:srgbClr val="000000"/>
                           </a:solidFill>
@@ -7512,7 +6150,7 @@
                     <a:p>
                       <a:pPr algn="ctr"/>
                       <a:r>
-                        <a:rPr sz="1000" b="0">
+                        <a:rPr sz="1200" b="0">
                           <a:solidFill>
                             <a:srgbClr val="000000"/>
                           </a:solidFill>
@@ -7534,7 +6172,7 @@
                     <a:p>
                       <a:pPr algn="ctr"/>
                       <a:r>
-                        <a:rPr sz="1000" b="0">
+                        <a:rPr sz="1200" b="0">
                           <a:solidFill>
                             <a:srgbClr val="000000"/>
                           </a:solidFill>
@@ -7556,7 +6194,7 @@
                     <a:p>
                       <a:pPr algn="ctr"/>
                       <a:r>
-                        <a:rPr sz="1000" b="0">
+                        <a:rPr sz="1200" b="0">
                           <a:solidFill>
                             <a:srgbClr val="000000"/>
                           </a:solidFill>
@@ -7578,7 +6216,7 @@
                     <a:p>
                       <a:pPr algn="ctr"/>
                       <a:r>
-                        <a:rPr sz="1000" b="0">
+                        <a:rPr sz="1200" b="0">
                           <a:solidFill>
                             <a:srgbClr val="000000"/>
                           </a:solidFill>
@@ -7593,8 +6231,30 @@
                     </a:solidFill>
                   </a:tcPr>
                 </a:tc>
+                <a:tc>
+                  <a:txBody>
+                    <a:bodyPr/>
+                    <a:lstStyle/>
+                    <a:p>
+                      <a:pPr algn="l"/>
+                      <a:r>
+                        <a:rPr sz="1200" b="0">
+                          <a:solidFill>
+                            <a:srgbClr val="000000"/>
+                          </a:solidFill>
+                        </a:rPr>
+                        <a:t>Quick baseline (100 epochs, single seed)</a:t>
+                      </a:r>
+                    </a:p>
+                  </a:txBody>
+                  <a:tcPr>
+                    <a:solidFill>
+                      <a:srgbClr val="FFFFFF"/>
+                    </a:solidFill>
+                  </a:tcPr>
+                </a:tc>
               </a:tr>
-              <a:tr h="502920">
+              <a:tr h="457200">
                 <a:tc>
                   <a:txBody>
                     <a:bodyPr/>
@@ -7602,7 +6262,7 @@
                     <a:p>
                       <a:pPr algn="l"/>
                       <a:r>
-                        <a:rPr sz="1000" b="0">
+                        <a:rPr sz="1200" b="0">
                           <a:solidFill>
                             <a:srgbClr val="000000"/>
                           </a:solidFill>
@@ -7624,7 +6284,7 @@
                     <a:p>
                       <a:pPr algn="ctr"/>
                       <a:r>
-                        <a:rPr sz="1000" b="0">
+                        <a:rPr sz="1200" b="0">
                           <a:solidFill>
                             <a:srgbClr val="000000"/>
                           </a:solidFill>
@@ -7646,7 +6306,7 @@
                     <a:p>
                       <a:pPr algn="ctr"/>
                       <a:r>
-                        <a:rPr sz="1000" b="0">
+                        <a:rPr sz="1200" b="0">
                           <a:solidFill>
                             <a:srgbClr val="000000"/>
                           </a:solidFill>
@@ -7668,7 +6328,7 @@
                     <a:p>
                       <a:pPr algn="ctr"/>
                       <a:r>
-                        <a:rPr sz="1000" b="0">
+                        <a:rPr sz="1200" b="0">
                           <a:solidFill>
                             <a:srgbClr val="000000"/>
                           </a:solidFill>
@@ -7690,12 +6350,34 @@
                     <a:p>
                       <a:pPr algn="ctr"/>
                       <a:r>
-                        <a:rPr sz="1000" b="0">
+                        <a:rPr sz="1200" b="0">
                           <a:solidFill>
                             <a:srgbClr val="000000"/>
                           </a:solidFill>
                         </a:rPr>
                         <a:t>--</a:t>
+                      </a:r>
+                    </a:p>
+                  </a:txBody>
+                  <a:tcPr>
+                    <a:solidFill>
+                      <a:srgbClr val="FFFFFF"/>
+                    </a:solidFill>
+                  </a:tcPr>
+                </a:tc>
+                <a:tc>
+                  <a:txBody>
+                    <a:bodyPr/>
+                    <a:lstStyle/>
+                    <a:p>
+                      <a:pPr algn="l"/>
+                      <a:r>
+                        <a:rPr sz="1200" b="0">
+                          <a:solidFill>
+                            <a:srgbClr val="000000"/>
+                          </a:solidFill>
+                        </a:rPr>
+                        <a:t>Quick baseline (100 epochs, single seed)</a:t>
                       </a:r>
                     </a:p>
                   </a:txBody>
@@ -7710,674 +6392,6 @@
           </a:graphicData>
         </a:graphic>
       </p:graphicFrame>
-      <p:sp>
-        <p:nvSpPr>
-          <p:cNvPr id="4" name="Rectangle 3"/>
-          <p:cNvSpPr/>
-          <p:nvPr/>
-        </p:nvSpPr>
-        <p:spPr>
-          <a:xfrm>
-            <a:off x="13716000" y="731520"/>
-            <a:ext cx="5029200" cy="5394960"/>
-          </a:xfrm>
-          <a:prstGeom prst="rect">
-            <a:avLst/>
-          </a:prstGeom>
-          <a:solidFill>
-            <a:srgbClr val="F0F0F0"/>
-          </a:solidFill>
-          <a:ln w="12700">
-            <a:solidFill>
-              <a:srgbClr val="C8C8C8"/>
-            </a:solidFill>
-          </a:ln>
-        </p:spPr>
-        <p:style>
-          <a:lnRef idx="1">
-            <a:schemeClr val="accent1"/>
-          </a:lnRef>
-          <a:fillRef idx="3">
-            <a:schemeClr val="accent1"/>
-          </a:fillRef>
-          <a:effectRef idx="2">
-            <a:schemeClr val="accent1"/>
-          </a:effectRef>
-          <a:fontRef idx="minor">
-            <a:schemeClr val="lt1"/>
-          </a:fontRef>
-        </p:style>
-        <p:txBody>
-          <a:bodyPr rtlCol="0" anchor="ctr"/>
-          <a:lstStyle/>
-          <a:p>
-            <a:pPr algn="ctr"/>
-          </a:p>
-        </p:txBody>
-      </p:sp>
-      <p:sp>
-        <p:nvSpPr>
-          <p:cNvPr id="5" name="TextBox 4"/>
-          <p:cNvSpPr txBox="1"/>
-          <p:nvPr/>
-        </p:nvSpPr>
-        <p:spPr>
-          <a:xfrm>
-            <a:off x="13990320" y="868680"/>
-            <a:ext cx="4480560" cy="411480"/>
-          </a:xfrm>
-          <a:prstGeom prst="rect">
-            <a:avLst/>
-          </a:prstGeom>
-          <a:noFill/>
-        </p:spPr>
-        <p:txBody>
-          <a:bodyPr wrap="square">
-            <a:spAutoFit/>
-          </a:bodyPr>
-          <a:lstStyle/>
-          <a:p>
-            <a:pPr algn="ctr"/>
-            <a:r>
-              <a:rPr sz="1800" b="1">
-                <a:solidFill>
-                  <a:srgbClr val="000000"/>
-                </a:solidFill>
-              </a:rPr>
-              <a:t>Summary</a:t>
-            </a:r>
-          </a:p>
-        </p:txBody>
-      </p:sp>
-      <p:sp>
-        <p:nvSpPr>
-          <p:cNvPr id="6" name="Oval 5"/>
-          <p:cNvSpPr/>
-          <p:nvPr/>
-        </p:nvSpPr>
-        <p:spPr>
-          <a:xfrm>
-            <a:off x="14081760" y="1426464"/>
-            <a:ext cx="256032" cy="256032"/>
-          </a:xfrm>
-          <a:prstGeom prst="ellipse">
-            <a:avLst/>
-          </a:prstGeom>
-          <a:solidFill>
-            <a:srgbClr val="27AE60"/>
-          </a:solidFill>
-          <a:ln>
-            <a:noFill/>
-          </a:ln>
-        </p:spPr>
-        <p:style>
-          <a:lnRef idx="1">
-            <a:schemeClr val="accent1"/>
-          </a:lnRef>
-          <a:fillRef idx="3">
-            <a:schemeClr val="accent1"/>
-          </a:fillRef>
-          <a:effectRef idx="2">
-            <a:schemeClr val="accent1"/>
-          </a:effectRef>
-          <a:fontRef idx="minor">
-            <a:schemeClr val="lt1"/>
-          </a:fontRef>
-        </p:style>
-        <p:txBody>
-          <a:bodyPr rtlCol="0" anchor="ctr"/>
-          <a:lstStyle/>
-          <a:p>
-            <a:pPr algn="ctr"/>
-          </a:p>
-        </p:txBody>
-      </p:sp>
-      <p:sp>
-        <p:nvSpPr>
-          <p:cNvPr id="7" name="TextBox 6"/>
-          <p:cNvSpPr txBox="1"/>
-          <p:nvPr/>
-        </p:nvSpPr>
-        <p:spPr>
-          <a:xfrm>
-            <a:off x="14493240" y="1371600"/>
-            <a:ext cx="1645920" cy="365760"/>
-          </a:xfrm>
-          <a:prstGeom prst="rect">
-            <a:avLst/>
-          </a:prstGeom>
-          <a:noFill/>
-        </p:spPr>
-        <p:txBody>
-          <a:bodyPr wrap="square">
-            <a:spAutoFit/>
-          </a:bodyPr>
-          <a:lstStyle/>
-          <a:p>
-            <a:pPr algn="l"/>
-            <a:r>
-              <a:rPr sz="1300" b="1">
-                <a:solidFill>
-                  <a:srgbClr val="000000"/>
-                </a:solidFill>
-              </a:rPr>
-              <a:t>BCICIV2A</a:t>
-            </a:r>
-          </a:p>
-        </p:txBody>
-      </p:sp>
-      <p:sp>
-        <p:nvSpPr>
-          <p:cNvPr id="8" name="TextBox 7"/>
-          <p:cNvSpPr txBox="1"/>
-          <p:nvPr/>
-        </p:nvSpPr>
-        <p:spPr>
-          <a:xfrm>
-            <a:off x="16184880" y="1371600"/>
-            <a:ext cx="2286000" cy="365760"/>
-          </a:xfrm>
-          <a:prstGeom prst="rect">
-            <a:avLst/>
-          </a:prstGeom>
-          <a:noFill/>
-        </p:spPr>
-        <p:txBody>
-          <a:bodyPr wrap="square">
-            <a:spAutoFit/>
-          </a:bodyPr>
-          <a:lstStyle/>
-          <a:p>
-            <a:pPr algn="l"/>
-            <a:r>
-              <a:rPr sz="1100" b="0">
-                <a:solidFill>
-                  <a:srgbClr val="27AE60"/>
-                </a:solidFill>
-              </a:rPr>
-              <a:t>Primary - val 79.17%</a:t>
-            </a:r>
-          </a:p>
-        </p:txBody>
-      </p:sp>
-      <p:sp>
-        <p:nvSpPr>
-          <p:cNvPr id="9" name="Oval 8"/>
-          <p:cNvSpPr/>
-          <p:nvPr/>
-        </p:nvSpPr>
-        <p:spPr>
-          <a:xfrm>
-            <a:off x="14081760" y="1883664"/>
-            <a:ext cx="256032" cy="256032"/>
-          </a:xfrm>
-          <a:prstGeom prst="ellipse">
-            <a:avLst/>
-          </a:prstGeom>
-          <a:solidFill>
-            <a:srgbClr val="27AE60"/>
-          </a:solidFill>
-          <a:ln>
-            <a:noFill/>
-          </a:ln>
-        </p:spPr>
-        <p:style>
-          <a:lnRef idx="1">
-            <a:schemeClr val="accent1"/>
-          </a:lnRef>
-          <a:fillRef idx="3">
-            <a:schemeClr val="accent1"/>
-          </a:fillRef>
-          <a:effectRef idx="2">
-            <a:schemeClr val="accent1"/>
-          </a:effectRef>
-          <a:fontRef idx="minor">
-            <a:schemeClr val="lt1"/>
-          </a:fontRef>
-        </p:style>
-        <p:txBody>
-          <a:bodyPr rtlCol="0" anchor="ctr"/>
-          <a:lstStyle/>
-          <a:p>
-            <a:pPr algn="ctr"/>
-          </a:p>
-        </p:txBody>
-      </p:sp>
-      <p:sp>
-        <p:nvSpPr>
-          <p:cNvPr id="10" name="TextBox 9"/>
-          <p:cNvSpPr txBox="1"/>
-          <p:nvPr/>
-        </p:nvSpPr>
-        <p:spPr>
-          <a:xfrm>
-            <a:off x="14493240" y="1828800"/>
-            <a:ext cx="1645920" cy="365760"/>
-          </a:xfrm>
-          <a:prstGeom prst="rect">
-            <a:avLst/>
-          </a:prstGeom>
-          <a:noFill/>
-        </p:spPr>
-        <p:txBody>
-          <a:bodyPr wrap="square">
-            <a:spAutoFit/>
-          </a:bodyPr>
-          <a:lstStyle/>
-          <a:p>
-            <a:pPr algn="l"/>
-            <a:r>
-              <a:rPr sz="1300" b="1">
-                <a:solidFill>
-                  <a:srgbClr val="000000"/>
-                </a:solidFill>
-              </a:rPr>
-              <a:t>BCICIV2B</a:t>
-            </a:r>
-          </a:p>
-        </p:txBody>
-      </p:sp>
-      <p:sp>
-        <p:nvSpPr>
-          <p:cNvPr id="11" name="TextBox 10"/>
-          <p:cNvSpPr txBox="1"/>
-          <p:nvPr/>
-        </p:nvSpPr>
-        <p:spPr>
-          <a:xfrm>
-            <a:off x="16184880" y="1828800"/>
-            <a:ext cx="2286000" cy="365760"/>
-          </a:xfrm>
-          <a:prstGeom prst="rect">
-            <a:avLst/>
-          </a:prstGeom>
-          <a:noFill/>
-        </p:spPr>
-        <p:txBody>
-          <a:bodyPr wrap="square">
-            <a:spAutoFit/>
-          </a:bodyPr>
-          <a:lstStyle/>
-          <a:p>
-            <a:pPr algn="l"/>
-            <a:r>
-              <a:rPr sz="1100" b="0">
-                <a:solidFill>
-                  <a:srgbClr val="27AE60"/>
-                </a:solidFill>
-              </a:rPr>
-              <a:t>Primary - test 78.35%, k=0.57</a:t>
-            </a:r>
-          </a:p>
-        </p:txBody>
-      </p:sp>
-      <p:sp>
-        <p:nvSpPr>
-          <p:cNvPr id="12" name="Oval 11"/>
-          <p:cNvSpPr/>
-          <p:nvPr/>
-        </p:nvSpPr>
-        <p:spPr>
-          <a:xfrm>
-            <a:off x="14081760" y="2340864"/>
-            <a:ext cx="256032" cy="256032"/>
-          </a:xfrm>
-          <a:prstGeom prst="ellipse">
-            <a:avLst/>
-          </a:prstGeom>
-          <a:solidFill>
-            <a:srgbClr val="F1C40F"/>
-          </a:solidFill>
-          <a:ln>
-            <a:noFill/>
-          </a:ln>
-        </p:spPr>
-        <p:style>
-          <a:lnRef idx="1">
-            <a:schemeClr val="accent1"/>
-          </a:lnRef>
-          <a:fillRef idx="3">
-            <a:schemeClr val="accent1"/>
-          </a:fillRef>
-          <a:effectRef idx="2">
-            <a:schemeClr val="accent1"/>
-          </a:effectRef>
-          <a:fontRef idx="minor">
-            <a:schemeClr val="lt1"/>
-          </a:fontRef>
-        </p:style>
-        <p:txBody>
-          <a:bodyPr rtlCol="0" anchor="ctr"/>
-          <a:lstStyle/>
-          <a:p>
-            <a:pPr algn="ctr"/>
-          </a:p>
-        </p:txBody>
-      </p:sp>
-      <p:sp>
-        <p:nvSpPr>
-          <p:cNvPr id="13" name="TextBox 12"/>
-          <p:cNvSpPr txBox="1"/>
-          <p:nvPr/>
-        </p:nvSpPr>
-        <p:spPr>
-          <a:xfrm>
-            <a:off x="14493240" y="2286000"/>
-            <a:ext cx="1645920" cy="365760"/>
-          </a:xfrm>
-          <a:prstGeom prst="rect">
-            <a:avLst/>
-          </a:prstGeom>
-          <a:noFill/>
-        </p:spPr>
-        <p:txBody>
-          <a:bodyPr wrap="square">
-            <a:spAutoFit/>
-          </a:bodyPr>
-          <a:lstStyle/>
-          <a:p>
-            <a:pPr algn="l"/>
-            <a:r>
-              <a:rPr sz="1300" b="1">
-                <a:solidFill>
-                  <a:srgbClr val="000000"/>
-                </a:solidFill>
-              </a:rPr>
-              <a:t>IIIa</a:t>
-            </a:r>
-          </a:p>
-        </p:txBody>
-      </p:sp>
-      <p:sp>
-        <p:nvSpPr>
-          <p:cNvPr id="14" name="TextBox 13"/>
-          <p:cNvSpPr txBox="1"/>
-          <p:nvPr/>
-        </p:nvSpPr>
-        <p:spPr>
-          <a:xfrm>
-            <a:off x="16184880" y="2286000"/>
-            <a:ext cx="2286000" cy="365760"/>
-          </a:xfrm>
-          <a:prstGeom prst="rect">
-            <a:avLst/>
-          </a:prstGeom>
-          <a:noFill/>
-        </p:spPr>
-        <p:txBody>
-          <a:bodyPr wrap="square">
-            <a:spAutoFit/>
-          </a:bodyPr>
-          <a:lstStyle/>
-          <a:p>
-            <a:pPr algn="l"/>
-            <a:r>
-              <a:rPr sz="1100" b="0">
-                <a:solidFill>
-                  <a:srgbClr val="F1C40F"/>
-                </a:solidFill>
-              </a:rPr>
-              <a:t>Quick baseline - val 55.95%</a:t>
-            </a:r>
-          </a:p>
-        </p:txBody>
-      </p:sp>
-      <p:sp>
-        <p:nvSpPr>
-          <p:cNvPr id="15" name="Oval 14"/>
-          <p:cNvSpPr/>
-          <p:nvPr/>
-        </p:nvSpPr>
-        <p:spPr>
-          <a:xfrm>
-            <a:off x="14081760" y="2798064"/>
-            <a:ext cx="256032" cy="256032"/>
-          </a:xfrm>
-          <a:prstGeom prst="ellipse">
-            <a:avLst/>
-          </a:prstGeom>
-          <a:solidFill>
-            <a:srgbClr val="F1C40F"/>
-          </a:solidFill>
-          <a:ln>
-            <a:noFill/>
-          </a:ln>
-        </p:spPr>
-        <p:style>
-          <a:lnRef idx="1">
-            <a:schemeClr val="accent1"/>
-          </a:lnRef>
-          <a:fillRef idx="3">
-            <a:schemeClr val="accent1"/>
-          </a:fillRef>
-          <a:effectRef idx="2">
-            <a:schemeClr val="accent1"/>
-          </a:effectRef>
-          <a:fontRef idx="minor">
-            <a:schemeClr val="lt1"/>
-          </a:fontRef>
-        </p:style>
-        <p:txBody>
-          <a:bodyPr rtlCol="0" anchor="ctr"/>
-          <a:lstStyle/>
-          <a:p>
-            <a:pPr algn="ctr"/>
-          </a:p>
-        </p:txBody>
-      </p:sp>
-      <p:sp>
-        <p:nvSpPr>
-          <p:cNvPr id="16" name="TextBox 15"/>
-          <p:cNvSpPr txBox="1"/>
-          <p:nvPr/>
-        </p:nvSpPr>
-        <p:spPr>
-          <a:xfrm>
-            <a:off x="14493240" y="2743200"/>
-            <a:ext cx="1645920" cy="365760"/>
-          </a:xfrm>
-          <a:prstGeom prst="rect">
-            <a:avLst/>
-          </a:prstGeom>
-          <a:noFill/>
-        </p:spPr>
-        <p:txBody>
-          <a:bodyPr wrap="square">
-            <a:spAutoFit/>
-          </a:bodyPr>
-          <a:lstStyle/>
-          <a:p>
-            <a:pPr algn="l"/>
-            <a:r>
-              <a:rPr sz="1300" b="1">
-                <a:solidFill>
-                  <a:srgbClr val="000000"/>
-                </a:solidFill>
-              </a:rPr>
-              <a:t>Physionet MI</a:t>
-            </a:r>
-          </a:p>
-        </p:txBody>
-      </p:sp>
-      <p:sp>
-        <p:nvSpPr>
-          <p:cNvPr id="17" name="TextBox 16"/>
-          <p:cNvSpPr txBox="1"/>
-          <p:nvPr/>
-        </p:nvSpPr>
-        <p:spPr>
-          <a:xfrm>
-            <a:off x="16184880" y="2743200"/>
-            <a:ext cx="2286000" cy="365760"/>
-          </a:xfrm>
-          <a:prstGeom prst="rect">
-            <a:avLst/>
-          </a:prstGeom>
-          <a:noFill/>
-        </p:spPr>
-        <p:txBody>
-          <a:bodyPr wrap="square">
-            <a:spAutoFit/>
-          </a:bodyPr>
-          <a:lstStyle/>
-          <a:p>
-            <a:pPr algn="l"/>
-            <a:r>
-              <a:rPr sz="1100" b="0">
-                <a:solidFill>
-                  <a:srgbClr val="F1C40F"/>
-                </a:solidFill>
-              </a:rPr>
-              <a:t>Quick baseline - val 49.30%</a:t>
-            </a:r>
-          </a:p>
-        </p:txBody>
-      </p:sp>
-      <p:sp>
-        <p:nvSpPr>
-          <p:cNvPr id="18" name="Rectangle 17"/>
-          <p:cNvSpPr/>
-          <p:nvPr/>
-        </p:nvSpPr>
-        <p:spPr>
-          <a:xfrm>
-            <a:off x="14081760" y="3337560"/>
-            <a:ext cx="4297680" cy="13716"/>
-          </a:xfrm>
-          <a:prstGeom prst="rect">
-            <a:avLst/>
-          </a:prstGeom>
-          <a:solidFill>
-            <a:srgbClr val="C8C8C8"/>
-          </a:solidFill>
-          <a:ln>
-            <a:noFill/>
-          </a:ln>
-        </p:spPr>
-        <p:style>
-          <a:lnRef idx="1">
-            <a:schemeClr val="accent1"/>
-          </a:lnRef>
-          <a:fillRef idx="3">
-            <a:schemeClr val="accent1"/>
-          </a:fillRef>
-          <a:effectRef idx="2">
-            <a:schemeClr val="accent1"/>
-          </a:effectRef>
-          <a:fontRef idx="minor">
-            <a:schemeClr val="lt1"/>
-          </a:fontRef>
-        </p:style>
-        <p:txBody>
-          <a:bodyPr rtlCol="0" anchor="ctr"/>
-          <a:lstStyle/>
-          <a:p>
-            <a:pPr algn="ctr"/>
-          </a:p>
-        </p:txBody>
-      </p:sp>
-      <p:sp>
-        <p:nvSpPr>
-          <p:cNvPr id="19" name="TextBox 18"/>
-          <p:cNvSpPr txBox="1"/>
-          <p:nvPr/>
-        </p:nvSpPr>
-        <p:spPr>
-          <a:xfrm>
-            <a:off x="14173200" y="3611879"/>
-            <a:ext cx="4114800" cy="365760"/>
-          </a:xfrm>
-          <a:prstGeom prst="rect">
-            <a:avLst/>
-          </a:prstGeom>
-          <a:noFill/>
-        </p:spPr>
-        <p:txBody>
-          <a:bodyPr wrap="square">
-            <a:spAutoFit/>
-          </a:bodyPr>
-          <a:lstStyle/>
-          <a:p>
-            <a:pPr algn="l"/>
-            <a:r>
-              <a:rPr sz="1400" b="1">
-                <a:solidFill>
-                  <a:srgbClr val="27AE60"/>
-                </a:solidFill>
-              </a:rPr>
-              <a:t>Primary (300 ep): 2 datasets available</a:t>
-            </a:r>
-          </a:p>
-        </p:txBody>
-      </p:sp>
-      <p:sp>
-        <p:nvSpPr>
-          <p:cNvPr id="20" name="TextBox 19"/>
-          <p:cNvSpPr txBox="1"/>
-          <p:nvPr/>
-        </p:nvSpPr>
-        <p:spPr>
-          <a:xfrm>
-            <a:off x="14173200" y="4023359"/>
-            <a:ext cx="4114800" cy="365760"/>
-          </a:xfrm>
-          <a:prstGeom prst="rect">
-            <a:avLst/>
-          </a:prstGeom>
-          <a:noFill/>
-        </p:spPr>
-        <p:txBody>
-          <a:bodyPr wrap="square">
-            <a:spAutoFit/>
-          </a:bodyPr>
-          <a:lstStyle/>
-          <a:p>
-            <a:pPr algn="l"/>
-            <a:r>
-              <a:rPr sz="1400" b="1">
-                <a:solidFill>
-                  <a:srgbClr val="F1C40F"/>
-                </a:solidFill>
-              </a:rPr>
-              <a:t>Quick baseline (100 ep): 2 datasets</a:t>
-            </a:r>
-          </a:p>
-        </p:txBody>
-      </p:sp>
-      <p:sp>
-        <p:nvSpPr>
-          <p:cNvPr id="21" name="TextBox 20"/>
-          <p:cNvSpPr txBox="1"/>
-          <p:nvPr/>
-        </p:nvSpPr>
-        <p:spPr>
-          <a:xfrm>
-            <a:off x="13990320" y="4709159"/>
-            <a:ext cx="4480560" cy="457200"/>
-          </a:xfrm>
-          <a:prstGeom prst="rect">
-            <a:avLst/>
-          </a:prstGeom>
-          <a:noFill/>
-        </p:spPr>
-        <p:txBody>
-          <a:bodyPr wrap="square">
-            <a:spAutoFit/>
-          </a:bodyPr>
-          <a:lstStyle/>
-          <a:p>
-            <a:pPr algn="ctr"/>
-            <a:r>
-              <a:rPr sz="1300" b="0">
-                <a:solidFill>
-                  <a:srgbClr val="145A32"/>
-                </a:solidFill>
-              </a:rPr>
-              <a:t>EEGNet serves as the task-specific expert baseline.</a:t>
-            </a:r>
-          </a:p>
-        </p:txBody>
-      </p:sp>
     </p:spTree>
   </p:cSld>
   <p:clrMapOvr>
@@ -8404,8 +6418,8 @@
         </p:nvSpPr>
         <p:spPr>
           <a:xfrm>
-            <a:off x="457200" y="137160"/>
-            <a:ext cx="18288000" cy="411480"/>
+            <a:off x="457200" y="182880"/>
+            <a:ext cx="16459200" cy="457200"/>
           </a:xfrm>
           <a:prstGeom prst="rect">
             <a:avLst/>
@@ -8413,18 +6427,13 @@
           <a:noFill/>
         </p:spPr>
         <p:txBody>
-          <a:bodyPr wrap="square">
+          <a:bodyPr wrap="none">
             <a:spAutoFit/>
           </a:bodyPr>
           <a:lstStyle/>
           <a:p>
-            <a:pPr algn="l"/>
             <a:r>
-              <a:rPr sz="2000" b="1">
-                <a:solidFill>
-                  <a:srgbClr val="000000"/>
-                </a:solidFill>
-              </a:rPr>
+              <a:rPr sz="2200" b="1"/>
               <a:t>Table 4: NeuroGate - Linear Probing with Frozen Backbone</a:t>
             </a:r>
           </a:p>
@@ -8439,8 +6448,8 @@
           <p:nvPr/>
         </p:nvGraphicFramePr>
         <p:xfrm>
-          <a:off x="274320" y="731520"/>
-          <a:ext cx="10515600" cy="2514600"/>
+          <a:off x="457200" y="822960"/>
+          <a:ext cx="15544800" cy="2286000"/>
         </p:xfrm>
         <a:graphic>
           <a:graphicData uri="http://schemas.openxmlformats.org/drawingml/2006/table">
@@ -8450,19 +6459,20 @@
               </a:tblPr>
               <a:tblGrid>
                 <a:gridCol w="2286000"/>
+                <a:gridCol w="4114800"/>
+                <a:gridCol w="4114800"/>
+                <a:gridCol w="1828800"/>
                 <a:gridCol w="3200400"/>
-                <a:gridCol w="3200400"/>
-                <a:gridCol w="1828800"/>
               </a:tblGrid>
-              <a:tr h="502920">
-                <a:tc>
-                  <a:txBody>
-                    <a:bodyPr/>
-                    <a:lstStyle/>
-                    <a:p>
-                      <a:pPr algn="ctr"/>
-                      <a:r>
-                        <a:rPr sz="1000" b="1">
+              <a:tr h="457200">
+                <a:tc>
+                  <a:txBody>
+                    <a:bodyPr/>
+                    <a:lstStyle/>
+                    <a:p>
+                      <a:pPr algn="ctr"/>
+                      <a:r>
+                        <a:rPr sz="1200" b="1">
                           <a:solidFill>
                             <a:srgbClr val="FFFFFF"/>
                           </a:solidFill>
@@ -8484,7 +6494,7 @@
                     <a:p>
                       <a:pPr algn="ctr"/>
                       <a:r>
-                        <a:rPr sz="1000" b="1">
+                        <a:rPr sz="1200" b="1">
                           <a:solidFill>
                             <a:srgbClr val="FFFFFF"/>
                           </a:solidFill>
@@ -8506,7 +6516,7 @@
                     <a:p>
                       <a:pPr algn="ctr"/>
                       <a:r>
-                        <a:rPr sz="1000" b="1">
+                        <a:rPr sz="1200" b="1">
                           <a:solidFill>
                             <a:srgbClr val="FFFFFF"/>
                           </a:solidFill>
@@ -8528,7 +6538,7 @@
                     <a:p>
                       <a:pPr algn="ctr"/>
                       <a:r>
-                        <a:rPr sz="1000" b="1">
+                        <a:rPr sz="1200" b="1">
                           <a:solidFill>
                             <a:srgbClr val="FFFFFF"/>
                           </a:solidFill>
@@ -8543,8 +6553,30 @@
                     </a:solidFill>
                   </a:tcPr>
                 </a:tc>
+                <a:tc>
+                  <a:txBody>
+                    <a:bodyPr/>
+                    <a:lstStyle/>
+                    <a:p>
+                      <a:pPr algn="ctr"/>
+                      <a:r>
+                        <a:rPr sz="1200" b="1">
+                          <a:solidFill>
+                            <a:srgbClr val="FFFFFF"/>
+                          </a:solidFill>
+                        </a:rPr>
+                        <a:t>Gain Level</a:t>
+                      </a:r>
+                    </a:p>
+                  </a:txBody>
+                  <a:tcPr>
+                    <a:solidFill>
+                      <a:srgbClr val="3C3C3C"/>
+                    </a:solidFill>
+                  </a:tcPr>
+                </a:tc>
               </a:tr>
-              <a:tr h="502920">
+              <a:tr h="457200">
                 <a:tc>
                   <a:txBody>
                     <a:bodyPr/>
@@ -8552,7 +6584,7 @@
                     <a:p>
                       <a:pPr algn="l"/>
                       <a:r>
-                        <a:rPr sz="1000" b="0">
+                        <a:rPr sz="1200" b="0">
                           <a:solidFill>
                             <a:srgbClr val="000000"/>
                           </a:solidFill>
@@ -8572,9 +6604,9 @@
                     <a:bodyPr/>
                     <a:lstStyle/>
                     <a:p>
-                      <a:pPr algn="ctr"/>
-                      <a:r>
-                        <a:rPr sz="1000" b="0">
+                      <a:pPr algn="l"/>
+                      <a:r>
+                        <a:rPr sz="1200" b="0">
                           <a:solidFill>
                             <a:srgbClr val="000000"/>
                           </a:solidFill>
@@ -8594,9 +6626,9 @@
                     <a:bodyPr/>
                     <a:lstStyle/>
                     <a:p>
-                      <a:pPr algn="ctr"/>
-                      <a:r>
-                        <a:rPr sz="1000" b="0">
+                      <a:pPr algn="l"/>
+                      <a:r>
+                        <a:rPr sz="1200" b="0">
                           <a:solidFill>
                             <a:srgbClr val="000000"/>
                           </a:solidFill>
@@ -8618,7 +6650,7 @@
                     <a:p>
                       <a:pPr algn="ctr"/>
                       <a:r>
-                        <a:rPr sz="1000" b="0">
+                        <a:rPr sz="1200" b="0">
                           <a:solidFill>
                             <a:srgbClr val="000000"/>
                           </a:solidFill>
@@ -8633,8 +6665,30 @@
                     </a:solidFill>
                   </a:tcPr>
                 </a:tc>
+                <a:tc>
+                  <a:txBody>
+                    <a:bodyPr/>
+                    <a:lstStyle/>
+                    <a:p>
+                      <a:pPr algn="l"/>
+                      <a:r>
+                        <a:rPr sz="1200" b="1">
+                          <a:solidFill>
+                            <a:srgbClr val="145A32"/>
+                          </a:solidFill>
+                        </a:rPr>
+                        <a:t>Large gain (sleep staging)</a:t>
+                      </a:r>
+                    </a:p>
+                  </a:txBody>
+                  <a:tcPr>
+                    <a:solidFill>
+                      <a:srgbClr val="DCFFE6"/>
+                    </a:solidFill>
+                  </a:tcPr>
+                </a:tc>
               </a:tr>
-              <a:tr h="502920">
+              <a:tr h="457200">
                 <a:tc>
                   <a:txBody>
                     <a:bodyPr/>
@@ -8642,7 +6696,7 @@
                     <a:p>
                       <a:pPr algn="l"/>
                       <a:r>
-                        <a:rPr sz="1000" b="0">
+                        <a:rPr sz="1200" b="0">
                           <a:solidFill>
                             <a:srgbClr val="000000"/>
                           </a:solidFill>
@@ -8662,9 +6716,9 @@
                     <a:bodyPr/>
                     <a:lstStyle/>
                     <a:p>
-                      <a:pPr algn="ctr"/>
-                      <a:r>
-                        <a:rPr sz="1000" b="0">
+                      <a:pPr algn="l"/>
+                      <a:r>
+                        <a:rPr sz="1200" b="0">
                           <a:solidFill>
                             <a:srgbClr val="000000"/>
                           </a:solidFill>
@@ -8684,9 +6738,9 @@
                     <a:bodyPr/>
                     <a:lstStyle/>
                     <a:p>
-                      <a:pPr algn="ctr"/>
-                      <a:r>
-                        <a:rPr sz="1000" b="0">
+                      <a:pPr algn="l"/>
+                      <a:r>
+                        <a:rPr sz="1200" b="0">
                           <a:solidFill>
                             <a:srgbClr val="000000"/>
                           </a:solidFill>
@@ -8708,7 +6762,7 @@
                     <a:p>
                       <a:pPr algn="ctr"/>
                       <a:r>
-                        <a:rPr sz="1000" b="0">
+                        <a:rPr sz="1200" b="0">
                           <a:solidFill>
                             <a:srgbClr val="000000"/>
                           </a:solidFill>
@@ -8723,8 +6777,30 @@
                     </a:solidFill>
                   </a:tcPr>
                 </a:tc>
+                <a:tc>
+                  <a:txBody>
+                    <a:bodyPr/>
+                    <a:lstStyle/>
+                    <a:p>
+                      <a:pPr algn="l"/>
+                      <a:r>
+                        <a:rPr sz="1200" b="1">
+                          <a:solidFill>
+                            <a:srgbClr val="145A32"/>
+                          </a:solidFill>
+                        </a:rPr>
+                        <a:t>Large gain (sleep staging)</a:t>
+                      </a:r>
+                    </a:p>
+                  </a:txBody>
+                  <a:tcPr>
+                    <a:solidFill>
+                      <a:srgbClr val="DCFFE6"/>
+                    </a:solidFill>
+                  </a:tcPr>
+                </a:tc>
               </a:tr>
-              <a:tr h="502920">
+              <a:tr h="457200">
                 <a:tc>
                   <a:txBody>
                     <a:bodyPr/>
@@ -8732,7 +6808,7 @@
                     <a:p>
                       <a:pPr algn="l"/>
                       <a:r>
-                        <a:rPr sz="1000" b="0">
+                        <a:rPr sz="1200" b="0">
                           <a:solidFill>
                             <a:srgbClr val="000000"/>
                           </a:solidFill>
@@ -8752,9 +6828,9 @@
                     <a:bodyPr/>
                     <a:lstStyle/>
                     <a:p>
-                      <a:pPr algn="ctr"/>
-                      <a:r>
-                        <a:rPr sz="1000" b="0">
+                      <a:pPr algn="l"/>
+                      <a:r>
+                        <a:rPr sz="1200" b="0">
                           <a:solidFill>
                             <a:srgbClr val="000000"/>
                           </a:solidFill>
@@ -8774,9 +6850,9 @@
                     <a:bodyPr/>
                     <a:lstStyle/>
                     <a:p>
-                      <a:pPr algn="ctr"/>
-                      <a:r>
-                        <a:rPr sz="1000" b="0">
+                      <a:pPr algn="l"/>
+                      <a:r>
+                        <a:rPr sz="1200" b="0">
                           <a:solidFill>
                             <a:srgbClr val="000000"/>
                           </a:solidFill>
@@ -8798,7 +6874,7 @@
                     <a:p>
                       <a:pPr algn="ctr"/>
                       <a:r>
-                        <a:rPr sz="1000" b="0">
+                        <a:rPr sz="1200" b="0">
                           <a:solidFill>
                             <a:srgbClr val="000000"/>
                           </a:solidFill>
@@ -8813,8 +6889,30 @@
                     </a:solidFill>
                   </a:tcPr>
                 </a:tc>
+                <a:tc>
+                  <a:txBody>
+                    <a:bodyPr/>
+                    <a:lstStyle/>
+                    <a:p>
+                      <a:pPr algn="l"/>
+                      <a:r>
+                        <a:rPr sz="1200" b="1">
+                          <a:solidFill>
+                            <a:srgbClr val="B48200"/>
+                          </a:solidFill>
+                        </a:rPr>
+                        <a:t>Small gain (clinical)</a:t>
+                      </a:r>
+                    </a:p>
+                  </a:txBody>
+                  <a:tcPr>
+                    <a:solidFill>
+                      <a:srgbClr val="FFFADC"/>
+                    </a:solidFill>
+                  </a:tcPr>
+                </a:tc>
               </a:tr>
-              <a:tr h="502920">
+              <a:tr h="457200">
                 <a:tc>
                   <a:txBody>
                     <a:bodyPr/>
@@ -8822,7 +6920,7 @@
                     <a:p>
                       <a:pPr algn="l"/>
                       <a:r>
-                        <a:rPr sz="1000" b="0">
+                        <a:rPr sz="1200" b="0">
                           <a:solidFill>
                             <a:srgbClr val="000000"/>
                           </a:solidFill>
@@ -8842,9 +6940,9 @@
                     <a:bodyPr/>
                     <a:lstStyle/>
                     <a:p>
-                      <a:pPr algn="ctr"/>
-                      <a:r>
-                        <a:rPr sz="1000" b="0">
+                      <a:pPr algn="l"/>
+                      <a:r>
+                        <a:rPr sz="1200" b="0">
                           <a:solidFill>
                             <a:srgbClr val="000000"/>
                           </a:solidFill>
@@ -8864,9 +6962,9 @@
                     <a:bodyPr/>
                     <a:lstStyle/>
                     <a:p>
-                      <a:pPr algn="ctr"/>
-                      <a:r>
-                        <a:rPr sz="1000" b="0">
+                      <a:pPr algn="l"/>
+                      <a:r>
+                        <a:rPr sz="1200" b="0">
                           <a:solidFill>
                             <a:srgbClr val="000000"/>
                           </a:solidFill>
@@ -8888,7 +6986,7 @@
                     <a:p>
                       <a:pPr algn="ctr"/>
                       <a:r>
-                        <a:rPr sz="1000" b="0">
+                        <a:rPr sz="1200" b="0">
                           <a:solidFill>
                             <a:srgbClr val="000000"/>
                           </a:solidFill>
@@ -8900,6 +6998,28 @@
                   <a:tcPr>
                     <a:solidFill>
                       <a:srgbClr val="FFFFFF"/>
+                    </a:solidFill>
+                  </a:tcPr>
+                </a:tc>
+                <a:tc>
+                  <a:txBody>
+                    <a:bodyPr/>
+                    <a:lstStyle/>
+                    <a:p>
+                      <a:pPr algn="l"/>
+                      <a:r>
+                        <a:rPr sz="1200" b="1">
+                          <a:solidFill>
+                            <a:srgbClr val="B48200"/>
+                          </a:solidFill>
+                        </a:rPr>
+                        <a:t>Small gain (motor imagery)</a:t>
+                      </a:r>
+                    </a:p>
+                  </a:txBody>
+                  <a:tcPr>
+                    <a:solidFill>
+                      <a:srgbClr val="FFFADC"/>
                     </a:solidFill>
                   </a:tcPr>
                 </a:tc>
@@ -8910,59 +7030,14 @@
       </p:graphicFrame>
       <p:sp>
         <p:nvSpPr>
-          <p:cNvPr id="4" name="Rectangle 3"/>
-          <p:cNvSpPr/>
-          <p:nvPr/>
-        </p:nvSpPr>
-        <p:spPr>
-          <a:xfrm>
-            <a:off x="13716000" y="731520"/>
-            <a:ext cx="5029200" cy="5394960"/>
-          </a:xfrm>
-          <a:prstGeom prst="rect">
-            <a:avLst/>
-          </a:prstGeom>
-          <a:solidFill>
-            <a:srgbClr val="F0F0F0"/>
-          </a:solidFill>
-          <a:ln w="12700">
-            <a:solidFill>
-              <a:srgbClr val="C8C8C8"/>
-            </a:solidFill>
-          </a:ln>
-        </p:spPr>
-        <p:style>
-          <a:lnRef idx="1">
-            <a:schemeClr val="accent1"/>
-          </a:lnRef>
-          <a:fillRef idx="3">
-            <a:schemeClr val="accent1"/>
-          </a:fillRef>
-          <a:effectRef idx="2">
-            <a:schemeClr val="accent1"/>
-          </a:effectRef>
-          <a:fontRef idx="minor">
-            <a:schemeClr val="lt1"/>
-          </a:fontRef>
-        </p:style>
-        <p:txBody>
-          <a:bodyPr rtlCol="0" anchor="ctr"/>
-          <a:lstStyle/>
-          <a:p>
-            <a:pPr algn="ctr"/>
-          </a:p>
-        </p:txBody>
-      </p:sp>
-      <p:sp>
-        <p:nvSpPr>
-          <p:cNvPr id="5" name="TextBox 4"/>
+          <p:cNvPr id="4" name="TextBox 3"/>
           <p:cNvSpPr txBox="1"/>
           <p:nvPr/>
         </p:nvSpPr>
         <p:spPr>
           <a:xfrm>
-            <a:off x="13990320" y="868680"/>
-            <a:ext cx="4480560" cy="411480"/>
+            <a:off x="457200" y="3474720"/>
+            <a:ext cx="16459200" cy="365760"/>
           </a:xfrm>
           <a:prstGeom prst="rect">
             <a:avLst/>
@@ -8970,608 +7045,18 @@
           <a:noFill/>
         </p:spPr>
         <p:txBody>
-          <a:bodyPr wrap="square">
+          <a:bodyPr wrap="none">
             <a:spAutoFit/>
           </a:bodyPr>
           <a:lstStyle/>
           <a:p>
-            <a:pPr algn="ctr"/>
             <a:r>
-              <a:rPr sz="1800" b="1">
+              <a:rPr sz="1300">
                 <a:solidFill>
-                  <a:srgbClr val="000000"/>
+                  <a:srgbClr val="3C3C3C"/>
                 </a:solidFill>
               </a:rPr>
-              <a:t>LP Gains</a:t>
-            </a:r>
-          </a:p>
-        </p:txBody>
-      </p:sp>
-      <p:sp>
-        <p:nvSpPr>
-          <p:cNvPr id="6" name="Oval 5"/>
-          <p:cNvSpPr/>
-          <p:nvPr/>
-        </p:nvSpPr>
-        <p:spPr>
-          <a:xfrm>
-            <a:off x="14081760" y="1426464"/>
-            <a:ext cx="256032" cy="256032"/>
-          </a:xfrm>
-          <a:prstGeom prst="ellipse">
-            <a:avLst/>
-          </a:prstGeom>
-          <a:solidFill>
-            <a:srgbClr val="27AE60"/>
-          </a:solidFill>
-          <a:ln>
-            <a:noFill/>
-          </a:ln>
-        </p:spPr>
-        <p:style>
-          <a:lnRef idx="1">
-            <a:schemeClr val="accent1"/>
-          </a:lnRef>
-          <a:fillRef idx="3">
-            <a:schemeClr val="accent1"/>
-          </a:fillRef>
-          <a:effectRef idx="2">
-            <a:schemeClr val="accent1"/>
-          </a:effectRef>
-          <a:fontRef idx="minor">
-            <a:schemeClr val="lt1"/>
-          </a:fontRef>
-        </p:style>
-        <p:txBody>
-          <a:bodyPr rtlCol="0" anchor="ctr"/>
-          <a:lstStyle/>
-          <a:p>
-            <a:pPr algn="ctr"/>
-          </a:p>
-        </p:txBody>
-      </p:sp>
-      <p:sp>
-        <p:nvSpPr>
-          <p:cNvPr id="7" name="TextBox 6"/>
-          <p:cNvSpPr txBox="1"/>
-          <p:nvPr/>
-        </p:nvSpPr>
-        <p:spPr>
-          <a:xfrm>
-            <a:off x="14493240" y="1371600"/>
-            <a:ext cx="1645920" cy="365760"/>
-          </a:xfrm>
-          <a:prstGeom prst="rect">
-            <a:avLst/>
-          </a:prstGeom>
-          <a:noFill/>
-        </p:spPr>
-        <p:txBody>
-          <a:bodyPr wrap="square">
-            <a:spAutoFit/>
-          </a:bodyPr>
-          <a:lstStyle/>
-          <a:p>
-            <a:pPr algn="l"/>
-            <a:r>
-              <a:rPr sz="1300" b="1">
-                <a:solidFill>
-                  <a:srgbClr val="000000"/>
-                </a:solidFill>
-              </a:rPr>
-              <a:t>HMC</a:t>
-            </a:r>
-          </a:p>
-        </p:txBody>
-      </p:sp>
-      <p:sp>
-        <p:nvSpPr>
-          <p:cNvPr id="8" name="TextBox 7"/>
-          <p:cNvSpPr txBox="1"/>
-          <p:nvPr/>
-        </p:nvSpPr>
-        <p:spPr>
-          <a:xfrm>
-            <a:off x="16184880" y="1371600"/>
-            <a:ext cx="2286000" cy="365760"/>
-          </a:xfrm>
-          <a:prstGeom prst="rect">
-            <a:avLst/>
-          </a:prstGeom>
-          <a:noFill/>
-        </p:spPr>
-        <p:txBody>
-          <a:bodyPr wrap="square">
-            <a:spAutoFit/>
-          </a:bodyPr>
-          <a:lstStyle/>
-          <a:p>
-            <a:pPr algn="l"/>
-            <a:r>
-              <a:rPr sz="1100" b="0">
-                <a:solidFill>
-                  <a:srgbClr val="27AE60"/>
-                </a:solidFill>
-              </a:rPr>
-              <a:t>+0.0773</a:t>
-            </a:r>
-          </a:p>
-        </p:txBody>
-      </p:sp>
-      <p:sp>
-        <p:nvSpPr>
-          <p:cNvPr id="9" name="Oval 8"/>
-          <p:cNvSpPr/>
-          <p:nvPr/>
-        </p:nvSpPr>
-        <p:spPr>
-          <a:xfrm>
-            <a:off x="14081760" y="1883664"/>
-            <a:ext cx="256032" cy="256032"/>
-          </a:xfrm>
-          <a:prstGeom prst="ellipse">
-            <a:avLst/>
-          </a:prstGeom>
-          <a:solidFill>
-            <a:srgbClr val="27AE60"/>
-          </a:solidFill>
-          <a:ln>
-            <a:noFill/>
-          </a:ln>
-        </p:spPr>
-        <p:style>
-          <a:lnRef idx="1">
-            <a:schemeClr val="accent1"/>
-          </a:lnRef>
-          <a:fillRef idx="3">
-            <a:schemeClr val="accent1"/>
-          </a:fillRef>
-          <a:effectRef idx="2">
-            <a:schemeClr val="accent1"/>
-          </a:effectRef>
-          <a:fontRef idx="minor">
-            <a:schemeClr val="lt1"/>
-          </a:fontRef>
-        </p:style>
-        <p:txBody>
-          <a:bodyPr rtlCol="0" anchor="ctr"/>
-          <a:lstStyle/>
-          <a:p>
-            <a:pPr algn="ctr"/>
-          </a:p>
-        </p:txBody>
-      </p:sp>
-      <p:sp>
-        <p:nvSpPr>
-          <p:cNvPr id="10" name="TextBox 9"/>
-          <p:cNvSpPr txBox="1"/>
-          <p:nvPr/>
-        </p:nvSpPr>
-        <p:spPr>
-          <a:xfrm>
-            <a:off x="14493240" y="1828800"/>
-            <a:ext cx="1645920" cy="365760"/>
-          </a:xfrm>
-          <a:prstGeom prst="rect">
-            <a:avLst/>
-          </a:prstGeom>
-          <a:noFill/>
-        </p:spPr>
-        <p:txBody>
-          <a:bodyPr wrap="square">
-            <a:spAutoFit/>
-          </a:bodyPr>
-          <a:lstStyle/>
-          <a:p>
-            <a:pPr algn="l"/>
-            <a:r>
-              <a:rPr sz="1300" b="1">
-                <a:solidFill>
-                  <a:srgbClr val="000000"/>
-                </a:solidFill>
-              </a:rPr>
-              <a:t>ISRUC-S1</a:t>
-            </a:r>
-          </a:p>
-        </p:txBody>
-      </p:sp>
-      <p:sp>
-        <p:nvSpPr>
-          <p:cNvPr id="11" name="TextBox 10"/>
-          <p:cNvSpPr txBox="1"/>
-          <p:nvPr/>
-        </p:nvSpPr>
-        <p:spPr>
-          <a:xfrm>
-            <a:off x="16184880" y="1828800"/>
-            <a:ext cx="2286000" cy="365760"/>
-          </a:xfrm>
-          <a:prstGeom prst="rect">
-            <a:avLst/>
-          </a:prstGeom>
-          <a:noFill/>
-        </p:spPr>
-        <p:txBody>
-          <a:bodyPr wrap="square">
-            <a:spAutoFit/>
-          </a:bodyPr>
-          <a:lstStyle/>
-          <a:p>
-            <a:pPr algn="l"/>
-            <a:r>
-              <a:rPr sz="1100" b="0">
-                <a:solidFill>
-                  <a:srgbClr val="27AE60"/>
-                </a:solidFill>
-              </a:rPr>
-              <a:t>+0.0972</a:t>
-            </a:r>
-          </a:p>
-        </p:txBody>
-      </p:sp>
-      <p:sp>
-        <p:nvSpPr>
-          <p:cNvPr id="12" name="Oval 11"/>
-          <p:cNvSpPr/>
-          <p:nvPr/>
-        </p:nvSpPr>
-        <p:spPr>
-          <a:xfrm>
-            <a:off x="14081760" y="2340864"/>
-            <a:ext cx="256032" cy="256032"/>
-          </a:xfrm>
-          <a:prstGeom prst="ellipse">
-            <a:avLst/>
-          </a:prstGeom>
-          <a:solidFill>
-            <a:srgbClr val="F1C40F"/>
-          </a:solidFill>
-          <a:ln>
-            <a:noFill/>
-          </a:ln>
-        </p:spPr>
-        <p:style>
-          <a:lnRef idx="1">
-            <a:schemeClr val="accent1"/>
-          </a:lnRef>
-          <a:fillRef idx="3">
-            <a:schemeClr val="accent1"/>
-          </a:fillRef>
-          <a:effectRef idx="2">
-            <a:schemeClr val="accent1"/>
-          </a:effectRef>
-          <a:fontRef idx="minor">
-            <a:schemeClr val="lt1"/>
-          </a:fontRef>
-        </p:style>
-        <p:txBody>
-          <a:bodyPr rtlCol="0" anchor="ctr"/>
-          <a:lstStyle/>
-          <a:p>
-            <a:pPr algn="ctr"/>
-          </a:p>
-        </p:txBody>
-      </p:sp>
-      <p:sp>
-        <p:nvSpPr>
-          <p:cNvPr id="13" name="TextBox 12"/>
-          <p:cNvSpPr txBox="1"/>
-          <p:nvPr/>
-        </p:nvSpPr>
-        <p:spPr>
-          <a:xfrm>
-            <a:off x="14493240" y="2286000"/>
-            <a:ext cx="1645920" cy="365760"/>
-          </a:xfrm>
-          <a:prstGeom prst="rect">
-            <a:avLst/>
-          </a:prstGeom>
-          <a:noFill/>
-        </p:spPr>
-        <p:txBody>
-          <a:bodyPr wrap="square">
-            <a:spAutoFit/>
-          </a:bodyPr>
-          <a:lstStyle/>
-          <a:p>
-            <a:pPr algn="l"/>
-            <a:r>
-              <a:rPr sz="1300" b="1">
-                <a:solidFill>
-                  <a:srgbClr val="000000"/>
-                </a:solidFill>
-              </a:rPr>
-              <a:t>MDD</a:t>
-            </a:r>
-          </a:p>
-        </p:txBody>
-      </p:sp>
-      <p:sp>
-        <p:nvSpPr>
-          <p:cNvPr id="14" name="TextBox 13"/>
-          <p:cNvSpPr txBox="1"/>
-          <p:nvPr/>
-        </p:nvSpPr>
-        <p:spPr>
-          <a:xfrm>
-            <a:off x="16184880" y="2286000"/>
-            <a:ext cx="2286000" cy="365760"/>
-          </a:xfrm>
-          <a:prstGeom prst="rect">
-            <a:avLst/>
-          </a:prstGeom>
-          <a:noFill/>
-        </p:spPr>
-        <p:txBody>
-          <a:bodyPr wrap="square">
-            <a:spAutoFit/>
-          </a:bodyPr>
-          <a:lstStyle/>
-          <a:p>
-            <a:pPr algn="l"/>
-            <a:r>
-              <a:rPr sz="1100" b="0">
-                <a:solidFill>
-                  <a:srgbClr val="F1C40F"/>
-                </a:solidFill>
-              </a:rPr>
-              <a:t>+0.0154</a:t>
-            </a:r>
-          </a:p>
-        </p:txBody>
-      </p:sp>
-      <p:sp>
-        <p:nvSpPr>
-          <p:cNvPr id="15" name="Oval 14"/>
-          <p:cNvSpPr/>
-          <p:nvPr/>
-        </p:nvSpPr>
-        <p:spPr>
-          <a:xfrm>
-            <a:off x="14081760" y="2798064"/>
-            <a:ext cx="256032" cy="256032"/>
-          </a:xfrm>
-          <a:prstGeom prst="ellipse">
-            <a:avLst/>
-          </a:prstGeom>
-          <a:solidFill>
-            <a:srgbClr val="F1C40F"/>
-          </a:solidFill>
-          <a:ln>
-            <a:noFill/>
-          </a:ln>
-        </p:spPr>
-        <p:style>
-          <a:lnRef idx="1">
-            <a:schemeClr val="accent1"/>
-          </a:lnRef>
-          <a:fillRef idx="3">
-            <a:schemeClr val="accent1"/>
-          </a:fillRef>
-          <a:effectRef idx="2">
-            <a:schemeClr val="accent1"/>
-          </a:effectRef>
-          <a:fontRef idx="minor">
-            <a:schemeClr val="lt1"/>
-          </a:fontRef>
-        </p:style>
-        <p:txBody>
-          <a:bodyPr rtlCol="0" anchor="ctr"/>
-          <a:lstStyle/>
-          <a:p>
-            <a:pPr algn="ctr"/>
-          </a:p>
-        </p:txBody>
-      </p:sp>
-      <p:sp>
-        <p:nvSpPr>
-          <p:cNvPr id="16" name="TextBox 15"/>
-          <p:cNvSpPr txBox="1"/>
-          <p:nvPr/>
-        </p:nvSpPr>
-        <p:spPr>
-          <a:xfrm>
-            <a:off x="14493240" y="2743200"/>
-            <a:ext cx="1645920" cy="365760"/>
-          </a:xfrm>
-          <a:prstGeom prst="rect">
-            <a:avLst/>
-          </a:prstGeom>
-          <a:noFill/>
-        </p:spPr>
-        <p:txBody>
-          <a:bodyPr wrap="square">
-            <a:spAutoFit/>
-          </a:bodyPr>
-          <a:lstStyle/>
-          <a:p>
-            <a:pPr algn="l"/>
-            <a:r>
-              <a:rPr sz="1300" b="1">
-                <a:solidFill>
-                  <a:srgbClr val="000000"/>
-                </a:solidFill>
-              </a:rPr>
-              <a:t>Physionet-MI</a:t>
-            </a:r>
-          </a:p>
-        </p:txBody>
-      </p:sp>
-      <p:sp>
-        <p:nvSpPr>
-          <p:cNvPr id="17" name="TextBox 16"/>
-          <p:cNvSpPr txBox="1"/>
-          <p:nvPr/>
-        </p:nvSpPr>
-        <p:spPr>
-          <a:xfrm>
-            <a:off x="16184880" y="2743200"/>
-            <a:ext cx="2286000" cy="365760"/>
-          </a:xfrm>
-          <a:prstGeom prst="rect">
-            <a:avLst/>
-          </a:prstGeom>
-          <a:noFill/>
-        </p:spPr>
-        <p:txBody>
-          <a:bodyPr wrap="square">
-            <a:spAutoFit/>
-          </a:bodyPr>
-          <a:lstStyle/>
-          <a:p>
-            <a:pPr algn="l"/>
-            <a:r>
-              <a:rPr sz="1100" b="0">
-                <a:solidFill>
-                  <a:srgbClr val="F1C40F"/>
-                </a:solidFill>
-              </a:rPr>
-              <a:t>+0.0156</a:t>
-            </a:r>
-          </a:p>
-        </p:txBody>
-      </p:sp>
-      <p:sp>
-        <p:nvSpPr>
-          <p:cNvPr id="18" name="Rectangle 17"/>
-          <p:cNvSpPr/>
-          <p:nvPr/>
-        </p:nvSpPr>
-        <p:spPr>
-          <a:xfrm>
-            <a:off x="14081760" y="3337560"/>
-            <a:ext cx="4297680" cy="13716"/>
-          </a:xfrm>
-          <a:prstGeom prst="rect">
-            <a:avLst/>
-          </a:prstGeom>
-          <a:solidFill>
-            <a:srgbClr val="C8C8C8"/>
-          </a:solidFill>
-          <a:ln>
-            <a:noFill/>
-          </a:ln>
-        </p:spPr>
-        <p:style>
-          <a:lnRef idx="1">
-            <a:schemeClr val="accent1"/>
-          </a:lnRef>
-          <a:fillRef idx="3">
-            <a:schemeClr val="accent1"/>
-          </a:fillRef>
-          <a:effectRef idx="2">
-            <a:schemeClr val="accent1"/>
-          </a:effectRef>
-          <a:fontRef idx="minor">
-            <a:schemeClr val="lt1"/>
-          </a:fontRef>
-        </p:style>
-        <p:txBody>
-          <a:bodyPr rtlCol="0" anchor="ctr"/>
-          <a:lstStyle/>
-          <a:p>
-            <a:pPr algn="ctr"/>
-          </a:p>
-        </p:txBody>
-      </p:sp>
-      <p:sp>
-        <p:nvSpPr>
-          <p:cNvPr id="19" name="TextBox 18"/>
-          <p:cNvSpPr txBox="1"/>
-          <p:nvPr/>
-        </p:nvSpPr>
-        <p:spPr>
-          <a:xfrm>
-            <a:off x="14173200" y="3611879"/>
-            <a:ext cx="4114800" cy="365760"/>
-          </a:xfrm>
-          <a:prstGeom prst="rect">
-            <a:avLst/>
-          </a:prstGeom>
-          <a:noFill/>
-        </p:spPr>
-        <p:txBody>
-          <a:bodyPr wrap="square">
-            <a:spAutoFit/>
-          </a:bodyPr>
-          <a:lstStyle/>
-          <a:p>
-            <a:pPr algn="l"/>
-            <a:r>
-              <a:rPr sz="1400" b="1">
-                <a:solidFill>
-                  <a:srgbClr val="27AE60"/>
-                </a:solidFill>
-              </a:rPr>
-              <a:t>Sleep staging: large gains (&gt;= +0.07)</a:t>
-            </a:r>
-          </a:p>
-        </p:txBody>
-      </p:sp>
-      <p:sp>
-        <p:nvSpPr>
-          <p:cNvPr id="20" name="TextBox 19"/>
-          <p:cNvSpPr txBox="1"/>
-          <p:nvPr/>
-        </p:nvSpPr>
-        <p:spPr>
-          <a:xfrm>
-            <a:off x="14173200" y="4023359"/>
-            <a:ext cx="4114800" cy="365760"/>
-          </a:xfrm>
-          <a:prstGeom prst="rect">
-            <a:avLst/>
-          </a:prstGeom>
-          <a:noFill/>
-        </p:spPr>
-        <p:txBody>
-          <a:bodyPr wrap="square">
-            <a:spAutoFit/>
-          </a:bodyPr>
-          <a:lstStyle/>
-          <a:p>
-            <a:pPr algn="l"/>
-            <a:r>
-              <a:rPr sz="1400" b="1">
-                <a:solidFill>
-                  <a:srgbClr val="F1C40F"/>
-                </a:solidFill>
-              </a:rPr>
-              <a:t>Clinical / MI: small gains (~ +0.015)</a:t>
-            </a:r>
-          </a:p>
-        </p:txBody>
-      </p:sp>
-      <p:sp>
-        <p:nvSpPr>
-          <p:cNvPr id="21" name="TextBox 20"/>
-          <p:cNvSpPr txBox="1"/>
-          <p:nvPr/>
-        </p:nvSpPr>
-        <p:spPr>
-          <a:xfrm>
-            <a:off x="13990320" y="4709159"/>
-            <a:ext cx="4480560" cy="457200"/>
-          </a:xfrm>
-          <a:prstGeom prst="rect">
-            <a:avLst/>
-          </a:prstGeom>
-          <a:noFill/>
-        </p:spPr>
-        <p:txBody>
-          <a:bodyPr wrap="square">
-            <a:spAutoFit/>
-          </a:bodyPr>
-          <a:lstStyle/>
-          <a:p>
-            <a:pPr algn="ctr"/>
-            <a:r>
-              <a:rPr sz="1300" b="0">
-                <a:solidFill>
-                  <a:srgbClr val="145A32"/>
-                </a:solidFill>
-              </a:rPr>
-              <a:t>Neural priors most helpful where frozen embeddings lack spectral structure.</a:t>
+              <a:t>Neural priors most helpful where frozen embeddings lack spectral structure (sleep staging &gt;&gt; motor imagery).</a:t>
             </a:r>
           </a:p>
         </p:txBody>
@@ -9602,8 +7087,8 @@
         </p:nvSpPr>
         <p:spPr>
           <a:xfrm>
-            <a:off x="457200" y="137160"/>
-            <a:ext cx="18288000" cy="411480"/>
+            <a:off x="457200" y="182880"/>
+            <a:ext cx="16459200" cy="457200"/>
           </a:xfrm>
           <a:prstGeom prst="rect">
             <a:avLst/>
@@ -9611,18 +7096,13 @@
           <a:noFill/>
         </p:spPr>
         <p:txBody>
-          <a:bodyPr wrap="square">
+          <a:bodyPr wrap="none">
             <a:spAutoFit/>
           </a:bodyPr>
           <a:lstStyle/>
           <a:p>
-            <a:pPr algn="l"/>
             <a:r>
-              <a:rPr sz="2000" b="1">
-                <a:solidFill>
-                  <a:srgbClr val="000000"/>
-                </a:solidFill>
-              </a:rPr>
+              <a:rPr sz="2200" b="1"/>
               <a:t>Table 5: NeuroGate - Fine-Tuning Summary on Selected-12 Datasets</a:t>
             </a:r>
           </a:p>
@@ -9637,8 +7117,8 @@
           <p:nvPr/>
         </p:nvGraphicFramePr>
         <p:xfrm>
-          <a:off x="274320" y="731520"/>
-          <a:ext cx="10972800" cy="2514600"/>
+          <a:off x="457200" y="822960"/>
+          <a:ext cx="15544800" cy="2286000"/>
         </p:xfrm>
         <a:graphic>
           <a:graphicData uri="http://schemas.openxmlformats.org/drawingml/2006/table">
@@ -9647,18 +7127,19 @@
                 <a:tableStyleId>{5C22544A-7EE6-4342-B048-85BDC9FD1C3A}</a:tableStyleId>
               </a:tblPr>
               <a:tblGrid>
-                <a:gridCol w="7315200"/>
+                <a:gridCol w="8229600"/>
+                <a:gridCol w="3657600"/>
                 <a:gridCol w="3657600"/>
               </a:tblGrid>
-              <a:tr h="502920">
-                <a:tc>
-                  <a:txBody>
-                    <a:bodyPr/>
-                    <a:lstStyle/>
-                    <a:p>
-                      <a:pPr algn="ctr"/>
-                      <a:r>
-                        <a:rPr sz="1000" b="1">
+              <a:tr h="457200">
+                <a:tc>
+                  <a:txBody>
+                    <a:bodyPr/>
+                    <a:lstStyle/>
+                    <a:p>
+                      <a:pPr algn="ctr"/>
+                      <a:r>
+                        <a:rPr sz="1200" b="1">
                           <a:solidFill>
                             <a:srgbClr val="FFFFFF"/>
                           </a:solidFill>
@@ -9680,7 +7161,7 @@
                     <a:p>
                       <a:pPr algn="ctr"/>
                       <a:r>
-                        <a:rPr sz="1000" b="1">
+                        <a:rPr sz="1200" b="1">
                           <a:solidFill>
                             <a:srgbClr val="FFFFFF"/>
                           </a:solidFill>
@@ -9695,8 +7176,30 @@
                     </a:solidFill>
                   </a:tcPr>
                 </a:tc>
+                <a:tc>
+                  <a:txBody>
+                    <a:bodyPr/>
+                    <a:lstStyle/>
+                    <a:p>
+                      <a:pPr algn="ctr"/>
+                      <a:r>
+                        <a:rPr sz="1200" b="1">
+                          <a:solidFill>
+                            <a:srgbClr val="FFFFFF"/>
+                          </a:solidFill>
+                        </a:rPr>
+                        <a:t>Evidence Strength</a:t>
+                      </a:r>
+                    </a:p>
+                  </a:txBody>
+                  <a:tcPr>
+                    <a:solidFill>
+                      <a:srgbClr val="3C3C3C"/>
+                    </a:solidFill>
+                  </a:tcPr>
+                </a:tc>
               </a:tr>
-              <a:tr h="502920">
+              <a:tr h="457200">
                 <a:tc>
                   <a:txBody>
                     <a:bodyPr/>
@@ -9704,7 +7207,7 @@
                     <a:p>
                       <a:pPr algn="l"/>
                       <a:r>
-                        <a:rPr sz="1000" b="0">
+                        <a:rPr sz="1200" b="0">
                           <a:solidFill>
                             <a:srgbClr val="000000"/>
                           </a:solidFill>
@@ -9724,9 +7227,9 @@
                     <a:bodyPr/>
                     <a:lstStyle/>
                     <a:p>
-                      <a:pPr algn="ctr"/>
-                      <a:r>
-                        <a:rPr sz="1000" b="0">
+                      <a:pPr algn="l"/>
+                      <a:r>
+                        <a:rPr sz="1200" b="0">
                           <a:solidFill>
                             <a:srgbClr val="000000"/>
                           </a:solidFill>
@@ -9741,8 +7244,30 @@
                     </a:solidFill>
                   </a:tcPr>
                 </a:tc>
+                <a:tc>
+                  <a:txBody>
+                    <a:bodyPr/>
+                    <a:lstStyle/>
+                    <a:p>
+                      <a:pPr algn="l"/>
+                      <a:r>
+                        <a:rPr sz="1200" b="1">
+                          <a:solidFill>
+                            <a:srgbClr val="145A32"/>
+                          </a:solidFill>
+                        </a:rPr>
+                        <a:t>Strong (LP, frozen backbone)</a:t>
+                      </a:r>
+                    </a:p>
+                  </a:txBody>
+                  <a:tcPr>
+                    <a:solidFill>
+                      <a:srgbClr val="DCFFE6"/>
+                    </a:solidFill>
+                  </a:tcPr>
+                </a:tc>
               </a:tr>
-              <a:tr h="502920">
+              <a:tr h="457200">
                 <a:tc>
                   <a:txBody>
                     <a:bodyPr/>
@@ -9750,7 +7275,7 @@
                     <a:p>
                       <a:pPr algn="l"/>
                       <a:r>
-                        <a:rPr sz="1000" b="0">
+                        <a:rPr sz="1200" b="0">
                           <a:solidFill>
                             <a:srgbClr val="000000"/>
                           </a:solidFill>
@@ -9770,9 +7295,9 @@
                     <a:bodyPr/>
                     <a:lstStyle/>
                     <a:p>
-                      <a:pPr algn="ctr"/>
-                      <a:r>
-                        <a:rPr sz="1000" b="0">
+                      <a:pPr algn="l"/>
+                      <a:r>
+                        <a:rPr sz="1200" b="0">
                           <a:solidFill>
                             <a:srgbClr val="000000"/>
                           </a:solidFill>
@@ -9787,8 +7312,30 @@
                     </a:solidFill>
                   </a:tcPr>
                 </a:tc>
+                <a:tc>
+                  <a:txBody>
+                    <a:bodyPr/>
+                    <a:lstStyle/>
+                    <a:p>
+                      <a:pPr algn="l"/>
+                      <a:r>
+                        <a:rPr sz="1200" b="1">
+                          <a:solidFill>
+                            <a:srgbClr val="145A32"/>
+                          </a:solidFill>
+                        </a:rPr>
+                        <a:t>Strong (LP, 83% positive)</a:t>
+                      </a:r>
+                    </a:p>
+                  </a:txBody>
+                  <a:tcPr>
+                    <a:solidFill>
+                      <a:srgbClr val="DCFFE6"/>
+                    </a:solidFill>
+                  </a:tcPr>
+                </a:tc>
               </a:tr>
-              <a:tr h="502920">
+              <a:tr h="457200">
                 <a:tc>
                   <a:txBody>
                     <a:bodyPr/>
@@ -9796,7 +7343,7 @@
                     <a:p>
                       <a:pPr algn="l"/>
                       <a:r>
-                        <a:rPr sz="1000" b="0">
+                        <a:rPr sz="1200" b="0">
                           <a:solidFill>
                             <a:srgbClr val="000000"/>
                           </a:solidFill>
@@ -9816,9 +7363,9 @@
                     <a:bodyPr/>
                     <a:lstStyle/>
                     <a:p>
-                      <a:pPr algn="ctr"/>
-                      <a:r>
-                        <a:rPr sz="1000" b="0">
+                      <a:pPr algn="l"/>
+                      <a:r>
+                        <a:rPr sz="1200" b="0">
                           <a:solidFill>
                             <a:srgbClr val="000000"/>
                           </a:solidFill>
@@ -9833,8 +7380,30 @@
                     </a:solidFill>
                   </a:tcPr>
                 </a:tc>
+                <a:tc>
+                  <a:txBody>
+                    <a:bodyPr/>
+                    <a:lstStyle/>
+                    <a:p>
+                      <a:pPr algn="l"/>
+                      <a:r>
+                        <a:rPr sz="1200" b="1">
+                          <a:solidFill>
+                            <a:srgbClr val="B48200"/>
+                          </a:solidFill>
+                        </a:rPr>
+                        <a:t>Supporting (FT, end-to-end)</a:t>
+                      </a:r>
+                    </a:p>
+                  </a:txBody>
+                  <a:tcPr>
+                    <a:solidFill>
+                      <a:srgbClr val="FFFADC"/>
+                    </a:solidFill>
+                  </a:tcPr>
+                </a:tc>
               </a:tr>
-              <a:tr h="502920">
+              <a:tr h="457200">
                 <a:tc>
                   <a:txBody>
                     <a:bodyPr/>
@@ -9842,7 +7411,7 @@
                     <a:p>
                       <a:pPr algn="l"/>
                       <a:r>
-                        <a:rPr sz="1000" b="0">
+                        <a:rPr sz="1200" b="0">
                           <a:solidFill>
                             <a:srgbClr val="000000"/>
                           </a:solidFill>
@@ -9862,9 +7431,9 @@
                     <a:bodyPr/>
                     <a:lstStyle/>
                     <a:p>
-                      <a:pPr algn="ctr"/>
-                      <a:r>
-                        <a:rPr sz="1000" b="0">
+                      <a:pPr algn="l"/>
+                      <a:r>
+                        <a:rPr sz="1200" b="0">
                           <a:solidFill>
                             <a:srgbClr val="000000"/>
                           </a:solidFill>
@@ -9876,6 +7445,28 @@
                   <a:tcPr>
                     <a:solidFill>
                       <a:srgbClr val="FFFFFF"/>
+                    </a:solidFill>
+                  </a:tcPr>
+                </a:tc>
+                <a:tc>
+                  <a:txBody>
+                    <a:bodyPr/>
+                    <a:lstStyle/>
+                    <a:p>
+                      <a:pPr algn="l"/>
+                      <a:r>
+                        <a:rPr sz="1200" b="1">
+                          <a:solidFill>
+                            <a:srgbClr val="B48200"/>
+                          </a:solidFill>
+                        </a:rPr>
+                        <a:t>Supporting (FT, end-to-end)</a:t>
+                      </a:r>
+                    </a:p>
+                  </a:txBody>
+                  <a:tcPr>
+                    <a:solidFill>
+                      <a:srgbClr val="FFFADC"/>
                     </a:solidFill>
                   </a:tcPr>
                 </a:tc>
@@ -9886,59 +7477,14 @@
       </p:graphicFrame>
       <p:sp>
         <p:nvSpPr>
-          <p:cNvPr id="4" name="Rectangle 3"/>
-          <p:cNvSpPr/>
-          <p:nvPr/>
-        </p:nvSpPr>
-        <p:spPr>
-          <a:xfrm>
-            <a:off x="13716000" y="731520"/>
-            <a:ext cx="5029200" cy="5394960"/>
-          </a:xfrm>
-          <a:prstGeom prst="rect">
-            <a:avLst/>
-          </a:prstGeom>
-          <a:solidFill>
-            <a:srgbClr val="F0F0F0"/>
-          </a:solidFill>
-          <a:ln w="12700">
-            <a:solidFill>
-              <a:srgbClr val="C8C8C8"/>
-            </a:solidFill>
-          </a:ln>
-        </p:spPr>
-        <p:style>
-          <a:lnRef idx="1">
-            <a:schemeClr val="accent1"/>
-          </a:lnRef>
-          <a:fillRef idx="3">
-            <a:schemeClr val="accent1"/>
-          </a:fillRef>
-          <a:effectRef idx="2">
-            <a:schemeClr val="accent1"/>
-          </a:effectRef>
-          <a:fontRef idx="minor">
-            <a:schemeClr val="lt1"/>
-          </a:fontRef>
-        </p:style>
-        <p:txBody>
-          <a:bodyPr rtlCol="0" anchor="ctr"/>
-          <a:lstStyle/>
-          <a:p>
-            <a:pPr algn="ctr"/>
-          </a:p>
-        </p:txBody>
-      </p:sp>
-      <p:sp>
-        <p:nvSpPr>
-          <p:cNvPr id="5" name="TextBox 4"/>
+          <p:cNvPr id="4" name="TextBox 3"/>
           <p:cNvSpPr txBox="1"/>
           <p:nvPr/>
         </p:nvSpPr>
         <p:spPr>
           <a:xfrm>
-            <a:off x="13990320" y="868680"/>
-            <a:ext cx="4480560" cy="411480"/>
+            <a:off x="457200" y="3474720"/>
+            <a:ext cx="16459200" cy="365760"/>
           </a:xfrm>
           <a:prstGeom prst="rect">
             <a:avLst/>
@@ -9946,608 +7492,18 @@
           <a:noFill/>
         </p:spPr>
         <p:txBody>
-          <a:bodyPr wrap="square">
+          <a:bodyPr wrap="none">
             <a:spAutoFit/>
           </a:bodyPr>
           <a:lstStyle/>
           <a:p>
-            <a:pPr algn="ctr"/>
             <a:r>
-              <a:rPr sz="1800" b="1">
+              <a:rPr sz="1300">
                 <a:solidFill>
-                  <a:srgbClr val="000000"/>
+                  <a:srgbClr val="3C3C3C"/>
                 </a:solidFill>
               </a:rPr>
-              <a:t>FT Summary</a:t>
-            </a:r>
-          </a:p>
-        </p:txBody>
-      </p:sp>
-      <p:sp>
-        <p:nvSpPr>
-          <p:cNvPr id="6" name="Oval 5"/>
-          <p:cNvSpPr/>
-          <p:nvPr/>
-        </p:nvSpPr>
-        <p:spPr>
-          <a:xfrm>
-            <a:off x="14081760" y="1426464"/>
-            <a:ext cx="256032" cy="256032"/>
-          </a:xfrm>
-          <a:prstGeom prst="ellipse">
-            <a:avLst/>
-          </a:prstGeom>
-          <a:solidFill>
-            <a:srgbClr val="27AE60"/>
-          </a:solidFill>
-          <a:ln>
-            <a:noFill/>
-          </a:ln>
-        </p:spPr>
-        <p:style>
-          <a:lnRef idx="1">
-            <a:schemeClr val="accent1"/>
-          </a:lnRef>
-          <a:fillRef idx="3">
-            <a:schemeClr val="accent1"/>
-          </a:fillRef>
-          <a:effectRef idx="2">
-            <a:schemeClr val="accent1"/>
-          </a:effectRef>
-          <a:fontRef idx="minor">
-            <a:schemeClr val="lt1"/>
-          </a:fontRef>
-        </p:style>
-        <p:txBody>
-          <a:bodyPr rtlCol="0" anchor="ctr"/>
-          <a:lstStyle/>
-          <a:p>
-            <a:pPr algn="ctr"/>
-          </a:p>
-        </p:txBody>
-      </p:sp>
-      <p:sp>
-        <p:nvSpPr>
-          <p:cNvPr id="7" name="TextBox 6"/>
-          <p:cNvSpPr txBox="1"/>
-          <p:nvPr/>
-        </p:nvSpPr>
-        <p:spPr>
-          <a:xfrm>
-            <a:off x="14493240" y="1371600"/>
-            <a:ext cx="1645920" cy="365760"/>
-          </a:xfrm>
-          <a:prstGeom prst="rect">
-            <a:avLst/>
-          </a:prstGeom>
-          <a:noFill/>
-        </p:spPr>
-        <p:txBody>
-          <a:bodyPr wrap="square">
-            <a:spAutoFit/>
-          </a:bodyPr>
-          <a:lstStyle/>
-          <a:p>
-            <a:pPr algn="l"/>
-            <a:r>
-              <a:rPr sz="1300" b="1">
-                <a:solidFill>
-                  <a:srgbClr val="000000"/>
-                </a:solidFill>
-              </a:rPr>
-              <a:t>LP mean gain</a:t>
-            </a:r>
-          </a:p>
-        </p:txBody>
-      </p:sp>
-      <p:sp>
-        <p:nvSpPr>
-          <p:cNvPr id="8" name="TextBox 7"/>
-          <p:cNvSpPr txBox="1"/>
-          <p:nvPr/>
-        </p:nvSpPr>
-        <p:spPr>
-          <a:xfrm>
-            <a:off x="16184880" y="1371600"/>
-            <a:ext cx="2286000" cy="365760"/>
-          </a:xfrm>
-          <a:prstGeom prst="rect">
-            <a:avLst/>
-          </a:prstGeom>
-          <a:noFill/>
-        </p:spPr>
-        <p:txBody>
-          <a:bodyPr wrap="square">
-            <a:spAutoFit/>
-          </a:bodyPr>
-          <a:lstStyle/>
-          <a:p>
-            <a:pPr algn="l"/>
-            <a:r>
-              <a:rPr sz="1100" b="0">
-                <a:solidFill>
-                  <a:srgbClr val="27AE60"/>
-                </a:solidFill>
-              </a:rPr>
-              <a:t>+0.0389 BA</a:t>
-            </a:r>
-          </a:p>
-        </p:txBody>
-      </p:sp>
-      <p:sp>
-        <p:nvSpPr>
-          <p:cNvPr id="9" name="Oval 8"/>
-          <p:cNvSpPr/>
-          <p:nvPr/>
-        </p:nvSpPr>
-        <p:spPr>
-          <a:xfrm>
-            <a:off x="14081760" y="1883664"/>
-            <a:ext cx="256032" cy="256032"/>
-          </a:xfrm>
-          <a:prstGeom prst="ellipse">
-            <a:avLst/>
-          </a:prstGeom>
-          <a:solidFill>
-            <a:srgbClr val="27AE60"/>
-          </a:solidFill>
-          <a:ln>
-            <a:noFill/>
-          </a:ln>
-        </p:spPr>
-        <p:style>
-          <a:lnRef idx="1">
-            <a:schemeClr val="accent1"/>
-          </a:lnRef>
-          <a:fillRef idx="3">
-            <a:schemeClr val="accent1"/>
-          </a:fillRef>
-          <a:effectRef idx="2">
-            <a:schemeClr val="accent1"/>
-          </a:effectRef>
-          <a:fontRef idx="minor">
-            <a:schemeClr val="lt1"/>
-          </a:fontRef>
-        </p:style>
-        <p:txBody>
-          <a:bodyPr rtlCol="0" anchor="ctr"/>
-          <a:lstStyle/>
-          <a:p>
-            <a:pPr algn="ctr"/>
-          </a:p>
-        </p:txBody>
-      </p:sp>
-      <p:sp>
-        <p:nvSpPr>
-          <p:cNvPr id="10" name="TextBox 9"/>
-          <p:cNvSpPr txBox="1"/>
-          <p:nvPr/>
-        </p:nvSpPr>
-        <p:spPr>
-          <a:xfrm>
-            <a:off x="14493240" y="1828800"/>
-            <a:ext cx="1645920" cy="365760"/>
-          </a:xfrm>
-          <a:prstGeom prst="rect">
-            <a:avLst/>
-          </a:prstGeom>
-          <a:noFill/>
-        </p:spPr>
-        <p:txBody>
-          <a:bodyPr wrap="square">
-            <a:spAutoFit/>
-          </a:bodyPr>
-          <a:lstStyle/>
-          <a:p>
-            <a:pPr algn="l"/>
-            <a:r>
-              <a:rPr sz="1300" b="1">
-                <a:solidFill>
-                  <a:srgbClr val="000000"/>
-                </a:solidFill>
-              </a:rPr>
-              <a:t>LP positive rate</a:t>
-            </a:r>
-          </a:p>
-        </p:txBody>
-      </p:sp>
-      <p:sp>
-        <p:nvSpPr>
-          <p:cNvPr id="11" name="TextBox 10"/>
-          <p:cNvSpPr txBox="1"/>
-          <p:nvPr/>
-        </p:nvSpPr>
-        <p:spPr>
-          <a:xfrm>
-            <a:off x="16184880" y="1828800"/>
-            <a:ext cx="2286000" cy="365760"/>
-          </a:xfrm>
-          <a:prstGeom prst="rect">
-            <a:avLst/>
-          </a:prstGeom>
-          <a:noFill/>
-        </p:spPr>
-        <p:txBody>
-          <a:bodyPr wrap="square">
-            <a:spAutoFit/>
-          </a:bodyPr>
-          <a:lstStyle/>
-          <a:p>
-            <a:pPr algn="l"/>
-            <a:r>
-              <a:rPr sz="1100" b="0">
-                <a:solidFill>
-                  <a:srgbClr val="27AE60"/>
-                </a:solidFill>
-              </a:rPr>
-              <a:t>40 / 48 (83%)</a:t>
-            </a:r>
-          </a:p>
-        </p:txBody>
-      </p:sp>
-      <p:sp>
-        <p:nvSpPr>
-          <p:cNvPr id="12" name="Oval 11"/>
-          <p:cNvSpPr/>
-          <p:nvPr/>
-        </p:nvSpPr>
-        <p:spPr>
-          <a:xfrm>
-            <a:off x="14081760" y="2340864"/>
-            <a:ext cx="256032" cy="256032"/>
-          </a:xfrm>
-          <a:prstGeom prst="ellipse">
-            <a:avLst/>
-          </a:prstGeom>
-          <a:solidFill>
-            <a:srgbClr val="F1C40F"/>
-          </a:solidFill>
-          <a:ln>
-            <a:noFill/>
-          </a:ln>
-        </p:spPr>
-        <p:style>
-          <a:lnRef idx="1">
-            <a:schemeClr val="accent1"/>
-          </a:lnRef>
-          <a:fillRef idx="3">
-            <a:schemeClr val="accent1"/>
-          </a:fillRef>
-          <a:effectRef idx="2">
-            <a:schemeClr val="accent1"/>
-          </a:effectRef>
-          <a:fontRef idx="minor">
-            <a:schemeClr val="lt1"/>
-          </a:fontRef>
-        </p:style>
-        <p:txBody>
-          <a:bodyPr rtlCol="0" anchor="ctr"/>
-          <a:lstStyle/>
-          <a:p>
-            <a:pPr algn="ctr"/>
-          </a:p>
-        </p:txBody>
-      </p:sp>
-      <p:sp>
-        <p:nvSpPr>
-          <p:cNvPr id="13" name="TextBox 12"/>
-          <p:cNvSpPr txBox="1"/>
-          <p:nvPr/>
-        </p:nvSpPr>
-        <p:spPr>
-          <a:xfrm>
-            <a:off x="14493240" y="2286000"/>
-            <a:ext cx="1645920" cy="365760"/>
-          </a:xfrm>
-          <a:prstGeom prst="rect">
-            <a:avLst/>
-          </a:prstGeom>
-          <a:noFill/>
-        </p:spPr>
-        <p:txBody>
-          <a:bodyPr wrap="square">
-            <a:spAutoFit/>
-          </a:bodyPr>
-          <a:lstStyle/>
-          <a:p>
-            <a:pPr algn="l"/>
-            <a:r>
-              <a:rPr sz="1300" b="1">
-                <a:solidFill>
-                  <a:srgbClr val="000000"/>
-                </a:solidFill>
-              </a:rPr>
-              <a:t>FT mean gain</a:t>
-            </a:r>
-          </a:p>
-        </p:txBody>
-      </p:sp>
-      <p:sp>
-        <p:nvSpPr>
-          <p:cNvPr id="14" name="TextBox 13"/>
-          <p:cNvSpPr txBox="1"/>
-          <p:nvPr/>
-        </p:nvSpPr>
-        <p:spPr>
-          <a:xfrm>
-            <a:off x="16184880" y="2286000"/>
-            <a:ext cx="2286000" cy="365760"/>
-          </a:xfrm>
-          <a:prstGeom prst="rect">
-            <a:avLst/>
-          </a:prstGeom>
-          <a:noFill/>
-        </p:spPr>
-        <p:txBody>
-          <a:bodyPr wrap="square">
-            <a:spAutoFit/>
-          </a:bodyPr>
-          <a:lstStyle/>
-          <a:p>
-            <a:pPr algn="l"/>
-            <a:r>
-              <a:rPr sz="1100" b="0">
-                <a:solidFill>
-                  <a:srgbClr val="F1C40F"/>
-                </a:solidFill>
-              </a:rPr>
-              <a:t>+0.0078 BA</a:t>
-            </a:r>
-          </a:p>
-        </p:txBody>
-      </p:sp>
-      <p:sp>
-        <p:nvSpPr>
-          <p:cNvPr id="15" name="Oval 14"/>
-          <p:cNvSpPr/>
-          <p:nvPr/>
-        </p:nvSpPr>
-        <p:spPr>
-          <a:xfrm>
-            <a:off x="14081760" y="2798064"/>
-            <a:ext cx="256032" cy="256032"/>
-          </a:xfrm>
-          <a:prstGeom prst="ellipse">
-            <a:avLst/>
-          </a:prstGeom>
-          <a:solidFill>
-            <a:srgbClr val="F1C40F"/>
-          </a:solidFill>
-          <a:ln>
-            <a:noFill/>
-          </a:ln>
-        </p:spPr>
-        <p:style>
-          <a:lnRef idx="1">
-            <a:schemeClr val="accent1"/>
-          </a:lnRef>
-          <a:fillRef idx="3">
-            <a:schemeClr val="accent1"/>
-          </a:fillRef>
-          <a:effectRef idx="2">
-            <a:schemeClr val="accent1"/>
-          </a:effectRef>
-          <a:fontRef idx="minor">
-            <a:schemeClr val="lt1"/>
-          </a:fontRef>
-        </p:style>
-        <p:txBody>
-          <a:bodyPr rtlCol="0" anchor="ctr"/>
-          <a:lstStyle/>
-          <a:p>
-            <a:pPr algn="ctr"/>
-          </a:p>
-        </p:txBody>
-      </p:sp>
-      <p:sp>
-        <p:nvSpPr>
-          <p:cNvPr id="16" name="TextBox 15"/>
-          <p:cNvSpPr txBox="1"/>
-          <p:nvPr/>
-        </p:nvSpPr>
-        <p:spPr>
-          <a:xfrm>
-            <a:off x="14493240" y="2743200"/>
-            <a:ext cx="1645920" cy="365760"/>
-          </a:xfrm>
-          <a:prstGeom prst="rect">
-            <a:avLst/>
-          </a:prstGeom>
-          <a:noFill/>
-        </p:spPr>
-        <p:txBody>
-          <a:bodyPr wrap="square">
-            <a:spAutoFit/>
-          </a:bodyPr>
-          <a:lstStyle/>
-          <a:p>
-            <a:pPr algn="l"/>
-            <a:r>
-              <a:rPr sz="1300" b="1">
-                <a:solidFill>
-                  <a:srgbClr val="000000"/>
-                </a:solidFill>
-              </a:rPr>
-              <a:t>FT best-of gain</a:t>
-            </a:r>
-          </a:p>
-        </p:txBody>
-      </p:sp>
-      <p:sp>
-        <p:nvSpPr>
-          <p:cNvPr id="17" name="TextBox 16"/>
-          <p:cNvSpPr txBox="1"/>
-          <p:nvPr/>
-        </p:nvSpPr>
-        <p:spPr>
-          <a:xfrm>
-            <a:off x="16184880" y="2743200"/>
-            <a:ext cx="2286000" cy="365760"/>
-          </a:xfrm>
-          <a:prstGeom prst="rect">
-            <a:avLst/>
-          </a:prstGeom>
-          <a:noFill/>
-        </p:spPr>
-        <p:txBody>
-          <a:bodyPr wrap="square">
-            <a:spAutoFit/>
-          </a:bodyPr>
-          <a:lstStyle/>
-          <a:p>
-            <a:pPr algn="l"/>
-            <a:r>
-              <a:rPr sz="1100" b="0">
-                <a:solidFill>
-                  <a:srgbClr val="F1C40F"/>
-                </a:solidFill>
-              </a:rPr>
-              <a:t>+0.0097 BA</a:t>
-            </a:r>
-          </a:p>
-        </p:txBody>
-      </p:sp>
-      <p:sp>
-        <p:nvSpPr>
-          <p:cNvPr id="18" name="Rectangle 17"/>
-          <p:cNvSpPr/>
-          <p:nvPr/>
-        </p:nvSpPr>
-        <p:spPr>
-          <a:xfrm>
-            <a:off x="14081760" y="3337560"/>
-            <a:ext cx="4297680" cy="13716"/>
-          </a:xfrm>
-          <a:prstGeom prst="rect">
-            <a:avLst/>
-          </a:prstGeom>
-          <a:solidFill>
-            <a:srgbClr val="C8C8C8"/>
-          </a:solidFill>
-          <a:ln>
-            <a:noFill/>
-          </a:ln>
-        </p:spPr>
-        <p:style>
-          <a:lnRef idx="1">
-            <a:schemeClr val="accent1"/>
-          </a:lnRef>
-          <a:fillRef idx="3">
-            <a:schemeClr val="accent1"/>
-          </a:fillRef>
-          <a:effectRef idx="2">
-            <a:schemeClr val="accent1"/>
-          </a:effectRef>
-          <a:fontRef idx="minor">
-            <a:schemeClr val="lt1"/>
-          </a:fontRef>
-        </p:style>
-        <p:txBody>
-          <a:bodyPr rtlCol="0" anchor="ctr"/>
-          <a:lstStyle/>
-          <a:p>
-            <a:pPr algn="ctr"/>
-          </a:p>
-        </p:txBody>
-      </p:sp>
-      <p:sp>
-        <p:nvSpPr>
-          <p:cNvPr id="19" name="TextBox 18"/>
-          <p:cNvSpPr txBox="1"/>
-          <p:nvPr/>
-        </p:nvSpPr>
-        <p:spPr>
-          <a:xfrm>
-            <a:off x="14173200" y="3611879"/>
-            <a:ext cx="4114800" cy="365760"/>
-          </a:xfrm>
-          <a:prstGeom prst="rect">
-            <a:avLst/>
-          </a:prstGeom>
-          <a:noFill/>
-        </p:spPr>
-        <p:txBody>
-          <a:bodyPr wrap="square">
-            <a:spAutoFit/>
-          </a:bodyPr>
-          <a:lstStyle/>
-          <a:p>
-            <a:pPr algn="l"/>
-            <a:r>
-              <a:rPr sz="1400" b="1">
-                <a:solidFill>
-                  <a:srgbClr val="27AE60"/>
-                </a:solidFill>
-              </a:rPr>
-              <a:t>Main evidence: LP (frozen backbone)</a:t>
-            </a:r>
-          </a:p>
-        </p:txBody>
-      </p:sp>
-      <p:sp>
-        <p:nvSpPr>
-          <p:cNvPr id="20" name="TextBox 19"/>
-          <p:cNvSpPr txBox="1"/>
-          <p:nvPr/>
-        </p:nvSpPr>
-        <p:spPr>
-          <a:xfrm>
-            <a:off x="14173200" y="4023359"/>
-            <a:ext cx="4114800" cy="365760"/>
-          </a:xfrm>
-          <a:prstGeom prst="rect">
-            <a:avLst/>
-          </a:prstGeom>
-          <a:noFill/>
-        </p:spPr>
-        <p:txBody>
-          <a:bodyPr wrap="square">
-            <a:spAutoFit/>
-          </a:bodyPr>
-          <a:lstStyle/>
-          <a:p>
-            <a:pPr algn="l"/>
-            <a:r>
-              <a:rPr sz="1400" b="1">
-                <a:solidFill>
-                  <a:srgbClr val="F1C40F"/>
-                </a:solidFill>
-              </a:rPr>
-              <a:t>Supporting: FT (end-to-end)</a:t>
-            </a:r>
-          </a:p>
-        </p:txBody>
-      </p:sp>
-      <p:sp>
-        <p:nvSpPr>
-          <p:cNvPr id="21" name="TextBox 20"/>
-          <p:cNvSpPr txBox="1"/>
-          <p:nvPr/>
-        </p:nvSpPr>
-        <p:spPr>
-          <a:xfrm>
-            <a:off x="13990320" y="4709159"/>
-            <a:ext cx="4480560" cy="457200"/>
-          </a:xfrm>
-          <a:prstGeom prst="rect">
-            <a:avLst/>
-          </a:prstGeom>
-          <a:noFill/>
-        </p:spPr>
-        <p:txBody>
-          <a:bodyPr wrap="square">
-            <a:spAutoFit/>
-          </a:bodyPr>
-          <a:lstStyle/>
-          <a:p>
-            <a:pPr algn="ctr"/>
-            <a:r>
-              <a:rPr sz="1300" b="0">
-                <a:solidFill>
-                  <a:srgbClr val="145A32"/>
-                </a:solidFill>
-              </a:rPr>
-              <a:t>NeuroGate: supplementing frozen foundation embeddings (LP).</a:t>
+              <a:t>Primary evidence: LP (frozen backbone). FT gains are smaller but consistently positive.</a:t>
             </a:r>
           </a:p>
         </p:txBody>
@@ -10578,8 +7534,8 @@
         </p:nvSpPr>
         <p:spPr>
           <a:xfrm>
-            <a:off x="457200" y="137160"/>
-            <a:ext cx="18288000" cy="411480"/>
+            <a:off x="457200" y="182880"/>
+            <a:ext cx="16459200" cy="457200"/>
           </a:xfrm>
           <a:prstGeom prst="rect">
             <a:avLst/>
@@ -10587,18 +7543,13 @@
           <a:noFill/>
         </p:spPr>
         <p:txBody>
-          <a:bodyPr wrap="square">
+          <a:bodyPr wrap="none">
             <a:spAutoFit/>
           </a:bodyPr>
           <a:lstStyle/>
           <a:p>
-            <a:pPr algn="l"/>
             <a:r>
-              <a:rPr sz="2000" b="1">
-                <a:solidFill>
-                  <a:srgbClr val="000000"/>
-                </a:solidFill>
-              </a:rPr>
+              <a:rPr sz="2200" b="1"/>
               <a:t>Table 6: EEG Conformer Reproduction on BCICIV2a (Per-Subject Accuracy %)</a:t>
             </a:r>
           </a:p>
@@ -10613,8 +7564,8 @@
           <p:nvPr/>
         </p:nvGraphicFramePr>
         <p:xfrm>
-          <a:off x="274320" y="731520"/>
-          <a:ext cx="10195560" cy="1508760"/>
+          <a:off x="457200" y="822960"/>
+          <a:ext cx="12527280" cy="1371600"/>
         </p:xfrm>
         <a:graphic>
           <a:graphicData uri="http://schemas.openxmlformats.org/drawingml/2006/table">
@@ -10623,27 +7574,28 @@
                 <a:tableStyleId>{5C22544A-7EE6-4342-B048-85BDC9FD1C3A}</a:tableStyleId>
               </a:tblPr>
               <a:tblGrid>
-                <a:gridCol w="2286000"/>
-                <a:gridCol w="777240"/>
-                <a:gridCol w="777240"/>
-                <a:gridCol w="777240"/>
-                <a:gridCol w="777240"/>
-                <a:gridCol w="777240"/>
-                <a:gridCol w="777240"/>
-                <a:gridCol w="777240"/>
-                <a:gridCol w="777240"/>
-                <a:gridCol w="777240"/>
-                <a:gridCol w="914400"/>
+                <a:gridCol w="2560320"/>
+                <a:gridCol w="868680"/>
+                <a:gridCol w="868680"/>
+                <a:gridCol w="868680"/>
+                <a:gridCol w="868680"/>
+                <a:gridCol w="868680"/>
+                <a:gridCol w="868680"/>
+                <a:gridCol w="868680"/>
+                <a:gridCol w="868680"/>
+                <a:gridCol w="868680"/>
+                <a:gridCol w="1051560"/>
+                <a:gridCol w="1097280"/>
               </a:tblGrid>
-              <a:tr h="502920">
-                <a:tc>
-                  <a:txBody>
-                    <a:bodyPr/>
-                    <a:lstStyle/>
-                    <a:p>
-                      <a:pPr algn="ctr"/>
-                      <a:r>
-                        <a:rPr sz="1000" b="1">
+              <a:tr h="457200">
+                <a:tc>
+                  <a:txBody>
+                    <a:bodyPr/>
+                    <a:lstStyle/>
+                    <a:p>
+                      <a:pPr algn="ctr"/>
+                      <a:r>
+                        <a:rPr sz="1200" b="1">
                           <a:solidFill>
                             <a:srgbClr val="FFFFFF"/>
                           </a:solidFill>
@@ -10665,7 +7617,7 @@
                     <a:p>
                       <a:pPr algn="ctr"/>
                       <a:r>
-                        <a:rPr sz="1000" b="1">
+                        <a:rPr sz="1200" b="1">
                           <a:solidFill>
                             <a:srgbClr val="FFFFFF"/>
                           </a:solidFill>
@@ -10687,7 +7639,7 @@
                     <a:p>
                       <a:pPr algn="ctr"/>
                       <a:r>
-                        <a:rPr sz="1000" b="1">
+                        <a:rPr sz="1200" b="1">
                           <a:solidFill>
                             <a:srgbClr val="FFFFFF"/>
                           </a:solidFill>
@@ -10709,7 +7661,7 @@
                     <a:p>
                       <a:pPr algn="ctr"/>
                       <a:r>
-                        <a:rPr sz="1000" b="1">
+                        <a:rPr sz="1200" b="1">
                           <a:solidFill>
                             <a:srgbClr val="FFFFFF"/>
                           </a:solidFill>
@@ -10731,7 +7683,7 @@
                     <a:p>
                       <a:pPr algn="ctr"/>
                       <a:r>
-                        <a:rPr sz="1000" b="1">
+                        <a:rPr sz="1200" b="1">
                           <a:solidFill>
                             <a:srgbClr val="FFFFFF"/>
                           </a:solidFill>
@@ -10753,7 +7705,7 @@
                     <a:p>
                       <a:pPr algn="ctr"/>
                       <a:r>
-                        <a:rPr sz="1000" b="1">
+                        <a:rPr sz="1200" b="1">
                           <a:solidFill>
                             <a:srgbClr val="FFFFFF"/>
                           </a:solidFill>
@@ -10775,7 +7727,7 @@
                     <a:p>
                       <a:pPr algn="ctr"/>
                       <a:r>
-                        <a:rPr sz="1000" b="1">
+                        <a:rPr sz="1200" b="1">
                           <a:solidFill>
                             <a:srgbClr val="FFFFFF"/>
                           </a:solidFill>
@@ -10797,7 +7749,7 @@
                     <a:p>
                       <a:pPr algn="ctr"/>
                       <a:r>
-                        <a:rPr sz="1000" b="1">
+                        <a:rPr sz="1200" b="1">
                           <a:solidFill>
                             <a:srgbClr val="FFFFFF"/>
                           </a:solidFill>
@@ -10819,7 +7771,7 @@
                     <a:p>
                       <a:pPr algn="ctr"/>
                       <a:r>
-                        <a:rPr sz="1000" b="1">
+                        <a:rPr sz="1200" b="1">
                           <a:solidFill>
                             <a:srgbClr val="FFFFFF"/>
                           </a:solidFill>
@@ -10841,7 +7793,7 @@
                     <a:p>
                       <a:pPr algn="ctr"/>
                       <a:r>
-                        <a:rPr sz="1000" b="1">
+                        <a:rPr sz="1200" b="1">
                           <a:solidFill>
                             <a:srgbClr val="FFFFFF"/>
                           </a:solidFill>
@@ -10863,7 +7815,7 @@
                     <a:p>
                       <a:pPr algn="ctr"/>
                       <a:r>
-                        <a:rPr sz="1000" b="1">
+                        <a:rPr sz="1200" b="1">
                           <a:solidFill>
                             <a:srgbClr val="FFFFFF"/>
                           </a:solidFill>
@@ -10878,8 +7830,30 @@
                     </a:solidFill>
                   </a:tcPr>
                 </a:tc>
+                <a:tc>
+                  <a:txBody>
+                    <a:bodyPr/>
+                    <a:lstStyle/>
+                    <a:p>
+                      <a:pPr algn="ctr"/>
+                      <a:r>
+                        <a:rPr sz="1200" b="1">
+                          <a:solidFill>
+                            <a:srgbClr val="FFFFFF"/>
+                          </a:solidFill>
+                        </a:rPr>
+                        <a:t>Delta</a:t>
+                      </a:r>
+                    </a:p>
+                  </a:txBody>
+                  <a:tcPr>
+                    <a:solidFill>
+                      <a:srgbClr val="3C3C3C"/>
+                    </a:solidFill>
+                  </a:tcPr>
+                </a:tc>
               </a:tr>
-              <a:tr h="502920">
+              <a:tr h="457200">
                 <a:tc>
                   <a:txBody>
                     <a:bodyPr/>
@@ -10887,7 +7861,7 @@
                     <a:p>
                       <a:pPr algn="l"/>
                       <a:r>
-                        <a:rPr sz="1000" b="0">
+                        <a:rPr sz="1100" b="0">
                           <a:solidFill>
                             <a:srgbClr val="000000"/>
                           </a:solidFill>
@@ -10909,7 +7883,7 @@
                     <a:p>
                       <a:pPr algn="ctr"/>
                       <a:r>
-                        <a:rPr sz="1000" b="0">
+                        <a:rPr sz="1100" b="0">
                           <a:solidFill>
                             <a:srgbClr val="000000"/>
                           </a:solidFill>
@@ -10931,7 +7905,7 @@
                     <a:p>
                       <a:pPr algn="ctr"/>
                       <a:r>
-                        <a:rPr sz="1000" b="0">
+                        <a:rPr sz="1100" b="0">
                           <a:solidFill>
                             <a:srgbClr val="000000"/>
                           </a:solidFill>
@@ -10953,7 +7927,7 @@
                     <a:p>
                       <a:pPr algn="ctr"/>
                       <a:r>
-                        <a:rPr sz="1000" b="0">
+                        <a:rPr sz="1100" b="0">
                           <a:solidFill>
                             <a:srgbClr val="000000"/>
                           </a:solidFill>
@@ -10975,7 +7949,7 @@
                     <a:p>
                       <a:pPr algn="ctr"/>
                       <a:r>
-                        <a:rPr sz="1000" b="0">
+                        <a:rPr sz="1100" b="0">
                           <a:solidFill>
                             <a:srgbClr val="000000"/>
                           </a:solidFill>
@@ -10997,7 +7971,7 @@
                     <a:p>
                       <a:pPr algn="ctr"/>
                       <a:r>
-                        <a:rPr sz="1000" b="0">
+                        <a:rPr sz="1100" b="0">
                           <a:solidFill>
                             <a:srgbClr val="000000"/>
                           </a:solidFill>
@@ -11019,7 +7993,7 @@
                     <a:p>
                       <a:pPr algn="ctr"/>
                       <a:r>
-                        <a:rPr sz="1000" b="0">
+                        <a:rPr sz="1100" b="0">
                           <a:solidFill>
                             <a:srgbClr val="000000"/>
                           </a:solidFill>
@@ -11041,7 +8015,7 @@
                     <a:p>
                       <a:pPr algn="ctr"/>
                       <a:r>
-                        <a:rPr sz="1000" b="0">
+                        <a:rPr sz="1100" b="0">
                           <a:solidFill>
                             <a:srgbClr val="000000"/>
                           </a:solidFill>
@@ -11063,7 +8037,7 @@
                     <a:p>
                       <a:pPr algn="ctr"/>
                       <a:r>
-                        <a:rPr sz="1000" b="0">
+                        <a:rPr sz="1100" b="0">
                           <a:solidFill>
                             <a:srgbClr val="000000"/>
                           </a:solidFill>
@@ -11085,7 +8059,7 @@
                     <a:p>
                       <a:pPr algn="ctr"/>
                       <a:r>
-                        <a:rPr sz="1000" b="0">
+                        <a:rPr sz="1100" b="0">
                           <a:solidFill>
                             <a:srgbClr val="000000"/>
                           </a:solidFill>
@@ -11107,7 +8081,7 @@
                     <a:p>
                       <a:pPr algn="ctr"/>
                       <a:r>
-                        <a:rPr sz="1000" b="0">
+                        <a:rPr sz="1100" b="0">
                           <a:solidFill>
                             <a:srgbClr val="000000"/>
                           </a:solidFill>
@@ -11122,8 +8096,30 @@
                     </a:solidFill>
                   </a:tcPr>
                 </a:tc>
+                <a:tc>
+                  <a:txBody>
+                    <a:bodyPr/>
+                    <a:lstStyle/>
+                    <a:p>
+                      <a:pPr algn="ctr"/>
+                      <a:r>
+                        <a:rPr sz="1100" b="0">
+                          <a:solidFill>
+                            <a:srgbClr val="000000"/>
+                          </a:solidFill>
+                        </a:rPr>
+                        <a:t>--</a:t>
+                      </a:r>
+                    </a:p>
+                  </a:txBody>
+                  <a:tcPr>
+                    <a:solidFill>
+                      <a:srgbClr val="FFFFFF"/>
+                    </a:solidFill>
+                  </a:tcPr>
+                </a:tc>
               </a:tr>
-              <a:tr h="502920">
+              <a:tr h="457200">
                 <a:tc>
                   <a:txBody>
                     <a:bodyPr/>
@@ -11131,7 +8127,7 @@
                     <a:p>
                       <a:pPr algn="l"/>
                       <a:r>
-                        <a:rPr sz="1000" b="0">
+                        <a:rPr sz="1100" b="0">
                           <a:solidFill>
                             <a:srgbClr val="000000"/>
                           </a:solidFill>
@@ -11153,7 +8149,7 @@
                     <a:p>
                       <a:pPr algn="ctr"/>
                       <a:r>
-                        <a:rPr sz="1000" b="0">
+                        <a:rPr sz="1100" b="0">
                           <a:solidFill>
                             <a:srgbClr val="000000"/>
                           </a:solidFill>
@@ -11175,7 +8171,7 @@
                     <a:p>
                       <a:pPr algn="ctr"/>
                       <a:r>
-                        <a:rPr sz="1000" b="0">
+                        <a:rPr sz="1100" b="0">
                           <a:solidFill>
                             <a:srgbClr val="000000"/>
                           </a:solidFill>
@@ -11197,7 +8193,7 @@
                     <a:p>
                       <a:pPr algn="ctr"/>
                       <a:r>
-                        <a:rPr sz="1000" b="0">
+                        <a:rPr sz="1100" b="0">
                           <a:solidFill>
                             <a:srgbClr val="000000"/>
                           </a:solidFill>
@@ -11219,9 +8215,9 @@
                     <a:p>
                       <a:pPr algn="ctr"/>
                       <a:r>
-                        <a:rPr sz="1000" b="0">
-                          <a:solidFill>
-                            <a:srgbClr val="000000"/>
+                        <a:rPr sz="1100" b="1">
+                          <a:solidFill>
+                            <a:srgbClr val="E74C3C"/>
                           </a:solidFill>
                         </a:rPr>
                         <a:t>28.47</a:t>
@@ -11230,18 +8226,18 @@
                   </a:txBody>
                   <a:tcPr>
                     <a:solidFill>
-                      <a:srgbClr val="FFFFFF"/>
-                    </a:solidFill>
-                  </a:tcPr>
-                </a:tc>
-                <a:tc>
-                  <a:txBody>
-                    <a:bodyPr/>
-                    <a:lstStyle/>
-                    <a:p>
-                      <a:pPr algn="ctr"/>
-                      <a:r>
-                        <a:rPr sz="1000" b="0">
+                      <a:srgbClr val="FFE6E6"/>
+                    </a:solidFill>
+                  </a:tcPr>
+                </a:tc>
+                <a:tc>
+                  <a:txBody>
+                    <a:bodyPr/>
+                    <a:lstStyle/>
+                    <a:p>
+                      <a:pPr algn="ctr"/>
+                      <a:r>
+                        <a:rPr sz="1100" b="0">
                           <a:solidFill>
                             <a:srgbClr val="000000"/>
                           </a:solidFill>
@@ -11263,7 +8259,7 @@
                     <a:p>
                       <a:pPr algn="ctr"/>
                       <a:r>
-                        <a:rPr sz="1000" b="0">
+                        <a:rPr sz="1100" b="0">
                           <a:solidFill>
                             <a:srgbClr val="000000"/>
                           </a:solidFill>
@@ -11285,7 +8281,7 @@
                     <a:p>
                       <a:pPr algn="ctr"/>
                       <a:r>
-                        <a:rPr sz="1000" b="0">
+                        <a:rPr sz="1100" b="0">
                           <a:solidFill>
                             <a:srgbClr val="000000"/>
                           </a:solidFill>
@@ -11307,7 +8303,7 @@
                     <a:p>
                       <a:pPr algn="ctr"/>
                       <a:r>
-                        <a:rPr sz="1000" b="0">
+                        <a:rPr sz="1100" b="0">
                           <a:solidFill>
                             <a:srgbClr val="000000"/>
                           </a:solidFill>
@@ -11329,7 +8325,7 @@
                     <a:p>
                       <a:pPr algn="ctr"/>
                       <a:r>
-                        <a:rPr sz="1000" b="0">
+                        <a:rPr sz="1100" b="0">
                           <a:solidFill>
                             <a:srgbClr val="000000"/>
                           </a:solidFill>
@@ -11351,7 +8347,7 @@
                     <a:p>
                       <a:pPr algn="ctr"/>
                       <a:r>
-                        <a:rPr sz="1000" b="0">
+                        <a:rPr sz="1100" b="0">
                           <a:solidFill>
                             <a:srgbClr val="000000"/>
                           </a:solidFill>
@@ -11363,6 +8359,28 @@
                   <a:tcPr>
                     <a:solidFill>
                       <a:srgbClr val="FFFFFF"/>
+                    </a:solidFill>
+                  </a:tcPr>
+                </a:tc>
+                <a:tc>
+                  <a:txBody>
+                    <a:bodyPr/>
+                    <a:lstStyle/>
+                    <a:p>
+                      <a:pPr algn="ctr"/>
+                      <a:r>
+                        <a:rPr sz="1100" b="1">
+                          <a:solidFill>
+                            <a:srgbClr val="E74C3C"/>
+                          </a:solidFill>
+                        </a:rPr>
+                        <a:t>-14.93 pp</a:t>
+                      </a:r>
+                    </a:p>
+                  </a:txBody>
+                  <a:tcPr>
+                    <a:solidFill>
+                      <a:srgbClr val="FFE6E6"/>
                     </a:solidFill>
                   </a:tcPr>
                 </a:tc>
@@ -11373,59 +8391,14 @@
       </p:graphicFrame>
       <p:sp>
         <p:nvSpPr>
-          <p:cNvPr id="4" name="Rectangle 3"/>
-          <p:cNvSpPr/>
-          <p:nvPr/>
-        </p:nvSpPr>
-        <p:spPr>
-          <a:xfrm>
-            <a:off x="13716000" y="731520"/>
-            <a:ext cx="5029200" cy="5394960"/>
-          </a:xfrm>
-          <a:prstGeom prst="rect">
-            <a:avLst/>
-          </a:prstGeom>
-          <a:solidFill>
-            <a:srgbClr val="F0F0F0"/>
-          </a:solidFill>
-          <a:ln w="12700">
-            <a:solidFill>
-              <a:srgbClr val="C8C8C8"/>
-            </a:solidFill>
-          </a:ln>
-        </p:spPr>
-        <p:style>
-          <a:lnRef idx="1">
-            <a:schemeClr val="accent1"/>
-          </a:lnRef>
-          <a:fillRef idx="3">
-            <a:schemeClr val="accent1"/>
-          </a:fillRef>
-          <a:effectRef idx="2">
-            <a:schemeClr val="accent1"/>
-          </a:effectRef>
-          <a:fontRef idx="minor">
-            <a:schemeClr val="lt1"/>
-          </a:fontRef>
-        </p:style>
-        <p:txBody>
-          <a:bodyPr rtlCol="0" anchor="ctr"/>
-          <a:lstStyle/>
-          <a:p>
-            <a:pPr algn="ctr"/>
-          </a:p>
-        </p:txBody>
-      </p:sp>
-      <p:sp>
-        <p:nvSpPr>
-          <p:cNvPr id="5" name="TextBox 4"/>
+          <p:cNvPr id="4" name="TextBox 3"/>
           <p:cNvSpPr txBox="1"/>
           <p:nvPr/>
         </p:nvSpPr>
         <p:spPr>
           <a:xfrm>
-            <a:off x="13990320" y="868680"/>
-            <a:ext cx="4480560" cy="411480"/>
+            <a:off x="457200" y="2743200"/>
+            <a:ext cx="16459200" cy="365760"/>
           </a:xfrm>
           <a:prstGeom prst="rect">
             <a:avLst/>
@@ -11433,608 +8406,18 @@
           <a:noFill/>
         </p:spPr>
         <p:txBody>
-          <a:bodyPr wrap="square">
+          <a:bodyPr wrap="none">
             <a:spAutoFit/>
           </a:bodyPr>
           <a:lstStyle/>
           <a:p>
-            <a:pPr algn="ctr"/>
             <a:r>
-              <a:rPr sz="1800" b="1">
+              <a:rPr sz="1300">
                 <a:solidFill>
-                  <a:srgbClr val="000000"/>
+                  <a:srgbClr val="3C3C3C"/>
                 </a:solidFill>
               </a:rPr>
-              <a:t>Ablation</a:t>
-            </a:r>
-          </a:p>
-        </p:txBody>
-      </p:sp>
-      <p:sp>
-        <p:nvSpPr>
-          <p:cNvPr id="6" name="Oval 5"/>
-          <p:cNvSpPr/>
-          <p:nvPr/>
-        </p:nvSpPr>
-        <p:spPr>
-          <a:xfrm>
-            <a:off x="14081760" y="1426464"/>
-            <a:ext cx="256032" cy="256032"/>
-          </a:xfrm>
-          <a:prstGeom prst="ellipse">
-            <a:avLst/>
-          </a:prstGeom>
-          <a:solidFill>
-            <a:srgbClr val="27AE60"/>
-          </a:solidFill>
-          <a:ln>
-            <a:noFill/>
-          </a:ln>
-        </p:spPr>
-        <p:style>
-          <a:lnRef idx="1">
-            <a:schemeClr val="accent1"/>
-          </a:lnRef>
-          <a:fillRef idx="3">
-            <a:schemeClr val="accent1"/>
-          </a:fillRef>
-          <a:effectRef idx="2">
-            <a:schemeClr val="accent1"/>
-          </a:effectRef>
-          <a:fontRef idx="minor">
-            <a:schemeClr val="lt1"/>
-          </a:fontRef>
-        </p:style>
-        <p:txBody>
-          <a:bodyPr rtlCol="0" anchor="ctr"/>
-          <a:lstStyle/>
-          <a:p>
-            <a:pPr algn="ctr"/>
-          </a:p>
-        </p:txBody>
-      </p:sp>
-      <p:sp>
-        <p:nvSpPr>
-          <p:cNvPr id="7" name="TextBox 6"/>
-          <p:cNvSpPr txBox="1"/>
-          <p:nvPr/>
-        </p:nvSpPr>
-        <p:spPr>
-          <a:xfrm>
-            <a:off x="14493240" y="1371600"/>
-            <a:ext cx="1645920" cy="365760"/>
-          </a:xfrm>
-          <a:prstGeom prst="rect">
-            <a:avLst/>
-          </a:prstGeom>
-          <a:noFill/>
-        </p:spPr>
-        <p:txBody>
-          <a:bodyPr wrap="square">
-            <a:spAutoFit/>
-          </a:bodyPr>
-          <a:lstStyle/>
-          <a:p>
-            <a:pPr algn="l"/>
-            <a:r>
-              <a:rPr sz="1300" b="1">
-                <a:solidFill>
-                  <a:srgbClr val="000000"/>
-                </a:solidFill>
-              </a:rPr>
-              <a:t>Full Conformer</a:t>
-            </a:r>
-          </a:p>
-        </p:txBody>
-      </p:sp>
-      <p:sp>
-        <p:nvSpPr>
-          <p:cNvPr id="8" name="TextBox 7"/>
-          <p:cNvSpPr txBox="1"/>
-          <p:nvPr/>
-        </p:nvSpPr>
-        <p:spPr>
-          <a:xfrm>
-            <a:off x="16184880" y="1371600"/>
-            <a:ext cx="2286000" cy="365760"/>
-          </a:xfrm>
-          <a:prstGeom prst="rect">
-            <a:avLst/>
-          </a:prstGeom>
-          <a:noFill/>
-        </p:spPr>
-        <p:txBody>
-          <a:bodyPr wrap="square">
-            <a:spAutoFit/>
-          </a:bodyPr>
-          <a:lstStyle/>
-          <a:p>
-            <a:pPr algn="l"/>
-            <a:r>
-              <a:rPr sz="1100" b="0">
-                <a:solidFill>
-                  <a:srgbClr val="27AE60"/>
-                </a:solidFill>
-              </a:rPr>
-              <a:t>Avg 78.66%</a:t>
-            </a:r>
-          </a:p>
-        </p:txBody>
-      </p:sp>
-      <p:sp>
-        <p:nvSpPr>
-          <p:cNvPr id="9" name="Oval 8"/>
-          <p:cNvSpPr/>
-          <p:nvPr/>
-        </p:nvSpPr>
-        <p:spPr>
-          <a:xfrm>
-            <a:off x="14081760" y="1883664"/>
-            <a:ext cx="256032" cy="256032"/>
-          </a:xfrm>
-          <a:prstGeom prst="ellipse">
-            <a:avLst/>
-          </a:prstGeom>
-          <a:solidFill>
-            <a:srgbClr val="E74C3C"/>
-          </a:solidFill>
-          <a:ln>
-            <a:noFill/>
-          </a:ln>
-        </p:spPr>
-        <p:style>
-          <a:lnRef idx="1">
-            <a:schemeClr val="accent1"/>
-          </a:lnRef>
-          <a:fillRef idx="3">
-            <a:schemeClr val="accent1"/>
-          </a:fillRef>
-          <a:effectRef idx="2">
-            <a:schemeClr val="accent1"/>
-          </a:effectRef>
-          <a:fontRef idx="minor">
-            <a:schemeClr val="lt1"/>
-          </a:fontRef>
-        </p:style>
-        <p:txBody>
-          <a:bodyPr rtlCol="0" anchor="ctr"/>
-          <a:lstStyle/>
-          <a:p>
-            <a:pPr algn="ctr"/>
-          </a:p>
-        </p:txBody>
-      </p:sp>
-      <p:sp>
-        <p:nvSpPr>
-          <p:cNvPr id="10" name="TextBox 9"/>
-          <p:cNvSpPr txBox="1"/>
-          <p:nvPr/>
-        </p:nvSpPr>
-        <p:spPr>
-          <a:xfrm>
-            <a:off x="14493240" y="1828800"/>
-            <a:ext cx="1645920" cy="365760"/>
-          </a:xfrm>
-          <a:prstGeom prst="rect">
-            <a:avLst/>
-          </a:prstGeom>
-          <a:noFill/>
-        </p:spPr>
-        <p:txBody>
-          <a:bodyPr wrap="square">
-            <a:spAutoFit/>
-          </a:bodyPr>
-          <a:lstStyle/>
-          <a:p>
-            <a:pPr algn="l"/>
-            <a:r>
-              <a:rPr sz="1300" b="1">
-                <a:solidFill>
-                  <a:srgbClr val="000000"/>
-                </a:solidFill>
-              </a:rPr>
-              <a:t>w/o Transformer</a:t>
-            </a:r>
-          </a:p>
-        </p:txBody>
-      </p:sp>
-      <p:sp>
-        <p:nvSpPr>
-          <p:cNvPr id="11" name="TextBox 10"/>
-          <p:cNvSpPr txBox="1"/>
-          <p:nvPr/>
-        </p:nvSpPr>
-        <p:spPr>
-          <a:xfrm>
-            <a:off x="16184880" y="1828800"/>
-            <a:ext cx="2286000" cy="365760"/>
-          </a:xfrm>
-          <a:prstGeom prst="rect">
-            <a:avLst/>
-          </a:prstGeom>
-          <a:noFill/>
-        </p:spPr>
-        <p:txBody>
-          <a:bodyPr wrap="square">
-            <a:spAutoFit/>
-          </a:bodyPr>
-          <a:lstStyle/>
-          <a:p>
-            <a:pPr algn="l"/>
-            <a:r>
-              <a:rPr sz="1100" b="0">
-                <a:solidFill>
-                  <a:srgbClr val="E74C3C"/>
-                </a:solidFill>
-              </a:rPr>
-              <a:t>Avg 63.73% (-14.93)</a:t>
-            </a:r>
-          </a:p>
-        </p:txBody>
-      </p:sp>
-      <p:sp>
-        <p:nvSpPr>
-          <p:cNvPr id="12" name="Oval 11"/>
-          <p:cNvSpPr/>
-          <p:nvPr/>
-        </p:nvSpPr>
-        <p:spPr>
-          <a:xfrm>
-            <a:off x="14081760" y="2340864"/>
-            <a:ext cx="256032" cy="256032"/>
-          </a:xfrm>
-          <a:prstGeom prst="ellipse">
-            <a:avLst/>
-          </a:prstGeom>
-          <a:solidFill>
-            <a:srgbClr val="E74C3C"/>
-          </a:solidFill>
-          <a:ln>
-            <a:noFill/>
-          </a:ln>
-        </p:spPr>
-        <p:style>
-          <a:lnRef idx="1">
-            <a:schemeClr val="accent1"/>
-          </a:lnRef>
-          <a:fillRef idx="3">
-            <a:schemeClr val="accent1"/>
-          </a:fillRef>
-          <a:effectRef idx="2">
-            <a:schemeClr val="accent1"/>
-          </a:effectRef>
-          <a:fontRef idx="minor">
-            <a:schemeClr val="lt1"/>
-          </a:fontRef>
-        </p:style>
-        <p:txBody>
-          <a:bodyPr rtlCol="0" anchor="ctr"/>
-          <a:lstStyle/>
-          <a:p>
-            <a:pPr algn="ctr"/>
-          </a:p>
-        </p:txBody>
-      </p:sp>
-      <p:sp>
-        <p:nvSpPr>
-          <p:cNvPr id="13" name="TextBox 12"/>
-          <p:cNvSpPr txBox="1"/>
-          <p:nvPr/>
-        </p:nvSpPr>
-        <p:spPr>
-          <a:xfrm>
-            <a:off x="14493240" y="2286000"/>
-            <a:ext cx="1645920" cy="365760"/>
-          </a:xfrm>
-          <a:prstGeom prst="rect">
-            <a:avLst/>
-          </a:prstGeom>
-          <a:noFill/>
-        </p:spPr>
-        <p:txBody>
-          <a:bodyPr wrap="square">
-            <a:spAutoFit/>
-          </a:bodyPr>
-          <a:lstStyle/>
-          <a:p>
-            <a:pPr algn="l"/>
-            <a:r>
-              <a:rPr sz="1300" b="1">
-                <a:solidFill>
-                  <a:srgbClr val="000000"/>
-                </a:solidFill>
-              </a:rPr>
-              <a:t>S04 extreme gap</a:t>
-            </a:r>
-          </a:p>
-        </p:txBody>
-      </p:sp>
-      <p:sp>
-        <p:nvSpPr>
-          <p:cNvPr id="14" name="TextBox 13"/>
-          <p:cNvSpPr txBox="1"/>
-          <p:nvPr/>
-        </p:nvSpPr>
-        <p:spPr>
-          <a:xfrm>
-            <a:off x="16184880" y="2286000"/>
-            <a:ext cx="2286000" cy="365760"/>
-          </a:xfrm>
-          <a:prstGeom prst="rect">
-            <a:avLst/>
-          </a:prstGeom>
-          <a:noFill/>
-        </p:spPr>
-        <p:txBody>
-          <a:bodyPr wrap="square">
-            <a:spAutoFit/>
-          </a:bodyPr>
-          <a:lstStyle/>
-          <a:p>
-            <a:pPr algn="l"/>
-            <a:r>
-              <a:rPr sz="1100" b="0">
-                <a:solidFill>
-                  <a:srgbClr val="E74C3C"/>
-                </a:solidFill>
-              </a:rPr>
-              <a:t>78.13 to 28.47 (-49.66)</a:t>
-            </a:r>
-          </a:p>
-        </p:txBody>
-      </p:sp>
-      <p:sp>
-        <p:nvSpPr>
-          <p:cNvPr id="15" name="Oval 14"/>
-          <p:cNvSpPr/>
-          <p:nvPr/>
-        </p:nvSpPr>
-        <p:spPr>
-          <a:xfrm>
-            <a:off x="14081760" y="2798064"/>
-            <a:ext cx="256032" cy="256032"/>
-          </a:xfrm>
-          <a:prstGeom prst="ellipse">
-            <a:avLst/>
-          </a:prstGeom>
-          <a:solidFill>
-            <a:srgbClr val="27AE60"/>
-          </a:solidFill>
-          <a:ln>
-            <a:noFill/>
-          </a:ln>
-        </p:spPr>
-        <p:style>
-          <a:lnRef idx="1">
-            <a:schemeClr val="accent1"/>
-          </a:lnRef>
-          <a:fillRef idx="3">
-            <a:schemeClr val="accent1"/>
-          </a:fillRef>
-          <a:effectRef idx="2">
-            <a:schemeClr val="accent1"/>
-          </a:effectRef>
-          <a:fontRef idx="minor">
-            <a:schemeClr val="lt1"/>
-          </a:fontRef>
-        </p:style>
-        <p:txBody>
-          <a:bodyPr rtlCol="0" anchor="ctr"/>
-          <a:lstStyle/>
-          <a:p>
-            <a:pPr algn="ctr"/>
-          </a:p>
-        </p:txBody>
-      </p:sp>
-      <p:sp>
-        <p:nvSpPr>
-          <p:cNvPr id="16" name="TextBox 15"/>
-          <p:cNvSpPr txBox="1"/>
-          <p:nvPr/>
-        </p:nvSpPr>
-        <p:spPr>
-          <a:xfrm>
-            <a:off x="14493240" y="2743200"/>
-            <a:ext cx="1645920" cy="365760"/>
-          </a:xfrm>
-          <a:prstGeom prst="rect">
-            <a:avLst/>
-          </a:prstGeom>
-          <a:noFill/>
-        </p:spPr>
-        <p:txBody>
-          <a:bodyPr wrap="square">
-            <a:spAutoFit/>
-          </a:bodyPr>
-          <a:lstStyle/>
-          <a:p>
-            <a:pPr algn="l"/>
-            <a:r>
-              <a:rPr sz="1300" b="1">
-                <a:solidFill>
-                  <a:srgbClr val="000000"/>
-                </a:solidFill>
-              </a:rPr>
-              <a:t>S01, S08, S09</a:t>
-            </a:r>
-          </a:p>
-        </p:txBody>
-      </p:sp>
-      <p:sp>
-        <p:nvSpPr>
-          <p:cNvPr id="17" name="TextBox 16"/>
-          <p:cNvSpPr txBox="1"/>
-          <p:nvPr/>
-        </p:nvSpPr>
-        <p:spPr>
-          <a:xfrm>
-            <a:off x="16184880" y="2743200"/>
-            <a:ext cx="2286000" cy="365760"/>
-          </a:xfrm>
-          <a:prstGeom prst="rect">
-            <a:avLst/>
-          </a:prstGeom>
-          <a:noFill/>
-        </p:spPr>
-        <p:txBody>
-          <a:bodyPr wrap="square">
-            <a:spAutoFit/>
-          </a:bodyPr>
-          <a:lstStyle/>
-          <a:p>
-            <a:pPr algn="l"/>
-            <a:r>
-              <a:rPr sz="1100" b="0">
-                <a:solidFill>
-                  <a:srgbClr val="27AE60"/>
-                </a:solidFill>
-              </a:rPr>
-              <a:t>Resilient (&lt; 6 pp drop)</a:t>
-            </a:r>
-          </a:p>
-        </p:txBody>
-      </p:sp>
-      <p:sp>
-        <p:nvSpPr>
-          <p:cNvPr id="18" name="Rectangle 17"/>
-          <p:cNvSpPr/>
-          <p:nvPr/>
-        </p:nvSpPr>
-        <p:spPr>
-          <a:xfrm>
-            <a:off x="14081760" y="3337560"/>
-            <a:ext cx="4297680" cy="13716"/>
-          </a:xfrm>
-          <a:prstGeom prst="rect">
-            <a:avLst/>
-          </a:prstGeom>
-          <a:solidFill>
-            <a:srgbClr val="C8C8C8"/>
-          </a:solidFill>
-          <a:ln>
-            <a:noFill/>
-          </a:ln>
-        </p:spPr>
-        <p:style>
-          <a:lnRef idx="1">
-            <a:schemeClr val="accent1"/>
-          </a:lnRef>
-          <a:fillRef idx="3">
-            <a:schemeClr val="accent1"/>
-          </a:fillRef>
-          <a:effectRef idx="2">
-            <a:schemeClr val="accent1"/>
-          </a:effectRef>
-          <a:fontRef idx="minor">
-            <a:schemeClr val="lt1"/>
-          </a:fontRef>
-        </p:style>
-        <p:txBody>
-          <a:bodyPr rtlCol="0" anchor="ctr"/>
-          <a:lstStyle/>
-          <a:p>
-            <a:pPr algn="ctr"/>
-          </a:p>
-        </p:txBody>
-      </p:sp>
-      <p:sp>
-        <p:nvSpPr>
-          <p:cNvPr id="19" name="TextBox 18"/>
-          <p:cNvSpPr txBox="1"/>
-          <p:nvPr/>
-        </p:nvSpPr>
-        <p:spPr>
-          <a:xfrm>
-            <a:off x="14173200" y="3611879"/>
-            <a:ext cx="4114800" cy="365760"/>
-          </a:xfrm>
-          <a:prstGeom prst="rect">
-            <a:avLst/>
-          </a:prstGeom>
-          <a:noFill/>
-        </p:spPr>
-        <p:txBody>
-          <a:bodyPr wrap="square">
-            <a:spAutoFit/>
-          </a:bodyPr>
-          <a:lstStyle/>
-          <a:p>
-            <a:pPr algn="l"/>
-            <a:r>
-              <a:rPr sz="1400" b="1">
-                <a:solidFill>
-                  <a:srgbClr val="27AE60"/>
-                </a:solidFill>
-              </a:rPr>
-              <a:t>Transformer contribution: +14.93 pp on avg</a:t>
-            </a:r>
-          </a:p>
-        </p:txBody>
-      </p:sp>
-      <p:sp>
-        <p:nvSpPr>
-          <p:cNvPr id="20" name="TextBox 19"/>
-          <p:cNvSpPr txBox="1"/>
-          <p:nvPr/>
-        </p:nvSpPr>
-        <p:spPr>
-          <a:xfrm>
-            <a:off x="14173200" y="4023359"/>
-            <a:ext cx="4114800" cy="365760"/>
-          </a:xfrm>
-          <a:prstGeom prst="rect">
-            <a:avLst/>
-          </a:prstGeom>
-          <a:noFill/>
-        </p:spPr>
-        <p:txBody>
-          <a:bodyPr wrap="square">
-            <a:spAutoFit/>
-          </a:bodyPr>
-          <a:lstStyle/>
-          <a:p>
-            <a:pPr algn="l"/>
-            <a:r>
-              <a:rPr sz="1400" b="1">
-                <a:solidFill>
-                  <a:srgbClr val="E74C3C"/>
-                </a:solidFill>
-              </a:rPr>
-              <a:t>Per-subject variance: very high (S04 extreme)</a:t>
-            </a:r>
-          </a:p>
-        </p:txBody>
-      </p:sp>
-      <p:sp>
-        <p:nvSpPr>
-          <p:cNvPr id="21" name="TextBox 20"/>
-          <p:cNvSpPr txBox="1"/>
-          <p:nvPr/>
-        </p:nvSpPr>
-        <p:spPr>
-          <a:xfrm>
-            <a:off x="13990320" y="4709159"/>
-            <a:ext cx="4480560" cy="457200"/>
-          </a:xfrm>
-          <a:prstGeom prst="rect">
-            <a:avLst/>
-          </a:prstGeom>
-          <a:noFill/>
-        </p:spPr>
-        <p:txBody>
-          <a:bodyPr wrap="square">
-            <a:spAutoFit/>
-          </a:bodyPr>
-          <a:lstStyle/>
-          <a:p>
-            <a:pPr algn="ctr"/>
-            <a:r>
-              <a:rPr sz="1300" b="0">
-                <a:solidFill>
-                  <a:srgbClr val="145A32"/>
-                </a:solidFill>
-              </a:rPr>
-              <a:t>Self-attention is critical: removing Transformer drops accuracy by ~15 pp.</a:t>
+              <a:t>Self-attention is critical: removing Transformer drops accuracy by ~15 pp on average. Largest gap at S04 (78.13 -&gt; 28.47).</a:t>
             </a:r>
           </a:p>
         </p:txBody>

--- a/references/tables_v10.pptx
+++ b/references/tables_v10.pptx
@@ -11,6 +11,7 @@
     <p:sldId id="259" r:id="rId10"/>
     <p:sldId id="260" r:id="rId11"/>
     <p:sldId id="261" r:id="rId12"/>
+    <p:sldId id="262" r:id="rId13"/>
   </p:sldIdLst>
   <p:sldSz cx="17373600" cy="8229600" type="screen4x3"/>
   <p:notesSz cx="6858000" cy="9144000"/>
@@ -8422,6 +8423,1853 @@
           </a:p>
         </p:txBody>
       </p:sp>
+    </p:spTree>
+  </p:cSld>
+  <p:clrMapOvr>
+    <a:masterClrMapping/>
+  </p:clrMapOvr>
+</p:sld>
+</file>
+
+<file path=ppt/slides/slide7.xml><?xml version="1.0" encoding="utf-8"?>
+<p:sld xmlns:a="http://schemas.openxmlformats.org/drawingml/2006/main" xmlns:p="http://schemas.openxmlformats.org/presentationml/2006/main" xmlns:r="http://schemas.openxmlformats.org/officeDocument/2006/relationships">
+  <p:cSld>
+    <p:spTree>
+      <p:nvGrpSpPr>
+        <p:cNvPr id="1" name=""/>
+        <p:cNvGrpSpPr/>
+        <p:nvPr/>
+      </p:nvGrpSpPr>
+      <p:grpSpPr/>
+      <p:sp>
+        <p:nvSpPr>
+          <p:cNvPr id="2" name="TextBox 1"/>
+          <p:cNvSpPr txBox="1"/>
+          <p:nvPr/>
+        </p:nvSpPr>
+        <p:spPr>
+          <a:xfrm>
+            <a:off x="457200" y="137160"/>
+            <a:ext cx="16459200" cy="457200"/>
+          </a:xfrm>
+          <a:prstGeom prst="rect">
+            <a:avLst/>
+          </a:prstGeom>
+          <a:noFill/>
+        </p:spPr>
+        <p:txBody>
+          <a:bodyPr wrap="none">
+            <a:spAutoFit/>
+          </a:bodyPr>
+          <a:lstStyle/>
+          <a:p>
+            <a:r>
+              <a:rPr sz="2200" b="1"/>
+              <a:t>Table 7: Cross-Model Reproduction Traffic-Light Grid</a:t>
+            </a:r>
+          </a:p>
+        </p:txBody>
+      </p:sp>
+      <p:graphicFrame>
+        <p:nvGraphicFramePr>
+          <p:cNvPr id="3" name="Table 2"/>
+          <p:cNvGraphicFramePr>
+            <a:graphicFrameLocks noGrp="1"/>
+          </p:cNvGraphicFramePr>
+          <p:nvPr/>
+        </p:nvGraphicFramePr>
+        <p:xfrm>
+          <a:off x="457200" y="777240"/>
+          <a:ext cx="14996160" cy="5532120"/>
+        </p:xfrm>
+        <a:graphic>
+          <a:graphicData uri="http://schemas.openxmlformats.org/drawingml/2006/table">
+            <a:tbl>
+              <a:tblPr firstRow="1" bandRow="1">
+                <a:tableStyleId>{5C22544A-7EE6-4342-B048-85BDC9FD1C3A}</a:tableStyleId>
+              </a:tblPr>
+              <a:tblGrid>
+                <a:gridCol w="1828800"/>
+                <a:gridCol w="1645920"/>
+                <a:gridCol w="3840480"/>
+                <a:gridCol w="3840480"/>
+                <a:gridCol w="3840480"/>
+              </a:tblGrid>
+              <a:tr h="502920">
+                <a:tc>
+                  <a:txBody>
+                    <a:bodyPr/>
+                    <a:lstStyle/>
+                    <a:p>
+                      <a:pPr algn="ctr"/>
+                      <a:r>
+                        <a:rPr sz="1200" b="1">
+                          <a:solidFill>
+                            <a:srgbClr val="FFFFFF"/>
+                          </a:solidFill>
+                        </a:rPr>
+                        <a:t>Dataset</a:t>
+                      </a:r>
+                    </a:p>
+                  </a:txBody>
+                  <a:tcPr>
+                    <a:solidFill>
+                      <a:srgbClr val="3C3C3C"/>
+                    </a:solidFill>
+                  </a:tcPr>
+                </a:tc>
+                <a:tc>
+                  <a:txBody>
+                    <a:bodyPr/>
+                    <a:lstStyle/>
+                    <a:p>
+                      <a:pPr algn="ctr"/>
+                      <a:r>
+                        <a:rPr sz="1200" b="1">
+                          <a:solidFill>
+                            <a:srgbClr val="FFFFFF"/>
+                          </a:solidFill>
+                        </a:rPr>
+                        <a:t>Task</a:t>
+                      </a:r>
+                    </a:p>
+                  </a:txBody>
+                  <a:tcPr>
+                    <a:solidFill>
+                      <a:srgbClr val="3C3C3C"/>
+                    </a:solidFill>
+                  </a:tcPr>
+                </a:tc>
+                <a:tc>
+                  <a:txBody>
+                    <a:bodyPr/>
+                    <a:lstStyle/>
+                    <a:p>
+                      <a:pPr algn="ctr"/>
+                      <a:r>
+                        <a:rPr sz="1200" b="1">
+                          <a:solidFill>
+                            <a:srgbClr val="FFFFFF"/>
+                          </a:solidFill>
+                        </a:rPr>
+                        <a:t>EEGNet</a:t>
+                      </a:r>
+                    </a:p>
+                  </a:txBody>
+                  <a:tcPr>
+                    <a:solidFill>
+                      <a:srgbClr val="3C3C3C"/>
+                    </a:solidFill>
+                  </a:tcPr>
+                </a:tc>
+                <a:tc>
+                  <a:txBody>
+                    <a:bodyPr/>
+                    <a:lstStyle/>
+                    <a:p>
+                      <a:pPr algn="ctr"/>
+                      <a:r>
+                        <a:rPr sz="1200" b="1">
+                          <a:solidFill>
+                            <a:srgbClr val="FFFFFF"/>
+                          </a:solidFill>
+                        </a:rPr>
+                        <a:t>EEG Conformer</a:t>
+                      </a:r>
+                    </a:p>
+                  </a:txBody>
+                  <a:tcPr>
+                    <a:solidFill>
+                      <a:srgbClr val="3C3C3C"/>
+                    </a:solidFill>
+                  </a:tcPr>
+                </a:tc>
+                <a:tc>
+                  <a:txBody>
+                    <a:bodyPr/>
+                    <a:lstStyle/>
+                    <a:p>
+                      <a:pPr algn="ctr"/>
+                      <a:r>
+                        <a:rPr sz="1200" b="1">
+                          <a:solidFill>
+                            <a:srgbClr val="FFFFFF"/>
+                          </a:solidFill>
+                        </a:rPr>
+                        <a:t>CBraMod</a:t>
+                      </a:r>
+                    </a:p>
+                  </a:txBody>
+                  <a:tcPr>
+                    <a:solidFill>
+                      <a:srgbClr val="3C3C3C"/>
+                    </a:solidFill>
+                  </a:tcPr>
+                </a:tc>
+              </a:tr>
+              <a:tr h="502920">
+                <a:tc>
+                  <a:txBody>
+                    <a:bodyPr/>
+                    <a:lstStyle/>
+                    <a:p>
+                      <a:pPr algn="l"/>
+                      <a:r>
+                        <a:rPr sz="1100" b="1">
+                          <a:solidFill>
+                            <a:srgbClr val="000000"/>
+                          </a:solidFill>
+                        </a:rPr>
+                        <a:t>BCICIV2A / 2a</a:t>
+                      </a:r>
+                    </a:p>
+                  </a:txBody>
+                  <a:tcPr>
+                    <a:solidFill>
+                      <a:srgbClr val="FFFFFF"/>
+                    </a:solidFill>
+                  </a:tcPr>
+                </a:tc>
+                <a:tc>
+                  <a:txBody>
+                    <a:bodyPr/>
+                    <a:lstStyle/>
+                    <a:p>
+                      <a:pPr algn="l"/>
+                      <a:r>
+                        <a:rPr sz="1000" b="0">
+                          <a:solidFill>
+                            <a:srgbClr val="000000"/>
+                          </a:solidFill>
+                        </a:rPr>
+                        <a:t>Motor Imagery</a:t>
+                      </a:r>
+                    </a:p>
+                  </a:txBody>
+                  <a:tcPr>
+                    <a:solidFill>
+                      <a:srgbClr val="F5F5F5"/>
+                    </a:solidFill>
+                  </a:tcPr>
+                </a:tc>
+                <a:tc>
+                  <a:txBody>
+                    <a:bodyPr/>
+                    <a:lstStyle/>
+                    <a:p>
+                      <a:pPr algn="ctr"/>
+                      <a:r>
+                        <a:rPr sz="1000" b="1">
+                          <a:solidFill>
+                            <a:srgbClr val="27AE60"/>
+                          </a:solidFill>
+                        </a:rPr>
+                        <a:t>79.17% val</a:t>
+                      </a:r>
+                    </a:p>
+                  </a:txBody>
+                  <a:tcPr>
+                    <a:solidFill>
+                      <a:srgbClr val="DCFFE6"/>
+                    </a:solidFill>
+                  </a:tcPr>
+                </a:tc>
+                <a:tc>
+                  <a:txBody>
+                    <a:bodyPr/>
+                    <a:lstStyle/>
+                    <a:p>
+                      <a:pPr algn="ctr"/>
+                      <a:r>
+                        <a:rPr sz="1000" b="1">
+                          <a:solidFill>
+                            <a:srgbClr val="27AE60"/>
+                          </a:solidFill>
+                        </a:rPr>
+                        <a:t>78.66% avg</a:t>
+                      </a:r>
+                    </a:p>
+                  </a:txBody>
+                  <a:tcPr>
+                    <a:solidFill>
+                      <a:srgbClr val="DCFFE6"/>
+                    </a:solidFill>
+                  </a:tcPr>
+                </a:tc>
+                <a:tc>
+                  <a:txBody>
+                    <a:bodyPr/>
+                    <a:lstStyle/>
+                    <a:p>
+                      <a:pPr algn="ctr"/>
+                      <a:r>
+                        <a:rPr sz="1000" b="1">
+                          <a:solidFill>
+                            <a:srgbClr val="27AE60"/>
+                          </a:solidFill>
+                        </a:rPr>
+                        <a:t>bAcc 0.671</a:t>
+                      </a:r>
+                    </a:p>
+                  </a:txBody>
+                  <a:tcPr>
+                    <a:solidFill>
+                      <a:srgbClr val="DCFFE6"/>
+                    </a:solidFill>
+                  </a:tcPr>
+                </a:tc>
+              </a:tr>
+              <a:tr h="502920">
+                <a:tc>
+                  <a:txBody>
+                    <a:bodyPr/>
+                    <a:lstStyle/>
+                    <a:p>
+                      <a:pPr algn="l"/>
+                      <a:r>
+                        <a:rPr sz="1100" b="1">
+                          <a:solidFill>
+                            <a:srgbClr val="000000"/>
+                          </a:solidFill>
+                        </a:rPr>
+                        <a:t>BCICIV2B</a:t>
+                      </a:r>
+                    </a:p>
+                  </a:txBody>
+                  <a:tcPr>
+                    <a:solidFill>
+                      <a:srgbClr val="FFFFFF"/>
+                    </a:solidFill>
+                  </a:tcPr>
+                </a:tc>
+                <a:tc>
+                  <a:txBody>
+                    <a:bodyPr/>
+                    <a:lstStyle/>
+                    <a:p>
+                      <a:pPr algn="l"/>
+                      <a:r>
+                        <a:rPr sz="1000" b="0">
+                          <a:solidFill>
+                            <a:srgbClr val="000000"/>
+                          </a:solidFill>
+                        </a:rPr>
+                        <a:t>Motor Imagery</a:t>
+                      </a:r>
+                    </a:p>
+                  </a:txBody>
+                  <a:tcPr>
+                    <a:solidFill>
+                      <a:srgbClr val="F5F5F5"/>
+                    </a:solidFill>
+                  </a:tcPr>
+                </a:tc>
+                <a:tc>
+                  <a:txBody>
+                    <a:bodyPr/>
+                    <a:lstStyle/>
+                    <a:p>
+                      <a:pPr algn="ctr"/>
+                      <a:r>
+                        <a:rPr sz="1000" b="1">
+                          <a:solidFill>
+                            <a:srgbClr val="27AE60"/>
+                          </a:solidFill>
+                        </a:rPr>
+                        <a:t>78.35%, k=0.57</a:t>
+                      </a:r>
+                    </a:p>
+                  </a:txBody>
+                  <a:tcPr>
+                    <a:solidFill>
+                      <a:srgbClr val="DCFFE6"/>
+                    </a:solidFill>
+                  </a:tcPr>
+                </a:tc>
+                <a:tc>
+                  <a:txBody>
+                    <a:bodyPr/>
+                    <a:lstStyle/>
+                    <a:p>
+                      <a:pPr algn="ctr"/>
+                      <a:r>
+                        <a:rPr sz="1000" b="0">
+                          <a:solidFill>
+                            <a:srgbClr val="C8C8C8"/>
+                          </a:solidFill>
+                        </a:rPr>
+                        <a:t>--</a:t>
+                      </a:r>
+                    </a:p>
+                  </a:txBody>
+                  <a:tcPr>
+                    <a:solidFill>
+                      <a:srgbClr val="F5F5F5"/>
+                    </a:solidFill>
+                  </a:tcPr>
+                </a:tc>
+                <a:tc>
+                  <a:txBody>
+                    <a:bodyPr/>
+                    <a:lstStyle/>
+                    <a:p>
+                      <a:pPr algn="ctr"/>
+                      <a:r>
+                        <a:rPr sz="1000" b="0">
+                          <a:solidFill>
+                            <a:srgbClr val="C8C8C8"/>
+                          </a:solidFill>
+                        </a:rPr>
+                        <a:t>--</a:t>
+                      </a:r>
+                    </a:p>
+                  </a:txBody>
+                  <a:tcPr>
+                    <a:solidFill>
+                      <a:srgbClr val="F5F5F5"/>
+                    </a:solidFill>
+                  </a:tcPr>
+                </a:tc>
+              </a:tr>
+              <a:tr h="502920">
+                <a:tc>
+                  <a:txBody>
+                    <a:bodyPr/>
+                    <a:lstStyle/>
+                    <a:p>
+                      <a:pPr algn="l"/>
+                      <a:r>
+                        <a:rPr sz="1100" b="1">
+                          <a:solidFill>
+                            <a:srgbClr val="000000"/>
+                          </a:solidFill>
+                        </a:rPr>
+                        <a:t>IIIa</a:t>
+                      </a:r>
+                    </a:p>
+                  </a:txBody>
+                  <a:tcPr>
+                    <a:solidFill>
+                      <a:srgbClr val="FFFFFF"/>
+                    </a:solidFill>
+                  </a:tcPr>
+                </a:tc>
+                <a:tc>
+                  <a:txBody>
+                    <a:bodyPr/>
+                    <a:lstStyle/>
+                    <a:p>
+                      <a:pPr algn="l"/>
+                      <a:r>
+                        <a:rPr sz="1000" b="0">
+                          <a:solidFill>
+                            <a:srgbClr val="000000"/>
+                          </a:solidFill>
+                        </a:rPr>
+                        <a:t>Motor Imagery</a:t>
+                      </a:r>
+                    </a:p>
+                  </a:txBody>
+                  <a:tcPr>
+                    <a:solidFill>
+                      <a:srgbClr val="F5F5F5"/>
+                    </a:solidFill>
+                  </a:tcPr>
+                </a:tc>
+                <a:tc>
+                  <a:txBody>
+                    <a:bodyPr/>
+                    <a:lstStyle/>
+                    <a:p>
+                      <a:pPr algn="ctr"/>
+                      <a:r>
+                        <a:rPr sz="1000" b="1">
+                          <a:solidFill>
+                            <a:srgbClr val="F1C40F"/>
+                          </a:solidFill>
+                        </a:rPr>
+                        <a:t>55.95% val</a:t>
+                      </a:r>
+                    </a:p>
+                  </a:txBody>
+                  <a:tcPr>
+                    <a:solidFill>
+                      <a:srgbClr val="FFFADC"/>
+                    </a:solidFill>
+                  </a:tcPr>
+                </a:tc>
+                <a:tc>
+                  <a:txBody>
+                    <a:bodyPr/>
+                    <a:lstStyle/>
+                    <a:p>
+                      <a:pPr algn="ctr"/>
+                      <a:r>
+                        <a:rPr sz="1000" b="0">
+                          <a:solidFill>
+                            <a:srgbClr val="C8C8C8"/>
+                          </a:solidFill>
+                        </a:rPr>
+                        <a:t>--</a:t>
+                      </a:r>
+                    </a:p>
+                  </a:txBody>
+                  <a:tcPr>
+                    <a:solidFill>
+                      <a:srgbClr val="F5F5F5"/>
+                    </a:solidFill>
+                  </a:tcPr>
+                </a:tc>
+                <a:tc>
+                  <a:txBody>
+                    <a:bodyPr/>
+                    <a:lstStyle/>
+                    <a:p>
+                      <a:pPr algn="ctr"/>
+                      <a:r>
+                        <a:rPr sz="1000" b="0">
+                          <a:solidFill>
+                            <a:srgbClr val="C8C8C8"/>
+                          </a:solidFill>
+                        </a:rPr>
+                        <a:t>--</a:t>
+                      </a:r>
+                    </a:p>
+                  </a:txBody>
+                  <a:tcPr>
+                    <a:solidFill>
+                      <a:srgbClr val="F5F5F5"/>
+                    </a:solidFill>
+                  </a:tcPr>
+                </a:tc>
+              </a:tr>
+              <a:tr h="502920">
+                <a:tc>
+                  <a:txBody>
+                    <a:bodyPr/>
+                    <a:lstStyle/>
+                    <a:p>
+                      <a:pPr algn="l"/>
+                      <a:r>
+                        <a:rPr sz="1100" b="1">
+                          <a:solidFill>
+                            <a:srgbClr val="000000"/>
+                          </a:solidFill>
+                        </a:rPr>
+                        <a:t>Physionet-MI</a:t>
+                      </a:r>
+                    </a:p>
+                  </a:txBody>
+                  <a:tcPr>
+                    <a:solidFill>
+                      <a:srgbClr val="FFFFFF"/>
+                    </a:solidFill>
+                  </a:tcPr>
+                </a:tc>
+                <a:tc>
+                  <a:txBody>
+                    <a:bodyPr/>
+                    <a:lstStyle/>
+                    <a:p>
+                      <a:pPr algn="l"/>
+                      <a:r>
+                        <a:rPr sz="1000" b="0">
+                          <a:solidFill>
+                            <a:srgbClr val="000000"/>
+                          </a:solidFill>
+                        </a:rPr>
+                        <a:t>Motor Imagery</a:t>
+                      </a:r>
+                    </a:p>
+                  </a:txBody>
+                  <a:tcPr>
+                    <a:solidFill>
+                      <a:srgbClr val="F5F5F5"/>
+                    </a:solidFill>
+                  </a:tcPr>
+                </a:tc>
+                <a:tc>
+                  <a:txBody>
+                    <a:bodyPr/>
+                    <a:lstStyle/>
+                    <a:p>
+                      <a:pPr algn="ctr"/>
+                      <a:r>
+                        <a:rPr sz="1000" b="1">
+                          <a:solidFill>
+                            <a:srgbClr val="F1C40F"/>
+                          </a:solidFill>
+                        </a:rPr>
+                        <a:t>49.30% val</a:t>
+                      </a:r>
+                    </a:p>
+                  </a:txBody>
+                  <a:tcPr>
+                    <a:solidFill>
+                      <a:srgbClr val="FFFADC"/>
+                    </a:solidFill>
+                  </a:tcPr>
+                </a:tc>
+                <a:tc>
+                  <a:txBody>
+                    <a:bodyPr/>
+                    <a:lstStyle/>
+                    <a:p>
+                      <a:pPr algn="ctr"/>
+                      <a:r>
+                        <a:rPr sz="1000" b="0">
+                          <a:solidFill>
+                            <a:srgbClr val="C8C8C8"/>
+                          </a:solidFill>
+                        </a:rPr>
+                        <a:t>--</a:t>
+                      </a:r>
+                    </a:p>
+                  </a:txBody>
+                  <a:tcPr>
+                    <a:solidFill>
+                      <a:srgbClr val="F5F5F5"/>
+                    </a:solidFill>
+                  </a:tcPr>
+                </a:tc>
+                <a:tc>
+                  <a:txBody>
+                    <a:bodyPr/>
+                    <a:lstStyle/>
+                    <a:p>
+                      <a:pPr algn="ctr"/>
+                      <a:r>
+                        <a:rPr sz="1000" b="1">
+                          <a:solidFill>
+                            <a:srgbClr val="F1C40F"/>
+                          </a:solidFill>
+                        </a:rPr>
+                        <a:t>bAcc 0.618</a:t>
+                      </a:r>
+                    </a:p>
+                  </a:txBody>
+                  <a:tcPr>
+                    <a:solidFill>
+                      <a:srgbClr val="FFFADC"/>
+                    </a:solidFill>
+                  </a:tcPr>
+                </a:tc>
+              </a:tr>
+              <a:tr h="502920">
+                <a:tc>
+                  <a:txBody>
+                    <a:bodyPr/>
+                    <a:lstStyle/>
+                    <a:p>
+                      <a:pPr algn="l"/>
+                      <a:r>
+                        <a:rPr sz="1100" b="1">
+                          <a:solidFill>
+                            <a:srgbClr val="000000"/>
+                          </a:solidFill>
+                        </a:rPr>
+                        <a:t>FACED</a:t>
+                      </a:r>
+                    </a:p>
+                  </a:txBody>
+                  <a:tcPr>
+                    <a:solidFill>
+                      <a:srgbClr val="FFFFFF"/>
+                    </a:solidFill>
+                  </a:tcPr>
+                </a:tc>
+                <a:tc>
+                  <a:txBody>
+                    <a:bodyPr/>
+                    <a:lstStyle/>
+                    <a:p>
+                      <a:pPr algn="l"/>
+                      <a:r>
+                        <a:rPr sz="1000" b="0">
+                          <a:solidFill>
+                            <a:srgbClr val="000000"/>
+                          </a:solidFill>
+                        </a:rPr>
+                        <a:t>Emotion</a:t>
+                      </a:r>
+                    </a:p>
+                  </a:txBody>
+                  <a:tcPr>
+                    <a:solidFill>
+                      <a:srgbClr val="F5F5F5"/>
+                    </a:solidFill>
+                  </a:tcPr>
+                </a:tc>
+                <a:tc>
+                  <a:txBody>
+                    <a:bodyPr/>
+                    <a:lstStyle/>
+                    <a:p>
+                      <a:pPr algn="ctr"/>
+                      <a:r>
+                        <a:rPr sz="1000" b="0">
+                          <a:solidFill>
+                            <a:srgbClr val="C8C8C8"/>
+                          </a:solidFill>
+                        </a:rPr>
+                        <a:t>--</a:t>
+                      </a:r>
+                    </a:p>
+                  </a:txBody>
+                  <a:tcPr>
+                    <a:solidFill>
+                      <a:srgbClr val="F5F5F5"/>
+                    </a:solidFill>
+                  </a:tcPr>
+                </a:tc>
+                <a:tc>
+                  <a:txBody>
+                    <a:bodyPr/>
+                    <a:lstStyle/>
+                    <a:p>
+                      <a:pPr algn="ctr"/>
+                      <a:r>
+                        <a:rPr sz="1000" b="0">
+                          <a:solidFill>
+                            <a:srgbClr val="C8C8C8"/>
+                          </a:solidFill>
+                        </a:rPr>
+                        <a:t>--</a:t>
+                      </a:r>
+                    </a:p>
+                  </a:txBody>
+                  <a:tcPr>
+                    <a:solidFill>
+                      <a:srgbClr val="F5F5F5"/>
+                    </a:solidFill>
+                  </a:tcPr>
+                </a:tc>
+                <a:tc>
+                  <a:txBody>
+                    <a:bodyPr/>
+                    <a:lstStyle/>
+                    <a:p>
+                      <a:pPr algn="ctr"/>
+                      <a:r>
+                        <a:rPr sz="1000" b="1">
+                          <a:solidFill>
+                            <a:srgbClr val="F1C40F"/>
+                          </a:solidFill>
+                        </a:rPr>
+                        <a:t>bAcc 0.534</a:t>
+                      </a:r>
+                    </a:p>
+                  </a:txBody>
+                  <a:tcPr>
+                    <a:solidFill>
+                      <a:srgbClr val="FFFADC"/>
+                    </a:solidFill>
+                  </a:tcPr>
+                </a:tc>
+              </a:tr>
+              <a:tr h="502920">
+                <a:tc>
+                  <a:txBody>
+                    <a:bodyPr/>
+                    <a:lstStyle/>
+                    <a:p>
+                      <a:pPr algn="l"/>
+                      <a:r>
+                        <a:rPr sz="1100" b="1">
+                          <a:solidFill>
+                            <a:srgbClr val="000000"/>
+                          </a:solidFill>
+                        </a:rPr>
+                        <a:t>ISRUC-S1</a:t>
+                      </a:r>
+                    </a:p>
+                  </a:txBody>
+                  <a:tcPr>
+                    <a:solidFill>
+                      <a:srgbClr val="FFFFFF"/>
+                    </a:solidFill>
+                  </a:tcPr>
+                </a:tc>
+                <a:tc>
+                  <a:txBody>
+                    <a:bodyPr/>
+                    <a:lstStyle/>
+                    <a:p>
+                      <a:pPr algn="l"/>
+                      <a:r>
+                        <a:rPr sz="1000" b="0">
+                          <a:solidFill>
+                            <a:srgbClr val="000000"/>
+                          </a:solidFill>
+                        </a:rPr>
+                        <a:t>Sleep Staging</a:t>
+                      </a:r>
+                    </a:p>
+                  </a:txBody>
+                  <a:tcPr>
+                    <a:solidFill>
+                      <a:srgbClr val="F5F5F5"/>
+                    </a:solidFill>
+                  </a:tcPr>
+                </a:tc>
+                <a:tc>
+                  <a:txBody>
+                    <a:bodyPr/>
+                    <a:lstStyle/>
+                    <a:p>
+                      <a:pPr algn="ctr"/>
+                      <a:r>
+                        <a:rPr sz="1000" b="0">
+                          <a:solidFill>
+                            <a:srgbClr val="C8C8C8"/>
+                          </a:solidFill>
+                        </a:rPr>
+                        <a:t>--</a:t>
+                      </a:r>
+                    </a:p>
+                  </a:txBody>
+                  <a:tcPr>
+                    <a:solidFill>
+                      <a:srgbClr val="F5F5F5"/>
+                    </a:solidFill>
+                  </a:tcPr>
+                </a:tc>
+                <a:tc>
+                  <a:txBody>
+                    <a:bodyPr/>
+                    <a:lstStyle/>
+                    <a:p>
+                      <a:pPr algn="ctr"/>
+                      <a:r>
+                        <a:rPr sz="1000" b="0">
+                          <a:solidFill>
+                            <a:srgbClr val="C8C8C8"/>
+                          </a:solidFill>
+                        </a:rPr>
+                        <a:t>--</a:t>
+                      </a:r>
+                    </a:p>
+                  </a:txBody>
+                  <a:tcPr>
+                    <a:solidFill>
+                      <a:srgbClr val="F5F5F5"/>
+                    </a:solidFill>
+                  </a:tcPr>
+                </a:tc>
+                <a:tc>
+                  <a:txBody>
+                    <a:bodyPr/>
+                    <a:lstStyle/>
+                    <a:p>
+                      <a:pPr algn="ctr"/>
+                      <a:r>
+                        <a:rPr sz="1000" b="1">
+                          <a:solidFill>
+                            <a:srgbClr val="27AE60"/>
+                          </a:solidFill>
+                        </a:rPr>
+                        <a:t>bAcc 0.785</a:t>
+                      </a:r>
+                    </a:p>
+                  </a:txBody>
+                  <a:tcPr>
+                    <a:solidFill>
+                      <a:srgbClr val="DCFFE6"/>
+                    </a:solidFill>
+                  </a:tcPr>
+                </a:tc>
+              </a:tr>
+              <a:tr h="502920">
+                <a:tc>
+                  <a:txBody>
+                    <a:bodyPr/>
+                    <a:lstStyle/>
+                    <a:p>
+                      <a:pPr algn="l"/>
+                      <a:r>
+                        <a:rPr sz="1100" b="1">
+                          <a:solidFill>
+                            <a:srgbClr val="000000"/>
+                          </a:solidFill>
+                        </a:rPr>
+                        <a:t>SEED-V</a:t>
+                      </a:r>
+                    </a:p>
+                  </a:txBody>
+                  <a:tcPr>
+                    <a:solidFill>
+                      <a:srgbClr val="FFFFFF"/>
+                    </a:solidFill>
+                  </a:tcPr>
+                </a:tc>
+                <a:tc>
+                  <a:txBody>
+                    <a:bodyPr/>
+                    <a:lstStyle/>
+                    <a:p>
+                      <a:pPr algn="l"/>
+                      <a:r>
+                        <a:rPr sz="1000" b="0">
+                          <a:solidFill>
+                            <a:srgbClr val="000000"/>
+                          </a:solidFill>
+                        </a:rPr>
+                        <a:t>Emotion</a:t>
+                      </a:r>
+                    </a:p>
+                  </a:txBody>
+                  <a:tcPr>
+                    <a:solidFill>
+                      <a:srgbClr val="F5F5F5"/>
+                    </a:solidFill>
+                  </a:tcPr>
+                </a:tc>
+                <a:tc>
+                  <a:txBody>
+                    <a:bodyPr/>
+                    <a:lstStyle/>
+                    <a:p>
+                      <a:pPr algn="ctr"/>
+                      <a:r>
+                        <a:rPr sz="1000" b="0">
+                          <a:solidFill>
+                            <a:srgbClr val="C8C8C8"/>
+                          </a:solidFill>
+                        </a:rPr>
+                        <a:t>--</a:t>
+                      </a:r>
+                    </a:p>
+                  </a:txBody>
+                  <a:tcPr>
+                    <a:solidFill>
+                      <a:srgbClr val="F5F5F5"/>
+                    </a:solidFill>
+                  </a:tcPr>
+                </a:tc>
+                <a:tc>
+                  <a:txBody>
+                    <a:bodyPr/>
+                    <a:lstStyle/>
+                    <a:p>
+                      <a:pPr algn="ctr"/>
+                      <a:r>
+                        <a:rPr sz="1000" b="0">
+                          <a:solidFill>
+                            <a:srgbClr val="C8C8C8"/>
+                          </a:solidFill>
+                        </a:rPr>
+                        <a:t>--</a:t>
+                      </a:r>
+                    </a:p>
+                  </a:txBody>
+                  <a:tcPr>
+                    <a:solidFill>
+                      <a:srgbClr val="F5F5F5"/>
+                    </a:solidFill>
+                  </a:tcPr>
+                </a:tc>
+                <a:tc>
+                  <a:txBody>
+                    <a:bodyPr/>
+                    <a:lstStyle/>
+                    <a:p>
+                      <a:pPr algn="ctr"/>
+                      <a:r>
+                        <a:rPr sz="1000" b="1">
+                          <a:solidFill>
+                            <a:srgbClr val="F1C40F"/>
+                          </a:solidFill>
+                        </a:rPr>
+                        <a:t>bAcc 0.402</a:t>
+                      </a:r>
+                    </a:p>
+                  </a:txBody>
+                  <a:tcPr>
+                    <a:solidFill>
+                      <a:srgbClr val="FFFADC"/>
+                    </a:solidFill>
+                  </a:tcPr>
+                </a:tc>
+              </a:tr>
+              <a:tr h="502920">
+                <a:tc>
+                  <a:txBody>
+                    <a:bodyPr/>
+                    <a:lstStyle/>
+                    <a:p>
+                      <a:pPr algn="l"/>
+                      <a:r>
+                        <a:rPr sz="1100" b="1">
+                          <a:solidFill>
+                            <a:srgbClr val="000000"/>
+                          </a:solidFill>
+                        </a:rPr>
+                        <a:t>SHU-MI</a:t>
+                      </a:r>
+                    </a:p>
+                  </a:txBody>
+                  <a:tcPr>
+                    <a:solidFill>
+                      <a:srgbClr val="FFFFFF"/>
+                    </a:solidFill>
+                  </a:tcPr>
+                </a:tc>
+                <a:tc>
+                  <a:txBody>
+                    <a:bodyPr/>
+                    <a:lstStyle/>
+                    <a:p>
+                      <a:pPr algn="l"/>
+                      <a:r>
+                        <a:rPr sz="1000" b="0">
+                          <a:solidFill>
+                            <a:srgbClr val="000000"/>
+                          </a:solidFill>
+                        </a:rPr>
+                        <a:t>Motor Imagery</a:t>
+                      </a:r>
+                    </a:p>
+                  </a:txBody>
+                  <a:tcPr>
+                    <a:solidFill>
+                      <a:srgbClr val="F5F5F5"/>
+                    </a:solidFill>
+                  </a:tcPr>
+                </a:tc>
+                <a:tc>
+                  <a:txBody>
+                    <a:bodyPr/>
+                    <a:lstStyle/>
+                    <a:p>
+                      <a:pPr algn="ctr"/>
+                      <a:r>
+                        <a:rPr sz="1000" b="0">
+                          <a:solidFill>
+                            <a:srgbClr val="C8C8C8"/>
+                          </a:solidFill>
+                        </a:rPr>
+                        <a:t>--</a:t>
+                      </a:r>
+                    </a:p>
+                  </a:txBody>
+                  <a:tcPr>
+                    <a:solidFill>
+                      <a:srgbClr val="F5F5F5"/>
+                    </a:solidFill>
+                  </a:tcPr>
+                </a:tc>
+                <a:tc>
+                  <a:txBody>
+                    <a:bodyPr/>
+                    <a:lstStyle/>
+                    <a:p>
+                      <a:pPr algn="ctr"/>
+                      <a:r>
+                        <a:rPr sz="1000" b="0">
+                          <a:solidFill>
+                            <a:srgbClr val="C8C8C8"/>
+                          </a:solidFill>
+                        </a:rPr>
+                        <a:t>--</a:t>
+                      </a:r>
+                    </a:p>
+                  </a:txBody>
+                  <a:tcPr>
+                    <a:solidFill>
+                      <a:srgbClr val="F5F5F5"/>
+                    </a:solidFill>
+                  </a:tcPr>
+                </a:tc>
+                <a:tc>
+                  <a:txBody>
+                    <a:bodyPr/>
+                    <a:lstStyle/>
+                    <a:p>
+                      <a:pPr algn="ctr"/>
+                      <a:r>
+                        <a:rPr sz="1000" b="1">
+                          <a:solidFill>
+                            <a:srgbClr val="27AE60"/>
+                          </a:solidFill>
+                        </a:rPr>
+                        <a:t>bAcc 0.638</a:t>
+                      </a:r>
+                    </a:p>
+                  </a:txBody>
+                  <a:tcPr>
+                    <a:solidFill>
+                      <a:srgbClr val="DCFFE6"/>
+                    </a:solidFill>
+                  </a:tcPr>
+                </a:tc>
+              </a:tr>
+              <a:tr h="502920">
+                <a:tc>
+                  <a:txBody>
+                    <a:bodyPr/>
+                    <a:lstStyle/>
+                    <a:p>
+                      <a:pPr algn="l"/>
+                      <a:r>
+                        <a:rPr sz="1100" b="1">
+                          <a:solidFill>
+                            <a:srgbClr val="000000"/>
+                          </a:solidFill>
+                        </a:rPr>
+                        <a:t>MDD</a:t>
+                      </a:r>
+                    </a:p>
+                  </a:txBody>
+                  <a:tcPr>
+                    <a:solidFill>
+                      <a:srgbClr val="FFFFFF"/>
+                    </a:solidFill>
+                  </a:tcPr>
+                </a:tc>
+                <a:tc>
+                  <a:txBody>
+                    <a:bodyPr/>
+                    <a:lstStyle/>
+                    <a:p>
+                      <a:pPr algn="l"/>
+                      <a:r>
+                        <a:rPr sz="1000" b="0">
+                          <a:solidFill>
+                            <a:srgbClr val="000000"/>
+                          </a:solidFill>
+                        </a:rPr>
+                        <a:t>Clinical</a:t>
+                      </a:r>
+                    </a:p>
+                  </a:txBody>
+                  <a:tcPr>
+                    <a:solidFill>
+                      <a:srgbClr val="F5F5F5"/>
+                    </a:solidFill>
+                  </a:tcPr>
+                </a:tc>
+                <a:tc>
+                  <a:txBody>
+                    <a:bodyPr/>
+                    <a:lstStyle/>
+                    <a:p>
+                      <a:pPr algn="ctr"/>
+                      <a:r>
+                        <a:rPr sz="1000" b="0">
+                          <a:solidFill>
+                            <a:srgbClr val="C8C8C8"/>
+                          </a:solidFill>
+                        </a:rPr>
+                        <a:t>--</a:t>
+                      </a:r>
+                    </a:p>
+                  </a:txBody>
+                  <a:tcPr>
+                    <a:solidFill>
+                      <a:srgbClr val="F5F5F5"/>
+                    </a:solidFill>
+                  </a:tcPr>
+                </a:tc>
+                <a:tc>
+                  <a:txBody>
+                    <a:bodyPr/>
+                    <a:lstStyle/>
+                    <a:p>
+                      <a:pPr algn="ctr"/>
+                      <a:r>
+                        <a:rPr sz="1000" b="0">
+                          <a:solidFill>
+                            <a:srgbClr val="C8C8C8"/>
+                          </a:solidFill>
+                        </a:rPr>
+                        <a:t>--</a:t>
+                      </a:r>
+                    </a:p>
+                  </a:txBody>
+                  <a:tcPr>
+                    <a:solidFill>
+                      <a:srgbClr val="F5F5F5"/>
+                    </a:solidFill>
+                  </a:tcPr>
+                </a:tc>
+                <a:tc>
+                  <a:txBody>
+                    <a:bodyPr/>
+                    <a:lstStyle/>
+                    <a:p>
+                      <a:pPr algn="ctr"/>
+                      <a:r>
+                        <a:rPr sz="1000" b="1">
+                          <a:solidFill>
+                            <a:srgbClr val="27AE60"/>
+                          </a:solidFill>
+                        </a:rPr>
+                        <a:t>bAcc 0.967</a:t>
+                      </a:r>
+                    </a:p>
+                  </a:txBody>
+                  <a:tcPr>
+                    <a:solidFill>
+                      <a:srgbClr val="DCFFE6"/>
+                    </a:solidFill>
+                  </a:tcPr>
+                </a:tc>
+              </a:tr>
+              <a:tr h="502920">
+                <a:tc>
+                  <a:txBody>
+                    <a:bodyPr/>
+                    <a:lstStyle/>
+                    <a:p>
+                      <a:pPr algn="l"/>
+                      <a:r>
+                        <a:rPr sz="1100" b="1">
+                          <a:solidFill>
+                            <a:srgbClr val="000000"/>
+                          </a:solidFill>
+                        </a:rPr>
+                        <a:t>TUEV</a:t>
+                      </a:r>
+                    </a:p>
+                  </a:txBody>
+                  <a:tcPr>
+                    <a:solidFill>
+                      <a:srgbClr val="FFFFFF"/>
+                    </a:solidFill>
+                  </a:tcPr>
+                </a:tc>
+                <a:tc>
+                  <a:txBody>
+                    <a:bodyPr/>
+                    <a:lstStyle/>
+                    <a:p>
+                      <a:pPr algn="l"/>
+                      <a:r>
+                        <a:rPr sz="1000" b="0">
+                          <a:solidFill>
+                            <a:srgbClr val="000000"/>
+                          </a:solidFill>
+                        </a:rPr>
+                        <a:t>Pathology</a:t>
+                      </a:r>
+                    </a:p>
+                  </a:txBody>
+                  <a:tcPr>
+                    <a:solidFill>
+                      <a:srgbClr val="F5F5F5"/>
+                    </a:solidFill>
+                  </a:tcPr>
+                </a:tc>
+                <a:tc>
+                  <a:txBody>
+                    <a:bodyPr/>
+                    <a:lstStyle/>
+                    <a:p>
+                      <a:pPr algn="ctr"/>
+                      <a:r>
+                        <a:rPr sz="1000" b="0">
+                          <a:solidFill>
+                            <a:srgbClr val="C8C8C8"/>
+                          </a:solidFill>
+                        </a:rPr>
+                        <a:t>--</a:t>
+                      </a:r>
+                    </a:p>
+                  </a:txBody>
+                  <a:tcPr>
+                    <a:solidFill>
+                      <a:srgbClr val="F5F5F5"/>
+                    </a:solidFill>
+                  </a:tcPr>
+                </a:tc>
+                <a:tc>
+                  <a:txBody>
+                    <a:bodyPr/>
+                    <a:lstStyle/>
+                    <a:p>
+                      <a:pPr algn="ctr"/>
+                      <a:r>
+                        <a:rPr sz="1000" b="0">
+                          <a:solidFill>
+                            <a:srgbClr val="C8C8C8"/>
+                          </a:solidFill>
+                        </a:rPr>
+                        <a:t>--</a:t>
+                      </a:r>
+                    </a:p>
+                  </a:txBody>
+                  <a:tcPr>
+                    <a:solidFill>
+                      <a:srgbClr val="F5F5F5"/>
+                    </a:solidFill>
+                  </a:tcPr>
+                </a:tc>
+                <a:tc>
+                  <a:txBody>
+                    <a:bodyPr/>
+                    <a:lstStyle/>
+                    <a:p>
+                      <a:pPr algn="ctr"/>
+                      <a:r>
+                        <a:rPr sz="1000" b="1">
+                          <a:solidFill>
+                            <a:srgbClr val="E74C3C"/>
+                          </a:solidFill>
+                        </a:rPr>
+                        <a:t>k 0.634</a:t>
+                      </a:r>
+                    </a:p>
+                  </a:txBody>
+                  <a:tcPr>
+                    <a:solidFill>
+                      <a:srgbClr val="FFE6E6"/>
+                    </a:solidFill>
+                  </a:tcPr>
+                </a:tc>
+              </a:tr>
+            </a:tbl>
+          </a:graphicData>
+        </a:graphic>
+      </p:graphicFrame>
+      <p:sp>
+        <p:nvSpPr>
+          <p:cNvPr id="4" name="TextBox 3"/>
+          <p:cNvSpPr txBox="1"/>
+          <p:nvPr/>
+        </p:nvSpPr>
+        <p:spPr>
+          <a:xfrm>
+            <a:off x="457200" y="6583680"/>
+            <a:ext cx="15544800" cy="274320"/>
+          </a:xfrm>
+          <a:prstGeom prst="rect">
+            <a:avLst/>
+          </a:prstGeom>
+          <a:noFill/>
+        </p:spPr>
+        <p:txBody>
+          <a:bodyPr wrap="none">
+            <a:spAutoFit/>
+          </a:bodyPr>
+          <a:lstStyle/>
+          <a:p>
+            <a:r>
+              <a:rPr sz="1200" b="1"/>
+              <a:t>Legend:  </a:t>
+            </a:r>
+            <a:r>
+              <a:rPr sz="1100">
+                <a:solidFill>
+                  <a:srgbClr val="27AE60"/>
+                </a:solidFill>
+              </a:rPr>
+              <a:t>Green = On/above paper reference (reproduced)</a:t>
+            </a:r>
+            <a:r>
+              <a:rPr sz="1100">
+                <a:solidFill>
+                  <a:srgbClr val="B48200"/>
+                </a:solidFill>
+              </a:rPr>
+              <a:t>  |  Yellow = Close to paper reference</a:t>
+            </a:r>
+            <a:r>
+              <a:rPr sz="1100">
+                <a:solidFill>
+                  <a:srgbClr val="E74C3C"/>
+                </a:solidFill>
+              </a:rPr>
+              <a:t>  |  Red = Below paper reference</a:t>
+            </a:r>
+            <a:r>
+              <a:rPr sz="1100">
+                <a:solidFill>
+                  <a:srgbClr val="C8C8C8"/>
+                </a:solidFill>
+              </a:rPr>
+              <a:t>  |  Gray = No data</a:t>
+            </a:r>
+          </a:p>
+        </p:txBody>
+      </p:sp>
+      <p:graphicFrame>
+        <p:nvGraphicFramePr>
+          <p:cNvPr id="5" name="Table 4"/>
+          <p:cNvGraphicFramePr>
+            <a:graphicFrameLocks noGrp="1"/>
+          </p:cNvGraphicFramePr>
+          <p:nvPr/>
+        </p:nvGraphicFramePr>
+        <p:xfrm>
+          <a:off x="457200" y="7040880"/>
+          <a:ext cx="13350240" cy="1828800"/>
+        </p:xfrm>
+        <a:graphic>
+          <a:graphicData uri="http://schemas.openxmlformats.org/drawingml/2006/table">
+            <a:tbl>
+              <a:tblPr firstRow="1" bandRow="1">
+                <a:tableStyleId>{5C22544A-7EE6-4342-B048-85BDC9FD1C3A}</a:tableStyleId>
+              </a:tblPr>
+              <a:tblGrid>
+                <a:gridCol w="1828800"/>
+                <a:gridCol w="3840480"/>
+                <a:gridCol w="3840480"/>
+                <a:gridCol w="3840480"/>
+              </a:tblGrid>
+              <a:tr h="365760">
+                <a:tc>
+                  <a:txBody>
+                    <a:bodyPr/>
+                    <a:lstStyle/>
+                    <a:p>
+                      <a:pPr algn="ctr"/>
+                      <a:r>
+                        <a:rPr sz="1100" b="1">
+                          <a:solidFill>
+                            <a:srgbClr val="FFFFFF"/>
+                          </a:solidFill>
+                        </a:rPr>
+                        <a:t/>
+                      </a:r>
+                    </a:p>
+                  </a:txBody>
+                  <a:tcPr>
+                    <a:solidFill>
+                      <a:srgbClr val="3C3C3C"/>
+                    </a:solidFill>
+                  </a:tcPr>
+                </a:tc>
+                <a:tc>
+                  <a:txBody>
+                    <a:bodyPr/>
+                    <a:lstStyle/>
+                    <a:p>
+                      <a:pPr algn="ctr"/>
+                      <a:r>
+                        <a:rPr sz="1100" b="1">
+                          <a:solidFill>
+                            <a:srgbClr val="FFFFFF"/>
+                          </a:solidFill>
+                        </a:rPr>
+                        <a:t>EEGNet</a:t>
+                      </a:r>
+                    </a:p>
+                  </a:txBody>
+                  <a:tcPr>
+                    <a:solidFill>
+                      <a:srgbClr val="3C3C3C"/>
+                    </a:solidFill>
+                  </a:tcPr>
+                </a:tc>
+                <a:tc>
+                  <a:txBody>
+                    <a:bodyPr/>
+                    <a:lstStyle/>
+                    <a:p>
+                      <a:pPr algn="ctr"/>
+                      <a:r>
+                        <a:rPr sz="1100" b="1">
+                          <a:solidFill>
+                            <a:srgbClr val="FFFFFF"/>
+                          </a:solidFill>
+                        </a:rPr>
+                        <a:t>EEG Conformer</a:t>
+                      </a:r>
+                    </a:p>
+                  </a:txBody>
+                  <a:tcPr>
+                    <a:solidFill>
+                      <a:srgbClr val="3C3C3C"/>
+                    </a:solidFill>
+                  </a:tcPr>
+                </a:tc>
+                <a:tc>
+                  <a:txBody>
+                    <a:bodyPr/>
+                    <a:lstStyle/>
+                    <a:p>
+                      <a:pPr algn="ctr"/>
+                      <a:r>
+                        <a:rPr sz="1100" b="1">
+                          <a:solidFill>
+                            <a:srgbClr val="FFFFFF"/>
+                          </a:solidFill>
+                        </a:rPr>
+                        <a:t>CBraMod</a:t>
+                      </a:r>
+                    </a:p>
+                  </a:txBody>
+                  <a:tcPr>
+                    <a:solidFill>
+                      <a:srgbClr val="3C3C3C"/>
+                    </a:solidFill>
+                  </a:tcPr>
+                </a:tc>
+              </a:tr>
+              <a:tr h="365760">
+                <a:tc>
+                  <a:txBody>
+                    <a:bodyPr/>
+                    <a:lstStyle/>
+                    <a:p>
+                      <a:pPr algn="l"/>
+                      <a:r>
+                        <a:rPr sz="1100" b="1">
+                          <a:solidFill>
+                            <a:srgbClr val="27AE60"/>
+                          </a:solidFill>
+                        </a:rPr>
+                        <a:t>Green (reproduced)</a:t>
+                      </a:r>
+                    </a:p>
+                  </a:txBody>
+                  <a:tcPr>
+                    <a:solidFill>
+                      <a:srgbClr val="FFFFFF"/>
+                    </a:solidFill>
+                  </a:tcPr>
+                </a:tc>
+                <a:tc>
+                  <a:txBody>
+                    <a:bodyPr/>
+                    <a:lstStyle/>
+                    <a:p>
+                      <a:pPr algn="ctr"/>
+                      <a:r>
+                        <a:rPr sz="1200" b="1">
+                          <a:solidFill>
+                            <a:srgbClr val="27AE60"/>
+                          </a:solidFill>
+                        </a:rPr>
+                        <a:t>2</a:t>
+                      </a:r>
+                    </a:p>
+                  </a:txBody>
+                  <a:tcPr>
+                    <a:solidFill>
+                      <a:srgbClr val="DCFFE6"/>
+                    </a:solidFill>
+                  </a:tcPr>
+                </a:tc>
+                <a:tc>
+                  <a:txBody>
+                    <a:bodyPr/>
+                    <a:lstStyle/>
+                    <a:p>
+                      <a:pPr algn="ctr"/>
+                      <a:r>
+                        <a:rPr sz="1200" b="1">
+                          <a:solidFill>
+                            <a:srgbClr val="27AE60"/>
+                          </a:solidFill>
+                        </a:rPr>
+                        <a:t>1</a:t>
+                      </a:r>
+                    </a:p>
+                  </a:txBody>
+                  <a:tcPr>
+                    <a:solidFill>
+                      <a:srgbClr val="DCFFE6"/>
+                    </a:solidFill>
+                  </a:tcPr>
+                </a:tc>
+                <a:tc>
+                  <a:txBody>
+                    <a:bodyPr/>
+                    <a:lstStyle/>
+                    <a:p>
+                      <a:pPr algn="ctr"/>
+                      <a:r>
+                        <a:rPr sz="1200" b="1">
+                          <a:solidFill>
+                            <a:srgbClr val="27AE60"/>
+                          </a:solidFill>
+                        </a:rPr>
+                        <a:t>4</a:t>
+                      </a:r>
+                    </a:p>
+                  </a:txBody>
+                  <a:tcPr>
+                    <a:solidFill>
+                      <a:srgbClr val="DCFFE6"/>
+                    </a:solidFill>
+                  </a:tcPr>
+                </a:tc>
+              </a:tr>
+              <a:tr h="365760">
+                <a:tc>
+                  <a:txBody>
+                    <a:bodyPr/>
+                    <a:lstStyle/>
+                    <a:p>
+                      <a:pPr algn="l"/>
+                      <a:r>
+                        <a:rPr sz="1100" b="1">
+                          <a:solidFill>
+                            <a:srgbClr val="B48200"/>
+                          </a:solidFill>
+                        </a:rPr>
+                        <a:t>Yellow (close)</a:t>
+                      </a:r>
+                    </a:p>
+                  </a:txBody>
+                  <a:tcPr>
+                    <a:solidFill>
+                      <a:srgbClr val="FFFFFF"/>
+                    </a:solidFill>
+                  </a:tcPr>
+                </a:tc>
+                <a:tc>
+                  <a:txBody>
+                    <a:bodyPr/>
+                    <a:lstStyle/>
+                    <a:p>
+                      <a:pPr algn="ctr"/>
+                      <a:r>
+                        <a:rPr sz="1200" b="1">
+                          <a:solidFill>
+                            <a:srgbClr val="B48200"/>
+                          </a:solidFill>
+                        </a:rPr>
+                        <a:t>2</a:t>
+                      </a:r>
+                    </a:p>
+                  </a:txBody>
+                  <a:tcPr>
+                    <a:solidFill>
+                      <a:srgbClr val="FFFADC"/>
+                    </a:solidFill>
+                  </a:tcPr>
+                </a:tc>
+                <a:tc>
+                  <a:txBody>
+                    <a:bodyPr/>
+                    <a:lstStyle/>
+                    <a:p>
+                      <a:pPr algn="ctr"/>
+                      <a:r>
+                        <a:rPr sz="1200" b="0">
+                          <a:solidFill>
+                            <a:srgbClr val="B48200"/>
+                          </a:solidFill>
+                        </a:rPr>
+                        <a:t>0</a:t>
+                      </a:r>
+                    </a:p>
+                  </a:txBody>
+                  <a:tcPr>
+                    <a:solidFill>
+                      <a:srgbClr val="FFFADC"/>
+                    </a:solidFill>
+                  </a:tcPr>
+                </a:tc>
+                <a:tc>
+                  <a:txBody>
+                    <a:bodyPr/>
+                    <a:lstStyle/>
+                    <a:p>
+                      <a:pPr algn="ctr"/>
+                      <a:r>
+                        <a:rPr sz="1200" b="1">
+                          <a:solidFill>
+                            <a:srgbClr val="B48200"/>
+                          </a:solidFill>
+                        </a:rPr>
+                        <a:t>3</a:t>
+                      </a:r>
+                    </a:p>
+                  </a:txBody>
+                  <a:tcPr>
+                    <a:solidFill>
+                      <a:srgbClr val="FFFADC"/>
+                    </a:solidFill>
+                  </a:tcPr>
+                </a:tc>
+              </a:tr>
+              <a:tr h="365760">
+                <a:tc>
+                  <a:txBody>
+                    <a:bodyPr/>
+                    <a:lstStyle/>
+                    <a:p>
+                      <a:pPr algn="l"/>
+                      <a:r>
+                        <a:rPr sz="1100" b="1">
+                          <a:solidFill>
+                            <a:srgbClr val="E74C3C"/>
+                          </a:solidFill>
+                        </a:rPr>
+                        <a:t>Red (below)</a:t>
+                      </a:r>
+                    </a:p>
+                  </a:txBody>
+                  <a:tcPr>
+                    <a:solidFill>
+                      <a:srgbClr val="FFFFFF"/>
+                    </a:solidFill>
+                  </a:tcPr>
+                </a:tc>
+                <a:tc>
+                  <a:txBody>
+                    <a:bodyPr/>
+                    <a:lstStyle/>
+                    <a:p>
+                      <a:pPr algn="ctr"/>
+                      <a:r>
+                        <a:rPr sz="1200" b="0">
+                          <a:solidFill>
+                            <a:srgbClr val="E74C3C"/>
+                          </a:solidFill>
+                        </a:rPr>
+                        <a:t>0</a:t>
+                      </a:r>
+                    </a:p>
+                  </a:txBody>
+                  <a:tcPr>
+                    <a:solidFill>
+                      <a:srgbClr val="FFE6E6"/>
+                    </a:solidFill>
+                  </a:tcPr>
+                </a:tc>
+                <a:tc>
+                  <a:txBody>
+                    <a:bodyPr/>
+                    <a:lstStyle/>
+                    <a:p>
+                      <a:pPr algn="ctr"/>
+                      <a:r>
+                        <a:rPr sz="1200" b="0">
+                          <a:solidFill>
+                            <a:srgbClr val="E74C3C"/>
+                          </a:solidFill>
+                        </a:rPr>
+                        <a:t>0</a:t>
+                      </a:r>
+                    </a:p>
+                  </a:txBody>
+                  <a:tcPr>
+                    <a:solidFill>
+                      <a:srgbClr val="FFE6E6"/>
+                    </a:solidFill>
+                  </a:tcPr>
+                </a:tc>
+                <a:tc>
+                  <a:txBody>
+                    <a:bodyPr/>
+                    <a:lstStyle/>
+                    <a:p>
+                      <a:pPr algn="ctr"/>
+                      <a:r>
+                        <a:rPr sz="1200" b="1">
+                          <a:solidFill>
+                            <a:srgbClr val="E74C3C"/>
+                          </a:solidFill>
+                        </a:rPr>
+                        <a:t>1</a:t>
+                      </a:r>
+                    </a:p>
+                  </a:txBody>
+                  <a:tcPr>
+                    <a:solidFill>
+                      <a:srgbClr val="FFE6E6"/>
+                    </a:solidFill>
+                  </a:tcPr>
+                </a:tc>
+              </a:tr>
+              <a:tr h="365760">
+                <a:tc>
+                  <a:txBody>
+                    <a:bodyPr/>
+                    <a:lstStyle/>
+                    <a:p>
+                      <a:pPr algn="l"/>
+                      <a:r>
+                        <a:rPr sz="1100" b="1">
+                          <a:solidFill>
+                            <a:srgbClr val="C8C8C8"/>
+                          </a:solidFill>
+                        </a:rPr>
+                        <a:t>No data</a:t>
+                      </a:r>
+                    </a:p>
+                  </a:txBody>
+                  <a:tcPr>
+                    <a:solidFill>
+                      <a:srgbClr val="FFFFFF"/>
+                    </a:solidFill>
+                  </a:tcPr>
+                </a:tc>
+                <a:tc>
+                  <a:txBody>
+                    <a:bodyPr/>
+                    <a:lstStyle/>
+                    <a:p>
+                      <a:pPr algn="ctr"/>
+                      <a:r>
+                        <a:rPr sz="1200" b="0">
+                          <a:solidFill>
+                            <a:srgbClr val="C8C8C8"/>
+                          </a:solidFill>
+                        </a:rPr>
+                        <a:t>0</a:t>
+                      </a:r>
+                    </a:p>
+                  </a:txBody>
+                  <a:tcPr>
+                    <a:solidFill>
+                      <a:srgbClr val="F5F5F5"/>
+                    </a:solidFill>
+                  </a:tcPr>
+                </a:tc>
+                <a:tc>
+                  <a:txBody>
+                    <a:bodyPr/>
+                    <a:lstStyle/>
+                    <a:p>
+                      <a:pPr algn="ctr"/>
+                      <a:r>
+                        <a:rPr sz="1200" b="1">
+                          <a:solidFill>
+                            <a:srgbClr val="C8C8C8"/>
+                          </a:solidFill>
+                        </a:rPr>
+                        <a:t>3</a:t>
+                      </a:r>
+                    </a:p>
+                  </a:txBody>
+                  <a:tcPr>
+                    <a:solidFill>
+                      <a:srgbClr val="F5F5F5"/>
+                    </a:solidFill>
+                  </a:tcPr>
+                </a:tc>
+                <a:tc>
+                  <a:txBody>
+                    <a:bodyPr/>
+                    <a:lstStyle/>
+                    <a:p>
+                      <a:pPr algn="ctr"/>
+                      <a:r>
+                        <a:rPr sz="1200" b="1">
+                          <a:solidFill>
+                            <a:srgbClr val="C8C8C8"/>
+                          </a:solidFill>
+                        </a:rPr>
+                        <a:t>2</a:t>
+                      </a:r>
+                    </a:p>
+                  </a:txBody>
+                  <a:tcPr>
+                    <a:solidFill>
+                      <a:srgbClr val="F5F5F5"/>
+                    </a:solidFill>
+                  </a:tcPr>
+                </a:tc>
+              </a:tr>
+            </a:tbl>
+          </a:graphicData>
+        </a:graphic>
+      </p:graphicFrame>
     </p:spTree>
   </p:cSld>
   <p:clrMapOvr>

--- a/references/tables_v10.pptx
+++ b/references/tables_v10.pptx
@@ -8441,46 +8441,17 @@
         <p:nvPr/>
       </p:nvGrpSpPr>
       <p:grpSpPr/>
-      <p:sp>
-        <p:nvSpPr>
-          <p:cNvPr id="2" name="TextBox 1"/>
-          <p:cNvSpPr txBox="1"/>
-          <p:nvPr/>
-        </p:nvSpPr>
-        <p:spPr>
-          <a:xfrm>
-            <a:off x="457200" y="137160"/>
-            <a:ext cx="16459200" cy="457200"/>
-          </a:xfrm>
-          <a:prstGeom prst="rect">
-            <a:avLst/>
-          </a:prstGeom>
-          <a:noFill/>
-        </p:spPr>
-        <p:txBody>
-          <a:bodyPr wrap="none">
-            <a:spAutoFit/>
-          </a:bodyPr>
-          <a:lstStyle/>
-          <a:p>
-            <a:r>
-              <a:rPr sz="2200" b="1"/>
-              <a:t>Table 7: Cross-Model Reproduction Traffic-Light Grid</a:t>
-            </a:r>
-          </a:p>
-        </p:txBody>
-      </p:sp>
       <p:graphicFrame>
         <p:nvGraphicFramePr>
-          <p:cNvPr id="3" name="Table 2"/>
+          <p:cNvPr id="2" name="Table 1"/>
           <p:cNvGraphicFramePr>
             <a:graphicFrameLocks noGrp="1"/>
           </p:cNvGraphicFramePr>
           <p:nvPr/>
         </p:nvGraphicFramePr>
         <p:xfrm>
-          <a:off x="457200" y="777240"/>
-          <a:ext cx="14996160" cy="5532120"/>
+          <a:off x="274320" y="777240"/>
+          <a:ext cx="16459200" cy="8229600"/>
         </p:xfrm>
         <a:graphic>
           <a:graphicData uri="http://schemas.openxmlformats.org/drawingml/2006/table">
@@ -8489,21 +8460,21 @@
                 <a:tableStyleId>{5C22544A-7EE6-4342-B048-85BDC9FD1C3A}</a:tableStyleId>
               </a:tblPr>
               <a:tblGrid>
-                <a:gridCol w="1828800"/>
-                <a:gridCol w="1645920"/>
-                <a:gridCol w="3840480"/>
-                <a:gridCol w="3840480"/>
-                <a:gridCol w="3840480"/>
+                <a:gridCol w="1463040"/>
+                <a:gridCol w="1280160"/>
+                <a:gridCol w="4572000"/>
+                <a:gridCol w="4572000"/>
+                <a:gridCol w="4572000"/>
               </a:tblGrid>
-              <a:tr h="502920">
-                <a:tc>
-                  <a:txBody>
-                    <a:bodyPr/>
-                    <a:lstStyle/>
-                    <a:p>
-                      <a:pPr algn="ctr"/>
-                      <a:r>
-                        <a:rPr sz="1200" b="1">
+              <a:tr h="685800">
+                <a:tc>
+                  <a:txBody>
+                    <a:bodyPr/>
+                    <a:lstStyle/>
+                    <a:p>
+                      <a:pPr algn="ctr"/>
+                      <a:r>
+                        <a:rPr sz="1100" b="1">
                           <a:solidFill>
                             <a:srgbClr val="FFFFFF"/>
                           </a:solidFill>
@@ -8525,12 +8496,12 @@
                     <a:p>
                       <a:pPr algn="ctr"/>
                       <a:r>
-                        <a:rPr sz="1200" b="1">
+                        <a:rPr sz="1100" b="1">
                           <a:solidFill>
                             <a:srgbClr val="FFFFFF"/>
                           </a:solidFill>
                         </a:rPr>
-                        <a:t>Task</a:t>
+                        <a:t>Task / Type</a:t>
                       </a:r>
                     </a:p>
                   </a:txBody>
@@ -8547,12 +8518,13 @@
                     <a:p>
                       <a:pPr algn="ctr"/>
                       <a:r>
-                        <a:rPr sz="1200" b="1">
+                        <a:rPr sz="1100" b="1">
                           <a:solidFill>
                             <a:srgbClr val="FFFFFF"/>
                           </a:solidFill>
                         </a:rPr>
-                        <a:t>EEGNet</a:t>
+                        <a:t>EEGNet
+(Paper Ref. vs Our Repro.)</a:t>
                       </a:r>
                     </a:p>
                   </a:txBody>
@@ -8569,12 +8541,13 @@
                     <a:p>
                       <a:pPr algn="ctr"/>
                       <a:r>
-                        <a:rPr sz="1200" b="1">
+                        <a:rPr sz="1100" b="1">
                           <a:solidFill>
                             <a:srgbClr val="FFFFFF"/>
                           </a:solidFill>
                         </a:rPr>
-                        <a:t>EEG Conformer</a:t>
+                        <a:t>EEG Conformer
+(Paper Ref. vs Our Repro.)</a:t>
                       </a:r>
                     </a:p>
                   </a:txBody>
@@ -8591,12 +8564,13 @@
                     <a:p>
                       <a:pPr algn="ctr"/>
                       <a:r>
-                        <a:rPr sz="1200" b="1">
+                        <a:rPr sz="1100" b="1">
                           <a:solidFill>
                             <a:srgbClr val="FFFFFF"/>
                           </a:solidFill>
                         </a:rPr>
-                        <a:t>CBraMod</a:t>
+                        <a:t>CBraMod
+(Paper Ref. vs Our Repro.)</a:t>
                       </a:r>
                     </a:p>
                   </a:txBody>
@@ -8607,7 +8581,7 @@
                   </a:tcPr>
                 </a:tc>
               </a:tr>
-              <a:tr h="502920">
+              <a:tr h="685800">
                 <a:tc>
                   <a:txBody>
                     <a:bodyPr/>
@@ -8642,7 +8616,7 @@
                             <a:srgbClr val="000000"/>
                           </a:solidFill>
                         </a:rPr>
-                        <a:t>Motor Imagery</a:t>
+                        <a:t>MI (4-class)</a:t>
                       </a:r>
                     </a:p>
                   </a:txBody>
@@ -8657,14 +8631,1167 @@
                     <a:bodyPr/>
                     <a:lstStyle/>
                     <a:p>
+                      <a:pPr algn="l"/>
+                      <a:r>
+                        <a:rPr sz="900" b="0">
+                          <a:solidFill>
+                            <a:srgbClr val="B48200"/>
+                          </a:solidFill>
+                        </a:rPr>
+                        <a:t>Ref: ~68% within-subj
+Ours: val 79.17% (no test)</a:t>
+                      </a:r>
+                    </a:p>
+                  </a:txBody>
+                  <a:tcPr>
+                    <a:solidFill>
+                      <a:srgbClr val="FFFADC"/>
+                    </a:solidFill>
+                  </a:tcPr>
+                </a:tc>
+                <a:tc>
+                  <a:txBody>
+                    <a:bodyPr/>
+                    <a:lstStyle/>
+                    <a:p>
+                      <a:pPr algn="l"/>
+                      <a:r>
+                        <a:rPr sz="900" b="1">
+                          <a:solidFill>
+                            <a:srgbClr val="145A32"/>
+                          </a:solidFill>
+                        </a:rPr>
+                        <a:t>Ref: 78.66% avg, k=0.72
+Ours: 78.66% (exact match!)</a:t>
+                      </a:r>
+                    </a:p>
+                  </a:txBody>
+                  <a:tcPr>
+                    <a:solidFill>
+                      <a:srgbClr val="DCFFE6"/>
+                    </a:solidFill>
+                  </a:tcPr>
+                </a:tc>
+                <a:tc>
+                  <a:txBody>
+                    <a:bodyPr/>
+                    <a:lstStyle/>
+                    <a:p>
+                      <a:pPr algn="l"/>
+                      <a:r>
+                        <a:rPr sz="900" b="1">
+                          <a:solidFill>
+                            <a:srgbClr val="145A32"/>
+                          </a:solidFill>
+                        </a:rPr>
+                        <a:t>Ref: k 0.5138
+Ours: k 0.5612</a:t>
+                      </a:r>
+                    </a:p>
+                  </a:txBody>
+                  <a:tcPr>
+                    <a:solidFill>
+                      <a:srgbClr val="DCFFE6"/>
+                    </a:solidFill>
+                  </a:tcPr>
+                </a:tc>
+              </a:tr>
+              <a:tr h="685800">
+                <a:tc>
+                  <a:txBody>
+                    <a:bodyPr/>
+                    <a:lstStyle/>
+                    <a:p>
+                      <a:pPr algn="l"/>
+                      <a:r>
+                        <a:rPr sz="1100" b="1">
+                          <a:solidFill>
+                            <a:srgbClr val="000000"/>
+                          </a:solidFill>
+                        </a:rPr>
+                        <a:t>BCICIV2B</a:t>
+                      </a:r>
+                    </a:p>
+                  </a:txBody>
+                  <a:tcPr>
+                    <a:solidFill>
+                      <a:srgbClr val="FFFFFF"/>
+                    </a:solidFill>
+                  </a:tcPr>
+                </a:tc>
+                <a:tc>
+                  <a:txBody>
+                    <a:bodyPr/>
+                    <a:lstStyle/>
+                    <a:p>
+                      <a:pPr algn="l"/>
+                      <a:r>
+                        <a:rPr sz="1000" b="0">
+                          <a:solidFill>
+                            <a:srgbClr val="000000"/>
+                          </a:solidFill>
+                        </a:rPr>
+                        <a:t>MI (2-class)</a:t>
+                      </a:r>
+                    </a:p>
+                  </a:txBody>
+                  <a:tcPr>
+                    <a:solidFill>
+                      <a:srgbClr val="F5F5F5"/>
+                    </a:solidFill>
+                  </a:tcPr>
+                </a:tc>
+                <a:tc>
+                  <a:txBody>
+                    <a:bodyPr/>
+                    <a:lstStyle/>
+                    <a:p>
+                      <a:pPr algn="l"/>
+                      <a:r>
+                        <a:rPr sz="900" b="0">
+                          <a:solidFill>
+                            <a:srgbClr val="B48200"/>
+                          </a:solidFill>
+                        </a:rPr>
+                        <a:t>Ref: ~80% test, k~0.60
+Ours: test 78.35%, k=0.57</a:t>
+                      </a:r>
+                    </a:p>
+                  </a:txBody>
+                  <a:tcPr>
+                    <a:solidFill>
+                      <a:srgbClr val="FFFADC"/>
+                    </a:solidFill>
+                  </a:tcPr>
+                </a:tc>
+                <a:tc>
+                  <a:txBody>
+                    <a:bodyPr/>
+                    <a:lstStyle/>
+                    <a:p>
+                      <a:pPr algn="l"/>
+                      <a:r>
+                        <a:rPr sz="900" b="0">
+                          <a:solidFill>
+                            <a:srgbClr val="C8C8C8"/>
+                          </a:solidFill>
+                        </a:rPr>
+                        <a:t>No data</a:t>
+                      </a:r>
+                    </a:p>
+                  </a:txBody>
+                  <a:tcPr>
+                    <a:solidFill>
+                      <a:srgbClr val="F5F5F5"/>
+                    </a:solidFill>
+                  </a:tcPr>
+                </a:tc>
+                <a:tc>
+                  <a:txBody>
+                    <a:bodyPr/>
+                    <a:lstStyle/>
+                    <a:p>
+                      <a:pPr algn="l"/>
+                      <a:r>
+                        <a:rPr sz="900" b="0">
+                          <a:solidFill>
+                            <a:srgbClr val="C8C8C8"/>
+                          </a:solidFill>
+                        </a:rPr>
+                        <a:t>No data</a:t>
+                      </a:r>
+                    </a:p>
+                  </a:txBody>
+                  <a:tcPr>
+                    <a:solidFill>
+                      <a:srgbClr val="F5F5F5"/>
+                    </a:solidFill>
+                  </a:tcPr>
+                </a:tc>
+              </a:tr>
+              <a:tr h="685800">
+                <a:tc>
+                  <a:txBody>
+                    <a:bodyPr/>
+                    <a:lstStyle/>
+                    <a:p>
+                      <a:pPr algn="l"/>
+                      <a:r>
+                        <a:rPr sz="1100" b="1">
+                          <a:solidFill>
+                            <a:srgbClr val="000000"/>
+                          </a:solidFill>
+                        </a:rPr>
+                        <a:t>IIIa</a:t>
+                      </a:r>
+                    </a:p>
+                  </a:txBody>
+                  <a:tcPr>
+                    <a:solidFill>
+                      <a:srgbClr val="FFFFFF"/>
+                    </a:solidFill>
+                  </a:tcPr>
+                </a:tc>
+                <a:tc>
+                  <a:txBody>
+                    <a:bodyPr/>
+                    <a:lstStyle/>
+                    <a:p>
+                      <a:pPr algn="l"/>
+                      <a:r>
+                        <a:rPr sz="1000" b="0">
+                          <a:solidFill>
+                            <a:srgbClr val="000000"/>
+                          </a:solidFill>
+                        </a:rPr>
+                        <a:t>MI (4-class)</a:t>
+                      </a:r>
+                    </a:p>
+                  </a:txBody>
+                  <a:tcPr>
+                    <a:solidFill>
+                      <a:srgbClr val="F5F5F5"/>
+                    </a:solidFill>
+                  </a:tcPr>
+                </a:tc>
+                <a:tc>
+                  <a:txBody>
+                    <a:bodyPr/>
+                    <a:lstStyle/>
+                    <a:p>
+                      <a:pPr algn="l"/>
+                      <a:r>
+                        <a:rPr sz="900" b="0">
+                          <a:solidFill>
+                            <a:srgbClr val="C8C8C8"/>
+                          </a:solidFill>
+                        </a:rPr>
+                        <a:t>No data</a:t>
+                      </a:r>
+                    </a:p>
+                  </a:txBody>
+                  <a:tcPr>
+                    <a:solidFill>
+                      <a:srgbClr val="F5F5F5"/>
+                    </a:solidFill>
+                  </a:tcPr>
+                </a:tc>
+                <a:tc>
+                  <a:txBody>
+                    <a:bodyPr/>
+                    <a:lstStyle/>
+                    <a:p>
+                      <a:pPr algn="l"/>
+                      <a:r>
+                        <a:rPr sz="900" b="0">
+                          <a:solidFill>
+                            <a:srgbClr val="C8C8C8"/>
+                          </a:solidFill>
+                        </a:rPr>
+                        <a:t>No data</a:t>
+                      </a:r>
+                    </a:p>
+                  </a:txBody>
+                  <a:tcPr>
+                    <a:solidFill>
+                      <a:srgbClr val="F5F5F5"/>
+                    </a:solidFill>
+                  </a:tcPr>
+                </a:tc>
+                <a:tc>
+                  <a:txBody>
+                    <a:bodyPr/>
+                    <a:lstStyle/>
+                    <a:p>
+                      <a:pPr algn="l"/>
+                      <a:r>
+                        <a:rPr sz="900" b="0">
+                          <a:solidFill>
+                            <a:srgbClr val="C8C8C8"/>
+                          </a:solidFill>
+                        </a:rPr>
+                        <a:t>No data</a:t>
+                      </a:r>
+                    </a:p>
+                  </a:txBody>
+                  <a:tcPr>
+                    <a:solidFill>
+                      <a:srgbClr val="F5F5F5"/>
+                    </a:solidFill>
+                  </a:tcPr>
+                </a:tc>
+              </a:tr>
+              <a:tr h="685800">
+                <a:tc>
+                  <a:txBody>
+                    <a:bodyPr/>
+                    <a:lstStyle/>
+                    <a:p>
+                      <a:pPr algn="l"/>
+                      <a:r>
+                        <a:rPr sz="1100" b="1">
+                          <a:solidFill>
+                            <a:srgbClr val="000000"/>
+                          </a:solidFill>
+                        </a:rPr>
+                        <a:t>Physionet-MI</a:t>
+                      </a:r>
+                    </a:p>
+                  </a:txBody>
+                  <a:tcPr>
+                    <a:solidFill>
+                      <a:srgbClr val="FFFFFF"/>
+                    </a:solidFill>
+                  </a:tcPr>
+                </a:tc>
+                <a:tc>
+                  <a:txBody>
+                    <a:bodyPr/>
+                    <a:lstStyle/>
+                    <a:p>
+                      <a:pPr algn="l"/>
+                      <a:r>
+                        <a:rPr sz="1000" b="0">
+                          <a:solidFill>
+                            <a:srgbClr val="000000"/>
+                          </a:solidFill>
+                        </a:rPr>
+                        <a:t>MI (4-class)</a:t>
+                      </a:r>
+                    </a:p>
+                  </a:txBody>
+                  <a:tcPr>
+                    <a:solidFill>
+                      <a:srgbClr val="F5F5F5"/>
+                    </a:solidFill>
+                  </a:tcPr>
+                </a:tc>
+                <a:tc>
+                  <a:txBody>
+                    <a:bodyPr/>
+                    <a:lstStyle/>
+                    <a:p>
+                      <a:pPr algn="l"/>
+                      <a:r>
+                        <a:rPr sz="900" b="0">
+                          <a:solidFill>
+                            <a:srgbClr val="C8C8C8"/>
+                          </a:solidFill>
+                        </a:rPr>
+                        <a:t>No data</a:t>
+                      </a:r>
+                    </a:p>
+                  </a:txBody>
+                  <a:tcPr>
+                    <a:solidFill>
+                      <a:srgbClr val="F5F5F5"/>
+                    </a:solidFill>
+                  </a:tcPr>
+                </a:tc>
+                <a:tc>
+                  <a:txBody>
+                    <a:bodyPr/>
+                    <a:lstStyle/>
+                    <a:p>
+                      <a:pPr algn="l"/>
+                      <a:r>
+                        <a:rPr sz="900" b="0">
+                          <a:solidFill>
+                            <a:srgbClr val="C8C8C8"/>
+                          </a:solidFill>
+                        </a:rPr>
+                        <a:t>No data</a:t>
+                      </a:r>
+                    </a:p>
+                  </a:txBody>
+                  <a:tcPr>
+                    <a:solidFill>
+                      <a:srgbClr val="F5F5F5"/>
+                    </a:solidFill>
+                  </a:tcPr>
+                </a:tc>
+                <a:tc>
+                  <a:txBody>
+                    <a:bodyPr/>
+                    <a:lstStyle/>
+                    <a:p>
+                      <a:pPr algn="l"/>
+                      <a:r>
+                        <a:rPr sz="900" b="0">
+                          <a:solidFill>
+                            <a:srgbClr val="B48200"/>
+                          </a:solidFill>
+                        </a:rPr>
+                        <a:t>Ref: bAcc 0.6417
+Ours: bAcc 0.6181</a:t>
+                      </a:r>
+                    </a:p>
+                  </a:txBody>
+                  <a:tcPr>
+                    <a:solidFill>
+                      <a:srgbClr val="FFFADC"/>
+                    </a:solidFill>
+                  </a:tcPr>
+                </a:tc>
+              </a:tr>
+              <a:tr h="685800">
+                <a:tc>
+                  <a:txBody>
+                    <a:bodyPr/>
+                    <a:lstStyle/>
+                    <a:p>
+                      <a:pPr algn="l"/>
+                      <a:r>
+                        <a:rPr sz="1100" b="1">
+                          <a:solidFill>
+                            <a:srgbClr val="000000"/>
+                          </a:solidFill>
+                        </a:rPr>
+                        <a:t>FACED</a:t>
+                      </a:r>
+                    </a:p>
+                  </a:txBody>
+                  <a:tcPr>
+                    <a:solidFill>
+                      <a:srgbClr val="FFFFFF"/>
+                    </a:solidFill>
+                  </a:tcPr>
+                </a:tc>
+                <a:tc>
+                  <a:txBody>
+                    <a:bodyPr/>
+                    <a:lstStyle/>
+                    <a:p>
+                      <a:pPr algn="l"/>
+                      <a:r>
+                        <a:rPr sz="1000" b="0">
+                          <a:solidFill>
+                            <a:srgbClr val="000000"/>
+                          </a:solidFill>
+                        </a:rPr>
+                        <a:t>Emotion</a:t>
+                      </a:r>
+                    </a:p>
+                  </a:txBody>
+                  <a:tcPr>
+                    <a:solidFill>
+                      <a:srgbClr val="F5F5F5"/>
+                    </a:solidFill>
+                  </a:tcPr>
+                </a:tc>
+                <a:tc>
+                  <a:txBody>
+                    <a:bodyPr/>
+                    <a:lstStyle/>
+                    <a:p>
+                      <a:pPr algn="l"/>
+                      <a:r>
+                        <a:rPr sz="900" b="0">
+                          <a:solidFill>
+                            <a:srgbClr val="C8C8C8"/>
+                          </a:solidFill>
+                        </a:rPr>
+                        <a:t>No data</a:t>
+                      </a:r>
+                    </a:p>
+                  </a:txBody>
+                  <a:tcPr>
+                    <a:solidFill>
+                      <a:srgbClr val="F5F5F5"/>
+                    </a:solidFill>
+                  </a:tcPr>
+                </a:tc>
+                <a:tc>
+                  <a:txBody>
+                    <a:bodyPr/>
+                    <a:lstStyle/>
+                    <a:p>
+                      <a:pPr algn="l"/>
+                      <a:r>
+                        <a:rPr sz="900" b="0">
+                          <a:solidFill>
+                            <a:srgbClr val="C8C8C8"/>
+                          </a:solidFill>
+                        </a:rPr>
+                        <a:t>No data</a:t>
+                      </a:r>
+                    </a:p>
+                  </a:txBody>
+                  <a:tcPr>
+                    <a:solidFill>
+                      <a:srgbClr val="F5F5F5"/>
+                    </a:solidFill>
+                  </a:tcPr>
+                </a:tc>
+                <a:tc>
+                  <a:txBody>
+                    <a:bodyPr/>
+                    <a:lstStyle/>
+                    <a:p>
+                      <a:pPr algn="l"/>
+                      <a:r>
+                        <a:rPr sz="900" b="0">
+                          <a:solidFill>
+                            <a:srgbClr val="B48200"/>
+                          </a:solidFill>
+                        </a:rPr>
+                        <a:t>Ref: bAcc 0.5509
+Ours: bAcc 0.5340</a:t>
+                      </a:r>
+                    </a:p>
+                  </a:txBody>
+                  <a:tcPr>
+                    <a:solidFill>
+                      <a:srgbClr val="FFFADC"/>
+                    </a:solidFill>
+                  </a:tcPr>
+                </a:tc>
+              </a:tr>
+              <a:tr h="685800">
+                <a:tc>
+                  <a:txBody>
+                    <a:bodyPr/>
+                    <a:lstStyle/>
+                    <a:p>
+                      <a:pPr algn="l"/>
+                      <a:r>
+                        <a:rPr sz="1100" b="1">
+                          <a:solidFill>
+                            <a:srgbClr val="000000"/>
+                          </a:solidFill>
+                        </a:rPr>
+                        <a:t>ISRUC-S1</a:t>
+                      </a:r>
+                    </a:p>
+                  </a:txBody>
+                  <a:tcPr>
+                    <a:solidFill>
+                      <a:srgbClr val="FFFFFF"/>
+                    </a:solidFill>
+                  </a:tcPr>
+                </a:tc>
+                <a:tc>
+                  <a:txBody>
+                    <a:bodyPr/>
+                    <a:lstStyle/>
+                    <a:p>
+                      <a:pPr algn="l"/>
+                      <a:r>
+                        <a:rPr sz="1000" b="0">
+                          <a:solidFill>
+                            <a:srgbClr val="000000"/>
+                          </a:solidFill>
+                        </a:rPr>
+                        <a:t>Sleep Staging</a:t>
+                      </a:r>
+                    </a:p>
+                  </a:txBody>
+                  <a:tcPr>
+                    <a:solidFill>
+                      <a:srgbClr val="F5F5F5"/>
+                    </a:solidFill>
+                  </a:tcPr>
+                </a:tc>
+                <a:tc>
+                  <a:txBody>
+                    <a:bodyPr/>
+                    <a:lstStyle/>
+                    <a:p>
+                      <a:pPr algn="l"/>
+                      <a:r>
+                        <a:rPr sz="900" b="0">
+                          <a:solidFill>
+                            <a:srgbClr val="C8C8C8"/>
+                          </a:solidFill>
+                        </a:rPr>
+                        <a:t>No data</a:t>
+                      </a:r>
+                    </a:p>
+                  </a:txBody>
+                  <a:tcPr>
+                    <a:solidFill>
+                      <a:srgbClr val="F5F5F5"/>
+                    </a:solidFill>
+                  </a:tcPr>
+                </a:tc>
+                <a:tc>
+                  <a:txBody>
+                    <a:bodyPr/>
+                    <a:lstStyle/>
+                    <a:p>
+                      <a:pPr algn="l"/>
+                      <a:r>
+                        <a:rPr sz="900" b="0">
+                          <a:solidFill>
+                            <a:srgbClr val="C8C8C8"/>
+                          </a:solidFill>
+                        </a:rPr>
+                        <a:t>No data</a:t>
+                      </a:r>
+                    </a:p>
+                  </a:txBody>
+                  <a:tcPr>
+                    <a:solidFill>
+                      <a:srgbClr val="F5F5F5"/>
+                    </a:solidFill>
+                  </a:tcPr>
+                </a:tc>
+                <a:tc>
+                  <a:txBody>
+                    <a:bodyPr/>
+                    <a:lstStyle/>
+                    <a:p>
+                      <a:pPr algn="l"/>
+                      <a:r>
+                        <a:rPr sz="900" b="1">
+                          <a:solidFill>
+                            <a:srgbClr val="145A32"/>
+                          </a:solidFill>
+                        </a:rPr>
+                        <a:t>Ref: bAcc 0.7865
+Ours: bAcc 0.7850</a:t>
+                      </a:r>
+                    </a:p>
+                  </a:txBody>
+                  <a:tcPr>
+                    <a:solidFill>
+                      <a:srgbClr val="DCFFE6"/>
+                    </a:solidFill>
+                  </a:tcPr>
+                </a:tc>
+              </a:tr>
+              <a:tr h="685800">
+                <a:tc>
+                  <a:txBody>
+                    <a:bodyPr/>
+                    <a:lstStyle/>
+                    <a:p>
+                      <a:pPr algn="l"/>
+                      <a:r>
+                        <a:rPr sz="1100" b="1">
+                          <a:solidFill>
+                            <a:srgbClr val="000000"/>
+                          </a:solidFill>
+                        </a:rPr>
+                        <a:t>SEED-V</a:t>
+                      </a:r>
+                    </a:p>
+                  </a:txBody>
+                  <a:tcPr>
+                    <a:solidFill>
+                      <a:srgbClr val="FFFFFF"/>
+                    </a:solidFill>
+                  </a:tcPr>
+                </a:tc>
+                <a:tc>
+                  <a:txBody>
+                    <a:bodyPr/>
+                    <a:lstStyle/>
+                    <a:p>
+                      <a:pPr algn="l"/>
+                      <a:r>
+                        <a:rPr sz="1000" b="0">
+                          <a:solidFill>
+                            <a:srgbClr val="000000"/>
+                          </a:solidFill>
+                        </a:rPr>
+                        <a:t>Emotion</a:t>
+                      </a:r>
+                    </a:p>
+                  </a:txBody>
+                  <a:tcPr>
+                    <a:solidFill>
+                      <a:srgbClr val="F5F5F5"/>
+                    </a:solidFill>
+                  </a:tcPr>
+                </a:tc>
+                <a:tc>
+                  <a:txBody>
+                    <a:bodyPr/>
+                    <a:lstStyle/>
+                    <a:p>
+                      <a:pPr algn="l"/>
+                      <a:r>
+                        <a:rPr sz="900" b="0">
+                          <a:solidFill>
+                            <a:srgbClr val="C8C8C8"/>
+                          </a:solidFill>
+                        </a:rPr>
+                        <a:t>No data</a:t>
+                      </a:r>
+                    </a:p>
+                  </a:txBody>
+                  <a:tcPr>
+                    <a:solidFill>
+                      <a:srgbClr val="F5F5F5"/>
+                    </a:solidFill>
+                  </a:tcPr>
+                </a:tc>
+                <a:tc>
+                  <a:txBody>
+                    <a:bodyPr/>
+                    <a:lstStyle/>
+                    <a:p>
+                      <a:pPr algn="l"/>
+                      <a:r>
+                        <a:rPr sz="900" b="0">
+                          <a:solidFill>
+                            <a:srgbClr val="C8C8C8"/>
+                          </a:solidFill>
+                        </a:rPr>
+                        <a:t>No data</a:t>
+                      </a:r>
+                    </a:p>
+                  </a:txBody>
+                  <a:tcPr>
+                    <a:solidFill>
+                      <a:srgbClr val="F5F5F5"/>
+                    </a:solidFill>
+                  </a:tcPr>
+                </a:tc>
+                <a:tc>
+                  <a:txBody>
+                    <a:bodyPr/>
+                    <a:lstStyle/>
+                    <a:p>
+                      <a:pPr algn="l"/>
+                      <a:r>
+                        <a:rPr sz="900" b="0">
+                          <a:solidFill>
+                            <a:srgbClr val="B48200"/>
+                          </a:solidFill>
+                        </a:rPr>
+                        <a:t>Ref: bAcc 0.4091
+Ours: bAcc 0.4018</a:t>
+                      </a:r>
+                    </a:p>
+                  </a:txBody>
+                  <a:tcPr>
+                    <a:solidFill>
+                      <a:srgbClr val="FFFADC"/>
+                    </a:solidFill>
+                  </a:tcPr>
+                </a:tc>
+              </a:tr>
+              <a:tr h="685800">
+                <a:tc>
+                  <a:txBody>
+                    <a:bodyPr/>
+                    <a:lstStyle/>
+                    <a:p>
+                      <a:pPr algn="l"/>
+                      <a:r>
+                        <a:rPr sz="1100" b="1">
+                          <a:solidFill>
+                            <a:srgbClr val="000000"/>
+                          </a:solidFill>
+                        </a:rPr>
+                        <a:t>SHU-MI</a:t>
+                      </a:r>
+                    </a:p>
+                  </a:txBody>
+                  <a:tcPr>
+                    <a:solidFill>
+                      <a:srgbClr val="FFFFFF"/>
+                    </a:solidFill>
+                  </a:tcPr>
+                </a:tc>
+                <a:tc>
+                  <a:txBody>
+                    <a:bodyPr/>
+                    <a:lstStyle/>
+                    <a:p>
+                      <a:pPr algn="l"/>
+                      <a:r>
+                        <a:rPr sz="1000" b="0">
+                          <a:solidFill>
+                            <a:srgbClr val="000000"/>
+                          </a:solidFill>
+                        </a:rPr>
+                        <a:t>MI (4-class)</a:t>
+                      </a:r>
+                    </a:p>
+                  </a:txBody>
+                  <a:tcPr>
+                    <a:solidFill>
+                      <a:srgbClr val="F5F5F5"/>
+                    </a:solidFill>
+                  </a:tcPr>
+                </a:tc>
+                <a:tc>
+                  <a:txBody>
+                    <a:bodyPr/>
+                    <a:lstStyle/>
+                    <a:p>
+                      <a:pPr algn="l"/>
+                      <a:r>
+                        <a:rPr sz="900" b="0">
+                          <a:solidFill>
+                            <a:srgbClr val="C8C8C8"/>
+                          </a:solidFill>
+                        </a:rPr>
+                        <a:t>No data</a:t>
+                      </a:r>
+                    </a:p>
+                  </a:txBody>
+                  <a:tcPr>
+                    <a:solidFill>
+                      <a:srgbClr val="F5F5F5"/>
+                    </a:solidFill>
+                  </a:tcPr>
+                </a:tc>
+                <a:tc>
+                  <a:txBody>
+                    <a:bodyPr/>
+                    <a:lstStyle/>
+                    <a:p>
+                      <a:pPr algn="l"/>
+                      <a:r>
+                        <a:rPr sz="900" b="0">
+                          <a:solidFill>
+                            <a:srgbClr val="C8C8C8"/>
+                          </a:solidFill>
+                        </a:rPr>
+                        <a:t>No data</a:t>
+                      </a:r>
+                    </a:p>
+                  </a:txBody>
+                  <a:tcPr>
+                    <a:solidFill>
+                      <a:srgbClr val="F5F5F5"/>
+                    </a:solidFill>
+                  </a:tcPr>
+                </a:tc>
+                <a:tc>
+                  <a:txBody>
+                    <a:bodyPr/>
+                    <a:lstStyle/>
+                    <a:p>
+                      <a:pPr algn="l"/>
+                      <a:r>
+                        <a:rPr sz="900" b="1">
+                          <a:solidFill>
+                            <a:srgbClr val="145A32"/>
+                          </a:solidFill>
+                        </a:rPr>
+                        <a:t>Ref: bAcc 0.6370
+Ours: bAcc 0.6380</a:t>
+                      </a:r>
+                    </a:p>
+                  </a:txBody>
+                  <a:tcPr>
+                    <a:solidFill>
+                      <a:srgbClr val="DCFFE6"/>
+                    </a:solidFill>
+                  </a:tcPr>
+                </a:tc>
+              </a:tr>
+              <a:tr h="685800">
+                <a:tc>
+                  <a:txBody>
+                    <a:bodyPr/>
+                    <a:lstStyle/>
+                    <a:p>
+                      <a:pPr algn="l"/>
+                      <a:r>
+                        <a:rPr sz="1100" b="1">
+                          <a:solidFill>
+                            <a:srgbClr val="000000"/>
+                          </a:solidFill>
+                        </a:rPr>
+                        <a:t>MDD</a:t>
+                      </a:r>
+                    </a:p>
+                  </a:txBody>
+                  <a:tcPr>
+                    <a:solidFill>
+                      <a:srgbClr val="FFFFFF"/>
+                    </a:solidFill>
+                  </a:tcPr>
+                </a:tc>
+                <a:tc>
+                  <a:txBody>
+                    <a:bodyPr/>
+                    <a:lstStyle/>
+                    <a:p>
+                      <a:pPr algn="l"/>
+                      <a:r>
+                        <a:rPr sz="1000" b="0">
+                          <a:solidFill>
+                            <a:srgbClr val="000000"/>
+                          </a:solidFill>
+                        </a:rPr>
+                        <a:t>Clinical (depression)</a:t>
+                      </a:r>
+                    </a:p>
+                  </a:txBody>
+                  <a:tcPr>
+                    <a:solidFill>
+                      <a:srgbClr val="F5F5F5"/>
+                    </a:solidFill>
+                  </a:tcPr>
+                </a:tc>
+                <a:tc>
+                  <a:txBody>
+                    <a:bodyPr/>
+                    <a:lstStyle/>
+                    <a:p>
+                      <a:pPr algn="l"/>
+                      <a:r>
+                        <a:rPr sz="900" b="0">
+                          <a:solidFill>
+                            <a:srgbClr val="C8C8C8"/>
+                          </a:solidFill>
+                        </a:rPr>
+                        <a:t>No data</a:t>
+                      </a:r>
+                    </a:p>
+                  </a:txBody>
+                  <a:tcPr>
+                    <a:solidFill>
+                      <a:srgbClr val="F5F5F5"/>
+                    </a:solidFill>
+                  </a:tcPr>
+                </a:tc>
+                <a:tc>
+                  <a:txBody>
+                    <a:bodyPr/>
+                    <a:lstStyle/>
+                    <a:p>
+                      <a:pPr algn="l"/>
+                      <a:r>
+                        <a:rPr sz="900" b="0">
+                          <a:solidFill>
+                            <a:srgbClr val="C8C8C8"/>
+                          </a:solidFill>
+                        </a:rPr>
+                        <a:t>No data</a:t>
+                      </a:r>
+                    </a:p>
+                  </a:txBody>
+                  <a:tcPr>
+                    <a:solidFill>
+                      <a:srgbClr val="F5F5F5"/>
+                    </a:solidFill>
+                  </a:tcPr>
+                </a:tc>
+                <a:tc>
+                  <a:txBody>
+                    <a:bodyPr/>
+                    <a:lstStyle/>
+                    <a:p>
+                      <a:pPr algn="l"/>
+                      <a:r>
+                        <a:rPr sz="900" b="1">
+                          <a:solidFill>
+                            <a:srgbClr val="145A32"/>
+                          </a:solidFill>
+                        </a:rPr>
+                        <a:t>Ref: bAcc 0.9560
+Ours: bAcc 0.9674</a:t>
+                      </a:r>
+                    </a:p>
+                  </a:txBody>
+                  <a:tcPr>
+                    <a:solidFill>
+                      <a:srgbClr val="DCFFE6"/>
+                    </a:solidFill>
+                  </a:tcPr>
+                </a:tc>
+              </a:tr>
+              <a:tr h="685800">
+                <a:tc>
+                  <a:txBody>
+                    <a:bodyPr/>
+                    <a:lstStyle/>
+                    <a:p>
+                      <a:pPr algn="l"/>
+                      <a:r>
+                        <a:rPr sz="1100" b="1">
+                          <a:solidFill>
+                            <a:srgbClr val="000000"/>
+                          </a:solidFill>
+                        </a:rPr>
+                        <a:t>TUEV</a:t>
+                      </a:r>
+                    </a:p>
+                  </a:txBody>
+                  <a:tcPr>
+                    <a:solidFill>
+                      <a:srgbClr val="FFFFFF"/>
+                    </a:solidFill>
+                  </a:tcPr>
+                </a:tc>
+                <a:tc>
+                  <a:txBody>
+                    <a:bodyPr/>
+                    <a:lstStyle/>
+                    <a:p>
+                      <a:pPr algn="l"/>
+                      <a:r>
+                        <a:rPr sz="1000" b="0">
+                          <a:solidFill>
+                            <a:srgbClr val="000000"/>
+                          </a:solidFill>
+                        </a:rPr>
+                        <a:t>Pathology</a:t>
+                      </a:r>
+                    </a:p>
+                  </a:txBody>
+                  <a:tcPr>
+                    <a:solidFill>
+                      <a:srgbClr val="F5F5F5"/>
+                    </a:solidFill>
+                  </a:tcPr>
+                </a:tc>
+                <a:tc>
+                  <a:txBody>
+                    <a:bodyPr/>
+                    <a:lstStyle/>
+                    <a:p>
+                      <a:pPr algn="l"/>
+                      <a:r>
+                        <a:rPr sz="900" b="0">
+                          <a:solidFill>
+                            <a:srgbClr val="C8C8C8"/>
+                          </a:solidFill>
+                        </a:rPr>
+                        <a:t>No data</a:t>
+                      </a:r>
+                    </a:p>
+                  </a:txBody>
+                  <a:tcPr>
+                    <a:solidFill>
+                      <a:srgbClr val="F5F5F5"/>
+                    </a:solidFill>
+                  </a:tcPr>
+                </a:tc>
+                <a:tc>
+                  <a:txBody>
+                    <a:bodyPr/>
+                    <a:lstStyle/>
+                    <a:p>
+                      <a:pPr algn="l"/>
+                      <a:r>
+                        <a:rPr sz="900" b="0">
+                          <a:solidFill>
+                            <a:srgbClr val="C8C8C8"/>
+                          </a:solidFill>
+                        </a:rPr>
+                        <a:t>No data</a:t>
+                      </a:r>
+                    </a:p>
+                  </a:txBody>
+                  <a:tcPr>
+                    <a:solidFill>
+                      <a:srgbClr val="F5F5F5"/>
+                    </a:solidFill>
+                  </a:tcPr>
+                </a:tc>
+                <a:tc>
+                  <a:txBody>
+                    <a:bodyPr/>
+                    <a:lstStyle/>
+                    <a:p>
+                      <a:pPr algn="l"/>
+                      <a:r>
+                        <a:rPr sz="900" b="1">
+                          <a:solidFill>
+                            <a:srgbClr val="E74C3C"/>
+                          </a:solidFill>
+                        </a:rPr>
+                        <a:t>Ref: k 0.6671
+Ours: k 0.6343</a:t>
+                      </a:r>
+                    </a:p>
+                  </a:txBody>
+                  <a:tcPr>
+                    <a:solidFill>
+                      <a:srgbClr val="FFE6E6"/>
+                    </a:solidFill>
+                  </a:tcPr>
+                </a:tc>
+              </a:tr>
+              <a:tr h="685800">
+                <a:tc>
+                  <a:txBody>
+                    <a:bodyPr/>
+                    <a:lstStyle/>
+                    <a:p>
+                      <a:pPr algn="ctr"/>
+                      <a:r>
+                        <a:rPr sz="1100" b="1">
+                          <a:solidFill>
+                            <a:srgbClr val="FFFFFF"/>
+                          </a:solidFill>
+                        </a:rPr>
+                        <a:t>Summary</a:t>
+                      </a:r>
+                    </a:p>
+                  </a:txBody>
+                  <a:tcPr>
+                    <a:solidFill>
+                      <a:srgbClr val="3C3C3C"/>
+                    </a:solidFill>
+                  </a:tcPr>
+                </a:tc>
+                <a:tc>
+                  <a:txBody>
+                    <a:bodyPr/>
+                    <a:lstStyle/>
+                    <a:p>
+                      <a:pPr algn="ctr"/>
+                      <a:r>
+                        <a:rPr sz="1100" b="0">
+                          <a:solidFill>
+                            <a:srgbClr val="000000"/>
+                          </a:solidFill>
+                        </a:rPr>
+                        <a:t/>
+                      </a:r>
+                    </a:p>
+                  </a:txBody>
+                  <a:tcPr>
+                    <a:solidFill>
+                      <a:srgbClr val="3C3C3C"/>
+                    </a:solidFill>
+                  </a:tcPr>
+                </a:tc>
+                <a:tc>
+                  <a:txBody>
+                    <a:bodyPr/>
+                    <a:lstStyle/>
+                    <a:p>
                       <a:pPr algn="ctr"/>
                       <a:r>
                         <a:rPr sz="1000" b="1">
                           <a:solidFill>
+                            <a:srgbClr val="F1C40F"/>
+                          </a:solidFill>
+                        </a:rPr>
+                        <a:t>Y:2  No data:8</a:t>
+                      </a:r>
+                    </a:p>
+                  </a:txBody>
+                  <a:tcPr>
+                    <a:solidFill>
+                      <a:srgbClr val="FFFADC"/>
+                    </a:solidFill>
+                  </a:tcPr>
+                </a:tc>
+                <a:tc>
+                  <a:txBody>
+                    <a:bodyPr/>
+                    <a:lstStyle/>
+                    <a:p>
+                      <a:pPr algn="ctr"/>
+                      <a:r>
+                        <a:rPr sz="1000" b="1">
+                          <a:solidFill>
                             <a:srgbClr val="27AE60"/>
                           </a:solidFill>
                         </a:rPr>
-                        <a:t>79.17% val</a:t>
+                        <a:t>G:1  No data:9</a:t>
                       </a:r>
                     </a:p>
                   </a:txBody>
@@ -8686,1043 +9813,13 @@
                             <a:srgbClr val="27AE60"/>
                           </a:solidFill>
                         </a:rPr>
-                        <a:t>78.66% avg</a:t>
+                        <a:t>G:4  Y:3  R:1  No data:2</a:t>
                       </a:r>
                     </a:p>
                   </a:txBody>
                   <a:tcPr>
                     <a:solidFill>
                       <a:srgbClr val="DCFFE6"/>
-                    </a:solidFill>
-                  </a:tcPr>
-                </a:tc>
-                <a:tc>
-                  <a:txBody>
-                    <a:bodyPr/>
-                    <a:lstStyle/>
-                    <a:p>
-                      <a:pPr algn="ctr"/>
-                      <a:r>
-                        <a:rPr sz="1000" b="1">
-                          <a:solidFill>
-                            <a:srgbClr val="27AE60"/>
-                          </a:solidFill>
-                        </a:rPr>
-                        <a:t>bAcc 0.671</a:t>
-                      </a:r>
-                    </a:p>
-                  </a:txBody>
-                  <a:tcPr>
-                    <a:solidFill>
-                      <a:srgbClr val="DCFFE6"/>
-                    </a:solidFill>
-                  </a:tcPr>
-                </a:tc>
-              </a:tr>
-              <a:tr h="502920">
-                <a:tc>
-                  <a:txBody>
-                    <a:bodyPr/>
-                    <a:lstStyle/>
-                    <a:p>
-                      <a:pPr algn="l"/>
-                      <a:r>
-                        <a:rPr sz="1100" b="1">
-                          <a:solidFill>
-                            <a:srgbClr val="000000"/>
-                          </a:solidFill>
-                        </a:rPr>
-                        <a:t>BCICIV2B</a:t>
-                      </a:r>
-                    </a:p>
-                  </a:txBody>
-                  <a:tcPr>
-                    <a:solidFill>
-                      <a:srgbClr val="FFFFFF"/>
-                    </a:solidFill>
-                  </a:tcPr>
-                </a:tc>
-                <a:tc>
-                  <a:txBody>
-                    <a:bodyPr/>
-                    <a:lstStyle/>
-                    <a:p>
-                      <a:pPr algn="l"/>
-                      <a:r>
-                        <a:rPr sz="1000" b="0">
-                          <a:solidFill>
-                            <a:srgbClr val="000000"/>
-                          </a:solidFill>
-                        </a:rPr>
-                        <a:t>Motor Imagery</a:t>
-                      </a:r>
-                    </a:p>
-                  </a:txBody>
-                  <a:tcPr>
-                    <a:solidFill>
-                      <a:srgbClr val="F5F5F5"/>
-                    </a:solidFill>
-                  </a:tcPr>
-                </a:tc>
-                <a:tc>
-                  <a:txBody>
-                    <a:bodyPr/>
-                    <a:lstStyle/>
-                    <a:p>
-                      <a:pPr algn="ctr"/>
-                      <a:r>
-                        <a:rPr sz="1000" b="1">
-                          <a:solidFill>
-                            <a:srgbClr val="27AE60"/>
-                          </a:solidFill>
-                        </a:rPr>
-                        <a:t>78.35%, k=0.57</a:t>
-                      </a:r>
-                    </a:p>
-                  </a:txBody>
-                  <a:tcPr>
-                    <a:solidFill>
-                      <a:srgbClr val="DCFFE6"/>
-                    </a:solidFill>
-                  </a:tcPr>
-                </a:tc>
-                <a:tc>
-                  <a:txBody>
-                    <a:bodyPr/>
-                    <a:lstStyle/>
-                    <a:p>
-                      <a:pPr algn="ctr"/>
-                      <a:r>
-                        <a:rPr sz="1000" b="0">
-                          <a:solidFill>
-                            <a:srgbClr val="C8C8C8"/>
-                          </a:solidFill>
-                        </a:rPr>
-                        <a:t>--</a:t>
-                      </a:r>
-                    </a:p>
-                  </a:txBody>
-                  <a:tcPr>
-                    <a:solidFill>
-                      <a:srgbClr val="F5F5F5"/>
-                    </a:solidFill>
-                  </a:tcPr>
-                </a:tc>
-                <a:tc>
-                  <a:txBody>
-                    <a:bodyPr/>
-                    <a:lstStyle/>
-                    <a:p>
-                      <a:pPr algn="ctr"/>
-                      <a:r>
-                        <a:rPr sz="1000" b="0">
-                          <a:solidFill>
-                            <a:srgbClr val="C8C8C8"/>
-                          </a:solidFill>
-                        </a:rPr>
-                        <a:t>--</a:t>
-                      </a:r>
-                    </a:p>
-                  </a:txBody>
-                  <a:tcPr>
-                    <a:solidFill>
-                      <a:srgbClr val="F5F5F5"/>
-                    </a:solidFill>
-                  </a:tcPr>
-                </a:tc>
-              </a:tr>
-              <a:tr h="502920">
-                <a:tc>
-                  <a:txBody>
-                    <a:bodyPr/>
-                    <a:lstStyle/>
-                    <a:p>
-                      <a:pPr algn="l"/>
-                      <a:r>
-                        <a:rPr sz="1100" b="1">
-                          <a:solidFill>
-                            <a:srgbClr val="000000"/>
-                          </a:solidFill>
-                        </a:rPr>
-                        <a:t>IIIa</a:t>
-                      </a:r>
-                    </a:p>
-                  </a:txBody>
-                  <a:tcPr>
-                    <a:solidFill>
-                      <a:srgbClr val="FFFFFF"/>
-                    </a:solidFill>
-                  </a:tcPr>
-                </a:tc>
-                <a:tc>
-                  <a:txBody>
-                    <a:bodyPr/>
-                    <a:lstStyle/>
-                    <a:p>
-                      <a:pPr algn="l"/>
-                      <a:r>
-                        <a:rPr sz="1000" b="0">
-                          <a:solidFill>
-                            <a:srgbClr val="000000"/>
-                          </a:solidFill>
-                        </a:rPr>
-                        <a:t>Motor Imagery</a:t>
-                      </a:r>
-                    </a:p>
-                  </a:txBody>
-                  <a:tcPr>
-                    <a:solidFill>
-                      <a:srgbClr val="F5F5F5"/>
-                    </a:solidFill>
-                  </a:tcPr>
-                </a:tc>
-                <a:tc>
-                  <a:txBody>
-                    <a:bodyPr/>
-                    <a:lstStyle/>
-                    <a:p>
-                      <a:pPr algn="ctr"/>
-                      <a:r>
-                        <a:rPr sz="1000" b="1">
-                          <a:solidFill>
-                            <a:srgbClr val="F1C40F"/>
-                          </a:solidFill>
-                        </a:rPr>
-                        <a:t>55.95% val</a:t>
-                      </a:r>
-                    </a:p>
-                  </a:txBody>
-                  <a:tcPr>
-                    <a:solidFill>
-                      <a:srgbClr val="FFFADC"/>
-                    </a:solidFill>
-                  </a:tcPr>
-                </a:tc>
-                <a:tc>
-                  <a:txBody>
-                    <a:bodyPr/>
-                    <a:lstStyle/>
-                    <a:p>
-                      <a:pPr algn="ctr"/>
-                      <a:r>
-                        <a:rPr sz="1000" b="0">
-                          <a:solidFill>
-                            <a:srgbClr val="C8C8C8"/>
-                          </a:solidFill>
-                        </a:rPr>
-                        <a:t>--</a:t>
-                      </a:r>
-                    </a:p>
-                  </a:txBody>
-                  <a:tcPr>
-                    <a:solidFill>
-                      <a:srgbClr val="F5F5F5"/>
-                    </a:solidFill>
-                  </a:tcPr>
-                </a:tc>
-                <a:tc>
-                  <a:txBody>
-                    <a:bodyPr/>
-                    <a:lstStyle/>
-                    <a:p>
-                      <a:pPr algn="ctr"/>
-                      <a:r>
-                        <a:rPr sz="1000" b="0">
-                          <a:solidFill>
-                            <a:srgbClr val="C8C8C8"/>
-                          </a:solidFill>
-                        </a:rPr>
-                        <a:t>--</a:t>
-                      </a:r>
-                    </a:p>
-                  </a:txBody>
-                  <a:tcPr>
-                    <a:solidFill>
-                      <a:srgbClr val="F5F5F5"/>
-                    </a:solidFill>
-                  </a:tcPr>
-                </a:tc>
-              </a:tr>
-              <a:tr h="502920">
-                <a:tc>
-                  <a:txBody>
-                    <a:bodyPr/>
-                    <a:lstStyle/>
-                    <a:p>
-                      <a:pPr algn="l"/>
-                      <a:r>
-                        <a:rPr sz="1100" b="1">
-                          <a:solidFill>
-                            <a:srgbClr val="000000"/>
-                          </a:solidFill>
-                        </a:rPr>
-                        <a:t>Physionet-MI</a:t>
-                      </a:r>
-                    </a:p>
-                  </a:txBody>
-                  <a:tcPr>
-                    <a:solidFill>
-                      <a:srgbClr val="FFFFFF"/>
-                    </a:solidFill>
-                  </a:tcPr>
-                </a:tc>
-                <a:tc>
-                  <a:txBody>
-                    <a:bodyPr/>
-                    <a:lstStyle/>
-                    <a:p>
-                      <a:pPr algn="l"/>
-                      <a:r>
-                        <a:rPr sz="1000" b="0">
-                          <a:solidFill>
-                            <a:srgbClr val="000000"/>
-                          </a:solidFill>
-                        </a:rPr>
-                        <a:t>Motor Imagery</a:t>
-                      </a:r>
-                    </a:p>
-                  </a:txBody>
-                  <a:tcPr>
-                    <a:solidFill>
-                      <a:srgbClr val="F5F5F5"/>
-                    </a:solidFill>
-                  </a:tcPr>
-                </a:tc>
-                <a:tc>
-                  <a:txBody>
-                    <a:bodyPr/>
-                    <a:lstStyle/>
-                    <a:p>
-                      <a:pPr algn="ctr"/>
-                      <a:r>
-                        <a:rPr sz="1000" b="1">
-                          <a:solidFill>
-                            <a:srgbClr val="F1C40F"/>
-                          </a:solidFill>
-                        </a:rPr>
-                        <a:t>49.30% val</a:t>
-                      </a:r>
-                    </a:p>
-                  </a:txBody>
-                  <a:tcPr>
-                    <a:solidFill>
-                      <a:srgbClr val="FFFADC"/>
-                    </a:solidFill>
-                  </a:tcPr>
-                </a:tc>
-                <a:tc>
-                  <a:txBody>
-                    <a:bodyPr/>
-                    <a:lstStyle/>
-                    <a:p>
-                      <a:pPr algn="ctr"/>
-                      <a:r>
-                        <a:rPr sz="1000" b="0">
-                          <a:solidFill>
-                            <a:srgbClr val="C8C8C8"/>
-                          </a:solidFill>
-                        </a:rPr>
-                        <a:t>--</a:t>
-                      </a:r>
-                    </a:p>
-                  </a:txBody>
-                  <a:tcPr>
-                    <a:solidFill>
-                      <a:srgbClr val="F5F5F5"/>
-                    </a:solidFill>
-                  </a:tcPr>
-                </a:tc>
-                <a:tc>
-                  <a:txBody>
-                    <a:bodyPr/>
-                    <a:lstStyle/>
-                    <a:p>
-                      <a:pPr algn="ctr"/>
-                      <a:r>
-                        <a:rPr sz="1000" b="1">
-                          <a:solidFill>
-                            <a:srgbClr val="F1C40F"/>
-                          </a:solidFill>
-                        </a:rPr>
-                        <a:t>bAcc 0.618</a:t>
-                      </a:r>
-                    </a:p>
-                  </a:txBody>
-                  <a:tcPr>
-                    <a:solidFill>
-                      <a:srgbClr val="FFFADC"/>
-                    </a:solidFill>
-                  </a:tcPr>
-                </a:tc>
-              </a:tr>
-              <a:tr h="502920">
-                <a:tc>
-                  <a:txBody>
-                    <a:bodyPr/>
-                    <a:lstStyle/>
-                    <a:p>
-                      <a:pPr algn="l"/>
-                      <a:r>
-                        <a:rPr sz="1100" b="1">
-                          <a:solidFill>
-                            <a:srgbClr val="000000"/>
-                          </a:solidFill>
-                        </a:rPr>
-                        <a:t>FACED</a:t>
-                      </a:r>
-                    </a:p>
-                  </a:txBody>
-                  <a:tcPr>
-                    <a:solidFill>
-                      <a:srgbClr val="FFFFFF"/>
-                    </a:solidFill>
-                  </a:tcPr>
-                </a:tc>
-                <a:tc>
-                  <a:txBody>
-                    <a:bodyPr/>
-                    <a:lstStyle/>
-                    <a:p>
-                      <a:pPr algn="l"/>
-                      <a:r>
-                        <a:rPr sz="1000" b="0">
-                          <a:solidFill>
-                            <a:srgbClr val="000000"/>
-                          </a:solidFill>
-                        </a:rPr>
-                        <a:t>Emotion</a:t>
-                      </a:r>
-                    </a:p>
-                  </a:txBody>
-                  <a:tcPr>
-                    <a:solidFill>
-                      <a:srgbClr val="F5F5F5"/>
-                    </a:solidFill>
-                  </a:tcPr>
-                </a:tc>
-                <a:tc>
-                  <a:txBody>
-                    <a:bodyPr/>
-                    <a:lstStyle/>
-                    <a:p>
-                      <a:pPr algn="ctr"/>
-                      <a:r>
-                        <a:rPr sz="1000" b="0">
-                          <a:solidFill>
-                            <a:srgbClr val="C8C8C8"/>
-                          </a:solidFill>
-                        </a:rPr>
-                        <a:t>--</a:t>
-                      </a:r>
-                    </a:p>
-                  </a:txBody>
-                  <a:tcPr>
-                    <a:solidFill>
-                      <a:srgbClr val="F5F5F5"/>
-                    </a:solidFill>
-                  </a:tcPr>
-                </a:tc>
-                <a:tc>
-                  <a:txBody>
-                    <a:bodyPr/>
-                    <a:lstStyle/>
-                    <a:p>
-                      <a:pPr algn="ctr"/>
-                      <a:r>
-                        <a:rPr sz="1000" b="0">
-                          <a:solidFill>
-                            <a:srgbClr val="C8C8C8"/>
-                          </a:solidFill>
-                        </a:rPr>
-                        <a:t>--</a:t>
-                      </a:r>
-                    </a:p>
-                  </a:txBody>
-                  <a:tcPr>
-                    <a:solidFill>
-                      <a:srgbClr val="F5F5F5"/>
-                    </a:solidFill>
-                  </a:tcPr>
-                </a:tc>
-                <a:tc>
-                  <a:txBody>
-                    <a:bodyPr/>
-                    <a:lstStyle/>
-                    <a:p>
-                      <a:pPr algn="ctr"/>
-                      <a:r>
-                        <a:rPr sz="1000" b="1">
-                          <a:solidFill>
-                            <a:srgbClr val="F1C40F"/>
-                          </a:solidFill>
-                        </a:rPr>
-                        <a:t>bAcc 0.534</a:t>
-                      </a:r>
-                    </a:p>
-                  </a:txBody>
-                  <a:tcPr>
-                    <a:solidFill>
-                      <a:srgbClr val="FFFADC"/>
-                    </a:solidFill>
-                  </a:tcPr>
-                </a:tc>
-              </a:tr>
-              <a:tr h="502920">
-                <a:tc>
-                  <a:txBody>
-                    <a:bodyPr/>
-                    <a:lstStyle/>
-                    <a:p>
-                      <a:pPr algn="l"/>
-                      <a:r>
-                        <a:rPr sz="1100" b="1">
-                          <a:solidFill>
-                            <a:srgbClr val="000000"/>
-                          </a:solidFill>
-                        </a:rPr>
-                        <a:t>ISRUC-S1</a:t>
-                      </a:r>
-                    </a:p>
-                  </a:txBody>
-                  <a:tcPr>
-                    <a:solidFill>
-                      <a:srgbClr val="FFFFFF"/>
-                    </a:solidFill>
-                  </a:tcPr>
-                </a:tc>
-                <a:tc>
-                  <a:txBody>
-                    <a:bodyPr/>
-                    <a:lstStyle/>
-                    <a:p>
-                      <a:pPr algn="l"/>
-                      <a:r>
-                        <a:rPr sz="1000" b="0">
-                          <a:solidFill>
-                            <a:srgbClr val="000000"/>
-                          </a:solidFill>
-                        </a:rPr>
-                        <a:t>Sleep Staging</a:t>
-                      </a:r>
-                    </a:p>
-                  </a:txBody>
-                  <a:tcPr>
-                    <a:solidFill>
-                      <a:srgbClr val="F5F5F5"/>
-                    </a:solidFill>
-                  </a:tcPr>
-                </a:tc>
-                <a:tc>
-                  <a:txBody>
-                    <a:bodyPr/>
-                    <a:lstStyle/>
-                    <a:p>
-                      <a:pPr algn="ctr"/>
-                      <a:r>
-                        <a:rPr sz="1000" b="0">
-                          <a:solidFill>
-                            <a:srgbClr val="C8C8C8"/>
-                          </a:solidFill>
-                        </a:rPr>
-                        <a:t>--</a:t>
-                      </a:r>
-                    </a:p>
-                  </a:txBody>
-                  <a:tcPr>
-                    <a:solidFill>
-                      <a:srgbClr val="F5F5F5"/>
-                    </a:solidFill>
-                  </a:tcPr>
-                </a:tc>
-                <a:tc>
-                  <a:txBody>
-                    <a:bodyPr/>
-                    <a:lstStyle/>
-                    <a:p>
-                      <a:pPr algn="ctr"/>
-                      <a:r>
-                        <a:rPr sz="1000" b="0">
-                          <a:solidFill>
-                            <a:srgbClr val="C8C8C8"/>
-                          </a:solidFill>
-                        </a:rPr>
-                        <a:t>--</a:t>
-                      </a:r>
-                    </a:p>
-                  </a:txBody>
-                  <a:tcPr>
-                    <a:solidFill>
-                      <a:srgbClr val="F5F5F5"/>
-                    </a:solidFill>
-                  </a:tcPr>
-                </a:tc>
-                <a:tc>
-                  <a:txBody>
-                    <a:bodyPr/>
-                    <a:lstStyle/>
-                    <a:p>
-                      <a:pPr algn="ctr"/>
-                      <a:r>
-                        <a:rPr sz="1000" b="1">
-                          <a:solidFill>
-                            <a:srgbClr val="27AE60"/>
-                          </a:solidFill>
-                        </a:rPr>
-                        <a:t>bAcc 0.785</a:t>
-                      </a:r>
-                    </a:p>
-                  </a:txBody>
-                  <a:tcPr>
-                    <a:solidFill>
-                      <a:srgbClr val="DCFFE6"/>
-                    </a:solidFill>
-                  </a:tcPr>
-                </a:tc>
-              </a:tr>
-              <a:tr h="502920">
-                <a:tc>
-                  <a:txBody>
-                    <a:bodyPr/>
-                    <a:lstStyle/>
-                    <a:p>
-                      <a:pPr algn="l"/>
-                      <a:r>
-                        <a:rPr sz="1100" b="1">
-                          <a:solidFill>
-                            <a:srgbClr val="000000"/>
-                          </a:solidFill>
-                        </a:rPr>
-                        <a:t>SEED-V</a:t>
-                      </a:r>
-                    </a:p>
-                  </a:txBody>
-                  <a:tcPr>
-                    <a:solidFill>
-                      <a:srgbClr val="FFFFFF"/>
-                    </a:solidFill>
-                  </a:tcPr>
-                </a:tc>
-                <a:tc>
-                  <a:txBody>
-                    <a:bodyPr/>
-                    <a:lstStyle/>
-                    <a:p>
-                      <a:pPr algn="l"/>
-                      <a:r>
-                        <a:rPr sz="1000" b="0">
-                          <a:solidFill>
-                            <a:srgbClr val="000000"/>
-                          </a:solidFill>
-                        </a:rPr>
-                        <a:t>Emotion</a:t>
-                      </a:r>
-                    </a:p>
-                  </a:txBody>
-                  <a:tcPr>
-                    <a:solidFill>
-                      <a:srgbClr val="F5F5F5"/>
-                    </a:solidFill>
-                  </a:tcPr>
-                </a:tc>
-                <a:tc>
-                  <a:txBody>
-                    <a:bodyPr/>
-                    <a:lstStyle/>
-                    <a:p>
-                      <a:pPr algn="ctr"/>
-                      <a:r>
-                        <a:rPr sz="1000" b="0">
-                          <a:solidFill>
-                            <a:srgbClr val="C8C8C8"/>
-                          </a:solidFill>
-                        </a:rPr>
-                        <a:t>--</a:t>
-                      </a:r>
-                    </a:p>
-                  </a:txBody>
-                  <a:tcPr>
-                    <a:solidFill>
-                      <a:srgbClr val="F5F5F5"/>
-                    </a:solidFill>
-                  </a:tcPr>
-                </a:tc>
-                <a:tc>
-                  <a:txBody>
-                    <a:bodyPr/>
-                    <a:lstStyle/>
-                    <a:p>
-                      <a:pPr algn="ctr"/>
-                      <a:r>
-                        <a:rPr sz="1000" b="0">
-                          <a:solidFill>
-                            <a:srgbClr val="C8C8C8"/>
-                          </a:solidFill>
-                        </a:rPr>
-                        <a:t>--</a:t>
-                      </a:r>
-                    </a:p>
-                  </a:txBody>
-                  <a:tcPr>
-                    <a:solidFill>
-                      <a:srgbClr val="F5F5F5"/>
-                    </a:solidFill>
-                  </a:tcPr>
-                </a:tc>
-                <a:tc>
-                  <a:txBody>
-                    <a:bodyPr/>
-                    <a:lstStyle/>
-                    <a:p>
-                      <a:pPr algn="ctr"/>
-                      <a:r>
-                        <a:rPr sz="1000" b="1">
-                          <a:solidFill>
-                            <a:srgbClr val="F1C40F"/>
-                          </a:solidFill>
-                        </a:rPr>
-                        <a:t>bAcc 0.402</a:t>
-                      </a:r>
-                    </a:p>
-                  </a:txBody>
-                  <a:tcPr>
-                    <a:solidFill>
-                      <a:srgbClr val="FFFADC"/>
-                    </a:solidFill>
-                  </a:tcPr>
-                </a:tc>
-              </a:tr>
-              <a:tr h="502920">
-                <a:tc>
-                  <a:txBody>
-                    <a:bodyPr/>
-                    <a:lstStyle/>
-                    <a:p>
-                      <a:pPr algn="l"/>
-                      <a:r>
-                        <a:rPr sz="1100" b="1">
-                          <a:solidFill>
-                            <a:srgbClr val="000000"/>
-                          </a:solidFill>
-                        </a:rPr>
-                        <a:t>SHU-MI</a:t>
-                      </a:r>
-                    </a:p>
-                  </a:txBody>
-                  <a:tcPr>
-                    <a:solidFill>
-                      <a:srgbClr val="FFFFFF"/>
-                    </a:solidFill>
-                  </a:tcPr>
-                </a:tc>
-                <a:tc>
-                  <a:txBody>
-                    <a:bodyPr/>
-                    <a:lstStyle/>
-                    <a:p>
-                      <a:pPr algn="l"/>
-                      <a:r>
-                        <a:rPr sz="1000" b="0">
-                          <a:solidFill>
-                            <a:srgbClr val="000000"/>
-                          </a:solidFill>
-                        </a:rPr>
-                        <a:t>Motor Imagery</a:t>
-                      </a:r>
-                    </a:p>
-                  </a:txBody>
-                  <a:tcPr>
-                    <a:solidFill>
-                      <a:srgbClr val="F5F5F5"/>
-                    </a:solidFill>
-                  </a:tcPr>
-                </a:tc>
-                <a:tc>
-                  <a:txBody>
-                    <a:bodyPr/>
-                    <a:lstStyle/>
-                    <a:p>
-                      <a:pPr algn="ctr"/>
-                      <a:r>
-                        <a:rPr sz="1000" b="0">
-                          <a:solidFill>
-                            <a:srgbClr val="C8C8C8"/>
-                          </a:solidFill>
-                        </a:rPr>
-                        <a:t>--</a:t>
-                      </a:r>
-                    </a:p>
-                  </a:txBody>
-                  <a:tcPr>
-                    <a:solidFill>
-                      <a:srgbClr val="F5F5F5"/>
-                    </a:solidFill>
-                  </a:tcPr>
-                </a:tc>
-                <a:tc>
-                  <a:txBody>
-                    <a:bodyPr/>
-                    <a:lstStyle/>
-                    <a:p>
-                      <a:pPr algn="ctr"/>
-                      <a:r>
-                        <a:rPr sz="1000" b="0">
-                          <a:solidFill>
-                            <a:srgbClr val="C8C8C8"/>
-                          </a:solidFill>
-                        </a:rPr>
-                        <a:t>--</a:t>
-                      </a:r>
-                    </a:p>
-                  </a:txBody>
-                  <a:tcPr>
-                    <a:solidFill>
-                      <a:srgbClr val="F5F5F5"/>
-                    </a:solidFill>
-                  </a:tcPr>
-                </a:tc>
-                <a:tc>
-                  <a:txBody>
-                    <a:bodyPr/>
-                    <a:lstStyle/>
-                    <a:p>
-                      <a:pPr algn="ctr"/>
-                      <a:r>
-                        <a:rPr sz="1000" b="1">
-                          <a:solidFill>
-                            <a:srgbClr val="27AE60"/>
-                          </a:solidFill>
-                        </a:rPr>
-                        <a:t>bAcc 0.638</a:t>
-                      </a:r>
-                    </a:p>
-                  </a:txBody>
-                  <a:tcPr>
-                    <a:solidFill>
-                      <a:srgbClr val="DCFFE6"/>
-                    </a:solidFill>
-                  </a:tcPr>
-                </a:tc>
-              </a:tr>
-              <a:tr h="502920">
-                <a:tc>
-                  <a:txBody>
-                    <a:bodyPr/>
-                    <a:lstStyle/>
-                    <a:p>
-                      <a:pPr algn="l"/>
-                      <a:r>
-                        <a:rPr sz="1100" b="1">
-                          <a:solidFill>
-                            <a:srgbClr val="000000"/>
-                          </a:solidFill>
-                        </a:rPr>
-                        <a:t>MDD</a:t>
-                      </a:r>
-                    </a:p>
-                  </a:txBody>
-                  <a:tcPr>
-                    <a:solidFill>
-                      <a:srgbClr val="FFFFFF"/>
-                    </a:solidFill>
-                  </a:tcPr>
-                </a:tc>
-                <a:tc>
-                  <a:txBody>
-                    <a:bodyPr/>
-                    <a:lstStyle/>
-                    <a:p>
-                      <a:pPr algn="l"/>
-                      <a:r>
-                        <a:rPr sz="1000" b="0">
-                          <a:solidFill>
-                            <a:srgbClr val="000000"/>
-                          </a:solidFill>
-                        </a:rPr>
-                        <a:t>Clinical</a:t>
-                      </a:r>
-                    </a:p>
-                  </a:txBody>
-                  <a:tcPr>
-                    <a:solidFill>
-                      <a:srgbClr val="F5F5F5"/>
-                    </a:solidFill>
-                  </a:tcPr>
-                </a:tc>
-                <a:tc>
-                  <a:txBody>
-                    <a:bodyPr/>
-                    <a:lstStyle/>
-                    <a:p>
-                      <a:pPr algn="ctr"/>
-                      <a:r>
-                        <a:rPr sz="1000" b="0">
-                          <a:solidFill>
-                            <a:srgbClr val="C8C8C8"/>
-                          </a:solidFill>
-                        </a:rPr>
-                        <a:t>--</a:t>
-                      </a:r>
-                    </a:p>
-                  </a:txBody>
-                  <a:tcPr>
-                    <a:solidFill>
-                      <a:srgbClr val="F5F5F5"/>
-                    </a:solidFill>
-                  </a:tcPr>
-                </a:tc>
-                <a:tc>
-                  <a:txBody>
-                    <a:bodyPr/>
-                    <a:lstStyle/>
-                    <a:p>
-                      <a:pPr algn="ctr"/>
-                      <a:r>
-                        <a:rPr sz="1000" b="0">
-                          <a:solidFill>
-                            <a:srgbClr val="C8C8C8"/>
-                          </a:solidFill>
-                        </a:rPr>
-                        <a:t>--</a:t>
-                      </a:r>
-                    </a:p>
-                  </a:txBody>
-                  <a:tcPr>
-                    <a:solidFill>
-                      <a:srgbClr val="F5F5F5"/>
-                    </a:solidFill>
-                  </a:tcPr>
-                </a:tc>
-                <a:tc>
-                  <a:txBody>
-                    <a:bodyPr/>
-                    <a:lstStyle/>
-                    <a:p>
-                      <a:pPr algn="ctr"/>
-                      <a:r>
-                        <a:rPr sz="1000" b="1">
-                          <a:solidFill>
-                            <a:srgbClr val="27AE60"/>
-                          </a:solidFill>
-                        </a:rPr>
-                        <a:t>bAcc 0.967</a:t>
-                      </a:r>
-                    </a:p>
-                  </a:txBody>
-                  <a:tcPr>
-                    <a:solidFill>
-                      <a:srgbClr val="DCFFE6"/>
-                    </a:solidFill>
-                  </a:tcPr>
-                </a:tc>
-              </a:tr>
-              <a:tr h="502920">
-                <a:tc>
-                  <a:txBody>
-                    <a:bodyPr/>
-                    <a:lstStyle/>
-                    <a:p>
-                      <a:pPr algn="l"/>
-                      <a:r>
-                        <a:rPr sz="1100" b="1">
-                          <a:solidFill>
-                            <a:srgbClr val="000000"/>
-                          </a:solidFill>
-                        </a:rPr>
-                        <a:t>TUEV</a:t>
-                      </a:r>
-                    </a:p>
-                  </a:txBody>
-                  <a:tcPr>
-                    <a:solidFill>
-                      <a:srgbClr val="FFFFFF"/>
-                    </a:solidFill>
-                  </a:tcPr>
-                </a:tc>
-                <a:tc>
-                  <a:txBody>
-                    <a:bodyPr/>
-                    <a:lstStyle/>
-                    <a:p>
-                      <a:pPr algn="l"/>
-                      <a:r>
-                        <a:rPr sz="1000" b="0">
-                          <a:solidFill>
-                            <a:srgbClr val="000000"/>
-                          </a:solidFill>
-                        </a:rPr>
-                        <a:t>Pathology</a:t>
-                      </a:r>
-                    </a:p>
-                  </a:txBody>
-                  <a:tcPr>
-                    <a:solidFill>
-                      <a:srgbClr val="F5F5F5"/>
-                    </a:solidFill>
-                  </a:tcPr>
-                </a:tc>
-                <a:tc>
-                  <a:txBody>
-                    <a:bodyPr/>
-                    <a:lstStyle/>
-                    <a:p>
-                      <a:pPr algn="ctr"/>
-                      <a:r>
-                        <a:rPr sz="1000" b="0">
-                          <a:solidFill>
-                            <a:srgbClr val="C8C8C8"/>
-                          </a:solidFill>
-                        </a:rPr>
-                        <a:t>--</a:t>
-                      </a:r>
-                    </a:p>
-                  </a:txBody>
-                  <a:tcPr>
-                    <a:solidFill>
-                      <a:srgbClr val="F5F5F5"/>
-                    </a:solidFill>
-                  </a:tcPr>
-                </a:tc>
-                <a:tc>
-                  <a:txBody>
-                    <a:bodyPr/>
-                    <a:lstStyle/>
-                    <a:p>
-                      <a:pPr algn="ctr"/>
-                      <a:r>
-                        <a:rPr sz="1000" b="0">
-                          <a:solidFill>
-                            <a:srgbClr val="C8C8C8"/>
-                          </a:solidFill>
-                        </a:rPr>
-                        <a:t>--</a:t>
-                      </a:r>
-                    </a:p>
-                  </a:txBody>
-                  <a:tcPr>
-                    <a:solidFill>
-                      <a:srgbClr val="F5F5F5"/>
-                    </a:solidFill>
-                  </a:tcPr>
-                </a:tc>
-                <a:tc>
-                  <a:txBody>
-                    <a:bodyPr/>
-                    <a:lstStyle/>
-                    <a:p>
-                      <a:pPr algn="ctr"/>
-                      <a:r>
-                        <a:rPr sz="1000" b="1">
-                          <a:solidFill>
-                            <a:srgbClr val="E74C3C"/>
-                          </a:solidFill>
-                        </a:rPr>
-                        <a:t>k 0.634</a:t>
-                      </a:r>
-                    </a:p>
-                  </a:txBody>
-                  <a:tcPr>
-                    <a:solidFill>
-                      <a:srgbClr val="FFE6E6"/>
                     </a:solidFill>
                   </a:tcPr>
                 </a:tc>
@@ -9733,14 +9830,14 @@
       </p:graphicFrame>
       <p:sp>
         <p:nvSpPr>
-          <p:cNvPr id="4" name="TextBox 3"/>
+          <p:cNvPr id="3" name="TextBox 2"/>
           <p:cNvSpPr txBox="1"/>
           <p:nvPr/>
         </p:nvSpPr>
         <p:spPr>
           <a:xfrm>
-            <a:off x="457200" y="6583680"/>
-            <a:ext cx="15544800" cy="274320"/>
+            <a:off x="274320" y="9281160"/>
+            <a:ext cx="16916400" cy="548640"/>
           </a:xfrm>
           <a:prstGeom prst="rect">
             <a:avLst/>
@@ -9748,528 +9845,32 @@
           <a:noFill/>
         </p:spPr>
         <p:txBody>
-          <a:bodyPr wrap="none">
+          <a:bodyPr wrap="square">
             <a:spAutoFit/>
           </a:bodyPr>
           <a:lstStyle/>
           <a:p>
             <a:r>
-              <a:rPr sz="1200" b="1"/>
-              <a:t>Legend:  </a:t>
-            </a:r>
-            <a:r>
-              <a:rPr sz="1100">
-                <a:solidFill>
-                  <a:srgbClr val="27AE60"/>
-                </a:solidFill>
-              </a:rPr>
-              <a:t>Green = On/above paper reference (reproduced)</a:t>
-            </a:r>
-            <a:r>
-              <a:rPr sz="1100">
-                <a:solidFill>
-                  <a:srgbClr val="B48200"/>
-                </a:solidFill>
-              </a:rPr>
-              <a:t>  |  Yellow = Close to paper reference</a:t>
-            </a:r>
-            <a:r>
-              <a:rPr sz="1100">
-                <a:solidFill>
-                  <a:srgbClr val="E74C3C"/>
-                </a:solidFill>
-              </a:rPr>
-              <a:t>  |  Red = Below paper reference</a:t>
-            </a:r>
-            <a:r>
-              <a:rPr sz="1100">
+              <a:rPr sz="900">
                 <a:solidFill>
                   <a:srgbClr val="C8C8C8"/>
                 </a:solidFill>
               </a:rPr>
-              <a:t>  |  Gray = No data</a:t>
+              <a:t>Sources: EEGNet — Lawhern et al., J. Neural Eng. 2018 (BCICIV2A ~68% within-subj, BCICIV2B ~80% test). EEG Conformer — Song et al., IEEE TNSRE 2023 (BCICIV2A 78.66% avg). CBraMod — Wang et al., ICLR 2025 (reference values from original paper).</a:t>
+            </a:r>
+          </a:p>
+          <a:p>
+            <a:r>
+              <a:rPr sz="900">
+                <a:solidFill>
+                  <a:srgbClr val="C8C8C8"/>
+                </a:solidFill>
+              </a:rPr>
+              <a:t>G = meets/exceeds paper reference (reproduced). Y = close to paper reference (within ~5%). R = below paper reference. No data = dataset not in paper or no test labels available. IIIa &amp; Physionet-MI were not in the original EEGNet paper.</a:t>
             </a:r>
           </a:p>
         </p:txBody>
       </p:sp>
-      <p:graphicFrame>
-        <p:nvGraphicFramePr>
-          <p:cNvPr id="5" name="Table 4"/>
-          <p:cNvGraphicFramePr>
-            <a:graphicFrameLocks noGrp="1"/>
-          </p:cNvGraphicFramePr>
-          <p:nvPr/>
-        </p:nvGraphicFramePr>
-        <p:xfrm>
-          <a:off x="457200" y="7040880"/>
-          <a:ext cx="13350240" cy="1828800"/>
-        </p:xfrm>
-        <a:graphic>
-          <a:graphicData uri="http://schemas.openxmlformats.org/drawingml/2006/table">
-            <a:tbl>
-              <a:tblPr firstRow="1" bandRow="1">
-                <a:tableStyleId>{5C22544A-7EE6-4342-B048-85BDC9FD1C3A}</a:tableStyleId>
-              </a:tblPr>
-              <a:tblGrid>
-                <a:gridCol w="1828800"/>
-                <a:gridCol w="3840480"/>
-                <a:gridCol w="3840480"/>
-                <a:gridCol w="3840480"/>
-              </a:tblGrid>
-              <a:tr h="365760">
-                <a:tc>
-                  <a:txBody>
-                    <a:bodyPr/>
-                    <a:lstStyle/>
-                    <a:p>
-                      <a:pPr algn="ctr"/>
-                      <a:r>
-                        <a:rPr sz="1100" b="1">
-                          <a:solidFill>
-                            <a:srgbClr val="FFFFFF"/>
-                          </a:solidFill>
-                        </a:rPr>
-                        <a:t/>
-                      </a:r>
-                    </a:p>
-                  </a:txBody>
-                  <a:tcPr>
-                    <a:solidFill>
-                      <a:srgbClr val="3C3C3C"/>
-                    </a:solidFill>
-                  </a:tcPr>
-                </a:tc>
-                <a:tc>
-                  <a:txBody>
-                    <a:bodyPr/>
-                    <a:lstStyle/>
-                    <a:p>
-                      <a:pPr algn="ctr"/>
-                      <a:r>
-                        <a:rPr sz="1100" b="1">
-                          <a:solidFill>
-                            <a:srgbClr val="FFFFFF"/>
-                          </a:solidFill>
-                        </a:rPr>
-                        <a:t>EEGNet</a:t>
-                      </a:r>
-                    </a:p>
-                  </a:txBody>
-                  <a:tcPr>
-                    <a:solidFill>
-                      <a:srgbClr val="3C3C3C"/>
-                    </a:solidFill>
-                  </a:tcPr>
-                </a:tc>
-                <a:tc>
-                  <a:txBody>
-                    <a:bodyPr/>
-                    <a:lstStyle/>
-                    <a:p>
-                      <a:pPr algn="ctr"/>
-                      <a:r>
-                        <a:rPr sz="1100" b="1">
-                          <a:solidFill>
-                            <a:srgbClr val="FFFFFF"/>
-                          </a:solidFill>
-                        </a:rPr>
-                        <a:t>EEG Conformer</a:t>
-                      </a:r>
-                    </a:p>
-                  </a:txBody>
-                  <a:tcPr>
-                    <a:solidFill>
-                      <a:srgbClr val="3C3C3C"/>
-                    </a:solidFill>
-                  </a:tcPr>
-                </a:tc>
-                <a:tc>
-                  <a:txBody>
-                    <a:bodyPr/>
-                    <a:lstStyle/>
-                    <a:p>
-                      <a:pPr algn="ctr"/>
-                      <a:r>
-                        <a:rPr sz="1100" b="1">
-                          <a:solidFill>
-                            <a:srgbClr val="FFFFFF"/>
-                          </a:solidFill>
-                        </a:rPr>
-                        <a:t>CBraMod</a:t>
-                      </a:r>
-                    </a:p>
-                  </a:txBody>
-                  <a:tcPr>
-                    <a:solidFill>
-                      <a:srgbClr val="3C3C3C"/>
-                    </a:solidFill>
-                  </a:tcPr>
-                </a:tc>
-              </a:tr>
-              <a:tr h="365760">
-                <a:tc>
-                  <a:txBody>
-                    <a:bodyPr/>
-                    <a:lstStyle/>
-                    <a:p>
-                      <a:pPr algn="l"/>
-                      <a:r>
-                        <a:rPr sz="1100" b="1">
-                          <a:solidFill>
-                            <a:srgbClr val="27AE60"/>
-                          </a:solidFill>
-                        </a:rPr>
-                        <a:t>Green (reproduced)</a:t>
-                      </a:r>
-                    </a:p>
-                  </a:txBody>
-                  <a:tcPr>
-                    <a:solidFill>
-                      <a:srgbClr val="FFFFFF"/>
-                    </a:solidFill>
-                  </a:tcPr>
-                </a:tc>
-                <a:tc>
-                  <a:txBody>
-                    <a:bodyPr/>
-                    <a:lstStyle/>
-                    <a:p>
-                      <a:pPr algn="ctr"/>
-                      <a:r>
-                        <a:rPr sz="1200" b="1">
-                          <a:solidFill>
-                            <a:srgbClr val="27AE60"/>
-                          </a:solidFill>
-                        </a:rPr>
-                        <a:t>2</a:t>
-                      </a:r>
-                    </a:p>
-                  </a:txBody>
-                  <a:tcPr>
-                    <a:solidFill>
-                      <a:srgbClr val="DCFFE6"/>
-                    </a:solidFill>
-                  </a:tcPr>
-                </a:tc>
-                <a:tc>
-                  <a:txBody>
-                    <a:bodyPr/>
-                    <a:lstStyle/>
-                    <a:p>
-                      <a:pPr algn="ctr"/>
-                      <a:r>
-                        <a:rPr sz="1200" b="1">
-                          <a:solidFill>
-                            <a:srgbClr val="27AE60"/>
-                          </a:solidFill>
-                        </a:rPr>
-                        <a:t>1</a:t>
-                      </a:r>
-                    </a:p>
-                  </a:txBody>
-                  <a:tcPr>
-                    <a:solidFill>
-                      <a:srgbClr val="DCFFE6"/>
-                    </a:solidFill>
-                  </a:tcPr>
-                </a:tc>
-                <a:tc>
-                  <a:txBody>
-                    <a:bodyPr/>
-                    <a:lstStyle/>
-                    <a:p>
-                      <a:pPr algn="ctr"/>
-                      <a:r>
-                        <a:rPr sz="1200" b="1">
-                          <a:solidFill>
-                            <a:srgbClr val="27AE60"/>
-                          </a:solidFill>
-                        </a:rPr>
-                        <a:t>4</a:t>
-                      </a:r>
-                    </a:p>
-                  </a:txBody>
-                  <a:tcPr>
-                    <a:solidFill>
-                      <a:srgbClr val="DCFFE6"/>
-                    </a:solidFill>
-                  </a:tcPr>
-                </a:tc>
-              </a:tr>
-              <a:tr h="365760">
-                <a:tc>
-                  <a:txBody>
-                    <a:bodyPr/>
-                    <a:lstStyle/>
-                    <a:p>
-                      <a:pPr algn="l"/>
-                      <a:r>
-                        <a:rPr sz="1100" b="1">
-                          <a:solidFill>
-                            <a:srgbClr val="B48200"/>
-                          </a:solidFill>
-                        </a:rPr>
-                        <a:t>Yellow (close)</a:t>
-                      </a:r>
-                    </a:p>
-                  </a:txBody>
-                  <a:tcPr>
-                    <a:solidFill>
-                      <a:srgbClr val="FFFFFF"/>
-                    </a:solidFill>
-                  </a:tcPr>
-                </a:tc>
-                <a:tc>
-                  <a:txBody>
-                    <a:bodyPr/>
-                    <a:lstStyle/>
-                    <a:p>
-                      <a:pPr algn="ctr"/>
-                      <a:r>
-                        <a:rPr sz="1200" b="1">
-                          <a:solidFill>
-                            <a:srgbClr val="B48200"/>
-                          </a:solidFill>
-                        </a:rPr>
-                        <a:t>2</a:t>
-                      </a:r>
-                    </a:p>
-                  </a:txBody>
-                  <a:tcPr>
-                    <a:solidFill>
-                      <a:srgbClr val="FFFADC"/>
-                    </a:solidFill>
-                  </a:tcPr>
-                </a:tc>
-                <a:tc>
-                  <a:txBody>
-                    <a:bodyPr/>
-                    <a:lstStyle/>
-                    <a:p>
-                      <a:pPr algn="ctr"/>
-                      <a:r>
-                        <a:rPr sz="1200" b="0">
-                          <a:solidFill>
-                            <a:srgbClr val="B48200"/>
-                          </a:solidFill>
-                        </a:rPr>
-                        <a:t>0</a:t>
-                      </a:r>
-                    </a:p>
-                  </a:txBody>
-                  <a:tcPr>
-                    <a:solidFill>
-                      <a:srgbClr val="FFFADC"/>
-                    </a:solidFill>
-                  </a:tcPr>
-                </a:tc>
-                <a:tc>
-                  <a:txBody>
-                    <a:bodyPr/>
-                    <a:lstStyle/>
-                    <a:p>
-                      <a:pPr algn="ctr"/>
-                      <a:r>
-                        <a:rPr sz="1200" b="1">
-                          <a:solidFill>
-                            <a:srgbClr val="B48200"/>
-                          </a:solidFill>
-                        </a:rPr>
-                        <a:t>3</a:t>
-                      </a:r>
-                    </a:p>
-                  </a:txBody>
-                  <a:tcPr>
-                    <a:solidFill>
-                      <a:srgbClr val="FFFADC"/>
-                    </a:solidFill>
-                  </a:tcPr>
-                </a:tc>
-              </a:tr>
-              <a:tr h="365760">
-                <a:tc>
-                  <a:txBody>
-                    <a:bodyPr/>
-                    <a:lstStyle/>
-                    <a:p>
-                      <a:pPr algn="l"/>
-                      <a:r>
-                        <a:rPr sz="1100" b="1">
-                          <a:solidFill>
-                            <a:srgbClr val="E74C3C"/>
-                          </a:solidFill>
-                        </a:rPr>
-                        <a:t>Red (below)</a:t>
-                      </a:r>
-                    </a:p>
-                  </a:txBody>
-                  <a:tcPr>
-                    <a:solidFill>
-                      <a:srgbClr val="FFFFFF"/>
-                    </a:solidFill>
-                  </a:tcPr>
-                </a:tc>
-                <a:tc>
-                  <a:txBody>
-                    <a:bodyPr/>
-                    <a:lstStyle/>
-                    <a:p>
-                      <a:pPr algn="ctr"/>
-                      <a:r>
-                        <a:rPr sz="1200" b="0">
-                          <a:solidFill>
-                            <a:srgbClr val="E74C3C"/>
-                          </a:solidFill>
-                        </a:rPr>
-                        <a:t>0</a:t>
-                      </a:r>
-                    </a:p>
-                  </a:txBody>
-                  <a:tcPr>
-                    <a:solidFill>
-                      <a:srgbClr val="FFE6E6"/>
-                    </a:solidFill>
-                  </a:tcPr>
-                </a:tc>
-                <a:tc>
-                  <a:txBody>
-                    <a:bodyPr/>
-                    <a:lstStyle/>
-                    <a:p>
-                      <a:pPr algn="ctr"/>
-                      <a:r>
-                        <a:rPr sz="1200" b="0">
-                          <a:solidFill>
-                            <a:srgbClr val="E74C3C"/>
-                          </a:solidFill>
-                        </a:rPr>
-                        <a:t>0</a:t>
-                      </a:r>
-                    </a:p>
-                  </a:txBody>
-                  <a:tcPr>
-                    <a:solidFill>
-                      <a:srgbClr val="FFE6E6"/>
-                    </a:solidFill>
-                  </a:tcPr>
-                </a:tc>
-                <a:tc>
-                  <a:txBody>
-                    <a:bodyPr/>
-                    <a:lstStyle/>
-                    <a:p>
-                      <a:pPr algn="ctr"/>
-                      <a:r>
-                        <a:rPr sz="1200" b="1">
-                          <a:solidFill>
-                            <a:srgbClr val="E74C3C"/>
-                          </a:solidFill>
-                        </a:rPr>
-                        <a:t>1</a:t>
-                      </a:r>
-                    </a:p>
-                  </a:txBody>
-                  <a:tcPr>
-                    <a:solidFill>
-                      <a:srgbClr val="FFE6E6"/>
-                    </a:solidFill>
-                  </a:tcPr>
-                </a:tc>
-              </a:tr>
-              <a:tr h="365760">
-                <a:tc>
-                  <a:txBody>
-                    <a:bodyPr/>
-                    <a:lstStyle/>
-                    <a:p>
-                      <a:pPr algn="l"/>
-                      <a:r>
-                        <a:rPr sz="1100" b="1">
-                          <a:solidFill>
-                            <a:srgbClr val="C8C8C8"/>
-                          </a:solidFill>
-                        </a:rPr>
-                        <a:t>No data</a:t>
-                      </a:r>
-                    </a:p>
-                  </a:txBody>
-                  <a:tcPr>
-                    <a:solidFill>
-                      <a:srgbClr val="FFFFFF"/>
-                    </a:solidFill>
-                  </a:tcPr>
-                </a:tc>
-                <a:tc>
-                  <a:txBody>
-                    <a:bodyPr/>
-                    <a:lstStyle/>
-                    <a:p>
-                      <a:pPr algn="ctr"/>
-                      <a:r>
-                        <a:rPr sz="1200" b="0">
-                          <a:solidFill>
-                            <a:srgbClr val="C8C8C8"/>
-                          </a:solidFill>
-                        </a:rPr>
-                        <a:t>0</a:t>
-                      </a:r>
-                    </a:p>
-                  </a:txBody>
-                  <a:tcPr>
-                    <a:solidFill>
-                      <a:srgbClr val="F5F5F5"/>
-                    </a:solidFill>
-                  </a:tcPr>
-                </a:tc>
-                <a:tc>
-                  <a:txBody>
-                    <a:bodyPr/>
-                    <a:lstStyle/>
-                    <a:p>
-                      <a:pPr algn="ctr"/>
-                      <a:r>
-                        <a:rPr sz="1200" b="1">
-                          <a:solidFill>
-                            <a:srgbClr val="C8C8C8"/>
-                          </a:solidFill>
-                        </a:rPr>
-                        <a:t>3</a:t>
-                      </a:r>
-                    </a:p>
-                  </a:txBody>
-                  <a:tcPr>
-                    <a:solidFill>
-                      <a:srgbClr val="F5F5F5"/>
-                    </a:solidFill>
-                  </a:tcPr>
-                </a:tc>
-                <a:tc>
-                  <a:txBody>
-                    <a:bodyPr/>
-                    <a:lstStyle/>
-                    <a:p>
-                      <a:pPr algn="ctr"/>
-                      <a:r>
-                        <a:rPr sz="1200" b="1">
-                          <a:solidFill>
-                            <a:srgbClr val="C8C8C8"/>
-                          </a:solidFill>
-                        </a:rPr>
-                        <a:t>2</a:t>
-                      </a:r>
-                    </a:p>
-                  </a:txBody>
-                  <a:tcPr>
-                    <a:solidFill>
-                      <a:srgbClr val="F5F5F5"/>
-                    </a:solidFill>
-                  </a:tcPr>
-                </a:tc>
-              </a:tr>
-            </a:tbl>
-          </a:graphicData>
-        </a:graphic>
-      </p:graphicFrame>
     </p:spTree>
   </p:cSld>
   <p:clrMapOvr>
